--- a/Curso Gas B/07 - ITC-ICG 10 - GLP de uso domestico en caravanas y autocaravanas/07 - ITC-ICG 10 - GLP de uso domestico en caravanas y autocaravanas - Vídeo 1.pptx
+++ b/Curso Gas B/07 - ITC-ICG 10 - GLP de uso domestico en caravanas y autocaravanas/07 - ITC-ICG 10 - GLP de uso domestico en caravanas y autocaravanas - Vídeo 1.pptx
@@ -19,6 +19,7 @@
     <p:sldId id="267" r:id="rId19"/>
     <p:sldId id="268" r:id="rId20"/>
     <p:sldId id="269" r:id="rId21"/>
+    <p:sldId id="270" r:id="rId22"/>
   </p:sldIdLst>
   <p:sldSz cx="12191695" cy="6858000" type="screen4x3"/>
   <p:notesSz cx="6858000" cy="9144000"/>
@@ -520,7 +521,7 @@
           </a:p>
           <a:p>
             <a:r>
-              <a:t>N2: Pues mira, esta es una de las instrucciones más cortas del Reglamento, pero cae muchísimo en el examen. Cuando una caravana o una autocaravana lleva cocina, calefacción o calentador alimentados con bombonas de GLP, esa instalación tiene su propia norma: la ITC-ICG diez. En este vídeo la vamos a ver entera, apartado por apartado. Fíjate en cinco datos que se preguntan tal cual: la norma que la rige, la prueba de estanquidad, la presión de trabajo, cada cuánto se revisa, y esa rareza de que aquí no hay que comunicar nada a la Administración. Vamos con ello.</a:t>
+              <a:t>N2: Pues mira, esta es una de las instrucciones más cortas del Reglamento, pero cae muchísimo en el examen. Cuando una caravana o una autocaravana lleva cocina, calefacción o calentador alimentados con bombonas de GLP, es decir, de butano o propano, esa instalación tiene su propia norma: la ITC-ICG diez. En este vídeo la vamos a ver entera, apartado por apartado, sin saltarnos nada. Y quiero que te fijes en cinco datos que se preguntan tal cual: la norma que la rige, la prueba de estanquidad, la presión de trabajo, cada cuánto se revisa, y esa rareza de que aquí no hay que comunicar nada a la Administración. Si te llevas esos cinco, tienes el tema medio ganado. Vamos con ello.</a:t>
             </a:r>
           </a:p>
         </p:txBody>
@@ -590,12 +591,12 @@
           <a:lstStyle/>
           <a:p>
             <a:r>
-              <a:t>N1: Aquí está la trampa de examen: ¿hay que comunicar la puesta en servicio a la Administración?</a:t>
-            </a:r>
-          </a:p>
-          <a:p>
-            <a:r>
-              <a:t>N2: No. Y esta es LA excepción que tienes que recordar. En casi todo el Reglamento, tras la puesta en servicio el titular tiene que comunicar a la Comunidad Autónoma en un plazo, acuérdate de los treinta días del artículo cinco punto siete. Pues bien, en la caravana no hay que comunicar nada. Basta con que el titular guarde el certificado y lo tenga a mano por si la Administración se lo reclama. Así que si en el examen ves que en las instalaciones de GLP de caravanas hay que comunicar a la Administración en treinta días, eso es falso: no se comunica. Es de las trampas favoritas del examinador.</a:t>
+              <a:t>N1: Aquí me huelo la trampa. ¿Hay que comunicar la puesta en servicio a la Administración?</a:t>
+            </a:r>
+          </a:p>
+          <a:p>
+            <a:r>
+              <a:t>N2: No. Y esta es LA excepción que tienes que llevarte grabada. En casi todo el Reglamento, tras la puesta en servicio el titular tiene que comunicarlo a la Comunidad Autónoma dentro de un plazo; acuérdate de los treinta días del artículo cinco punto siete. Pues bien, en la caravana la cosa cambia: aquí no hay que comunicar nada. Lo único que se exige es que el titular guarde el certificado y lo tenga a mano por si la Administración se lo reclama. Nada de plazos, nada de registrar. ¿Por qué te insisto tanto? Porque el examinador lo usa de cebo: si ves una pregunta que dice que en las instalaciones de GLP de caravanas hay que comunicar a la Administración en treinta días, es falsa, tachada. No se comunica; solo se conserva el certificado. Es de sus trampas favoritas.</a:t>
             </a:r>
           </a:p>
         </p:txBody>
@@ -665,12 +666,12 @@
           <a:lstStyle/>
           <a:p>
             <a:r>
-              <a:t>N1: ¿Por qué son tan importantes esos treinta milibares y por qué se atan las bombonas?</a:t>
-            </a:r>
-          </a:p>
-          <a:p>
-            <a:r>
-              <a:t>N2: Los aparatos de la caravana funcionan a treinta milibares, la presión típica del GLP con regulador doméstico. Es un valor fijo que se pregunta tal cual, y no es un capricho: con presión o regulador equivocados aparece mala combustión, llama amarilla, tiznado de los aparatos y, lo grave, monóxido de carbono en pocos metros cúbicos. Si un usuario se te queja de olores raros, aparato que ahúma o que se apaga, empieza mirando presión y ventilación: en una caravana una ventilación mal hecha mata. Y las bombonas: siempre sujetas, llenas o vacías, dentro o fuera del habitáculo, tanto en uso como conduciendo. Una bombona suelta golpeando en una curva puede romper el grifo y provocar una fuga circulando. Detalle de examen: aplica también a los envases vacíos. Y en estacionamientos largos, como el invernaje, se desconectan de la instalación: menos gas conectado sin vigilancia, menos riesgo.</a:t>
+              <a:t>N1: ¿Por qué son tan importantes esos treinta milibares, y por qué se atan las bombonas?</a:t>
+            </a:r>
+          </a:p>
+          <a:p>
+            <a:r>
+              <a:t>N2: Vamos por partes. Los aparatos de la caravana funcionan a treinta milibares, que es la presión típica del GLP con regulador doméstico. Es un valor fijo que se pregunta tal cual, pero no es un capricho: con la presión o el regulador equivocados aparece mala combustión, o sea, llama amarilla en vez de azul, tiznado y hollín en los aparatos, y lo grave de verdad, monóxido de carbono, un gas que no huele y que en pocos metros cúbicos, como los de una caravana, mata. Por eso, si un usuario se te queja de olores raros, de un aparato que ahúma o que se apaga solo, empieza mirando presión y ventilación: en una caravana una ventilación mal hecha mata. Y ahora las bombonas: siempre sujetas, llenas o vacías, dentro o fuera del habitáculo, tanto en uso como conduciendo. Piensa en un vehículo en marcha: una bombona suelta golpeando en una curva puede romper el grifo y provocar una fuga circulando. Detalle de examen: la obligación de amarrarlas aplica también a los envases vacíos. Y en estacionamientos largos, como el invernaje, se desconectan de la instalación: menos gas conectado sin vigilancia, menos riesgo.</a:t>
             </a:r>
           </a:p>
         </p:txBody>
@@ -745,7 +746,7 @@
           </a:p>
           <a:p>
             <a:r>
-              <a:t>N2: Jamás. Las tuberías de gas nunca se pueden usar como conductor de puesta a tierra ni como parte de una instalación eléctrica o de radio. Piénsalo: enganchar un cable eléctrico a la tubería de gas es buscarse una chispa justo donde hay combustible. Y en un habitáculo pequeño y cerrado como el de una caravana, eso es una receta para el incendio. Este punto cae en examen, y la respuesta correcta siempre es que está prohibido. En obra lo verás en revisiones: gente que ha atado el negativo o la tierra a un tubo de gas por comodidad. Eso se corrige en el sitio.</a:t>
+              <a:t>N2: Jamás. Las tuberías de gas no se pueden usar nunca como conductor de puesta a tierra, ni como parte de una instalación eléctrica, ni de una de radio. Piénsalo un segundo: enganchar un cable eléctrico a la tubería de gas es meter una posible chispa justo donde hay combustible. Y en un habitáculo pequeño y cerrado como el de una caravana, eso es una receta directa para el incendio. Por eso el Reglamento lo prohíbe de plano. Este punto cae en examen, y la respuesta correcta siempre es que está prohibido, sin matices. En obra lo vas a ver en revisiones: gente que, por comodidad, ha atado el negativo de la batería o la tierra a un tubo de gas. Eso se corrige en el sitio, sí o sí, antes de firmar nada.</a:t>
             </a:r>
           </a:p>
         </p:txBody>
@@ -820,7 +821,7 @@
           </a:p>
           <a:p>
             <a:r>
-              <a:t>N2: Tres datos que se preguntan juntos. Primero, cada cuánto: cada cuatro años hay que revisar la instalación y los aparatos de la caravana. Segundo, quién: el responsable del buen estado es el titular, el dueño, y si no, el usuario; es el titular quien tiene que encargar la revisión a una empresa instaladora. La instaladora ejecuta y recomienda, pero quien responde de que la caravana esté en condiciones es el propietario, igual que con el coche: el taller te lo mira, pero llevarlo a pasar la ITV es cosa tuya. Y tercero, muy importante: se llama revisión, no inspección. ¿Por qué? Porque, como viste en el artículo siete del Reglamento, la caravana funciona con bombonas propias y no cuelga de una red de distribución, y todo lo que no cuelga de la red se revisa, no se inspecciona. La chuleta es: caravana, bombonas, sin red, revisión, cada cuatro años. Se documenta con el modelo IRV dos, que comprueba ventilaciones, evacuación de humos, estanquidad y funcionamiento de los aparatos según la UNE-EN mil novecientos cuarenta y nueve.</a:t>
+              <a:t>N2: Tres datos que se preguntan juntos, así que los atamos juntos. Primero, cada cuánto: cada cuatro años hay que revisar la instalación y los aparatos de la caravana. Segundo, quién manda hacerlo: el responsable del buen estado es el titular, el dueño, y en su defecto el usuario; y es el titular quien tiene que encargar la revisión a una empresa instaladora. La instaladora ejecuta y recomienda, pero quien responde de que la caravana esté en condiciones es el propietario, igual que con el coche: el taller te lo mira, pero llevarlo a pasar la ITV es cosa tuya. Y tercero, muy importante: aquí se llama revisión, no inspección. ¿Por qué esa palabra y no la otra? Porque, como viste en el artículo siete del Reglamento, la caravana funciona con bombonas propias y no cuelga de una red de distribución; y todo lo que no cuelga de la red se revisa, no se inspecciona. La chuleta es fácil: caravana, bombonas, sin red, revisión, cada cuatro años. Se documenta con el modelo IRV dos, que comprueba ventilaciones, evacuación de humos, estanquidad y funcionamiento de los aparatos según la UNE-EN mil novecientos cuarenta y nueve.</a:t>
             </a:r>
           </a:p>
         </p:txBody>
@@ -890,12 +891,97 @@
           <a:lstStyle/>
           <a:p>
             <a:r>
-              <a:t>N1: Si te quedas con tres ideas de todo el vídeo, que sean estas, ¿vale?</a:t>
-            </a:r>
-          </a:p>
-          <a:p>
-            <a:r>
-              <a:t>N2: La primera: la ITC-ICG diez regula la instalación fija de gas de la caravana, la que desarrolla el artículo dos punto uno letra ge, y su norma de cabecera es la UNE-EN mil novecientos cuarenta y nueve, sin año. Fuera quedan los cacharros portátiles con su propio cartucho, y la instalación solo la ejecuta una empresa instaladora de gas. La segunda: los dos datos técnicos que te van a preguntar seguro. La estanquidad, con manómetro de cero a uno bar, clase uno y escala de veinte milibares, es correcta si la presión no baja en al menos quince minutos; y los aparatos funcionan a treinta milibares, con las bombonas siempre sujetas y desconectadas en los parones largos. Y la tercera, las dos trampas: aquí no se comunica nada a la Administración, solo se guarda el certificado; y la revisión es cada cuatro años, se llama revisión y no inspección porque la caravana va con bombonas y no cuelga de una red, y se documenta con los modelos IRV del anexo uno. Con eso tienes el tema resuelto.</a:t>
+              <a:t>N1: ¿Qué diferencia hay entre el IRV-1 y el IRV-2? Se me lían.</a:t>
+            </a:r>
+          </a:p>
+          <a:p>
+            <a:r>
+              <a:t>N2: Muy sencillo, y así no vuelves a confundirlos. La ITC trae en su anexo uno dos impresos oficiales, los dos con las siglas IRV, que quieren decir instalación receptora de vehículo. El primero, el IRV uno, es el certificado de instalación: lo rellena la empresa instaladora cuando termina de montar y probar la caravana, se emite por triplicado, y es la llave que pone el gas en servicio. El segundo, el IRV dos, es el certificado de revisión periódica: es el que se rellena cada cuatro años cuando toca revisar, y deja constancia de que se han comprobado ventilaciones, evacuación de humos, caducidad de componentes, estanquidad y funcionamiento de los aparatos según la UNE-EN mil novecientos cuarenta y nueve. Chuleta para el examen: el uno es para instalar, el dos es para revisar. No hace falta que te aprendas el impreso casilla a casilla; basta con saber que el modelo está normalizado en el anexo uno, y que en cuanto veas las siglas IRV en una pregunta, están hablando de la caravana.</a:t>
+            </a:r>
+          </a:p>
+        </p:txBody>
+      </p:sp>
+      <p:sp>
+        <p:nvSpPr>
+          <p:cNvPr id="4" name="Slide Number Placeholder 3"/>
+          <p:cNvSpPr>
+            <a:spLocks noGrp="1"/>
+          </p:cNvSpPr>
+          <p:nvPr>
+            <p:ph type="sldNum" idx="5" sz="quarter"/>
+          </p:nvPr>
+        </p:nvSpPr>
+        <p:spPr/>
+      </p:sp>
+    </p:spTree>
+  </p:cSld>
+  <p:clrMapOvr>
+    <a:masterClrMapping/>
+  </p:clrMapOvr>
+</p:notes>
+</file>
+
+<file path=ppt/notesSlides/notesSlide15.xml><?xml version="1.0" encoding="utf-8"?>
+<p:notes xmlns:a="http://schemas.openxmlformats.org/drawingml/2006/main" xmlns:p="http://schemas.openxmlformats.org/presentationml/2006/main" xmlns:r="http://schemas.openxmlformats.org/officeDocument/2006/relationships">
+  <p:cSld>
+    <p:spTree>
+      <p:nvGrpSpPr>
+        <p:cNvPr id="1" name=""/>
+        <p:cNvGrpSpPr/>
+        <p:nvPr/>
+      </p:nvGrpSpPr>
+      <p:grpSpPr>
+        <a:xfrm>
+          <a:off x="0" y="0"/>
+          <a:ext cx="0" cy="0"/>
+          <a:chOff x="0" y="0"/>
+          <a:chExt cx="0" cy="0"/>
+        </a:xfrm>
+      </p:grpSpPr>
+      <p:sp>
+        <p:nvSpPr>
+          <p:cNvPr id="2" name="Slide Image Placeholder 1"/>
+          <p:cNvSpPr>
+            <a:spLocks noGrp="1"/>
+          </p:cNvSpPr>
+          <p:nvPr>
+            <p:ph type="sldImg" idx="2"/>
+          </p:nvPr>
+        </p:nvSpPr>
+        <p:spPr/>
+      </p:sp>
+      <p:sp>
+        <p:nvSpPr>
+          <p:cNvPr id="3" name="Notes Placeholder 2"/>
+          <p:cNvSpPr>
+            <a:spLocks noGrp="1"/>
+          </p:cNvSpPr>
+          <p:nvPr>
+            <p:ph type="body" idx="3" sz="quarter"/>
+          </p:nvPr>
+        </p:nvSpPr>
+        <p:spPr/>
+        <p:txBody>
+          <a:bodyPr/>
+          <a:lstStyle/>
+          <a:p>
+            <a:r>
+              <a:t>N1: Vale, es corta pero tiene mucha chicha. ¿Cómo lo ordeno todo en la cabeza para el examen?</a:t>
+            </a:r>
+          </a:p>
+          <a:p>
+            <a:r>
+              <a:t>N2: Vamos a atar el hilo entero, que verás que encaja solo. Empieza por el sitio: la ITC-ICG diez desarrolla la letra ge del artículo dos punto uno del Reglamento, y regula la instalación fija de gas de caravanas y autocaravanas; los cacharros portátiles con su propio cartucho se quedan fuera. Su norma de cabecera, la que tienes que asociar siempre a caravanas, es la UNE-EN mil novecientos cuarenta y nueve, sin año. Segundo, la seguridad: antes de dar gas, prueba de estanquidad con manómetro de cero a uno bar, clase uno y escala de veinte milibares, y la presión no puede bajar en al menos quince minutos. ¿Por qué tanto detalle? Porque una fuga de GLP en un habitáculo cerrado que además circula es la avería más grave que vas a evitar. En uso, treinta milibares, bombonas siempre sujetas, llenas o vacías, y desconectadas en los parones largos; y la tubería de gas nunca como toma de tierra, que es poner una chispa donde hay combustible. Tercero, el papeleo y las dos trampas: la instaladora firma el certificado, modelo IRV uno, por triplicado, y eso es la puesta en servicio. Trampa uno, aquí no se comunica nada a la Administración, solo se guarda el certificado. Trampa dos, la revisión es cada cuatro años y se llama revisión, no inspección, porque la caravana va con bombonas y no cuelga de una red; se documenta con el IRV dos.</a:t>
+            </a:r>
+          </a:p>
+          <a:p>
+            <a:r>
+              <a:t>N1: ¿Y cómo cae esto en el examen y en la obra?</a:t>
+            </a:r>
+          </a:p>
+          <a:p>
+            <a:r>
+              <a:t>N2: En el examen te lo preguntan por datos sueltos: los quince minutos, los treinta milibares, los cuatro años, el artículo dos punto uno letra ge, y sobre todo las dos trampas, la de no comunicar y la de revisión y no inspección. En la obra lo vives en un boletín de revisión de caravana: compruebas la estanquidad con agua jabonosa en regulador y racores, miras que las bombonas vayan amarradas y que nadie haya colgado un cable de la tubería, corriges lo que falle y rellenas el IRV dos. Con esto cierras el tema y, de paso, cierras el bloque de las ITC. Hoy ya eres bastante más gasista que ayer: te has ganado el aprobado de este tema. Enhorabuena, y a por lo que venga.</a:t>
             </a:r>
           </a:p>
         </p:txBody>
@@ -965,12 +1051,12 @@
           <a:lstStyle/>
           <a:p>
             <a:r>
-              <a:t>N1: Si solo pudieras memorizar tres números de este tema, ¿cuáles serían?</a:t>
-            </a:r>
-          </a:p>
-          <a:p>
-            <a:r>
-              <a:t>N2: Estos tres. El primero: quince minutos, que es el tiempo mínimo que la presión tiene que aguantar sin bajar para dar por buena la estanquidad. El segundo: treinta milibares, la presión a la que funcionan los aparatos de la caravana, típica del butano y el propano con regulador doméstico. Y el tercero: cuatro años, que es cada cuánto hay que revisar la instalación. Con estos tres clavados ya llevas media pregunta ganada. Los vamos viendo uno a uno.</a:t>
+              <a:t>N1: Si solo pudiera memorizar tres números de este tema, ¿cuáles serían?</a:t>
+            </a:r>
+          </a:p>
+          <a:p>
+            <a:r>
+              <a:t>N2: Estos tres, y no otros. El primero: quince minutos, que es el tiempo mínimo que la presión tiene que aguantar sin bajar para dar por buena la estanquidad, o sea, para dar por bueno que no se escapa gas. El segundo: treinta milibares, la presión a la que funcionan los aparatos de la caravana, la típica del butano y el propano con un regulador doméstico. Y el tercero: cuatro años, que es cada cuánto hay que revisar la instalación. Fíjate que ninguno es un año ni una fecha: son valores técnicos que el examinador suelta en las preguntas para ver si los tienes clavados. Con estos tres en la cabeza ya llevas media pregunta ganada. Los vamos viendo uno a uno.</a:t>
             </a:r>
           </a:p>
         </p:txBody>
@@ -1045,7 +1131,7 @@
           </a:p>
           <a:p>
             <a:r>
-              <a:t>N2: Acuérdate del Tema cero: el artículo dos del Reglamento listaba nueve tipos de instalaciones con letras. La letra ge era justamente el GLP de uso doméstico en caravanas y autocaravanas. Pues esta ITC-ICG diez es la rama que desarrolla esa letra ge. Fija los requisitos técnicos esenciales y las medidas de seguridad en el diseño, la construcción, las pruebas, la instalación y la utilización. Si en el examen te preguntan de qué apartado del Reglamento cuelga la ITC-ICG diez, la respuesta es artículo dos punto uno, letra ge. Ese detallito lo preguntan más de lo que crees.</a:t>
+              <a:t>N2: Acuérdate del Tema cero. El artículo dos del Reglamento listaba nueve tipos de instalaciones, cada una con una letra. La letra ge era justamente el GLP de uso doméstico en caravanas y autocaravanas. Pues esta ITC-ICG diez es la rama que desarrolla esa letra ge: coge ese renglón del Reglamento y lo explica al detalle. ¿Y qué fija? Los requisitos técnicos esenciales y las medidas de seguridad en cinco fases: el diseño, la construcción, las pruebas, la instalación y la utilización. Fíjate que cubre toda la vida de la instalación, desde que se piensa hasta que se usa. Así que si en el examen te preguntan de qué apartado del Reglamento cuelga la ITC-ICG diez, la respuesta es artículo dos punto uno, letra ge. Ese detallito lo preguntan más de lo que crees.</a:t>
             </a:r>
           </a:p>
         </p:txBody>
@@ -1120,7 +1206,7 @@
           </a:p>
           <a:p>
             <a:r>
-              <a:t>N2: Es la definición fina de caravana o autocaravana: un vehículo pensado para vivir dentro y circular por carretera. Ojo a la palabra recreo, que significa ocio, no vivienda fija ni vehículo industrial. Y fíjate en un matiz importante para el mantenimiento: las revisiones periódicas se aplican tanto a las caravanas nuevas como a las que ya existían. Es la regla general del Reglamento: lo viejo no se rehace por capricho, pero las revisiones caen igual. Nadie se libra de la revisión por tener una caravana antigua, igual que nadie se libra de la ITV por tener un coche viejo.</a:t>
+              <a:t>N2: Es la definición fina de caravana o autocaravana: un vehículo pensado para vivir dentro y para circular por carretera. Fíjate en la palabra recreo, porque tiene truco: recreo significa ocio, no es una vivienda fija ni un vehículo industrial. Y ahora un matiz que se pregunta: las reglas de mantenimiento y control periódico se aplican tanto a las caravanas nuevas como a las que ya existían. ¿Por qué te lo subrayo? Porque es la lógica general del Reglamento: lo viejo no se obliga a rehacerlo por capricho, pero las revisiones periódicas caen igual, tenga la edad que tenga la caravana. Nadie se libra de la revisión por tener una caravana antigua, igual que nadie se libra de la ITV por tener un coche viejo.</a:t>
             </a:r>
           </a:p>
         </p:txBody>
@@ -1190,12 +1276,12 @@
           <a:lstStyle/>
           <a:p>
             <a:r>
-              <a:t>N1: Un hornillo de camping con su cartucho, ¿lo tienes que certificar tú?</a:t>
-            </a:r>
-          </a:p>
-          <a:p>
-            <a:r>
-              <a:t>N2: No. Ese es el punto que quieren que confundas. Un hornillo de camping con su propio cartucho, o una estufa portátil de butano que lleva la bombona encima, no entra en esta ITC: son aparatos portátiles que incorporan su propia alimentación de gas. La ITC-ICG diez regula la instalación fija de la caravana, es decir, las tuberías, el regulador, las bombonas sujetas y los aparatos conectados a ellas. Los cacharros sueltos que te metes dentro no son cosa tuya. Es la misma lógica del cacharro portátil que ya viste en el Reglamento con el límite de quince kilos.</a:t>
+              <a:t>N1: Un hornillo de camping con su cartucho, ¿lo tengo que certificar yo?</a:t>
+            </a:r>
+          </a:p>
+          <a:p>
+            <a:r>
+              <a:t>N2: No, y este es justo el punto con el que quieren que te líes. Un hornillo de camping con su propio cartucho, o una estufa portátil de butano que lleva la bombona encima, no entra en esta ITC. ¿Por qué? Porque son aparatos portátiles que incorporan su propia alimentación de gas: son cacharros sueltos, no forman parte de una instalación. La ITC-ICG diez regula la instalación fija de la caravana, es decir, las tuberías, el regulador, las bombonas sujetas y los aparatos conectados a ellas por tubo. Lo que te llevas suelto dentro no es cosa tuya. Es la misma lógica del cacharro portátil que ya viste en el Reglamento con el límite de quince kilos: si el gas viaja con el propio aparato y no hay tubería, no lo certificas.</a:t>
             </a:r>
           </a:p>
         </p:txBody>
@@ -1270,7 +1356,7 @@
           </a:p>
           <a:p>
             <a:r>
-              <a:t>N2: La norma es la UNE-EN mil novecientos cuarenta y nueve. Es LA norma de la ITC-ICG diez: manda en el diseño, la construcción, el montaje, las pruebas previas y las recomendaciones de mantenimiento. Si te aparece esta norma en el examen, piensa caravanas. Y recuerda que las normas UNE se citan sin año. En cuanto a quién la monta: no la monta cualquiera, la ejecuta una empresa instaladora de gas habilitada según la ITC-ICG nueve. El dueño no puede ponerse a soldar tubos de gas en su autocaravana. Y los aparatos deben venir conformes a las directivas europeas de gas o a lo que diga la ITC-ICG ocho. Ejemplo de obra: si te llega una caravana montada por el cuñado, no la puedes certificar sin repasarla y probarla entera.</a:t>
+              <a:t>N2: La norma es la UNE-EN mil novecientos cuarenta y nueve. Grábatela, porque es LA norma de la ITC-ICG diez: manda en el diseño, en la construcción, en el montaje, en las pruebas previas y hasta en las recomendaciones de mantenimiento. Si te aparece esa norma en el examen, piensa automáticamente en caravanas. Y ojo, las normas UNE se citan sin año, así que la verás escrita a secas, sin ninguna fecha detrás. ¿Y quién la monta? No la monta cualquiera: la ejecuta una empresa instaladora de gas, habilitada según la ITC-ICG nueve. El dueño no puede ponerse a soldar tubos de gas en su autocaravana por su cuenta. Los aparatos, además, deben venir conformes a las directivas europeas de gas o a lo que diga la ITC-ICG ocho. Ejemplo de obra: si te llega una caravana montada por el cuñado, no la puedes certificar sin repasarla y probarla entera; el papel lo firmas tú, y respondes tú.</a:t>
             </a:r>
           </a:p>
         </p:txBody>
@@ -1340,12 +1426,12 @@
           <a:lstStyle/>
           <a:p>
             <a:r>
-              <a:t>N1: ¿Cómo sabes que una instalación de caravana es estanca?</a:t>
-            </a:r>
-          </a:p>
-          <a:p>
-            <a:r>
-              <a:t>N2: Este apartado es una mina de preguntas de examen, así que memoriza el aparato dato a dato. Antes de la puesta en servicio, la instaladora prueba resistencia y estanquidad. Para la estanquidad se usa un manómetro de rango cero a uno bar, clase uno, con divisiones de escala de veinte milibares, o un manotermógrafo del mismo rango. Lo de clase uno es la clase de precisión, o sea, su margen de error: un aparato fino, capaz de detectar una pérdida pequeña. Y el criterio de éxito: la presión no debe bajar durante un tiempo no inferior a quince minutos desde la primera lectura. No inferior significa como mínimo: puedes esperar más, nunca menos. Truco: si la aguja cae, hay fuga; si se queda quieta un cuarto de hora, es estanca. En obra, si baja, repasas regulador, latiguillo y racores con agua jabonosa y no das gas hasta que aguante.</a:t>
+              <a:t>N1: ¿Cómo sé que una instalación de caravana es estanca, es decir, que no se escapa ni una burbuja de gas?</a:t>
+            </a:r>
+          </a:p>
+          <a:p>
+            <a:r>
+              <a:t>N2: Este apartado es una mina de preguntas, así que vamos dato a dato. Antes de la puesta en servicio, la instaladora hace las pruebas de la UNE-EN mil novecientos cuarenta y nueve para comprobar dos cosas: resistencia y estanquidad. Para la estanquidad se usa un manómetro, que es el reloj que mide la presión, de rango cero a uno bar, clase uno, con divisiones de escala de veinte milibares; o un manotermógrafo del mismo rango, que es lo mismo pero registrando en papel. ¿Qué es eso de clase uno? Es la clase de precisión, o sea, lo fino que hila el aparato, su margen de error: uno de clase uno es lo bastante preciso para cazar una pérdida pequeña. Y el criterio de éxito: la presión no debe bajar durante un tiempo no inferior a quince minutos desde la primera lectura. No inferior significa como mínimo: puedes esperar más, nunca menos. Truco visual: si la aguja cae, hay fuga; si se queda quieta un cuarto de hora, es estanca. En obra, si baja, repasas regulador, latiguillo y racores con agua jabonosa, y no das gas hasta que aguante.</a:t>
             </a:r>
           </a:p>
         </p:txBody>
@@ -1420,7 +1506,7 @@
           </a:p>
           <a:p>
             <a:r>
-              <a:t>N2: La empresa instaladora rellena el certificado de instalación, que es el modelo IRV uno del anexo uno de la propia ITC. Y se emite por triplicado, o sea, tres copias con tres destinos: una se la queda la instaladora, otra es para el titular, que es el dueño de la caravana, y otra para el órgano competente de la Comunidad Autónoma. Aunque el texto solo nombra dos destinatarios de copia, por triplicado implica que la instaladora conserva la suya. Si ves las siglas IRV en una pregunta, ya sabes: es el certificado de instalación de la caravana.</a:t>
+              <a:t>N2: Cuando la instaladora termina, rellena el certificado de instalación, que es el modelo IRV uno del anexo uno de la propia ITC. Y aquí viene el dato: se emite por triplicado, o sea, tres copias con tres destinos. Una se la queda la propia empresa instaladora, otra es para el titular, que es el dueño de la caravana, y otra para el órgano competente de la Comunidad Autónoma. Fíjate en una sutileza que gusta preguntar: el texto de la ITC solo nombra dos destinatarios de copia, el titular y la Comunidad Autónoma; pero como dice por triplicado, se entiende que la tercera se la queda la instaladora. Tres copias, tres manos. Y una pista para el examen: si ves las siglas IRV en una pregunta, ya sabes que hablan del certificado de la caravana.</a:t>
             </a:r>
           </a:p>
         </p:txBody>
@@ -1495,7 +1581,7 @@
           </a:p>
           <a:p>
             <a:r>
-              <a:t>N2: El certificado es la llave que abre el gas. Una vez que la instaladora lo ha expedido, la instalación se considera en disposición de servicio. En ese momento, y no antes, el titular puede solicitar al suministrador los envases de GLP. Hasta que la instaladora no firma, no hay puesta en servicio. La secuencia es clarísima y por eso la preguntan: primero el papel, luego el gas. Nunca al revés.</a:t>
+              <a:t>N2: Piensa en el certificado como en la llave que abre el gas. Una vez que la instaladora lo ha expedido, la instalación se considera en disposición de servicio, es decir, lista y con garantías para funcionar. Y en ese momento, no antes, el titular puede solicitar al suministrador los envases de GLP, o sea, pedir sus bombonas. Hasta que la instaladora no firma, no hay puesta en servicio y no hay gas que valga. La secuencia es clarísima, y precisamente por eso la preguntan: primero el papel, luego el gas. Nunca al revés. Si alguien mete las bombonas antes de tener el certificado, esa instalación no está en servicio legalmente.</a:t>
             </a:r>
           </a:p>
         </p:txBody>
@@ -4750,7 +4836,7 @@
                 </a:solidFill>
                 <a:latin typeface="Montserrat"/>
               </a:rPr>
-              <a:t>010 / 014</a:t>
+              <a:t>010 / 015</a:t>
             </a:r>
           </a:p>
         </p:txBody>
@@ -5140,7 +5226,7 @@
                 </a:solidFill>
                 <a:latin typeface="Montserrat"/>
               </a:rPr>
-              <a:t>011 / 014</a:t>
+              <a:t>011 / 015</a:t>
             </a:r>
           </a:p>
         </p:txBody>
@@ -5555,7 +5641,7 @@
                 </a:solidFill>
                 <a:latin typeface="Montserrat"/>
               </a:rPr>
-              <a:t>012 / 014</a:t>
+              <a:t>012 / 015</a:t>
             </a:r>
           </a:p>
         </p:txBody>
@@ -5945,7 +6031,7 @@
                 </a:solidFill>
                 <a:latin typeface="Montserrat"/>
               </a:rPr>
-              <a:t>013 / 014</a:t>
+              <a:t>013 / 015</a:t>
             </a:r>
           </a:p>
         </p:txBody>
@@ -6360,7 +6446,7 @@
                 </a:solidFill>
                 <a:latin typeface="Montserrat"/>
               </a:rPr>
-              <a:t>014 / 014</a:t>
+              <a:t>014 / 015</a:t>
             </a:r>
           </a:p>
         </p:txBody>
@@ -6407,8 +6493,8 @@
         </p:nvSpPr>
         <p:spPr>
           <a:xfrm>
-            <a:off x="822960" y="640080"/>
-            <a:ext cx="10058400" cy="914400"/>
+            <a:off x="822960" y="457200"/>
+            <a:ext cx="8229600" cy="365760"/>
           </a:xfrm>
           <a:prstGeom prst="rect">
             <a:avLst/>
@@ -6422,13 +6508,13 @@
           <a:lstStyle/>
           <a:p>
             <a:r>
-              <a:rPr sz="3000" b="1" i="0">
-                <a:solidFill>
-                  <a:srgbClr val="1E2761"/>
-                </a:solidFill>
-                <a:latin typeface="Montserrat"/>
-              </a:rPr>
-              <a:t>Qué me llevo</a:t>
+              <a:rPr sz="1200" b="1" i="0">
+                <a:solidFill>
+                  <a:srgbClr val="64748B"/>
+                </a:solidFill>
+                <a:latin typeface="Montserrat"/>
+              </a:rPr>
+              <a:t>ANEXO 1 · MODELOS IRV</a:t>
             </a:r>
           </a:p>
         </p:txBody>
@@ -6441,8 +6527,8 @@
         </p:nvSpPr>
         <p:spPr>
           <a:xfrm>
-            <a:off x="822960" y="2011680"/>
-            <a:ext cx="10058400" cy="3657600"/>
+            <a:off x="822960" y="868680"/>
+            <a:ext cx="10515600" cy="914400"/>
           </a:xfrm>
           <a:prstGeom prst="rect">
             <a:avLst/>
@@ -6455,78 +6541,561 @@
           </a:bodyPr>
           <a:lstStyle/>
           <a:p>
+            <a:r>
+              <a:rPr sz="2700" b="1" i="0">
+                <a:solidFill>
+                  <a:srgbClr val="1E2761"/>
+                </a:solidFill>
+                <a:latin typeface="Montserrat"/>
+              </a:rPr>
+              <a:t>Los dos impresos oficiales</a:t>
+            </a:r>
+          </a:p>
+        </p:txBody>
+      </p:sp>
+      <p:sp>
+        <p:nvSpPr>
+          <p:cNvPr id="7" name="TextBox 6"/>
+          <p:cNvSpPr txBox="1"/>
+          <p:nvPr/>
+        </p:nvSpPr>
+        <p:spPr>
+          <a:xfrm>
+            <a:off x="822960" y="1920240"/>
+            <a:ext cx="4983480" cy="4206240"/>
+          </a:xfrm>
+          <a:prstGeom prst="rect">
+            <a:avLst/>
+          </a:prstGeom>
+          <a:noFill/>
+        </p:spPr>
+        <p:txBody>
+          <a:bodyPr wrap="square">
+            <a:spAutoFit/>
+          </a:bodyPr>
+          <a:lstStyle/>
+          <a:p>
             <a:pPr>
               <a:spcAft>
-                <a:spcPts val="1400"/>
+                <a:spcPts val="1000"/>
               </a:spcAft>
             </a:pPr>
             <a:r>
-              <a:rPr sz="2000" b="1" i="0">
+              <a:rPr sz="1600" b="1" i="0">
                 <a:solidFill>
                   <a:srgbClr val="2E3A80"/>
                 </a:solidFill>
                 <a:latin typeface="Montserrat"/>
               </a:rPr>
-              <a:t>✓  </a:t>
-            </a:r>
-            <a:r>
-              <a:rPr sz="2000" b="0" i="0">
+              <a:t>•  </a:t>
+            </a:r>
+            <a:r>
+              <a:rPr sz="1600" b="0" i="0">
                 <a:solidFill>
                   <a:srgbClr val="1B2330"/>
                 </a:solidFill>
                 <a:latin typeface="Montserrat"/>
               </a:rPr>
-              <a:t>ITC-ICG 10 = instalación fija; UNE-EN 1949 manda</a:t>
+              <a:t>IRV-1: certificado de instalación</a:t>
             </a:r>
           </a:p>
           <a:p>
             <a:pPr>
               <a:spcAft>
-                <a:spcPts val="1400"/>
+                <a:spcPts val="1000"/>
               </a:spcAft>
             </a:pPr>
             <a:r>
-              <a:rPr sz="2000" b="1" i="0">
+              <a:rPr sz="1600" b="1" i="0">
                 <a:solidFill>
                   <a:srgbClr val="2E3A80"/>
                 </a:solidFill>
                 <a:latin typeface="Montserrat"/>
               </a:rPr>
-              <a:t>✓  </a:t>
-            </a:r>
-            <a:r>
-              <a:rPr sz="2000" b="0" i="0">
+              <a:t>•  </a:t>
+            </a:r>
+            <a:r>
+              <a:rPr sz="1600" b="0" i="0">
                 <a:solidFill>
                   <a:srgbClr val="1B2330"/>
                 </a:solidFill>
                 <a:latin typeface="Montserrat"/>
               </a:rPr>
-              <a:t>Estanquidad: no baja en 15 min · uso a 30 mbar</a:t>
+              <a:t>IRV-2: certificado de revisión periódica</a:t>
             </a:r>
           </a:p>
           <a:p>
             <a:pPr>
               <a:spcAft>
-                <a:spcPts val="1400"/>
+                <a:spcPts val="1000"/>
               </a:spcAft>
             </a:pPr>
             <a:r>
+              <a:rPr sz="1600" b="1" i="0">
+                <a:solidFill>
+                  <a:srgbClr val="2E3A80"/>
+                </a:solidFill>
+                <a:latin typeface="Montserrat"/>
+              </a:rPr>
+              <a:t>•  </a:t>
+            </a:r>
+            <a:r>
+              <a:rPr sz="1600" b="0" i="0">
+                <a:solidFill>
+                  <a:srgbClr val="1B2330"/>
+                </a:solidFill>
+                <a:latin typeface="Montserrat"/>
+              </a:rPr>
+              <a:t>Modelos normalizados en el anexo 1</a:t>
+            </a:r>
+          </a:p>
+          <a:p>
+            <a:pPr>
+              <a:spcAft>
+                <a:spcPts val="1000"/>
+              </a:spcAft>
+            </a:pPr>
+            <a:r>
+              <a:rPr sz="1600" b="1" i="0">
+                <a:solidFill>
+                  <a:srgbClr val="2E3A80"/>
+                </a:solidFill>
+                <a:latin typeface="Montserrat"/>
+              </a:rPr>
+              <a:t>•  </a:t>
+            </a:r>
+            <a:r>
+              <a:rPr sz="1600" b="0" i="0">
+                <a:solidFill>
+                  <a:srgbClr val="1B2330"/>
+                </a:solidFill>
+                <a:latin typeface="Montserrat"/>
+              </a:rPr>
+              <a:t>Si ves 'IRV', piensa en caravana</a:t>
+            </a:r>
+          </a:p>
+        </p:txBody>
+      </p:sp>
+      <p:sp>
+        <p:nvSpPr>
+          <p:cNvPr id="8" name="imgph" descr="IMGQ:official gas installation certificate form"/>
+          <p:cNvSpPr/>
+          <p:nvPr/>
+        </p:nvSpPr>
+        <p:spPr>
+          <a:xfrm>
+            <a:off x="5806440" y="1051560"/>
+            <a:ext cx="5298947" cy="4629150"/>
+          </a:xfrm>
+          <a:prstGeom prst="roundRect">
+            <a:avLst/>
+          </a:prstGeom>
+          <a:solidFill>
+            <a:srgbClr val="F3F6FB"/>
+          </a:solidFill>
+          <a:ln w="12700">
+            <a:solidFill>
+              <a:srgbClr val="C7D2E6"/>
+            </a:solidFill>
+          </a:ln>
+          <a:effectLst/>
+        </p:spPr>
+        <p:style>
+          <a:lnRef idx="1">
+            <a:schemeClr val="accent1"/>
+          </a:lnRef>
+          <a:fillRef idx="3">
+            <a:schemeClr val="accent1"/>
+          </a:fillRef>
+          <a:effectRef idx="2">
+            <a:schemeClr val="accent1"/>
+          </a:effectRef>
+          <a:fontRef idx="minor">
+            <a:schemeClr val="lt1"/>
+          </a:fontRef>
+        </p:style>
+        <p:txBody>
+          <a:bodyPr rtlCol="0" anchor="ctr"/>
+          <a:lstStyle/>
+          <a:p>
+            <a:pPr algn="ctr"/>
+          </a:p>
+        </p:txBody>
+      </p:sp>
+      <p:sp>
+        <p:nvSpPr>
+          <p:cNvPr id="9" name="TextBox 8"/>
+          <p:cNvSpPr txBox="1"/>
+          <p:nvPr/>
+        </p:nvSpPr>
+        <p:spPr>
+          <a:xfrm>
+            <a:off x="6080760" y="2726055"/>
+            <a:ext cx="4750307" cy="1280160"/>
+          </a:xfrm>
+          <a:prstGeom prst="rect">
+            <a:avLst/>
+          </a:prstGeom>
+          <a:noFill/>
+        </p:spPr>
+        <p:txBody>
+          <a:bodyPr wrap="square">
+            <a:spAutoFit/>
+          </a:bodyPr>
+          <a:lstStyle/>
+          <a:p>
+            <a:pPr algn="ctr"/>
+            <a:r>
+              <a:rPr sz="1400" b="1" i="0">
+                <a:solidFill>
+                  <a:srgbClr val="64748B"/>
+                </a:solidFill>
+                <a:latin typeface="Montserrat"/>
+              </a:rPr>
+              <a:t>IMAGEN REALISTA</a:t>
+            </a:r>
+          </a:p>
+          <a:p>
+            <a:pPr algn="ctr"/>
+            <a:r>
+              <a:rPr sz="1100" b="0" i="1">
+                <a:solidFill>
+                  <a:srgbClr val="64748B"/>
+                </a:solidFill>
+                <a:latin typeface="Montserrat"/>
+              </a:rPr>
+              <a:t>official gas installation certificate form</a:t>
+            </a:r>
+          </a:p>
+        </p:txBody>
+      </p:sp>
+    </p:spTree>
+  </p:cSld>
+  <p:clrMapOvr>
+    <a:masterClrMapping/>
+  </p:clrMapOvr>
+</p:sld>
+</file>
+
+<file path=ppt/slides/slide15.xml><?xml version="1.0" encoding="utf-8"?>
+<p:sld xmlns:a="http://schemas.openxmlformats.org/drawingml/2006/main" xmlns:p="http://schemas.openxmlformats.org/presentationml/2006/main" xmlns:r="http://schemas.openxmlformats.org/officeDocument/2006/relationships">
+  <p:cSld>
+    <p:spTree>
+      <p:nvGrpSpPr>
+        <p:cNvPr id="1" name=""/>
+        <p:cNvGrpSpPr/>
+        <p:nvPr/>
+      </p:nvGrpSpPr>
+      <p:grpSpPr/>
+      <p:sp>
+        <p:nvSpPr>
+          <p:cNvPr id="2" name="Rectangle 1"/>
+          <p:cNvSpPr/>
+          <p:nvPr/>
+        </p:nvSpPr>
+        <p:spPr>
+          <a:xfrm>
+            <a:off x="0" y="0"/>
+            <a:ext cx="12191695" cy="6858000"/>
+          </a:xfrm>
+          <a:prstGeom prst="rect">
+            <a:avLst/>
+          </a:prstGeom>
+          <a:solidFill>
+            <a:srgbClr val="1E2761"/>
+          </a:solidFill>
+          <a:ln>
+            <a:noFill/>
+          </a:ln>
+          <a:effectLst/>
+        </p:spPr>
+        <p:style>
+          <a:lnRef idx="1">
+            <a:schemeClr val="accent1"/>
+          </a:lnRef>
+          <a:fillRef idx="3">
+            <a:schemeClr val="accent1"/>
+          </a:fillRef>
+          <a:effectRef idx="2">
+            <a:schemeClr val="accent1"/>
+          </a:effectRef>
+          <a:fontRef idx="minor">
+            <a:schemeClr val="lt1"/>
+          </a:fontRef>
+        </p:style>
+        <p:txBody>
+          <a:bodyPr rtlCol="0" anchor="ctr"/>
+          <a:lstStyle/>
+          <a:p>
+            <a:pPr algn="ctr"/>
+          </a:p>
+        </p:txBody>
+      </p:sp>
+      <p:sp>
+        <p:nvSpPr>
+          <p:cNvPr id="3" name="TextBox 2"/>
+          <p:cNvSpPr txBox="1"/>
+          <p:nvPr/>
+        </p:nvSpPr>
+        <p:spPr>
+          <a:xfrm>
+            <a:off x="822960" y="640080"/>
+            <a:ext cx="10515600" cy="457200"/>
+          </a:xfrm>
+          <a:prstGeom prst="rect">
+            <a:avLst/>
+          </a:prstGeom>
+          <a:noFill/>
+        </p:spPr>
+        <p:txBody>
+          <a:bodyPr wrap="square">
+            <a:spAutoFit/>
+          </a:bodyPr>
+          <a:lstStyle/>
+          <a:p>
+            <a:r>
+              <a:rPr sz="1400" b="1" i="0">
+                <a:solidFill>
+                  <a:srgbClr val="CADCFC"/>
+                </a:solidFill>
+                <a:latin typeface="Montserrat"/>
+              </a:rPr>
+              <a:t>LO QUE YA DOMINAS</a:t>
+            </a:r>
+          </a:p>
+        </p:txBody>
+      </p:sp>
+      <p:sp>
+        <p:nvSpPr>
+          <p:cNvPr id="4" name="TextBox 3"/>
+          <p:cNvSpPr txBox="1"/>
+          <p:nvPr/>
+        </p:nvSpPr>
+        <p:spPr>
+          <a:xfrm>
+            <a:off x="822960" y="1143000"/>
+            <a:ext cx="10515600" cy="1097280"/>
+          </a:xfrm>
+          <a:prstGeom prst="rect">
+            <a:avLst/>
+          </a:prstGeom>
+          <a:noFill/>
+        </p:spPr>
+        <p:txBody>
+          <a:bodyPr wrap="square">
+            <a:spAutoFit/>
+          </a:bodyPr>
+          <a:lstStyle/>
+          <a:p>
+            <a:r>
+              <a:rPr sz="3400" b="1" i="0">
+                <a:solidFill>
+                  <a:srgbClr val="FFFFFF"/>
+                </a:solidFill>
+                <a:latin typeface="Montserrat"/>
+              </a:rPr>
+              <a:t>Ya te sabes la ITC de las caravanas entera</a:t>
+            </a:r>
+          </a:p>
+        </p:txBody>
+      </p:sp>
+      <p:sp>
+        <p:nvSpPr>
+          <p:cNvPr id="5" name="TextBox 4"/>
+          <p:cNvSpPr txBox="1"/>
+          <p:nvPr/>
+        </p:nvSpPr>
+        <p:spPr>
+          <a:xfrm>
+            <a:off x="822960" y="2514600"/>
+            <a:ext cx="10515600" cy="2834640"/>
+          </a:xfrm>
+          <a:prstGeom prst="rect">
+            <a:avLst/>
+          </a:prstGeom>
+          <a:noFill/>
+        </p:spPr>
+        <p:txBody>
+          <a:bodyPr wrap="square">
+            <a:spAutoFit/>
+          </a:bodyPr>
+          <a:lstStyle/>
+          <a:p>
+            <a:pPr>
+              <a:spcAft>
+                <a:spcPts val="1200"/>
+              </a:spcAft>
+            </a:pPr>
+            <a:r>
               <a:rPr sz="2000" b="1" i="0">
                 <a:solidFill>
-                  <a:srgbClr val="2E3A80"/>
+                  <a:srgbClr val="CADCFC"/>
                 </a:solidFill>
                 <a:latin typeface="Montserrat"/>
               </a:rPr>
               <a:t>✓  </a:t>
             </a:r>
             <a:r>
-              <a:rPr sz="2000" b="0" i="0">
-                <a:solidFill>
-                  <a:srgbClr val="1B2330"/>
+              <a:rPr sz="1900" b="0" i="0">
+                <a:solidFill>
+                  <a:srgbClr val="FFFFFF"/>
+                </a:solidFill>
+                <a:latin typeface="Montserrat"/>
+              </a:rPr>
+              <a:t>De dónde cuelga: artículo 2.1,g) y UNE-EN 1949</a:t>
+            </a:r>
+          </a:p>
+          <a:p>
+            <a:pPr>
+              <a:spcAft>
+                <a:spcPts val="1200"/>
+              </a:spcAft>
+            </a:pPr>
+            <a:r>
+              <a:rPr sz="2000" b="1" i="0">
+                <a:solidFill>
+                  <a:srgbClr val="CADCFC"/>
+                </a:solidFill>
+                <a:latin typeface="Montserrat"/>
+              </a:rPr>
+              <a:t>✓  </a:t>
+            </a:r>
+            <a:r>
+              <a:rPr sz="1900" b="0" i="0">
+                <a:solidFill>
+                  <a:srgbClr val="FFFFFF"/>
+                </a:solidFill>
+                <a:latin typeface="Montserrat"/>
+              </a:rPr>
+              <a:t>Estanquidad: no baja en 15 min · uso a 30 mbar</a:t>
+            </a:r>
+          </a:p>
+          <a:p>
+            <a:pPr>
+              <a:spcAft>
+                <a:spcPts val="1200"/>
+              </a:spcAft>
+            </a:pPr>
+            <a:r>
+              <a:rPr sz="2000" b="1" i="0">
+                <a:solidFill>
+                  <a:srgbClr val="CADCFC"/>
+                </a:solidFill>
+                <a:latin typeface="Montserrat"/>
+              </a:rPr>
+              <a:t>✓  </a:t>
+            </a:r>
+            <a:r>
+              <a:rPr sz="1900" b="0" i="0">
+                <a:solidFill>
+                  <a:srgbClr val="FFFFFF"/>
+                </a:solidFill>
+                <a:latin typeface="Montserrat"/>
+              </a:rPr>
+              <a:t>Bombonas sujetas · tubería nunca es cable</a:t>
+            </a:r>
+          </a:p>
+          <a:p>
+            <a:pPr>
+              <a:spcAft>
+                <a:spcPts val="1200"/>
+              </a:spcAft>
+            </a:pPr>
+            <a:r>
+              <a:rPr sz="2000" b="1" i="0">
+                <a:solidFill>
+                  <a:srgbClr val="CADCFC"/>
+                </a:solidFill>
+                <a:latin typeface="Montserrat"/>
+              </a:rPr>
+              <a:t>✓  </a:t>
+            </a:r>
+            <a:r>
+              <a:rPr sz="1900" b="0" i="0">
+                <a:solidFill>
+                  <a:srgbClr val="FFFFFF"/>
                 </a:solidFill>
                 <a:latin typeface="Montserrat"/>
               </a:rPr>
               <a:t>No se comunica · revisión cada 4 años (IRV)</a:t>
+            </a:r>
+          </a:p>
+        </p:txBody>
+      </p:sp>
+      <p:sp>
+        <p:nvSpPr>
+          <p:cNvPr id="6" name="Rounded Rectangle 5"/>
+          <p:cNvSpPr/>
+          <p:nvPr/>
+        </p:nvSpPr>
+        <p:spPr>
+          <a:xfrm>
+            <a:off x="822960" y="5532120"/>
+            <a:ext cx="10515600" cy="777240"/>
+          </a:xfrm>
+          <a:prstGeom prst="roundRect">
+            <a:avLst/>
+          </a:prstGeom>
+          <a:solidFill>
+            <a:srgbClr val="2E3A80"/>
+          </a:solidFill>
+          <a:ln>
+            <a:noFill/>
+          </a:ln>
+          <a:effectLst/>
+        </p:spPr>
+        <p:style>
+          <a:lnRef idx="1">
+            <a:schemeClr val="accent1"/>
+          </a:lnRef>
+          <a:fillRef idx="3">
+            <a:schemeClr val="accent1"/>
+          </a:fillRef>
+          <a:effectRef idx="2">
+            <a:schemeClr val="accent1"/>
+          </a:effectRef>
+          <a:fontRef idx="minor">
+            <a:schemeClr val="lt1"/>
+          </a:fontRef>
+        </p:style>
+        <p:txBody>
+          <a:bodyPr rtlCol="0" anchor="ctr"/>
+          <a:lstStyle/>
+          <a:p>
+            <a:pPr algn="ctr"/>
+          </a:p>
+        </p:txBody>
+      </p:sp>
+      <p:sp>
+        <p:nvSpPr>
+          <p:cNvPr id="7" name="TextBox 6"/>
+          <p:cNvSpPr txBox="1"/>
+          <p:nvPr/>
+        </p:nvSpPr>
+        <p:spPr>
+          <a:xfrm>
+            <a:off x="1051560" y="5605272"/>
+            <a:ext cx="10058400" cy="640080"/>
+          </a:xfrm>
+          <a:prstGeom prst="rect">
+            <a:avLst/>
+          </a:prstGeom>
+          <a:noFill/>
+        </p:spPr>
+        <p:txBody>
+          <a:bodyPr wrap="square">
+            <a:spAutoFit/>
+          </a:bodyPr>
+          <a:lstStyle/>
+          <a:p>
+            <a:r>
+              <a:rPr sz="1500" b="1" i="1">
+                <a:solidFill>
+                  <a:srgbClr val="CADCFC"/>
+                </a:solidFill>
+                <a:latin typeface="Montserrat"/>
+              </a:rPr>
+              <a:t>Una ITC corta, pero de las que más caen. Ya es tuya.</a:t>
             </a:r>
           </a:p>
         </p:txBody>
@@ -6623,7 +7192,7 @@
                 </a:solidFill>
                 <a:latin typeface="Montserrat"/>
               </a:rPr>
-              <a:t>002 / 014</a:t>
+              <a:t>002 / 015</a:t>
             </a:r>
           </a:p>
         </p:txBody>
@@ -6807,7 +7376,7 @@
                 </a:solidFill>
                 <a:latin typeface="Montserrat"/>
               </a:rPr>
-              <a:t>minutos mínimo que aguanta la presión en la prueba de estanquidad</a:t>
+              <a:t>minutos mínimos de la prueba de estanquidad</a:t>
             </a:r>
           </a:p>
         </p:txBody>
@@ -6923,7 +7492,7 @@
                 </a:solidFill>
                 <a:latin typeface="Montserrat"/>
               </a:rPr>
-              <a:t>mbar de presión de funcionamiento de los aparatos</a:t>
+              <a:t>mbar de presión de los aparatos</a:t>
             </a:r>
           </a:p>
         </p:txBody>
@@ -7136,7 +7705,7 @@
                 </a:solidFill>
                 <a:latin typeface="Montserrat"/>
               </a:rPr>
-              <a:t>003 / 014</a:t>
+              <a:t>003 / 015</a:t>
             </a:r>
           </a:p>
         </p:txBody>
@@ -7551,7 +8120,7 @@
                 </a:solidFill>
                 <a:latin typeface="Montserrat"/>
               </a:rPr>
-              <a:t>004 / 014</a:t>
+              <a:t>004 / 015</a:t>
             </a:r>
           </a:p>
         </p:txBody>
@@ -7941,7 +8510,7 @@
                 </a:solidFill>
                 <a:latin typeface="Montserrat"/>
               </a:rPr>
-              <a:t>005 / 014</a:t>
+              <a:t>005 / 015</a:t>
             </a:r>
           </a:p>
         </p:txBody>
@@ -8331,7 +8900,7 @@
                 </a:solidFill>
                 <a:latin typeface="Montserrat"/>
               </a:rPr>
-              <a:t>006 / 014</a:t>
+              <a:t>006 / 015</a:t>
             </a:r>
           </a:p>
         </p:txBody>
@@ -8721,7 +9290,7 @@
                 </a:solidFill>
                 <a:latin typeface="Montserrat"/>
               </a:rPr>
-              <a:t>007 / 014</a:t>
+              <a:t>007 / 015</a:t>
             </a:r>
           </a:p>
         </p:txBody>
@@ -8896,7 +9465,7 @@
                 </a:solidFill>
                 <a:latin typeface="Montserrat"/>
               </a:rPr>
-              <a:t>Manómetro 0 a 1 bar, clase 1, escala 20 mbar</a:t>
+              <a:t>Manómetro 0-1 bar, clase 1</a:t>
             </a:r>
           </a:p>
           <a:p>
@@ -8921,7 +9490,7 @@
                 </a:solidFill>
                 <a:latin typeface="Montserrat"/>
               </a:rPr>
-              <a:t>O manotermógrafo del mismo rango</a:t>
+              <a:t>Escala de 20 mbar o manotermógrafo</a:t>
             </a:r>
           </a:p>
           <a:p>
@@ -9136,7 +9705,7 @@
                 </a:solidFill>
                 <a:latin typeface="Montserrat"/>
               </a:rPr>
-              <a:t>008 / 014</a:t>
+              <a:t>008 / 015</a:t>
             </a:r>
           </a:p>
         </p:txBody>
@@ -9526,7 +10095,7 @@
                 </a:solidFill>
                 <a:latin typeface="Montserrat"/>
               </a:rPr>
-              <a:t>009 / 014</a:t>
+              <a:t>009 / 015</a:t>
             </a:r>
           </a:p>
         </p:txBody>

--- a/Curso Gas B/07 - ITC-ICG 10 - GLP de uso domestico en caravanas y autocaravanas/07 - ITC-ICG 10 - GLP de uso domestico en caravanas y autocaravanas - Vídeo 1.pptx
+++ b/Curso Gas B/07 - ITC-ICG 10 - GLP de uso domestico en caravanas y autocaravanas/07 - ITC-ICG 10 - GLP de uso domestico en caravanas y autocaravanas - Vídeo 1.pptx
@@ -20,6 +20,7 @@
     <p:sldId id="268" r:id="rId20"/>
     <p:sldId id="269" r:id="rId21"/>
     <p:sldId id="270" r:id="rId22"/>
+    <p:sldId id="271" r:id="rId23"/>
   </p:sldIdLst>
   <p:sldSz cx="12191695" cy="6858000" type="screen4x3"/>
   <p:notesSz cx="6858000" cy="9144000"/>
@@ -591,12 +592,12 @@
           <a:lstStyle/>
           <a:p>
             <a:r>
-              <a:t>N1: Aquí me huelo la trampa. ¿Hay que comunicar la puesta en servicio a la Administración?</a:t>
-            </a:r>
-          </a:p>
-          <a:p>
-            <a:r>
-              <a:t>N2: No. Y esta es LA excepción que tienes que llevarte grabada. En casi todo el Reglamento, tras la puesta en servicio el titular tiene que comunicarlo a la Comunidad Autónoma dentro de un plazo; acuérdate de los treinta días del artículo cinco punto siete. Pues bien, en la caravana la cosa cambia: aquí no hay que comunicar nada. Lo único que se exige es que el titular guarde el certificado y lo tenga a mano por si la Administración se lo reclama. Nada de plazos, nada de registrar. ¿Por qué te insisto tanto? Porque el examinador lo usa de cebo: si ves una pregunta que dice que en las instalaciones de GLP de caravanas hay que comunicar a la Administración en treinta días, es falsa, tachada. No se comunica; solo se conserva el certificado. Es de sus trampas favoritas.</a:t>
+              <a:t>N1: ¿Cuándo puede el dueño pedir sus bombonas?</a:t>
+            </a:r>
+          </a:p>
+          <a:p>
+            <a:r>
+              <a:t>N2: Piensa en el certificado como en la llave que abre el gas. Una vez que la instaladora lo ha expedido, la instalación se considera en disposición de servicio, es decir, lista y con garantías para funcionar. Y en ese momento, no antes, el titular puede solicitar al suministrador los envases de GLP, o sea, pedir sus bombonas. Hasta que la instaladora no firma, no hay puesta en servicio y no hay gas que valga. La secuencia es clarísima, y precisamente por eso la preguntan: primero el papel, luego el gas. Nunca al revés. Si alguien mete las bombonas antes de tener el certificado, esa instalación no está en servicio legalmente.</a:t>
             </a:r>
           </a:p>
         </p:txBody>
@@ -666,12 +667,12 @@
           <a:lstStyle/>
           <a:p>
             <a:r>
-              <a:t>N1: ¿Por qué son tan importantes esos treinta milibares, y por qué se atan las bombonas?</a:t>
-            </a:r>
-          </a:p>
-          <a:p>
-            <a:r>
-              <a:t>N2: Vamos por partes. Los aparatos de la caravana funcionan a treinta milibares, que es la presión típica del GLP con regulador doméstico. Es un valor fijo que se pregunta tal cual, pero no es un capricho: con la presión o el regulador equivocados aparece mala combustión, o sea, llama amarilla en vez de azul, tiznado y hollín en los aparatos, y lo grave de verdad, monóxido de carbono, un gas que no huele y que en pocos metros cúbicos, como los de una caravana, mata. Por eso, si un usuario se te queja de olores raros, de un aparato que ahúma o que se apaga solo, empieza mirando presión y ventilación: en una caravana una ventilación mal hecha mata. Y ahora las bombonas: siempre sujetas, llenas o vacías, dentro o fuera del habitáculo, tanto en uso como conduciendo. Piensa en un vehículo en marcha: una bombona suelta golpeando en una curva puede romper el grifo y provocar una fuga circulando. Detalle de examen: la obligación de amarrarlas aplica también a los envases vacíos. Y en estacionamientos largos, como el invernaje, se desconectan de la instalación: menos gas conectado sin vigilancia, menos riesgo.</a:t>
+              <a:t>N1: Aquí me huelo la trampa. ¿Hay que comunicar la puesta en servicio a la Administración?</a:t>
+            </a:r>
+          </a:p>
+          <a:p>
+            <a:r>
+              <a:t>N2: No. Y esta es LA excepción que tienes que llevarte grabada. En casi todo el Reglamento, tras la puesta en servicio el titular tiene que comunicarlo a la Comunidad Autónoma dentro de un plazo; acuérdate de los treinta días del artículo cinco punto siete. Pues bien, en la caravana la cosa cambia: aquí no hay que comunicar nada. Lo único que se exige es que el titular guarde el certificado y lo tenga a mano por si la Administración se lo reclama. Nada de plazos, nada de registrar. ¿Por qué te insisto tanto? Porque el examinador lo usa de cebo: si ves una pregunta que dice que en las instalaciones de GLP de caravanas hay que comunicar a la Administración en treinta días, es falsa, tachada. No se comunica; solo se conserva el certificado. Es de sus trampas favoritas.</a:t>
             </a:r>
           </a:p>
         </p:txBody>
@@ -741,12 +742,12 @@
           <a:lstStyle/>
           <a:p>
             <a:r>
-              <a:t>N1: ¿Se puede enganchar la toma de tierra a la tubería de gas?</a:t>
-            </a:r>
-          </a:p>
-          <a:p>
-            <a:r>
-              <a:t>N2: Jamás. Las tuberías de gas no se pueden usar nunca como conductor de puesta a tierra, ni como parte de una instalación eléctrica, ni de una de radio. Piénsalo un segundo: enganchar un cable eléctrico a la tubería de gas es meter una posible chispa justo donde hay combustible. Y en un habitáculo pequeño y cerrado como el de una caravana, eso es una receta directa para el incendio. Por eso el Reglamento lo prohíbe de plano. Este punto cae en examen, y la respuesta correcta siempre es que está prohibido, sin matices. En obra lo vas a ver en revisiones: gente que, por comodidad, ha atado el negativo de la batería o la tierra a un tubo de gas. Eso se corrige en el sitio, sí o sí, antes de firmar nada.</a:t>
+              <a:t>N1: ¿Por qué son tan importantes esos treinta milibares, y por qué se atan las bombonas?</a:t>
+            </a:r>
+          </a:p>
+          <a:p>
+            <a:r>
+              <a:t>N2: Vamos por partes. Los aparatos de la caravana funcionan a treinta milibares, que es la presión típica del GLP con regulador doméstico. Es un valor fijo que se pregunta tal cual, pero no es un capricho: con la presión o el regulador equivocados aparece mala combustión, o sea, llama amarilla en vez de azul, tiznado y hollín en los aparatos, y lo grave de verdad, monóxido de carbono, un gas que no huele y que en pocos metros cúbicos, como los de una caravana, mata. Por eso, si un usuario se te queja de olores raros, de un aparato que ahúma o que se apaga solo, empieza mirando presión y ventilación: en una caravana una ventilación mal hecha mata. Y ahora las bombonas: siempre sujetas, llenas o vacías, dentro o fuera del habitáculo, tanto en uso como conduciendo. Piensa en un vehículo en marcha: una bombona suelta golpeando en una curva puede romper el grifo y provocar una fuga circulando. Detalle de examen: la obligación de amarrarlas aplica también a los envases vacíos. Y en estacionamientos largos, como el invernaje, se desconectan de la instalación: menos gas conectado sin vigilancia, menos riesgo.</a:t>
             </a:r>
           </a:p>
         </p:txBody>
@@ -816,12 +817,12 @@
           <a:lstStyle/>
           <a:p>
             <a:r>
-              <a:t>N1: ¿Cada cuánto se revisa, quién lo encarga, y por qué se llama revisión y no inspección?</a:t>
-            </a:r>
-          </a:p>
-          <a:p>
-            <a:r>
-              <a:t>N2: Tres datos que se preguntan juntos, así que los atamos juntos. Primero, cada cuánto: cada cuatro años hay que revisar la instalación y los aparatos de la caravana. Segundo, quién manda hacerlo: el responsable del buen estado es el titular, el dueño, y en su defecto el usuario; y es el titular quien tiene que encargar la revisión a una empresa instaladora. La instaladora ejecuta y recomienda, pero quien responde de que la caravana esté en condiciones es el propietario, igual que con el coche: el taller te lo mira, pero llevarlo a pasar la ITV es cosa tuya. Y tercero, muy importante: aquí se llama revisión, no inspección. ¿Por qué esa palabra y no la otra? Porque, como viste en el artículo siete del Reglamento, la caravana funciona con bombonas propias y no cuelga de una red de distribución; y todo lo que no cuelga de la red se revisa, no se inspecciona. La chuleta es fácil: caravana, bombonas, sin red, revisión, cada cuatro años. Se documenta con el modelo IRV dos, que comprueba ventilaciones, evacuación de humos, estanquidad y funcionamiento de los aparatos según la UNE-EN mil novecientos cuarenta y nueve.</a:t>
+              <a:t>N1: ¿Se puede enganchar la toma de tierra a la tubería de gas?</a:t>
+            </a:r>
+          </a:p>
+          <a:p>
+            <a:r>
+              <a:t>N2: Jamás. Las tuberías de gas no se pueden usar nunca como conductor de puesta a tierra, ni como parte de una instalación eléctrica, ni de una de radio. Piénsalo un segundo: enganchar un cable eléctrico a la tubería de gas es meter una posible chispa justo donde hay combustible. Y en un habitáculo pequeño y cerrado como el de una caravana, eso es una receta directa para el incendio. Por eso el Reglamento lo prohíbe de plano. Este punto cae en examen, y la respuesta correcta siempre es que está prohibido, sin matices. En obra lo vas a ver en revisiones: gente que, por comodidad, ha atado el negativo de la batería o la tierra a un tubo de gas. Eso se corrige en el sitio, sí o sí, antes de firmar nada.</a:t>
             </a:r>
           </a:p>
         </p:txBody>
@@ -891,12 +892,12 @@
           <a:lstStyle/>
           <a:p>
             <a:r>
-              <a:t>N1: ¿Qué diferencia hay entre el IRV-1 y el IRV-2? Se me lían.</a:t>
-            </a:r>
-          </a:p>
-          <a:p>
-            <a:r>
-              <a:t>N2: Muy sencillo, y así no vuelves a confundirlos. La ITC trae en su anexo uno dos impresos oficiales, los dos con las siglas IRV, que quieren decir instalación receptora de vehículo. El primero, el IRV uno, es el certificado de instalación: lo rellena la empresa instaladora cuando termina de montar y probar la caravana, se emite por triplicado, y es la llave que pone el gas en servicio. El segundo, el IRV dos, es el certificado de revisión periódica: es el que se rellena cada cuatro años cuando toca revisar, y deja constancia de que se han comprobado ventilaciones, evacuación de humos, caducidad de componentes, estanquidad y funcionamiento de los aparatos según la UNE-EN mil novecientos cuarenta y nueve. Chuleta para el examen: el uno es para instalar, el dos es para revisar. No hace falta que te aprendas el impreso casilla a casilla; basta con saber que el modelo está normalizado en el anexo uno, y que en cuanto veas las siglas IRV en una pregunta, están hablando de la caravana.</a:t>
+              <a:t>N1: ¿Cada cuánto se revisa, quién lo encarga, y por qué se llama revisión y no inspección?</a:t>
+            </a:r>
+          </a:p>
+          <a:p>
+            <a:r>
+              <a:t>N2: Tres datos que se preguntan juntos, así que los atamos juntos. Primero, cada cuánto: cada cuatro años hay que revisar la instalación y los aparatos de la caravana. Segundo, quién manda hacerlo: el responsable del buen estado es el titular, el dueño, y en su defecto el usuario; y es el titular quien tiene que encargar la revisión a una empresa instaladora. La instaladora ejecuta y recomienda, pero quien responde de que la caravana esté en condiciones es el propietario, igual que con el coche: el taller te lo mira, pero llevarlo a pasar la ITV es cosa tuya. Y tercero, muy importante: aquí se llama revisión, no inspección. ¿Por qué esa palabra y no la otra? Porque, como viste en el artículo siete del Reglamento, la caravana funciona con bombonas propias y no cuelga de una red de distribución; y todo lo que no cuelga de la red se revisa, no se inspecciona. La chuleta es fácil: caravana, bombonas, sin red, revisión, cada cuatro años. Se documenta con el modelo IRV dos, que comprueba ventilaciones, evacuación de humos, estanquidad y funcionamiento de los aparatos según la UNE-EN mil novecientos cuarenta y nueve.</a:t>
             </a:r>
           </a:p>
         </p:txBody>
@@ -966,6 +967,81 @@
           <a:lstStyle/>
           <a:p>
             <a:r>
+              <a:t>N1: ¿Qué diferencia hay entre el IRV-1 y el IRV-2? Se me lían.</a:t>
+            </a:r>
+          </a:p>
+          <a:p>
+            <a:r>
+              <a:t>N2: Muy sencillo, y así no vuelves a confundirlos. La ITC trae en su anexo uno dos impresos oficiales, los dos con las siglas IRV, que quieren decir instalación receptora de vehículo. El primero, el IRV uno, es el certificado de instalación: lo rellena la empresa instaladora cuando termina de montar y probar la caravana, se emite por triplicado, y es la llave que pone el gas en servicio. El segundo, el IRV dos, es el certificado de revisión periódica: es el que se rellena cada cuatro años cuando toca revisar, y deja constancia de que se han comprobado ventilaciones, evacuación de humos, caducidad de componentes, estanquidad y funcionamiento de los aparatos según la UNE-EN mil novecientos cuarenta y nueve. Chuleta para el examen: el uno es para instalar, el dos es para revisar. No hace falta que te aprendas el impreso casilla a casilla; basta con saber que el modelo está normalizado en el anexo uno, y que en cuanto veas las siglas IRV en una pregunta, están hablando de la caravana.</a:t>
+            </a:r>
+          </a:p>
+        </p:txBody>
+      </p:sp>
+      <p:sp>
+        <p:nvSpPr>
+          <p:cNvPr id="4" name="Slide Number Placeholder 3"/>
+          <p:cNvSpPr>
+            <a:spLocks noGrp="1"/>
+          </p:cNvSpPr>
+          <p:nvPr>
+            <p:ph type="sldNum" idx="5" sz="quarter"/>
+          </p:nvPr>
+        </p:nvSpPr>
+        <p:spPr/>
+      </p:sp>
+    </p:spTree>
+  </p:cSld>
+  <p:clrMapOvr>
+    <a:masterClrMapping/>
+  </p:clrMapOvr>
+</p:notes>
+</file>
+
+<file path=ppt/notesSlides/notesSlide16.xml><?xml version="1.0" encoding="utf-8"?>
+<p:notes xmlns:a="http://schemas.openxmlformats.org/drawingml/2006/main" xmlns:p="http://schemas.openxmlformats.org/presentationml/2006/main" xmlns:r="http://schemas.openxmlformats.org/officeDocument/2006/relationships">
+  <p:cSld>
+    <p:spTree>
+      <p:nvGrpSpPr>
+        <p:cNvPr id="1" name=""/>
+        <p:cNvGrpSpPr/>
+        <p:nvPr/>
+      </p:nvGrpSpPr>
+      <p:grpSpPr>
+        <a:xfrm>
+          <a:off x="0" y="0"/>
+          <a:ext cx="0" cy="0"/>
+          <a:chOff x="0" y="0"/>
+          <a:chExt cx="0" cy="0"/>
+        </a:xfrm>
+      </p:grpSpPr>
+      <p:sp>
+        <p:nvSpPr>
+          <p:cNvPr id="2" name="Slide Image Placeholder 1"/>
+          <p:cNvSpPr>
+            <a:spLocks noGrp="1"/>
+          </p:cNvSpPr>
+          <p:nvPr>
+            <p:ph type="sldImg" idx="2"/>
+          </p:nvPr>
+        </p:nvSpPr>
+        <p:spPr/>
+      </p:sp>
+      <p:sp>
+        <p:nvSpPr>
+          <p:cNvPr id="3" name="Notes Placeholder 2"/>
+          <p:cNvSpPr>
+            <a:spLocks noGrp="1"/>
+          </p:cNvSpPr>
+          <p:nvPr>
+            <p:ph type="body" idx="3" sz="quarter"/>
+          </p:nvPr>
+        </p:nvSpPr>
+        <p:spPr/>
+        <p:txBody>
+          <a:bodyPr/>
+          <a:lstStyle/>
+          <a:p>
+            <a:r>
               <a:t>N1: Vale, es corta pero tiene mucha chicha. ¿Cómo lo ordeno todo en la cabeza para el examen?</a:t>
             </a:r>
           </a:p>
@@ -1124,16 +1200,7 @@
         <p:txBody>
           <a:bodyPr/>
           <a:lstStyle/>
-          <a:p>
-            <a:r>
-              <a:t>N1: ¿De dónde cuelga esta ITC dentro del Reglamento?</a:t>
-            </a:r>
-          </a:p>
-          <a:p>
-            <a:r>
-              <a:t>N2: Acuérdate del Tema cero. El artículo dos del Reglamento listaba nueve tipos de instalaciones, cada una con una letra. La letra ge era justamente el GLP de uso doméstico en caravanas y autocaravanas. Pues esta ITC-ICG diez es la rama que desarrolla esa letra ge: coge ese renglón del Reglamento y lo explica al detalle. ¿Y qué fija? Los requisitos técnicos esenciales y las medidas de seguridad en cinco fases: el diseño, la construcción, las pruebas, la instalación y la utilización. Fíjate que cubre toda la vida de la instalación, desde que se piensa hasta que se usa. Así que si en el examen te preguntan de qué apartado del Reglamento cuelga la ITC-ICG diez, la respuesta es artículo dos punto uno, letra ge. Ese detallito lo preguntan más de lo que crees.</a:t>
-            </a:r>
-          </a:p>
+          <a:p/>
         </p:txBody>
       </p:sp>
       <p:sp>
@@ -1201,12 +1268,12 @@
           <a:lstStyle/>
           <a:p>
             <a:r>
-              <a:t>N1: ¿Qué es exactamente un vehículo habitable de recreo de carretera?</a:t>
-            </a:r>
-          </a:p>
-          <a:p>
-            <a:r>
-              <a:t>N2: Es la definición fina de caravana o autocaravana: un vehículo pensado para vivir dentro y para circular por carretera. Fíjate en la palabra recreo, porque tiene truco: recreo significa ocio, no es una vivienda fija ni un vehículo industrial. Y ahora un matiz que se pregunta: las reglas de mantenimiento y control periódico se aplican tanto a las caravanas nuevas como a las que ya existían. ¿Por qué te lo subrayo? Porque es la lógica general del Reglamento: lo viejo no se obliga a rehacerlo por capricho, pero las revisiones periódicas caen igual, tenga la edad que tenga la caravana. Nadie se libra de la revisión por tener una caravana antigua, igual que nadie se libra de la ITV por tener un coche viejo.</a:t>
+              <a:t>N1: ¿De dónde cuelga esta ITC dentro del Reglamento?</a:t>
+            </a:r>
+          </a:p>
+          <a:p>
+            <a:r>
+              <a:t>N2: Acuérdate del Tema cero. El artículo dos del Reglamento listaba nueve tipos de instalaciones, cada una con una letra. La letra ge era justamente el GLP de uso doméstico en caravanas y autocaravanas. Pues esta ITC-ICG diez es la rama que desarrolla esa letra ge: coge ese renglón del Reglamento y lo explica al detalle. ¿Y qué fija? Los requisitos técnicos esenciales y las medidas de seguridad en cinco fases: el diseño, la construcción, las pruebas, la instalación y la utilización. Fíjate que cubre toda la vida de la instalación, desde que se piensa hasta que se usa. Así que si en el examen te preguntan de qué apartado del Reglamento cuelga la ITC-ICG diez, la respuesta es artículo dos punto uno, letra ge. Ese detallito lo preguntan más de lo que crees.</a:t>
             </a:r>
           </a:p>
         </p:txBody>
@@ -1276,12 +1343,12 @@
           <a:lstStyle/>
           <a:p>
             <a:r>
-              <a:t>N1: Un hornillo de camping con su cartucho, ¿lo tengo que certificar yo?</a:t>
-            </a:r>
-          </a:p>
-          <a:p>
-            <a:r>
-              <a:t>N2: No, y este es justo el punto con el que quieren que te líes. Un hornillo de camping con su propio cartucho, o una estufa portátil de butano que lleva la bombona encima, no entra en esta ITC. ¿Por qué? Porque son aparatos portátiles que incorporan su propia alimentación de gas: son cacharros sueltos, no forman parte de una instalación. La ITC-ICG diez regula la instalación fija de la caravana, es decir, las tuberías, el regulador, las bombonas sujetas y los aparatos conectados a ellas por tubo. Lo que te llevas suelto dentro no es cosa tuya. Es la misma lógica del cacharro portátil que ya viste en el Reglamento con el límite de quince kilos: si el gas viaja con el propio aparato y no hay tubería, no lo certificas.</a:t>
+              <a:t>N1: ¿Qué es exactamente un vehículo habitable de recreo de carretera?</a:t>
+            </a:r>
+          </a:p>
+          <a:p>
+            <a:r>
+              <a:t>N2: Es la definición fina de caravana o autocaravana: un vehículo pensado para vivir dentro y para circular por carretera. Fíjate en la palabra recreo, porque tiene truco: recreo significa ocio, no es una vivienda fija ni un vehículo industrial. Y ahora un matiz que se pregunta: las reglas de mantenimiento y control periódico se aplican tanto a las caravanas nuevas como a las que ya existían. ¿Por qué te lo subrayo? Porque es la lógica general del Reglamento: lo viejo no se obliga a rehacerlo por capricho, pero las revisiones periódicas caen igual, tenga la edad que tenga la caravana. Nadie se libra de la revisión por tener una caravana antigua, igual que nadie se libra de la ITV por tener un coche viejo.</a:t>
             </a:r>
           </a:p>
         </p:txBody>
@@ -1351,12 +1418,12 @@
           <a:lstStyle/>
           <a:p>
             <a:r>
-              <a:t>N1: ¿Cuál es la norma estrella de este tema, y quién puede montar la instalación?</a:t>
-            </a:r>
-          </a:p>
-          <a:p>
-            <a:r>
-              <a:t>N2: La norma es la UNE-EN mil novecientos cuarenta y nueve. Grábatela, porque es LA norma de la ITC-ICG diez: manda en el diseño, en la construcción, en el montaje, en las pruebas previas y hasta en las recomendaciones de mantenimiento. Si te aparece esa norma en el examen, piensa automáticamente en caravanas. Y ojo, las normas UNE se citan sin año, así que la verás escrita a secas, sin ninguna fecha detrás. ¿Y quién la monta? No la monta cualquiera: la ejecuta una empresa instaladora de gas, habilitada según la ITC-ICG nueve. El dueño no puede ponerse a soldar tubos de gas en su autocaravana por su cuenta. Los aparatos, además, deben venir conformes a las directivas europeas de gas o a lo que diga la ITC-ICG ocho. Ejemplo de obra: si te llega una caravana montada por el cuñado, no la puedes certificar sin repasarla y probarla entera; el papel lo firmas tú, y respondes tú.</a:t>
+              <a:t>N1: Un hornillo de camping con su cartucho, ¿lo tengo que certificar yo?</a:t>
+            </a:r>
+          </a:p>
+          <a:p>
+            <a:r>
+              <a:t>N2: No, y este es justo el punto con el que quieren que te líes. Un hornillo de camping con su propio cartucho, o una estufa portátil de butano que lleva la bombona encima, no entra en esta ITC. ¿Por qué? Porque son aparatos portátiles que incorporan su propia alimentación de gas: son cacharros sueltos, no forman parte de una instalación. La ITC-ICG diez regula la instalación fija de la caravana, es decir, las tuberías, el regulador, las bombonas sujetas y los aparatos conectados a ellas por tubo. Lo que te llevas suelto dentro no es cosa tuya. Es la misma lógica del cacharro portátil que ya viste en el Reglamento con el límite de quince kilos: si el gas viaja con el propio aparato y no hay tubería, no lo certificas.</a:t>
             </a:r>
           </a:p>
         </p:txBody>
@@ -1426,12 +1493,12 @@
           <a:lstStyle/>
           <a:p>
             <a:r>
-              <a:t>N1: ¿Cómo sé que una instalación de caravana es estanca, es decir, que no se escapa ni una burbuja de gas?</a:t>
-            </a:r>
-          </a:p>
-          <a:p>
-            <a:r>
-              <a:t>N2: Este apartado es una mina de preguntas, así que vamos dato a dato. Antes de la puesta en servicio, la instaladora hace las pruebas de la UNE-EN mil novecientos cuarenta y nueve para comprobar dos cosas: resistencia y estanquidad. Para la estanquidad se usa un manómetro, que es el reloj que mide la presión, de rango cero a uno bar, clase uno, con divisiones de escala de veinte milibares; o un manotermógrafo del mismo rango, que es lo mismo pero registrando en papel. ¿Qué es eso de clase uno? Es la clase de precisión, o sea, lo fino que hila el aparato, su margen de error: uno de clase uno es lo bastante preciso para cazar una pérdida pequeña. Y el criterio de éxito: la presión no debe bajar durante un tiempo no inferior a quince minutos desde la primera lectura. No inferior significa como mínimo: puedes esperar más, nunca menos. Truco visual: si la aguja cae, hay fuga; si se queda quieta un cuarto de hora, es estanca. En obra, si baja, repasas regulador, latiguillo y racores con agua jabonosa, y no das gas hasta que aguante.</a:t>
+              <a:t>N1: ¿Cuál es la norma estrella de este tema, y quién puede montar la instalación?</a:t>
+            </a:r>
+          </a:p>
+          <a:p>
+            <a:r>
+              <a:t>N2: La norma es la UNE-EN mil novecientos cuarenta y nueve. Grábatela, porque es LA norma de la ITC-ICG diez: manda en el diseño, en la construcción, en el montaje, en las pruebas previas y hasta en las recomendaciones de mantenimiento. Si te aparece esa norma en el examen, piensa automáticamente en caravanas. Y ojo, las normas UNE se citan sin año, así que la verás escrita a secas, sin ninguna fecha detrás. ¿Y quién la monta? No la monta cualquiera: la ejecuta una empresa instaladora de gas, habilitada según la ITC-ICG nueve. El dueño no puede ponerse a soldar tubos de gas en su autocaravana por su cuenta. Los aparatos, además, deben venir conformes a las directivas europeas de gas o a lo que diga la ITC-ICG ocho. Ejemplo de obra: si te llega una caravana montada por el cuñado, no la puedes certificar sin repasarla y probarla entera; el papel lo firmas tú, y respondes tú.</a:t>
             </a:r>
           </a:p>
         </p:txBody>
@@ -1501,12 +1568,12 @@
           <a:lstStyle/>
           <a:p>
             <a:r>
-              <a:t>N1: ¿Cuántas copias del certificado se hacen y para quién?</a:t>
-            </a:r>
-          </a:p>
-          <a:p>
-            <a:r>
-              <a:t>N2: Cuando la instaladora termina, rellena el certificado de instalación, que es el modelo IRV uno del anexo uno de la propia ITC. Y aquí viene el dato: se emite por triplicado, o sea, tres copias con tres destinos. Una se la queda la propia empresa instaladora, otra es para el titular, que es el dueño de la caravana, y otra para el órgano competente de la Comunidad Autónoma. Fíjate en una sutileza que gusta preguntar: el texto de la ITC solo nombra dos destinatarios de copia, el titular y la Comunidad Autónoma; pero como dice por triplicado, se entiende que la tercera se la queda la instaladora. Tres copias, tres manos. Y una pista para el examen: si ves las siglas IRV en una pregunta, ya sabes que hablan del certificado de la caravana.</a:t>
+              <a:t>N1: ¿Cómo sé que una instalación de caravana es estanca, es decir, que no se escapa ni una burbuja de gas?</a:t>
+            </a:r>
+          </a:p>
+          <a:p>
+            <a:r>
+              <a:t>N2: Este apartado es una mina de preguntas, así que vamos dato a dato. Antes de la puesta en servicio, la instaladora hace las pruebas de la UNE-EN mil novecientos cuarenta y nueve para comprobar dos cosas: resistencia y estanquidad. Para la estanquidad se usa un manómetro, que es el reloj que mide la presión, de rango cero a uno bar, clase uno, con divisiones de escala de veinte milibares; o un manotermógrafo del mismo rango, que es lo mismo pero registrando en papel. ¿Qué es eso de clase uno? Es la clase de precisión, o sea, lo fino que hila el aparato, su margen de error: uno de clase uno es lo bastante preciso para cazar una pérdida pequeña. Y el criterio de éxito: la presión no debe bajar durante un tiempo no inferior a quince minutos desde la primera lectura. No inferior significa como mínimo: puedes esperar más, nunca menos. Truco visual: si la aguja cae, hay fuga; si se queda quieta un cuarto de hora, es estanca. En obra, si baja, repasas regulador, latiguillo y racores con agua jabonosa, y no das gas hasta que aguante.</a:t>
             </a:r>
           </a:p>
         </p:txBody>
@@ -1576,12 +1643,12 @@
           <a:lstStyle/>
           <a:p>
             <a:r>
-              <a:t>N1: ¿Cuándo puede el dueño pedir sus bombonas?</a:t>
-            </a:r>
-          </a:p>
-          <a:p>
-            <a:r>
-              <a:t>N2: Piensa en el certificado como en la llave que abre el gas. Una vez que la instaladora lo ha expedido, la instalación se considera en disposición de servicio, es decir, lista y con garantías para funcionar. Y en ese momento, no antes, el titular puede solicitar al suministrador los envases de GLP, o sea, pedir sus bombonas. Hasta que la instaladora no firma, no hay puesta en servicio y no hay gas que valga. La secuencia es clarísima, y precisamente por eso la preguntan: primero el papel, luego el gas. Nunca al revés. Si alguien mete las bombonas antes de tener el certificado, esa instalación no está en servicio legalmente.</a:t>
+              <a:t>N1: ¿Cuántas copias del certificado se hacen y para quién?</a:t>
+            </a:r>
+          </a:p>
+          <a:p>
+            <a:r>
+              <a:t>N2: Cuando la instaladora termina, rellena el certificado de instalación, que es el modelo IRV uno del anexo uno de la propia ITC. Y aquí viene el dato: se emite por triplicado, o sea, tres copias con tres destinos. Una se la queda la propia empresa instaladora, otra es para el titular, que es el dueño de la caravana, y otra para el órgano competente de la Comunidad Autónoma. Fíjate en una sutileza que gusta preguntar: el texto de la ITC solo nombra dos destinatarios de copia, el titular y la Comunidad Autónoma; pero como dice por triplicado, se entiende que la tercera se la queda la instaladora. Tres copias, tres manos. Y una pista para el examen: si ves las siglas IRV en una pregunta, ya sabes que hablan del certificado de la caravana.</a:t>
             </a:r>
           </a:p>
         </p:txBody>
@@ -4656,7 +4723,7 @@
             <a:r>
               <a:rPr sz="1400" b="1" i="0">
                 <a:solidFill>
-                  <a:srgbClr val="CADCFC"/>
+                  <a:srgbClr val="F4A24C"/>
                 </a:solidFill>
                 <a:latin typeface="Montserrat"/>
               </a:rPr>
@@ -4667,13 +4734,57 @@
       </p:sp>
       <p:sp>
         <p:nvSpPr>
-          <p:cNvPr id="4" name="TextBox 3"/>
+          <p:cNvPr id="4" name="Rounded Rectangle 3"/>
+          <p:cNvSpPr/>
+          <p:nvPr/>
+        </p:nvSpPr>
+        <p:spPr>
+          <a:xfrm>
+            <a:off x="868680" y="2057400"/>
+            <a:ext cx="1463040" cy="82296"/>
+          </a:xfrm>
+          <a:prstGeom prst="roundRect">
+            <a:avLst/>
+          </a:prstGeom>
+          <a:solidFill>
+            <a:srgbClr val="E8801A"/>
+          </a:solidFill>
+          <a:ln>
+            <a:noFill/>
+          </a:ln>
+          <a:effectLst/>
+        </p:spPr>
+        <p:style>
+          <a:lnRef idx="1">
+            <a:schemeClr val="accent1"/>
+          </a:lnRef>
+          <a:fillRef idx="3">
+            <a:schemeClr val="accent1"/>
+          </a:fillRef>
+          <a:effectRef idx="2">
+            <a:schemeClr val="accent1"/>
+          </a:effectRef>
+          <a:fontRef idx="minor">
+            <a:schemeClr val="lt1"/>
+          </a:fontRef>
+        </p:style>
+        <p:txBody>
+          <a:bodyPr rtlCol="0" anchor="ctr"/>
+          <a:lstStyle/>
+          <a:p>
+            <a:pPr algn="ctr"/>
+          </a:p>
+        </p:txBody>
+      </p:sp>
+      <p:sp>
+        <p:nvSpPr>
+          <p:cNvPr id="5" name="TextBox 4"/>
           <p:cNvSpPr txBox="1"/>
           <p:nvPr/>
         </p:nvSpPr>
         <p:spPr>
           <a:xfrm>
-            <a:off x="822960" y="2194560"/>
+            <a:off x="822960" y="2286000"/>
             <a:ext cx="10515600" cy="2011680"/>
           </a:xfrm>
           <a:prstGeom prst="rect">
@@ -4712,7 +4823,7 @@
       </p:sp>
       <p:sp>
         <p:nvSpPr>
-          <p:cNvPr id="5" name="TextBox 4"/>
+          <p:cNvPr id="6" name="TextBox 5"/>
           <p:cNvSpPr txBox="1"/>
           <p:nvPr/>
         </p:nvSpPr>
@@ -4836,7 +4947,7 @@
                 </a:solidFill>
                 <a:latin typeface="Montserrat"/>
               </a:rPr>
-              <a:t>010 / 015</a:t>
+              <a:t>010 / 016</a:t>
             </a:r>
           </a:p>
         </p:txBody>
@@ -4884,7 +4995,7 @@
         <p:spPr>
           <a:xfrm>
             <a:off x="822960" y="457200"/>
-            <a:ext cx="8229600" cy="365760"/>
+            <a:ext cx="10058400" cy="365760"/>
           </a:xfrm>
           <a:prstGeom prst="rect">
             <a:avLst/>
@@ -4898,13 +5009,13 @@
           <a:lstStyle/>
           <a:p>
             <a:r>
-              <a:rPr sz="1200" b="1" i="0">
-                <a:solidFill>
-                  <a:srgbClr val="64748B"/>
-                </a:solidFill>
-                <a:latin typeface="Montserrat"/>
-              </a:rPr>
-              <a:t>APARTADO 4.4 · COMUNICACIÓN</a:t>
+              <a:rPr sz="1300" b="1" i="0">
+                <a:solidFill>
+                  <a:srgbClr val="E8801A"/>
+                </a:solidFill>
+                <a:latin typeface="Montserrat"/>
+              </a:rPr>
+              <a:t>APARTADO 4.3 · PUESTA EN SERVICIO</a:t>
             </a:r>
           </a:p>
         </p:txBody>
@@ -4932,26 +5043,70 @@
           <a:lstStyle/>
           <a:p>
             <a:r>
-              <a:rPr sz="2700" b="1" i="0">
+              <a:rPr sz="2800" b="1" i="0">
                 <a:solidFill>
                   <a:srgbClr val="1E2761"/>
                 </a:solidFill>
                 <a:latin typeface="Montserrat"/>
               </a:rPr>
-              <a:t>La excepción: no se comunica</a:t>
-            </a:r>
-          </a:p>
-        </p:txBody>
-      </p:sp>
-      <p:sp>
-        <p:nvSpPr>
-          <p:cNvPr id="7" name="TextBox 6"/>
+              <a:t>El papel abre el gas</a:t>
+            </a:r>
+          </a:p>
+        </p:txBody>
+      </p:sp>
+      <p:sp>
+        <p:nvSpPr>
+          <p:cNvPr id="7" name="Rounded Rectangle 6"/>
+          <p:cNvSpPr/>
+          <p:nvPr/>
+        </p:nvSpPr>
+        <p:spPr>
+          <a:xfrm>
+            <a:off x="868680" y="1627632"/>
+            <a:ext cx="2011680" cy="73152"/>
+          </a:xfrm>
+          <a:prstGeom prst="roundRect">
+            <a:avLst/>
+          </a:prstGeom>
+          <a:solidFill>
+            <a:srgbClr val="E8801A"/>
+          </a:solidFill>
+          <a:ln>
+            <a:noFill/>
+          </a:ln>
+          <a:effectLst/>
+        </p:spPr>
+        <p:style>
+          <a:lnRef idx="1">
+            <a:schemeClr val="accent1"/>
+          </a:lnRef>
+          <a:fillRef idx="3">
+            <a:schemeClr val="accent1"/>
+          </a:fillRef>
+          <a:effectRef idx="2">
+            <a:schemeClr val="accent1"/>
+          </a:effectRef>
+          <a:fontRef idx="minor">
+            <a:schemeClr val="lt1"/>
+          </a:fontRef>
+        </p:style>
+        <p:txBody>
+          <a:bodyPr rtlCol="0" anchor="ctr"/>
+          <a:lstStyle/>
+          <a:p>
+            <a:pPr algn="ctr"/>
+          </a:p>
+        </p:txBody>
+      </p:sp>
+      <p:sp>
+        <p:nvSpPr>
+          <p:cNvPr id="8" name="TextBox 7"/>
           <p:cNvSpPr txBox="1"/>
           <p:nvPr/>
         </p:nvSpPr>
         <p:spPr>
           <a:xfrm>
-            <a:off x="822960" y="1920240"/>
+            <a:off x="822960" y="1965960"/>
             <a:ext cx="4983480" cy="4206240"/>
           </a:xfrm>
           <a:prstGeom prst="rect">
@@ -4967,17 +5122,17 @@
           <a:p>
             <a:pPr>
               <a:spcAft>
-                <a:spcPts val="1000"/>
+                <a:spcPts val="1100"/>
               </a:spcAft>
             </a:pPr>
             <a:r>
               <a:rPr sz="1600" b="1" i="0">
                 <a:solidFill>
-                  <a:srgbClr val="2E3A80"/>
-                </a:solidFill>
-                <a:latin typeface="Montserrat"/>
-              </a:rPr>
-              <a:t>•  </a:t>
+                  <a:srgbClr val="E8801A"/>
+                </a:solidFill>
+                <a:latin typeface="Montserrat"/>
+              </a:rPr>
+              <a:t>▸  </a:t>
             </a:r>
             <a:r>
               <a:rPr sz="1600" b="0" i="0">
@@ -4986,23 +5141,23 @@
                 </a:solidFill>
                 <a:latin typeface="Montserrat"/>
               </a:rPr>
-              <a:t>No es precisa ninguna comunicación</a:t>
+              <a:t>Con el certificado expedido, ya hay servicio</a:t>
             </a:r>
           </a:p>
           <a:p>
             <a:pPr>
               <a:spcAft>
-                <a:spcPts val="1000"/>
+                <a:spcPts val="1100"/>
               </a:spcAft>
             </a:pPr>
             <a:r>
               <a:rPr sz="1600" b="1" i="0">
                 <a:solidFill>
-                  <a:srgbClr val="2E3A80"/>
-                </a:solidFill>
-                <a:latin typeface="Montserrat"/>
-              </a:rPr>
-              <a:t>•  </a:t>
+                  <a:srgbClr val="E8801A"/>
+                </a:solidFill>
+                <a:latin typeface="Montserrat"/>
+              </a:rPr>
+              <a:t>▸  </a:t>
             </a:r>
             <a:r>
               <a:rPr sz="1600" b="0" i="0">
@@ -5011,23 +5166,23 @@
                 </a:solidFill>
                 <a:latin typeface="Montserrat"/>
               </a:rPr>
-              <a:t>El titular conserva el certificado</a:t>
+              <a:t>El titular pide los envases al suministrador</a:t>
             </a:r>
           </a:p>
           <a:p>
             <a:pPr>
               <a:spcAft>
-                <a:spcPts val="1000"/>
+                <a:spcPts val="1100"/>
               </a:spcAft>
             </a:pPr>
             <a:r>
               <a:rPr sz="1600" b="1" i="0">
                 <a:solidFill>
-                  <a:srgbClr val="2E3A80"/>
-                </a:solidFill>
-                <a:latin typeface="Montserrat"/>
-              </a:rPr>
-              <a:t>•  </a:t>
+                  <a:srgbClr val="E8801A"/>
+                </a:solidFill>
+                <a:latin typeface="Montserrat"/>
+              </a:rPr>
+              <a:t>▸  </a:t>
             </a:r>
             <a:r>
               <a:rPr sz="1600" b="0" i="0">
@@ -5036,14 +5191,14 @@
                 </a:solidFill>
                 <a:latin typeface="Montserrat"/>
               </a:rPr>
-              <a:t>A disposición de la Administración si lo pide</a:t>
-            </a:r>
-          </a:p>
-        </p:txBody>
-      </p:sp>
-      <p:sp>
-        <p:nvSpPr>
-          <p:cNvPr id="8" name="imgph" descr="IMGQ:filing documents folder cabinet"/>
+              <a:t>Primero el papel, luego el gas</a:t>
+            </a:r>
+          </a:p>
+        </p:txBody>
+      </p:sp>
+      <p:sp>
+        <p:nvSpPr>
+          <p:cNvPr id="9" name="imgph" descr="IMGQ:propane gas cylinder delivery"/>
           <p:cNvSpPr/>
           <p:nvPr/>
         </p:nvSpPr>
@@ -5089,7 +5244,7 @@
       </p:sp>
       <p:sp>
         <p:nvSpPr>
-          <p:cNvPr id="9" name="TextBox 8"/>
+          <p:cNvPr id="10" name="TextBox 9"/>
           <p:cNvSpPr txBox="1"/>
           <p:nvPr/>
         </p:nvSpPr>
@@ -5129,7 +5284,7 @@
                 </a:solidFill>
                 <a:latin typeface="Montserrat"/>
               </a:rPr>
-              <a:t>filing documents folder cabinet</a:t>
+              <a:t>propane gas cylinder delivery</a:t>
             </a:r>
           </a:p>
         </p:txBody>
@@ -5226,7 +5381,7 @@
                 </a:solidFill>
                 <a:latin typeface="Montserrat"/>
               </a:rPr>
-              <a:t>011 / 015</a:t>
+              <a:t>011 / 016</a:t>
             </a:r>
           </a:p>
         </p:txBody>
@@ -5274,7 +5429,7 @@
         <p:spPr>
           <a:xfrm>
             <a:off x="822960" y="457200"/>
-            <a:ext cx="8229600" cy="365760"/>
+            <a:ext cx="10058400" cy="365760"/>
           </a:xfrm>
           <a:prstGeom prst="rect">
             <a:avLst/>
@@ -5288,13 +5443,13 @@
           <a:lstStyle/>
           <a:p>
             <a:r>
-              <a:rPr sz="1200" b="1" i="0">
-                <a:solidFill>
-                  <a:srgbClr val="64748B"/>
-                </a:solidFill>
-                <a:latin typeface="Montserrat"/>
-              </a:rPr>
-              <a:t>APARTADO 5 · UTILIZACIÓN</a:t>
+              <a:rPr sz="1300" b="1" i="0">
+                <a:solidFill>
+                  <a:srgbClr val="E8801A"/>
+                </a:solidFill>
+                <a:latin typeface="Montserrat"/>
+              </a:rPr>
+              <a:t>APARTADO 4.4 · COMUNICACIÓN</a:t>
             </a:r>
           </a:p>
         </p:txBody>
@@ -5322,26 +5477,70 @@
           <a:lstStyle/>
           <a:p>
             <a:r>
-              <a:rPr sz="2700" b="1" i="0">
+              <a:rPr sz="2800" b="1" i="0">
                 <a:solidFill>
                   <a:srgbClr val="1E2761"/>
                 </a:solidFill>
                 <a:latin typeface="Montserrat"/>
               </a:rPr>
-              <a:t>Presión y bombonas</a:t>
-            </a:r>
-          </a:p>
-        </p:txBody>
-      </p:sp>
-      <p:sp>
-        <p:nvSpPr>
-          <p:cNvPr id="7" name="TextBox 6"/>
+              <a:t>La excepción: no se comunica</a:t>
+            </a:r>
+          </a:p>
+        </p:txBody>
+      </p:sp>
+      <p:sp>
+        <p:nvSpPr>
+          <p:cNvPr id="7" name="Rounded Rectangle 6"/>
+          <p:cNvSpPr/>
+          <p:nvPr/>
+        </p:nvSpPr>
+        <p:spPr>
+          <a:xfrm>
+            <a:off x="868680" y="1627632"/>
+            <a:ext cx="2011680" cy="73152"/>
+          </a:xfrm>
+          <a:prstGeom prst="roundRect">
+            <a:avLst/>
+          </a:prstGeom>
+          <a:solidFill>
+            <a:srgbClr val="E8801A"/>
+          </a:solidFill>
+          <a:ln>
+            <a:noFill/>
+          </a:ln>
+          <a:effectLst/>
+        </p:spPr>
+        <p:style>
+          <a:lnRef idx="1">
+            <a:schemeClr val="accent1"/>
+          </a:lnRef>
+          <a:fillRef idx="3">
+            <a:schemeClr val="accent1"/>
+          </a:fillRef>
+          <a:effectRef idx="2">
+            <a:schemeClr val="accent1"/>
+          </a:effectRef>
+          <a:fontRef idx="minor">
+            <a:schemeClr val="lt1"/>
+          </a:fontRef>
+        </p:style>
+        <p:txBody>
+          <a:bodyPr rtlCol="0" anchor="ctr"/>
+          <a:lstStyle/>
+          <a:p>
+            <a:pPr algn="ctr"/>
+          </a:p>
+        </p:txBody>
+      </p:sp>
+      <p:sp>
+        <p:nvSpPr>
+          <p:cNvPr id="8" name="TextBox 7"/>
           <p:cNvSpPr txBox="1"/>
           <p:nvPr/>
         </p:nvSpPr>
         <p:spPr>
           <a:xfrm>
-            <a:off x="822960" y="1920240"/>
+            <a:off x="822960" y="1965960"/>
             <a:ext cx="4983480" cy="4206240"/>
           </a:xfrm>
           <a:prstGeom prst="rect">
@@ -5357,17 +5556,17 @@
           <a:p>
             <a:pPr>
               <a:spcAft>
-                <a:spcPts val="1000"/>
+                <a:spcPts val="1100"/>
               </a:spcAft>
             </a:pPr>
             <a:r>
               <a:rPr sz="1600" b="1" i="0">
                 <a:solidFill>
-                  <a:srgbClr val="2E3A80"/>
-                </a:solidFill>
-                <a:latin typeface="Montserrat"/>
-              </a:rPr>
-              <a:t>•  </a:t>
+                  <a:srgbClr val="E8801A"/>
+                </a:solidFill>
+                <a:latin typeface="Montserrat"/>
+              </a:rPr>
+              <a:t>▸  </a:t>
             </a:r>
             <a:r>
               <a:rPr sz="1600" b="0" i="0">
@@ -5376,23 +5575,23 @@
                 </a:solidFill>
                 <a:latin typeface="Montserrat"/>
               </a:rPr>
-              <a:t>Presión de funcionamiento: 30 mbar</a:t>
+              <a:t>No es precisa ninguna comunicación</a:t>
             </a:r>
           </a:p>
           <a:p>
             <a:pPr>
               <a:spcAft>
-                <a:spcPts val="1000"/>
+                <a:spcPts val="1100"/>
               </a:spcAft>
             </a:pPr>
             <a:r>
               <a:rPr sz="1600" b="1" i="0">
                 <a:solidFill>
-                  <a:srgbClr val="2E3A80"/>
-                </a:solidFill>
-                <a:latin typeface="Montserrat"/>
-              </a:rPr>
-              <a:t>•  </a:t>
+                  <a:srgbClr val="E8801A"/>
+                </a:solidFill>
+                <a:latin typeface="Montserrat"/>
+              </a:rPr>
+              <a:t>▸  </a:t>
             </a:r>
             <a:r>
               <a:rPr sz="1600" b="0" i="0">
@@ -5401,23 +5600,23 @@
                 </a:solidFill>
                 <a:latin typeface="Montserrat"/>
               </a:rPr>
-              <a:t>Envases siempre sujetos, llenos o vacíos</a:t>
+              <a:t>El titular conserva el certificado</a:t>
             </a:r>
           </a:p>
           <a:p>
             <a:pPr>
               <a:spcAft>
-                <a:spcPts val="1000"/>
+                <a:spcPts val="1100"/>
               </a:spcAft>
             </a:pPr>
             <a:r>
               <a:rPr sz="1600" b="1" i="0">
                 <a:solidFill>
-                  <a:srgbClr val="2E3A80"/>
-                </a:solidFill>
-                <a:latin typeface="Montserrat"/>
-              </a:rPr>
-              <a:t>•  </a:t>
+                  <a:srgbClr val="E8801A"/>
+                </a:solidFill>
+                <a:latin typeface="Montserrat"/>
+              </a:rPr>
+              <a:t>▸  </a:t>
             </a:r>
             <a:r>
               <a:rPr sz="1600" b="0" i="0">
@@ -5426,39 +5625,14 @@
                 </a:solidFill>
                 <a:latin typeface="Montserrat"/>
               </a:rPr>
-              <a:t>Dentro o fuera, en uso y en marcha</a:t>
-            </a:r>
-          </a:p>
-          <a:p>
-            <a:pPr>
-              <a:spcAft>
-                <a:spcPts val="1000"/>
-              </a:spcAft>
-            </a:pPr>
-            <a:r>
-              <a:rPr sz="1600" b="1" i="0">
-                <a:solidFill>
-                  <a:srgbClr val="2E3A80"/>
-                </a:solidFill>
-                <a:latin typeface="Montserrat"/>
-              </a:rPr>
-              <a:t>•  </a:t>
-            </a:r>
-            <a:r>
-              <a:rPr sz="1600" b="0" i="0">
-                <a:solidFill>
-                  <a:srgbClr val="1B2330"/>
-                </a:solidFill>
-                <a:latin typeface="Montserrat"/>
-              </a:rPr>
-              <a:t>Desconectar en estacionamiento prolongado</a:t>
-            </a:r>
-          </a:p>
-        </p:txBody>
-      </p:sp>
-      <p:sp>
-        <p:nvSpPr>
-          <p:cNvPr id="8" name="imgph" descr="IMGQ:propane gas cylinder strap secured"/>
+              <a:t>A disposición de la Administración si lo pide</a:t>
+            </a:r>
+          </a:p>
+        </p:txBody>
+      </p:sp>
+      <p:sp>
+        <p:nvSpPr>
+          <p:cNvPr id="9" name="imgph" descr="IMGQ:filing documents folder cabinet"/>
           <p:cNvSpPr/>
           <p:nvPr/>
         </p:nvSpPr>
@@ -5504,7 +5678,7 @@
       </p:sp>
       <p:sp>
         <p:nvSpPr>
-          <p:cNvPr id="9" name="TextBox 8"/>
+          <p:cNvPr id="10" name="TextBox 9"/>
           <p:cNvSpPr txBox="1"/>
           <p:nvPr/>
         </p:nvSpPr>
@@ -5544,7 +5718,7 @@
                 </a:solidFill>
                 <a:latin typeface="Montserrat"/>
               </a:rPr>
-              <a:t>propane gas cylinder strap secured</a:t>
+              <a:t>filing documents folder cabinet</a:t>
             </a:r>
           </a:p>
         </p:txBody>
@@ -5641,7 +5815,7 @@
                 </a:solidFill>
                 <a:latin typeface="Montserrat"/>
               </a:rPr>
-              <a:t>012 / 015</a:t>
+              <a:t>012 / 016</a:t>
             </a:r>
           </a:p>
         </p:txBody>
@@ -5689,7 +5863,7 @@
         <p:spPr>
           <a:xfrm>
             <a:off x="822960" y="457200"/>
-            <a:ext cx="8229600" cy="365760"/>
+            <a:ext cx="10058400" cy="365760"/>
           </a:xfrm>
           <a:prstGeom prst="rect">
             <a:avLst/>
@@ -5703,13 +5877,13 @@
           <a:lstStyle/>
           <a:p>
             <a:r>
-              <a:rPr sz="1200" b="1" i="0">
-                <a:solidFill>
-                  <a:srgbClr val="64748B"/>
-                </a:solidFill>
-                <a:latin typeface="Montserrat"/>
-              </a:rPr>
-              <a:t>APARTADO 5 · PROHIBICIÓN</a:t>
+              <a:rPr sz="1300" b="1" i="0">
+                <a:solidFill>
+                  <a:srgbClr val="E8801A"/>
+                </a:solidFill>
+                <a:latin typeface="Montserrat"/>
+              </a:rPr>
+              <a:t>APARTADO 5 · UTILIZACIÓN</a:t>
             </a:r>
           </a:p>
         </p:txBody>
@@ -5737,26 +5911,70 @@
           <a:lstStyle/>
           <a:p>
             <a:r>
-              <a:rPr sz="2700" b="1" i="0">
+              <a:rPr sz="2800" b="1" i="0">
                 <a:solidFill>
                   <a:srgbClr val="1E2761"/>
                 </a:solidFill>
                 <a:latin typeface="Montserrat"/>
               </a:rPr>
-              <a:t>La tubería no es un cable</a:t>
-            </a:r>
-          </a:p>
-        </p:txBody>
-      </p:sp>
-      <p:sp>
-        <p:nvSpPr>
-          <p:cNvPr id="7" name="TextBox 6"/>
+              <a:t>Presión y bombonas</a:t>
+            </a:r>
+          </a:p>
+        </p:txBody>
+      </p:sp>
+      <p:sp>
+        <p:nvSpPr>
+          <p:cNvPr id="7" name="Rounded Rectangle 6"/>
+          <p:cNvSpPr/>
+          <p:nvPr/>
+        </p:nvSpPr>
+        <p:spPr>
+          <a:xfrm>
+            <a:off x="868680" y="1627632"/>
+            <a:ext cx="2011680" cy="73152"/>
+          </a:xfrm>
+          <a:prstGeom prst="roundRect">
+            <a:avLst/>
+          </a:prstGeom>
+          <a:solidFill>
+            <a:srgbClr val="E8801A"/>
+          </a:solidFill>
+          <a:ln>
+            <a:noFill/>
+          </a:ln>
+          <a:effectLst/>
+        </p:spPr>
+        <p:style>
+          <a:lnRef idx="1">
+            <a:schemeClr val="accent1"/>
+          </a:lnRef>
+          <a:fillRef idx="3">
+            <a:schemeClr val="accent1"/>
+          </a:fillRef>
+          <a:effectRef idx="2">
+            <a:schemeClr val="accent1"/>
+          </a:effectRef>
+          <a:fontRef idx="minor">
+            <a:schemeClr val="lt1"/>
+          </a:fontRef>
+        </p:style>
+        <p:txBody>
+          <a:bodyPr rtlCol="0" anchor="ctr"/>
+          <a:lstStyle/>
+          <a:p>
+            <a:pPr algn="ctr"/>
+          </a:p>
+        </p:txBody>
+      </p:sp>
+      <p:sp>
+        <p:nvSpPr>
+          <p:cNvPr id="8" name="TextBox 7"/>
           <p:cNvSpPr txBox="1"/>
           <p:nvPr/>
         </p:nvSpPr>
         <p:spPr>
           <a:xfrm>
-            <a:off x="822960" y="1920240"/>
+            <a:off x="822960" y="1965960"/>
             <a:ext cx="4983480" cy="4206240"/>
           </a:xfrm>
           <a:prstGeom prst="rect">
@@ -5772,17 +5990,17 @@
           <a:p>
             <a:pPr>
               <a:spcAft>
-                <a:spcPts val="1000"/>
+                <a:spcPts val="1100"/>
               </a:spcAft>
             </a:pPr>
             <a:r>
               <a:rPr sz="1600" b="1" i="0">
                 <a:solidFill>
-                  <a:srgbClr val="2E3A80"/>
-                </a:solidFill>
-                <a:latin typeface="Montserrat"/>
-              </a:rPr>
-              <a:t>•  </a:t>
+                  <a:srgbClr val="E8801A"/>
+                </a:solidFill>
+                <a:latin typeface="Montserrat"/>
+              </a:rPr>
+              <a:t>▸  </a:t>
             </a:r>
             <a:r>
               <a:rPr sz="1600" b="0" i="0">
@@ -5791,23 +6009,23 @@
                 </a:solidFill>
                 <a:latin typeface="Montserrat"/>
               </a:rPr>
-              <a:t>Prohibido usarla como toma de tierra</a:t>
+              <a:t>Presión de funcionamiento: 30 mbar</a:t>
             </a:r>
           </a:p>
           <a:p>
             <a:pPr>
               <a:spcAft>
-                <a:spcPts val="1000"/>
+                <a:spcPts val="1100"/>
               </a:spcAft>
             </a:pPr>
             <a:r>
               <a:rPr sz="1600" b="1" i="0">
                 <a:solidFill>
-                  <a:srgbClr val="2E3A80"/>
-                </a:solidFill>
-                <a:latin typeface="Montserrat"/>
-              </a:rPr>
-              <a:t>•  </a:t>
+                  <a:srgbClr val="E8801A"/>
+                </a:solidFill>
+                <a:latin typeface="Montserrat"/>
+              </a:rPr>
+              <a:t>▸  </a:t>
             </a:r>
             <a:r>
               <a:rPr sz="1600" b="0" i="0">
@@ -5816,23 +6034,23 @@
                 </a:solidFill>
                 <a:latin typeface="Montserrat"/>
               </a:rPr>
-              <a:t>Ni para instalaciones eléctricas</a:t>
+              <a:t>Envases siempre sujetos, llenos o vacíos</a:t>
             </a:r>
           </a:p>
           <a:p>
             <a:pPr>
               <a:spcAft>
-                <a:spcPts val="1000"/>
+                <a:spcPts val="1100"/>
               </a:spcAft>
             </a:pPr>
             <a:r>
               <a:rPr sz="1600" b="1" i="0">
                 <a:solidFill>
-                  <a:srgbClr val="2E3A80"/>
-                </a:solidFill>
-                <a:latin typeface="Montserrat"/>
-              </a:rPr>
-              <a:t>•  </a:t>
+                  <a:srgbClr val="E8801A"/>
+                </a:solidFill>
+                <a:latin typeface="Montserrat"/>
+              </a:rPr>
+              <a:t>▸  </a:t>
             </a:r>
             <a:r>
               <a:rPr sz="1600" b="0" i="0">
@@ -5841,14 +6059,39 @@
                 </a:solidFill>
                 <a:latin typeface="Montserrat"/>
               </a:rPr>
-              <a:t>Ni para instalaciones radioeléctricas</a:t>
-            </a:r>
-          </a:p>
-        </p:txBody>
-      </p:sp>
-      <p:sp>
-        <p:nvSpPr>
-          <p:cNvPr id="8" name="imgph" descr="IMGQ:electrical grounding wire clamp"/>
+              <a:t>Dentro o fuera, en uso y en marcha</a:t>
+            </a:r>
+          </a:p>
+          <a:p>
+            <a:pPr>
+              <a:spcAft>
+                <a:spcPts val="1100"/>
+              </a:spcAft>
+            </a:pPr>
+            <a:r>
+              <a:rPr sz="1600" b="1" i="0">
+                <a:solidFill>
+                  <a:srgbClr val="E8801A"/>
+                </a:solidFill>
+                <a:latin typeface="Montserrat"/>
+              </a:rPr>
+              <a:t>▸  </a:t>
+            </a:r>
+            <a:r>
+              <a:rPr sz="1600" b="0" i="0">
+                <a:solidFill>
+                  <a:srgbClr val="1B2330"/>
+                </a:solidFill>
+                <a:latin typeface="Montserrat"/>
+              </a:rPr>
+              <a:t>Desconectar en estacionamiento prolongado</a:t>
+            </a:r>
+          </a:p>
+        </p:txBody>
+      </p:sp>
+      <p:sp>
+        <p:nvSpPr>
+          <p:cNvPr id="9" name="imgph" descr="IMGQ:propane gas cylinder strap secured"/>
           <p:cNvSpPr/>
           <p:nvPr/>
         </p:nvSpPr>
@@ -5894,7 +6137,7 @@
       </p:sp>
       <p:sp>
         <p:nvSpPr>
-          <p:cNvPr id="9" name="TextBox 8"/>
+          <p:cNvPr id="10" name="TextBox 9"/>
           <p:cNvSpPr txBox="1"/>
           <p:nvPr/>
         </p:nvSpPr>
@@ -5934,7 +6177,7 @@
                 </a:solidFill>
                 <a:latin typeface="Montserrat"/>
               </a:rPr>
-              <a:t>electrical grounding wire clamp</a:t>
+              <a:t>propane gas cylinder strap secured</a:t>
             </a:r>
           </a:p>
         </p:txBody>
@@ -6031,7 +6274,7 @@
                 </a:solidFill>
                 <a:latin typeface="Montserrat"/>
               </a:rPr>
-              <a:t>013 / 015</a:t>
+              <a:t>013 / 016</a:t>
             </a:r>
           </a:p>
         </p:txBody>
@@ -6079,7 +6322,7 @@
         <p:spPr>
           <a:xfrm>
             <a:off x="822960" y="457200"/>
-            <a:ext cx="8229600" cy="365760"/>
+            <a:ext cx="10058400" cy="365760"/>
           </a:xfrm>
           <a:prstGeom prst="rect">
             <a:avLst/>
@@ -6093,13 +6336,13 @@
           <a:lstStyle/>
           <a:p>
             <a:r>
-              <a:rPr sz="1200" b="1" i="0">
-                <a:solidFill>
-                  <a:srgbClr val="64748B"/>
-                </a:solidFill>
-                <a:latin typeface="Montserrat"/>
-              </a:rPr>
-              <a:t>APARTADO 6 · MANTENIMIENTO</a:t>
+              <a:rPr sz="1300" b="1" i="0">
+                <a:solidFill>
+                  <a:srgbClr val="E8801A"/>
+                </a:solidFill>
+                <a:latin typeface="Montserrat"/>
+              </a:rPr>
+              <a:t>APARTADO 5 · PROHIBICIÓN</a:t>
             </a:r>
           </a:p>
         </p:txBody>
@@ -6127,26 +6370,70 @@
           <a:lstStyle/>
           <a:p>
             <a:r>
-              <a:rPr sz="2700" b="1" i="0">
+              <a:rPr sz="2800" b="1" i="0">
                 <a:solidFill>
                   <a:srgbClr val="1E2761"/>
                 </a:solidFill>
                 <a:latin typeface="Montserrat"/>
               </a:rPr>
-              <a:t>Revisión cada 4 años</a:t>
-            </a:r>
-          </a:p>
-        </p:txBody>
-      </p:sp>
-      <p:sp>
-        <p:nvSpPr>
-          <p:cNvPr id="7" name="TextBox 6"/>
+              <a:t>La tubería no es un cable</a:t>
+            </a:r>
+          </a:p>
+        </p:txBody>
+      </p:sp>
+      <p:sp>
+        <p:nvSpPr>
+          <p:cNvPr id="7" name="Rounded Rectangle 6"/>
+          <p:cNvSpPr/>
+          <p:nvPr/>
+        </p:nvSpPr>
+        <p:spPr>
+          <a:xfrm>
+            <a:off x="868680" y="1627632"/>
+            <a:ext cx="2011680" cy="73152"/>
+          </a:xfrm>
+          <a:prstGeom prst="roundRect">
+            <a:avLst/>
+          </a:prstGeom>
+          <a:solidFill>
+            <a:srgbClr val="E8801A"/>
+          </a:solidFill>
+          <a:ln>
+            <a:noFill/>
+          </a:ln>
+          <a:effectLst/>
+        </p:spPr>
+        <p:style>
+          <a:lnRef idx="1">
+            <a:schemeClr val="accent1"/>
+          </a:lnRef>
+          <a:fillRef idx="3">
+            <a:schemeClr val="accent1"/>
+          </a:fillRef>
+          <a:effectRef idx="2">
+            <a:schemeClr val="accent1"/>
+          </a:effectRef>
+          <a:fontRef idx="minor">
+            <a:schemeClr val="lt1"/>
+          </a:fontRef>
+        </p:style>
+        <p:txBody>
+          <a:bodyPr rtlCol="0" anchor="ctr"/>
+          <a:lstStyle/>
+          <a:p>
+            <a:pPr algn="ctr"/>
+          </a:p>
+        </p:txBody>
+      </p:sp>
+      <p:sp>
+        <p:nvSpPr>
+          <p:cNvPr id="8" name="TextBox 7"/>
           <p:cNvSpPr txBox="1"/>
           <p:nvPr/>
         </p:nvSpPr>
         <p:spPr>
           <a:xfrm>
-            <a:off x="822960" y="1920240"/>
+            <a:off x="822960" y="1965960"/>
             <a:ext cx="4983480" cy="4206240"/>
           </a:xfrm>
           <a:prstGeom prst="rect">
@@ -6162,17 +6449,17 @@
           <a:p>
             <a:pPr>
               <a:spcAft>
-                <a:spcPts val="1000"/>
+                <a:spcPts val="1100"/>
               </a:spcAft>
             </a:pPr>
             <a:r>
               <a:rPr sz="1600" b="1" i="0">
                 <a:solidFill>
-                  <a:srgbClr val="2E3A80"/>
-                </a:solidFill>
-                <a:latin typeface="Montserrat"/>
-              </a:rPr>
-              <a:t>•  </a:t>
+                  <a:srgbClr val="E8801A"/>
+                </a:solidFill>
+                <a:latin typeface="Montserrat"/>
+              </a:rPr>
+              <a:t>▸  </a:t>
             </a:r>
             <a:r>
               <a:rPr sz="1600" b="0" i="0">
@@ -6181,23 +6468,23 @@
                 </a:solidFill>
                 <a:latin typeface="Montserrat"/>
               </a:rPr>
-              <a:t>El titular es el responsable</a:t>
+              <a:t>Prohibido usarla como toma de tierra</a:t>
             </a:r>
           </a:p>
           <a:p>
             <a:pPr>
               <a:spcAft>
-                <a:spcPts val="1000"/>
+                <a:spcPts val="1100"/>
               </a:spcAft>
             </a:pPr>
             <a:r>
               <a:rPr sz="1600" b="1" i="0">
                 <a:solidFill>
-                  <a:srgbClr val="2E3A80"/>
-                </a:solidFill>
-                <a:latin typeface="Montserrat"/>
-              </a:rPr>
-              <a:t>•  </a:t>
+                  <a:srgbClr val="E8801A"/>
+                </a:solidFill>
+                <a:latin typeface="Montserrat"/>
+              </a:rPr>
+              <a:t>▸  </a:t>
             </a:r>
             <a:r>
               <a:rPr sz="1600" b="0" i="0">
@@ -6206,23 +6493,23 @@
                 </a:solidFill>
                 <a:latin typeface="Montserrat"/>
               </a:rPr>
-              <a:t>Encarga la revisión a una instaladora</a:t>
+              <a:t>Ni para instalaciones eléctricas</a:t>
             </a:r>
           </a:p>
           <a:p>
             <a:pPr>
               <a:spcAft>
-                <a:spcPts val="1000"/>
+                <a:spcPts val="1100"/>
               </a:spcAft>
             </a:pPr>
             <a:r>
               <a:rPr sz="1600" b="1" i="0">
                 <a:solidFill>
-                  <a:srgbClr val="2E3A80"/>
-                </a:solidFill>
-                <a:latin typeface="Montserrat"/>
-              </a:rPr>
-              <a:t>•  </a:t>
+                  <a:srgbClr val="E8801A"/>
+                </a:solidFill>
+                <a:latin typeface="Montserrat"/>
+              </a:rPr>
+              <a:t>▸  </a:t>
             </a:r>
             <a:r>
               <a:rPr sz="1600" b="0" i="0">
@@ -6231,39 +6518,14 @@
                 </a:solidFill>
                 <a:latin typeface="Montserrat"/>
               </a:rPr>
-              <a:t>Cada 4 años · es revisión, no inspección</a:t>
-            </a:r>
-          </a:p>
-          <a:p>
-            <a:pPr>
-              <a:spcAft>
-                <a:spcPts val="1000"/>
-              </a:spcAft>
-            </a:pPr>
-            <a:r>
-              <a:rPr sz="1600" b="1" i="0">
-                <a:solidFill>
-                  <a:srgbClr val="2E3A80"/>
-                </a:solidFill>
-                <a:latin typeface="Montserrat"/>
-              </a:rPr>
-              <a:t>•  </a:t>
-            </a:r>
-            <a:r>
-              <a:rPr sz="1600" b="0" i="0">
-                <a:solidFill>
-                  <a:srgbClr val="1B2330"/>
-                </a:solidFill>
-                <a:latin typeface="Montserrat"/>
-              </a:rPr>
-              <a:t>Se documenta con el modelo IRV-2</a:t>
-            </a:r>
-          </a:p>
-        </p:txBody>
-      </p:sp>
-      <p:sp>
-        <p:nvSpPr>
-          <p:cNvPr id="8" name="imgph" descr="IMGQ:technician checking gas installation caravan"/>
+              <a:t>Ni para instalaciones radioeléctricas</a:t>
+            </a:r>
+          </a:p>
+        </p:txBody>
+      </p:sp>
+      <p:sp>
+        <p:nvSpPr>
+          <p:cNvPr id="9" name="imgph" descr="IMGQ:electrical grounding wire clamp"/>
           <p:cNvSpPr/>
           <p:nvPr/>
         </p:nvSpPr>
@@ -6309,7 +6571,7 @@
       </p:sp>
       <p:sp>
         <p:nvSpPr>
-          <p:cNvPr id="9" name="TextBox 8"/>
+          <p:cNvPr id="10" name="TextBox 9"/>
           <p:cNvSpPr txBox="1"/>
           <p:nvPr/>
         </p:nvSpPr>
@@ -6349,7 +6611,7 @@
                 </a:solidFill>
                 <a:latin typeface="Montserrat"/>
               </a:rPr>
-              <a:t>technician checking gas installation caravan</a:t>
+              <a:t>electrical grounding wire clamp</a:t>
             </a:r>
           </a:p>
         </p:txBody>
@@ -6446,7 +6708,7 @@
                 </a:solidFill>
                 <a:latin typeface="Montserrat"/>
               </a:rPr>
-              <a:t>014 / 015</a:t>
+              <a:t>014 / 016</a:t>
             </a:r>
           </a:p>
         </p:txBody>
@@ -6494,7 +6756,7 @@
         <p:spPr>
           <a:xfrm>
             <a:off x="822960" y="457200"/>
-            <a:ext cx="8229600" cy="365760"/>
+            <a:ext cx="10058400" cy="365760"/>
           </a:xfrm>
           <a:prstGeom prst="rect">
             <a:avLst/>
@@ -6508,13 +6770,13 @@
           <a:lstStyle/>
           <a:p>
             <a:r>
-              <a:rPr sz="1200" b="1" i="0">
-                <a:solidFill>
-                  <a:srgbClr val="64748B"/>
-                </a:solidFill>
-                <a:latin typeface="Montserrat"/>
-              </a:rPr>
-              <a:t>ANEXO 1 · MODELOS IRV</a:t>
+              <a:rPr sz="1300" b="1" i="0">
+                <a:solidFill>
+                  <a:srgbClr val="E8801A"/>
+                </a:solidFill>
+                <a:latin typeface="Montserrat"/>
+              </a:rPr>
+              <a:t>APARTADO 6 · MANTENIMIENTO</a:t>
             </a:r>
           </a:p>
         </p:txBody>
@@ -6542,26 +6804,70 @@
           <a:lstStyle/>
           <a:p>
             <a:r>
-              <a:rPr sz="2700" b="1" i="0">
+              <a:rPr sz="2800" b="1" i="0">
                 <a:solidFill>
                   <a:srgbClr val="1E2761"/>
                 </a:solidFill>
                 <a:latin typeface="Montserrat"/>
               </a:rPr>
-              <a:t>Los dos impresos oficiales</a:t>
-            </a:r>
-          </a:p>
-        </p:txBody>
-      </p:sp>
-      <p:sp>
-        <p:nvSpPr>
-          <p:cNvPr id="7" name="TextBox 6"/>
+              <a:t>Revisión cada 4 años</a:t>
+            </a:r>
+          </a:p>
+        </p:txBody>
+      </p:sp>
+      <p:sp>
+        <p:nvSpPr>
+          <p:cNvPr id="7" name="Rounded Rectangle 6"/>
+          <p:cNvSpPr/>
+          <p:nvPr/>
+        </p:nvSpPr>
+        <p:spPr>
+          <a:xfrm>
+            <a:off x="868680" y="1627632"/>
+            <a:ext cx="2011680" cy="73152"/>
+          </a:xfrm>
+          <a:prstGeom prst="roundRect">
+            <a:avLst/>
+          </a:prstGeom>
+          <a:solidFill>
+            <a:srgbClr val="E8801A"/>
+          </a:solidFill>
+          <a:ln>
+            <a:noFill/>
+          </a:ln>
+          <a:effectLst/>
+        </p:spPr>
+        <p:style>
+          <a:lnRef idx="1">
+            <a:schemeClr val="accent1"/>
+          </a:lnRef>
+          <a:fillRef idx="3">
+            <a:schemeClr val="accent1"/>
+          </a:fillRef>
+          <a:effectRef idx="2">
+            <a:schemeClr val="accent1"/>
+          </a:effectRef>
+          <a:fontRef idx="minor">
+            <a:schemeClr val="lt1"/>
+          </a:fontRef>
+        </p:style>
+        <p:txBody>
+          <a:bodyPr rtlCol="0" anchor="ctr"/>
+          <a:lstStyle/>
+          <a:p>
+            <a:pPr algn="ctr"/>
+          </a:p>
+        </p:txBody>
+      </p:sp>
+      <p:sp>
+        <p:nvSpPr>
+          <p:cNvPr id="8" name="TextBox 7"/>
           <p:cNvSpPr txBox="1"/>
           <p:nvPr/>
         </p:nvSpPr>
         <p:spPr>
           <a:xfrm>
-            <a:off x="822960" y="1920240"/>
+            <a:off x="822960" y="1965960"/>
             <a:ext cx="4983480" cy="4206240"/>
           </a:xfrm>
           <a:prstGeom prst="rect">
@@ -6577,17 +6883,17 @@
           <a:p>
             <a:pPr>
               <a:spcAft>
-                <a:spcPts val="1000"/>
+                <a:spcPts val="1100"/>
               </a:spcAft>
             </a:pPr>
             <a:r>
               <a:rPr sz="1600" b="1" i="0">
                 <a:solidFill>
-                  <a:srgbClr val="2E3A80"/>
-                </a:solidFill>
-                <a:latin typeface="Montserrat"/>
-              </a:rPr>
-              <a:t>•  </a:t>
+                  <a:srgbClr val="E8801A"/>
+                </a:solidFill>
+                <a:latin typeface="Montserrat"/>
+              </a:rPr>
+              <a:t>▸  </a:t>
             </a:r>
             <a:r>
               <a:rPr sz="1600" b="0" i="0">
@@ -6596,23 +6902,23 @@
                 </a:solidFill>
                 <a:latin typeface="Montserrat"/>
               </a:rPr>
-              <a:t>IRV-1: certificado de instalación</a:t>
+              <a:t>El titular es el responsable</a:t>
             </a:r>
           </a:p>
           <a:p>
             <a:pPr>
               <a:spcAft>
-                <a:spcPts val="1000"/>
+                <a:spcPts val="1100"/>
               </a:spcAft>
             </a:pPr>
             <a:r>
               <a:rPr sz="1600" b="1" i="0">
                 <a:solidFill>
-                  <a:srgbClr val="2E3A80"/>
-                </a:solidFill>
-                <a:latin typeface="Montserrat"/>
-              </a:rPr>
-              <a:t>•  </a:t>
+                  <a:srgbClr val="E8801A"/>
+                </a:solidFill>
+                <a:latin typeface="Montserrat"/>
+              </a:rPr>
+              <a:t>▸  </a:t>
             </a:r>
             <a:r>
               <a:rPr sz="1600" b="0" i="0">
@@ -6621,23 +6927,23 @@
                 </a:solidFill>
                 <a:latin typeface="Montserrat"/>
               </a:rPr>
-              <a:t>IRV-2: certificado de revisión periódica</a:t>
+              <a:t>Encarga la revisión a una instaladora</a:t>
             </a:r>
           </a:p>
           <a:p>
             <a:pPr>
               <a:spcAft>
-                <a:spcPts val="1000"/>
+                <a:spcPts val="1100"/>
               </a:spcAft>
             </a:pPr>
             <a:r>
               <a:rPr sz="1600" b="1" i="0">
                 <a:solidFill>
-                  <a:srgbClr val="2E3A80"/>
-                </a:solidFill>
-                <a:latin typeface="Montserrat"/>
-              </a:rPr>
-              <a:t>•  </a:t>
+                  <a:srgbClr val="E8801A"/>
+                </a:solidFill>
+                <a:latin typeface="Montserrat"/>
+              </a:rPr>
+              <a:t>▸  </a:t>
             </a:r>
             <a:r>
               <a:rPr sz="1600" b="0" i="0">
@@ -6646,23 +6952,23 @@
                 </a:solidFill>
                 <a:latin typeface="Montserrat"/>
               </a:rPr>
-              <a:t>Modelos normalizados en el anexo 1</a:t>
+              <a:t>Cada 4 años · es revisión, no inspección</a:t>
             </a:r>
           </a:p>
           <a:p>
             <a:pPr>
               <a:spcAft>
-                <a:spcPts val="1000"/>
+                <a:spcPts val="1100"/>
               </a:spcAft>
             </a:pPr>
             <a:r>
               <a:rPr sz="1600" b="1" i="0">
                 <a:solidFill>
-                  <a:srgbClr val="2E3A80"/>
-                </a:solidFill>
-                <a:latin typeface="Montserrat"/>
-              </a:rPr>
-              <a:t>•  </a:t>
+                  <a:srgbClr val="E8801A"/>
+                </a:solidFill>
+                <a:latin typeface="Montserrat"/>
+              </a:rPr>
+              <a:t>▸  </a:t>
             </a:r>
             <a:r>
               <a:rPr sz="1600" b="0" i="0">
@@ -6671,14 +6977,14 @@
                 </a:solidFill>
                 <a:latin typeface="Montserrat"/>
               </a:rPr>
-              <a:t>Si ves 'IRV', piensa en caravana</a:t>
-            </a:r>
-          </a:p>
-        </p:txBody>
-      </p:sp>
-      <p:sp>
-        <p:nvSpPr>
-          <p:cNvPr id="8" name="imgph" descr="IMGQ:official gas installation certificate form"/>
+              <a:t>Se documenta con el modelo IRV-2</a:t>
+            </a:r>
+          </a:p>
+        </p:txBody>
+      </p:sp>
+      <p:sp>
+        <p:nvSpPr>
+          <p:cNvPr id="9" name="imgph" descr="IMGQ:technician checking gas installation caravan"/>
           <p:cNvSpPr/>
           <p:nvPr/>
         </p:nvSpPr>
@@ -6724,7 +7030,7 @@
       </p:sp>
       <p:sp>
         <p:nvSpPr>
-          <p:cNvPr id="9" name="TextBox 8"/>
+          <p:cNvPr id="10" name="TextBox 9"/>
           <p:cNvSpPr txBox="1"/>
           <p:nvPr/>
         </p:nvSpPr>
@@ -6764,7 +7070,7 @@
                 </a:solidFill>
                 <a:latin typeface="Montserrat"/>
               </a:rPr>
-              <a:t>official gas installation certificate form</a:t>
+              <a:t>technician checking gas installation caravan</a:t>
             </a:r>
           </a:p>
         </p:txBody>
@@ -6802,6 +7108,465 @@
             <a:avLst/>
           </a:prstGeom>
           <a:solidFill>
+            <a:srgbClr val="FFFFFF"/>
+          </a:solidFill>
+          <a:ln>
+            <a:noFill/>
+          </a:ln>
+          <a:effectLst/>
+        </p:spPr>
+        <p:style>
+          <a:lnRef idx="1">
+            <a:schemeClr val="accent1"/>
+          </a:lnRef>
+          <a:fillRef idx="3">
+            <a:schemeClr val="accent1"/>
+          </a:fillRef>
+          <a:effectRef idx="2">
+            <a:schemeClr val="accent1"/>
+          </a:effectRef>
+          <a:fontRef idx="minor">
+            <a:schemeClr val="lt1"/>
+          </a:fontRef>
+        </p:style>
+        <p:txBody>
+          <a:bodyPr rtlCol="0" anchor="ctr"/>
+          <a:lstStyle/>
+          <a:p>
+            <a:pPr algn="ctr"/>
+          </a:p>
+        </p:txBody>
+      </p:sp>
+      <p:sp>
+        <p:nvSpPr>
+          <p:cNvPr id="3" name="TextBox 2"/>
+          <p:cNvSpPr txBox="1"/>
+          <p:nvPr/>
+        </p:nvSpPr>
+        <p:spPr>
+          <a:xfrm>
+            <a:off x="10607040" y="320040"/>
+            <a:ext cx="1371600" cy="365760"/>
+          </a:xfrm>
+          <a:prstGeom prst="rect">
+            <a:avLst/>
+          </a:prstGeom>
+          <a:noFill/>
+        </p:spPr>
+        <p:txBody>
+          <a:bodyPr wrap="square">
+            <a:spAutoFit/>
+          </a:bodyPr>
+          <a:lstStyle/>
+          <a:p>
+            <a:pPr algn="r"/>
+            <a:r>
+              <a:rPr sz="1000" b="1" i="0">
+                <a:solidFill>
+                  <a:srgbClr val="64748B"/>
+                </a:solidFill>
+                <a:latin typeface="Montserrat"/>
+              </a:rPr>
+              <a:t>015 / 016</a:t>
+            </a:r>
+          </a:p>
+        </p:txBody>
+      </p:sp>
+      <p:sp>
+        <p:nvSpPr>
+          <p:cNvPr id="4" name="TextBox 3"/>
+          <p:cNvSpPr txBox="1"/>
+          <p:nvPr/>
+        </p:nvSpPr>
+        <p:spPr>
+          <a:xfrm>
+            <a:off x="457200" y="6419088"/>
+            <a:ext cx="8229600" cy="365760"/>
+          </a:xfrm>
+          <a:prstGeom prst="rect">
+            <a:avLst/>
+          </a:prstGeom>
+          <a:noFill/>
+        </p:spPr>
+        <p:txBody>
+          <a:bodyPr wrap="square">
+            <a:spAutoFit/>
+          </a:bodyPr>
+          <a:lstStyle/>
+          <a:p>
+            <a:r>
+              <a:rPr sz="900" b="0" i="0">
+                <a:solidFill>
+                  <a:srgbClr val="64748B"/>
+                </a:solidFill>
+                <a:latin typeface="Montserrat"/>
+              </a:rPr>
+              <a:t>Curso Gas B · Tema 07 · ITC-ICG 10 · Caravanas</a:t>
+            </a:r>
+          </a:p>
+        </p:txBody>
+      </p:sp>
+      <p:sp>
+        <p:nvSpPr>
+          <p:cNvPr id="5" name="TextBox 4"/>
+          <p:cNvSpPr txBox="1"/>
+          <p:nvPr/>
+        </p:nvSpPr>
+        <p:spPr>
+          <a:xfrm>
+            <a:off x="822960" y="457200"/>
+            <a:ext cx="10058400" cy="365760"/>
+          </a:xfrm>
+          <a:prstGeom prst="rect">
+            <a:avLst/>
+          </a:prstGeom>
+          <a:noFill/>
+        </p:spPr>
+        <p:txBody>
+          <a:bodyPr wrap="square">
+            <a:spAutoFit/>
+          </a:bodyPr>
+          <a:lstStyle/>
+          <a:p>
+            <a:r>
+              <a:rPr sz="1300" b="1" i="0">
+                <a:solidFill>
+                  <a:srgbClr val="E8801A"/>
+                </a:solidFill>
+                <a:latin typeface="Montserrat"/>
+              </a:rPr>
+              <a:t>ANEXO 1 · MODELOS IRV</a:t>
+            </a:r>
+          </a:p>
+        </p:txBody>
+      </p:sp>
+      <p:sp>
+        <p:nvSpPr>
+          <p:cNvPr id="6" name="TextBox 5"/>
+          <p:cNvSpPr txBox="1"/>
+          <p:nvPr/>
+        </p:nvSpPr>
+        <p:spPr>
+          <a:xfrm>
+            <a:off x="822960" y="868680"/>
+            <a:ext cx="10515600" cy="914400"/>
+          </a:xfrm>
+          <a:prstGeom prst="rect">
+            <a:avLst/>
+          </a:prstGeom>
+          <a:noFill/>
+        </p:spPr>
+        <p:txBody>
+          <a:bodyPr wrap="square">
+            <a:spAutoFit/>
+          </a:bodyPr>
+          <a:lstStyle/>
+          <a:p>
+            <a:r>
+              <a:rPr sz="2800" b="1" i="0">
+                <a:solidFill>
+                  <a:srgbClr val="1E2761"/>
+                </a:solidFill>
+                <a:latin typeface="Montserrat"/>
+              </a:rPr>
+              <a:t>Los dos impresos oficiales</a:t>
+            </a:r>
+          </a:p>
+        </p:txBody>
+      </p:sp>
+      <p:sp>
+        <p:nvSpPr>
+          <p:cNvPr id="7" name="Rounded Rectangle 6"/>
+          <p:cNvSpPr/>
+          <p:nvPr/>
+        </p:nvSpPr>
+        <p:spPr>
+          <a:xfrm>
+            <a:off x="868680" y="1627632"/>
+            <a:ext cx="2011680" cy="73152"/>
+          </a:xfrm>
+          <a:prstGeom prst="roundRect">
+            <a:avLst/>
+          </a:prstGeom>
+          <a:solidFill>
+            <a:srgbClr val="E8801A"/>
+          </a:solidFill>
+          <a:ln>
+            <a:noFill/>
+          </a:ln>
+          <a:effectLst/>
+        </p:spPr>
+        <p:style>
+          <a:lnRef idx="1">
+            <a:schemeClr val="accent1"/>
+          </a:lnRef>
+          <a:fillRef idx="3">
+            <a:schemeClr val="accent1"/>
+          </a:fillRef>
+          <a:effectRef idx="2">
+            <a:schemeClr val="accent1"/>
+          </a:effectRef>
+          <a:fontRef idx="minor">
+            <a:schemeClr val="lt1"/>
+          </a:fontRef>
+        </p:style>
+        <p:txBody>
+          <a:bodyPr rtlCol="0" anchor="ctr"/>
+          <a:lstStyle/>
+          <a:p>
+            <a:pPr algn="ctr"/>
+          </a:p>
+        </p:txBody>
+      </p:sp>
+      <p:sp>
+        <p:nvSpPr>
+          <p:cNvPr id="8" name="TextBox 7"/>
+          <p:cNvSpPr txBox="1"/>
+          <p:nvPr/>
+        </p:nvSpPr>
+        <p:spPr>
+          <a:xfrm>
+            <a:off x="822960" y="1965960"/>
+            <a:ext cx="4983480" cy="4206240"/>
+          </a:xfrm>
+          <a:prstGeom prst="rect">
+            <a:avLst/>
+          </a:prstGeom>
+          <a:noFill/>
+        </p:spPr>
+        <p:txBody>
+          <a:bodyPr wrap="square">
+            <a:spAutoFit/>
+          </a:bodyPr>
+          <a:lstStyle/>
+          <a:p>
+            <a:pPr>
+              <a:spcAft>
+                <a:spcPts val="1100"/>
+              </a:spcAft>
+            </a:pPr>
+            <a:r>
+              <a:rPr sz="1600" b="1" i="0">
+                <a:solidFill>
+                  <a:srgbClr val="E8801A"/>
+                </a:solidFill>
+                <a:latin typeface="Montserrat"/>
+              </a:rPr>
+              <a:t>▸  </a:t>
+            </a:r>
+            <a:r>
+              <a:rPr sz="1600" b="0" i="0">
+                <a:solidFill>
+                  <a:srgbClr val="1B2330"/>
+                </a:solidFill>
+                <a:latin typeface="Montserrat"/>
+              </a:rPr>
+              <a:t>IRV-1: certificado de instalación</a:t>
+            </a:r>
+          </a:p>
+          <a:p>
+            <a:pPr>
+              <a:spcAft>
+                <a:spcPts val="1100"/>
+              </a:spcAft>
+            </a:pPr>
+            <a:r>
+              <a:rPr sz="1600" b="1" i="0">
+                <a:solidFill>
+                  <a:srgbClr val="E8801A"/>
+                </a:solidFill>
+                <a:latin typeface="Montserrat"/>
+              </a:rPr>
+              <a:t>▸  </a:t>
+            </a:r>
+            <a:r>
+              <a:rPr sz="1600" b="0" i="0">
+                <a:solidFill>
+                  <a:srgbClr val="1B2330"/>
+                </a:solidFill>
+                <a:latin typeface="Montserrat"/>
+              </a:rPr>
+              <a:t>IRV-2: certificado de revisión periódica</a:t>
+            </a:r>
+          </a:p>
+          <a:p>
+            <a:pPr>
+              <a:spcAft>
+                <a:spcPts val="1100"/>
+              </a:spcAft>
+            </a:pPr>
+            <a:r>
+              <a:rPr sz="1600" b="1" i="0">
+                <a:solidFill>
+                  <a:srgbClr val="E8801A"/>
+                </a:solidFill>
+                <a:latin typeface="Montserrat"/>
+              </a:rPr>
+              <a:t>▸  </a:t>
+            </a:r>
+            <a:r>
+              <a:rPr sz="1600" b="0" i="0">
+                <a:solidFill>
+                  <a:srgbClr val="1B2330"/>
+                </a:solidFill>
+                <a:latin typeface="Montserrat"/>
+              </a:rPr>
+              <a:t>Modelos normalizados en el anexo 1</a:t>
+            </a:r>
+          </a:p>
+          <a:p>
+            <a:pPr>
+              <a:spcAft>
+                <a:spcPts val="1100"/>
+              </a:spcAft>
+            </a:pPr>
+            <a:r>
+              <a:rPr sz="1600" b="1" i="0">
+                <a:solidFill>
+                  <a:srgbClr val="E8801A"/>
+                </a:solidFill>
+                <a:latin typeface="Montserrat"/>
+              </a:rPr>
+              <a:t>▸  </a:t>
+            </a:r>
+            <a:r>
+              <a:rPr sz="1600" b="0" i="0">
+                <a:solidFill>
+                  <a:srgbClr val="1B2330"/>
+                </a:solidFill>
+                <a:latin typeface="Montserrat"/>
+              </a:rPr>
+              <a:t>Si ves 'IRV', piensa en caravana</a:t>
+            </a:r>
+          </a:p>
+        </p:txBody>
+      </p:sp>
+      <p:sp>
+        <p:nvSpPr>
+          <p:cNvPr id="9" name="imgph" descr="IMGQ:official gas installation certificate form"/>
+          <p:cNvSpPr/>
+          <p:nvPr/>
+        </p:nvSpPr>
+        <p:spPr>
+          <a:xfrm>
+            <a:off x="5806440" y="1051560"/>
+            <a:ext cx="5298947" cy="4629150"/>
+          </a:xfrm>
+          <a:prstGeom prst="roundRect">
+            <a:avLst/>
+          </a:prstGeom>
+          <a:solidFill>
+            <a:srgbClr val="F3F6FB"/>
+          </a:solidFill>
+          <a:ln w="12700">
+            <a:solidFill>
+              <a:srgbClr val="C7D2E6"/>
+            </a:solidFill>
+          </a:ln>
+          <a:effectLst/>
+        </p:spPr>
+        <p:style>
+          <a:lnRef idx="1">
+            <a:schemeClr val="accent1"/>
+          </a:lnRef>
+          <a:fillRef idx="3">
+            <a:schemeClr val="accent1"/>
+          </a:fillRef>
+          <a:effectRef idx="2">
+            <a:schemeClr val="accent1"/>
+          </a:effectRef>
+          <a:fontRef idx="minor">
+            <a:schemeClr val="lt1"/>
+          </a:fontRef>
+        </p:style>
+        <p:txBody>
+          <a:bodyPr rtlCol="0" anchor="ctr"/>
+          <a:lstStyle/>
+          <a:p>
+            <a:pPr algn="ctr"/>
+          </a:p>
+        </p:txBody>
+      </p:sp>
+      <p:sp>
+        <p:nvSpPr>
+          <p:cNvPr id="10" name="TextBox 9"/>
+          <p:cNvSpPr txBox="1"/>
+          <p:nvPr/>
+        </p:nvSpPr>
+        <p:spPr>
+          <a:xfrm>
+            <a:off x="6080760" y="2726055"/>
+            <a:ext cx="4750307" cy="1280160"/>
+          </a:xfrm>
+          <a:prstGeom prst="rect">
+            <a:avLst/>
+          </a:prstGeom>
+          <a:noFill/>
+        </p:spPr>
+        <p:txBody>
+          <a:bodyPr wrap="square">
+            <a:spAutoFit/>
+          </a:bodyPr>
+          <a:lstStyle/>
+          <a:p>
+            <a:pPr algn="ctr"/>
+            <a:r>
+              <a:rPr sz="1400" b="1" i="0">
+                <a:solidFill>
+                  <a:srgbClr val="64748B"/>
+                </a:solidFill>
+                <a:latin typeface="Montserrat"/>
+              </a:rPr>
+              <a:t>IMAGEN REALISTA</a:t>
+            </a:r>
+          </a:p>
+          <a:p>
+            <a:pPr algn="ctr"/>
+            <a:r>
+              <a:rPr sz="1100" b="0" i="1">
+                <a:solidFill>
+                  <a:srgbClr val="64748B"/>
+                </a:solidFill>
+                <a:latin typeface="Montserrat"/>
+              </a:rPr>
+              <a:t>official gas installation certificate form</a:t>
+            </a:r>
+          </a:p>
+        </p:txBody>
+      </p:sp>
+    </p:spTree>
+  </p:cSld>
+  <p:clrMapOvr>
+    <a:masterClrMapping/>
+  </p:clrMapOvr>
+</p:sld>
+</file>
+
+<file path=ppt/slides/slide16.xml><?xml version="1.0" encoding="utf-8"?>
+<p:sld xmlns:a="http://schemas.openxmlformats.org/drawingml/2006/main" xmlns:p="http://schemas.openxmlformats.org/presentationml/2006/main" xmlns:r="http://schemas.openxmlformats.org/officeDocument/2006/relationships">
+  <p:cSld>
+    <p:spTree>
+      <p:nvGrpSpPr>
+        <p:cNvPr id="1" name=""/>
+        <p:cNvGrpSpPr/>
+        <p:nvPr/>
+      </p:nvGrpSpPr>
+      <p:grpSpPr/>
+      <p:sp>
+        <p:nvSpPr>
+          <p:cNvPr id="2" name="Rectangle 1"/>
+          <p:cNvSpPr/>
+          <p:nvPr/>
+        </p:nvSpPr>
+        <p:spPr>
+          <a:xfrm>
+            <a:off x="0" y="0"/>
+            <a:ext cx="12191695" cy="6858000"/>
+          </a:xfrm>
+          <a:prstGeom prst="rect">
+            <a:avLst/>
+          </a:prstGeom>
+          <a:solidFill>
             <a:srgbClr val="1E2761"/>
           </a:solidFill>
           <a:ln>
@@ -6856,7 +7621,7 @@
             <a:r>
               <a:rPr sz="1400" b="1" i="0">
                 <a:solidFill>
-                  <a:srgbClr val="CADCFC"/>
+                  <a:srgbClr val="F4A24C"/>
                 </a:solidFill>
                 <a:latin typeface="Montserrat"/>
               </a:rPr>
@@ -6867,13 +7632,57 @@
       </p:sp>
       <p:sp>
         <p:nvSpPr>
-          <p:cNvPr id="4" name="TextBox 3"/>
+          <p:cNvPr id="4" name="Rounded Rectangle 3"/>
+          <p:cNvSpPr/>
+          <p:nvPr/>
+        </p:nvSpPr>
+        <p:spPr>
+          <a:xfrm>
+            <a:off x="868680" y="1051560"/>
+            <a:ext cx="1463040" cy="82296"/>
+          </a:xfrm>
+          <a:prstGeom prst="roundRect">
+            <a:avLst/>
+          </a:prstGeom>
+          <a:solidFill>
+            <a:srgbClr val="E8801A"/>
+          </a:solidFill>
+          <a:ln>
+            <a:noFill/>
+          </a:ln>
+          <a:effectLst/>
+        </p:spPr>
+        <p:style>
+          <a:lnRef idx="1">
+            <a:schemeClr val="accent1"/>
+          </a:lnRef>
+          <a:fillRef idx="3">
+            <a:schemeClr val="accent1"/>
+          </a:fillRef>
+          <a:effectRef idx="2">
+            <a:schemeClr val="accent1"/>
+          </a:effectRef>
+          <a:fontRef idx="minor">
+            <a:schemeClr val="lt1"/>
+          </a:fontRef>
+        </p:style>
+        <p:txBody>
+          <a:bodyPr rtlCol="0" anchor="ctr"/>
+          <a:lstStyle/>
+          <a:p>
+            <a:pPr algn="ctr"/>
+          </a:p>
+        </p:txBody>
+      </p:sp>
+      <p:sp>
+        <p:nvSpPr>
+          <p:cNvPr id="5" name="TextBox 4"/>
           <p:cNvSpPr txBox="1"/>
           <p:nvPr/>
         </p:nvSpPr>
         <p:spPr>
           <a:xfrm>
-            <a:off x="822960" y="1143000"/>
+            <a:off x="822960" y="1234440"/>
             <a:ext cx="10515600" cy="1097280"/>
           </a:xfrm>
           <a:prstGeom prst="rect">
@@ -6901,14 +7710,14 @@
       </p:sp>
       <p:sp>
         <p:nvSpPr>
-          <p:cNvPr id="5" name="TextBox 4"/>
+          <p:cNvPr id="6" name="TextBox 5"/>
           <p:cNvSpPr txBox="1"/>
           <p:nvPr/>
         </p:nvSpPr>
         <p:spPr>
           <a:xfrm>
-            <a:off x="822960" y="2514600"/>
-            <a:ext cx="10515600" cy="2834640"/>
+            <a:off x="822960" y="2606040"/>
+            <a:ext cx="10515600" cy="2743200"/>
           </a:xfrm>
           <a:prstGeom prst="rect">
             <a:avLst/>
@@ -6929,7 +7738,7 @@
             <a:r>
               <a:rPr sz="2000" b="1" i="0">
                 <a:solidFill>
-                  <a:srgbClr val="CADCFC"/>
+                  <a:srgbClr val="F4A24C"/>
                 </a:solidFill>
                 <a:latin typeface="Montserrat"/>
               </a:rPr>
@@ -6954,7 +7763,7 @@
             <a:r>
               <a:rPr sz="2000" b="1" i="0">
                 <a:solidFill>
-                  <a:srgbClr val="CADCFC"/>
+                  <a:srgbClr val="F4A24C"/>
                 </a:solidFill>
                 <a:latin typeface="Montserrat"/>
               </a:rPr>
@@ -6979,7 +7788,7 @@
             <a:r>
               <a:rPr sz="2000" b="1" i="0">
                 <a:solidFill>
-                  <a:srgbClr val="CADCFC"/>
+                  <a:srgbClr val="F4A24C"/>
                 </a:solidFill>
                 <a:latin typeface="Montserrat"/>
               </a:rPr>
@@ -7004,7 +7813,7 @@
             <a:r>
               <a:rPr sz="2000" b="1" i="0">
                 <a:solidFill>
-                  <a:srgbClr val="CADCFC"/>
+                  <a:srgbClr val="F4A24C"/>
                 </a:solidFill>
                 <a:latin typeface="Montserrat"/>
               </a:rPr>
@@ -7024,20 +7833,20 @@
       </p:sp>
       <p:sp>
         <p:nvSpPr>
-          <p:cNvPr id="6" name="Rounded Rectangle 5"/>
+          <p:cNvPr id="7" name="Rounded Rectangle 6"/>
           <p:cNvSpPr/>
           <p:nvPr/>
         </p:nvSpPr>
         <p:spPr>
           <a:xfrm>
             <a:off x="822960" y="5532120"/>
-            <a:ext cx="10515600" cy="777240"/>
+            <a:ext cx="10515600" cy="822960"/>
           </a:xfrm>
           <a:prstGeom prst="roundRect">
             <a:avLst/>
           </a:prstGeom>
           <a:solidFill>
-            <a:srgbClr val="2E3A80"/>
+            <a:srgbClr val="E8801A"/>
           </a:solidFill>
           <a:ln>
             <a:noFill/>
@@ -7068,13 +7877,13 @@
       </p:sp>
       <p:sp>
         <p:nvSpPr>
-          <p:cNvPr id="7" name="TextBox 6"/>
+          <p:cNvPr id="8" name="TextBox 7"/>
           <p:cNvSpPr txBox="1"/>
           <p:nvPr/>
         </p:nvSpPr>
         <p:spPr>
           <a:xfrm>
-            <a:off x="1051560" y="5605272"/>
+            <a:off x="1051560" y="5623560"/>
             <a:ext cx="10058400" cy="640080"/>
           </a:xfrm>
           <a:prstGeom prst="rect">
@@ -7091,7 +7900,7 @@
             <a:r>
               <a:rPr sz="1500" b="1" i="1">
                 <a:solidFill>
-                  <a:srgbClr val="CADCFC"/>
+                  <a:srgbClr val="1E2761"/>
                 </a:solidFill>
                 <a:latin typeface="Montserrat"/>
               </a:rPr>
@@ -7192,7 +8001,7 @@
                 </a:solidFill>
                 <a:latin typeface="Montserrat"/>
               </a:rPr>
-              <a:t>002 / 015</a:t>
+              <a:t>002 / 016</a:t>
             </a:r>
           </a:p>
         </p:txBody>
@@ -7256,7 +8065,7 @@
             <a:r>
               <a:rPr sz="2700" b="1" i="0">
                 <a:solidFill>
-                  <a:srgbClr val="1E2761"/>
+                  <a:srgbClr val="E8801A"/>
                 </a:solidFill>
                 <a:latin typeface="Montserrat"/>
               </a:rPr>
@@ -7268,6 +8077,50 @@
       <p:sp>
         <p:nvSpPr>
           <p:cNvPr id="6" name="Rounded Rectangle 5"/>
+          <p:cNvSpPr/>
+          <p:nvPr/>
+        </p:nvSpPr>
+        <p:spPr>
+          <a:xfrm>
+            <a:off x="868680" y="1234440"/>
+            <a:ext cx="1463040" cy="73152"/>
+          </a:xfrm>
+          <a:prstGeom prst="roundRect">
+            <a:avLst/>
+          </a:prstGeom>
+          <a:solidFill>
+            <a:srgbClr val="1E2761"/>
+          </a:solidFill>
+          <a:ln>
+            <a:noFill/>
+          </a:ln>
+          <a:effectLst/>
+        </p:spPr>
+        <p:style>
+          <a:lnRef idx="1">
+            <a:schemeClr val="accent1"/>
+          </a:lnRef>
+          <a:fillRef idx="3">
+            <a:schemeClr val="accent1"/>
+          </a:fillRef>
+          <a:effectRef idx="2">
+            <a:schemeClr val="accent1"/>
+          </a:effectRef>
+          <a:fontRef idx="minor">
+            <a:schemeClr val="lt1"/>
+          </a:fontRef>
+        </p:style>
+        <p:txBody>
+          <a:bodyPr rtlCol="0" anchor="ctr"/>
+          <a:lstStyle/>
+          <a:p>
+            <a:pPr algn="ctr"/>
+          </a:p>
+        </p:txBody>
+      </p:sp>
+      <p:sp>
+        <p:nvSpPr>
+          <p:cNvPr id="7" name="Rounded Rectangle 6"/>
           <p:cNvSpPr/>
           <p:nvPr/>
         </p:nvSpPr>
@@ -7313,7 +8166,7 @@
       </p:sp>
       <p:sp>
         <p:nvSpPr>
-          <p:cNvPr id="7" name="TextBox 6"/>
+          <p:cNvPr id="8" name="TextBox 7"/>
           <p:cNvSpPr txBox="1"/>
           <p:nvPr/>
         </p:nvSpPr>
@@ -7348,7 +8201,7 @@
       </p:sp>
       <p:sp>
         <p:nvSpPr>
-          <p:cNvPr id="8" name="TextBox 7"/>
+          <p:cNvPr id="9" name="TextBox 8"/>
           <p:cNvSpPr txBox="1"/>
           <p:nvPr/>
         </p:nvSpPr>
@@ -7383,7 +8236,7 @@
       </p:sp>
       <p:sp>
         <p:nvSpPr>
-          <p:cNvPr id="9" name="Rounded Rectangle 8"/>
+          <p:cNvPr id="10" name="Rounded Rectangle 9"/>
           <p:cNvSpPr/>
           <p:nvPr/>
         </p:nvSpPr>
@@ -7429,7 +8282,7 @@
       </p:sp>
       <p:sp>
         <p:nvSpPr>
-          <p:cNvPr id="10" name="TextBox 9"/>
+          <p:cNvPr id="11" name="TextBox 10"/>
           <p:cNvSpPr txBox="1"/>
           <p:nvPr/>
         </p:nvSpPr>
@@ -7464,7 +8317,7 @@
       </p:sp>
       <p:sp>
         <p:nvSpPr>
-          <p:cNvPr id="11" name="TextBox 10"/>
+          <p:cNvPr id="12" name="TextBox 11"/>
           <p:cNvSpPr txBox="1"/>
           <p:nvPr/>
         </p:nvSpPr>
@@ -7499,7 +8352,7 @@
       </p:sp>
       <p:sp>
         <p:nvSpPr>
-          <p:cNvPr id="12" name="Rounded Rectangle 11"/>
+          <p:cNvPr id="13" name="Rounded Rectangle 12"/>
           <p:cNvSpPr/>
           <p:nvPr/>
         </p:nvSpPr>
@@ -7545,7 +8398,7 @@
       </p:sp>
       <p:sp>
         <p:nvSpPr>
-          <p:cNvPr id="13" name="TextBox 12"/>
+          <p:cNvPr id="14" name="TextBox 13"/>
           <p:cNvSpPr txBox="1"/>
           <p:nvPr/>
         </p:nvSpPr>
@@ -7580,7 +8433,7 @@
       </p:sp>
       <p:sp>
         <p:nvSpPr>
-          <p:cNvPr id="14" name="TextBox 13"/>
+          <p:cNvPr id="15" name="TextBox 14"/>
           <p:cNvSpPr txBox="1"/>
           <p:nvPr/>
         </p:nvSpPr>
@@ -7705,7 +8558,7 @@
                 </a:solidFill>
                 <a:latin typeface="Montserrat"/>
               </a:rPr>
-              <a:t>003 / 015</a:t>
+              <a:t>003 / 016</a:t>
             </a:r>
           </a:p>
         </p:txBody>
@@ -7752,7 +8605,7 @@
         </p:nvSpPr>
         <p:spPr>
           <a:xfrm>
-            <a:off x="822960" y="457200"/>
+            <a:off x="822960" y="502920"/>
             <a:ext cx="8229600" cy="365760"/>
           </a:xfrm>
           <a:prstGeom prst="rect">
@@ -7767,13 +8620,13 @@
           <a:lstStyle/>
           <a:p>
             <a:r>
-              <a:rPr sz="1200" b="1" i="0">
-                <a:solidFill>
-                  <a:srgbClr val="64748B"/>
-                </a:solidFill>
-                <a:latin typeface="Montserrat"/>
-              </a:rPr>
-              <a:t>APARTADO 1 · OBJETO</a:t>
+              <a:rPr sz="1300" b="1" i="0">
+                <a:solidFill>
+                  <a:srgbClr val="E8801A"/>
+                </a:solidFill>
+                <a:latin typeface="Montserrat"/>
+              </a:rPr>
+              <a:t>PARTES DE ESTE VÍDEO</a:t>
             </a:r>
           </a:p>
         </p:txBody>
@@ -7786,7 +8639,7 @@
         </p:nvSpPr>
         <p:spPr>
           <a:xfrm>
-            <a:off x="822960" y="868680"/>
+            <a:off x="822960" y="914400"/>
             <a:ext cx="10515600" cy="914400"/>
           </a:xfrm>
           <a:prstGeom prst="rect">
@@ -7807,155 +8660,30 @@
                 </a:solidFill>
                 <a:latin typeface="Montserrat"/>
               </a:rPr>
-              <a:t>¿Qué regula esta ITC?</a:t>
-            </a:r>
-          </a:p>
-        </p:txBody>
-      </p:sp>
-      <p:sp>
-        <p:nvSpPr>
-          <p:cNvPr id="7" name="TextBox 6"/>
-          <p:cNvSpPr txBox="1"/>
-          <p:nvPr/>
-        </p:nvSpPr>
-        <p:spPr>
-          <a:xfrm>
-            <a:off x="822960" y="1920240"/>
-            <a:ext cx="4983480" cy="4206240"/>
-          </a:xfrm>
-          <a:prstGeom prst="rect">
-            <a:avLst/>
-          </a:prstGeom>
-          <a:noFill/>
-        </p:spPr>
-        <p:txBody>
-          <a:bodyPr wrap="square">
-            <a:spAutoFit/>
-          </a:bodyPr>
-          <a:lstStyle/>
-          <a:p>
-            <a:pPr>
-              <a:spcAft>
-                <a:spcPts val="1000"/>
-              </a:spcAft>
-            </a:pPr>
-            <a:r>
-              <a:rPr sz="1600" b="1" i="0">
-                <a:solidFill>
-                  <a:srgbClr val="2E3A80"/>
-                </a:solidFill>
-                <a:latin typeface="Montserrat"/>
-              </a:rPr>
-              <a:t>•  </a:t>
-            </a:r>
-            <a:r>
-              <a:rPr sz="1600" b="0" i="0">
-                <a:solidFill>
-                  <a:srgbClr val="1B2330"/>
-                </a:solidFill>
-                <a:latin typeface="Montserrat"/>
-              </a:rPr>
-              <a:t>Requisitos técnicos y medidas de seguridad</a:t>
-            </a:r>
-          </a:p>
-          <a:p>
-            <a:pPr>
-              <a:spcAft>
-                <a:spcPts val="1000"/>
-              </a:spcAft>
-            </a:pPr>
-            <a:r>
-              <a:rPr sz="1600" b="1" i="0">
-                <a:solidFill>
-                  <a:srgbClr val="2E3A80"/>
-                </a:solidFill>
-                <a:latin typeface="Montserrat"/>
-              </a:rPr>
-              <a:t>•  </a:t>
-            </a:r>
-            <a:r>
-              <a:rPr sz="1600" b="0" i="0">
-                <a:solidFill>
-                  <a:srgbClr val="1B2330"/>
-                </a:solidFill>
-                <a:latin typeface="Montserrat"/>
-              </a:rPr>
-              <a:t>Diseño, construcción, pruebas, instalación y uso</a:t>
-            </a:r>
-          </a:p>
-          <a:p>
-            <a:pPr>
-              <a:spcAft>
-                <a:spcPts val="1000"/>
-              </a:spcAft>
-            </a:pPr>
-            <a:r>
-              <a:rPr sz="1600" b="1" i="0">
-                <a:solidFill>
-                  <a:srgbClr val="2E3A80"/>
-                </a:solidFill>
-                <a:latin typeface="Montserrat"/>
-              </a:rPr>
-              <a:t>•  </a:t>
-            </a:r>
-            <a:r>
-              <a:rPr sz="1600" b="0" i="0">
-                <a:solidFill>
-                  <a:srgbClr val="1B2330"/>
-                </a:solidFill>
-                <a:latin typeface="Montserrat"/>
-              </a:rPr>
-              <a:t>GLP doméstico en caravanas y autocaravanas</a:t>
-            </a:r>
-          </a:p>
-          <a:p>
-            <a:pPr>
-              <a:spcAft>
-                <a:spcPts val="1000"/>
-              </a:spcAft>
-            </a:pPr>
-            <a:r>
-              <a:rPr sz="1600" b="1" i="0">
-                <a:solidFill>
-                  <a:srgbClr val="2E3A80"/>
-                </a:solidFill>
-                <a:latin typeface="Montserrat"/>
-              </a:rPr>
-              <a:t>•  </a:t>
-            </a:r>
-            <a:r>
-              <a:rPr sz="1600" b="0" i="0">
-                <a:solidFill>
-                  <a:srgbClr val="1B2330"/>
-                </a:solidFill>
-                <a:latin typeface="Montserrat"/>
-              </a:rPr>
-              <a:t>Desarrolla el artículo 2.1,g) del Reglamento</a:t>
-            </a:r>
-          </a:p>
-        </p:txBody>
-      </p:sp>
-      <p:sp>
-        <p:nvSpPr>
-          <p:cNvPr id="8" name="imgph" descr="IMGQ:camper van gas installation"/>
+              <a:t>En este vídeo</a:t>
+            </a:r>
+          </a:p>
+        </p:txBody>
+      </p:sp>
+      <p:sp>
+        <p:nvSpPr>
+          <p:cNvPr id="7" name="Rounded Rectangle 6"/>
           <p:cNvSpPr/>
           <p:nvPr/>
         </p:nvSpPr>
         <p:spPr>
           <a:xfrm>
-            <a:off x="5806440" y="1051560"/>
-            <a:ext cx="5298947" cy="4629150"/>
+            <a:off x="868680" y="1673352"/>
+            <a:ext cx="2011680" cy="73152"/>
           </a:xfrm>
           <a:prstGeom prst="roundRect">
             <a:avLst/>
           </a:prstGeom>
           <a:solidFill>
-            <a:srgbClr val="F3F6FB"/>
+            <a:srgbClr val="E8801A"/>
           </a:solidFill>
-          <a:ln w="12700">
-            <a:solidFill>
-              <a:srgbClr val="C7D2E6"/>
-            </a:solidFill>
+          <a:ln>
+            <a:noFill/>
           </a:ln>
           <a:effectLst/>
         </p:spPr>
@@ -7983,14 +8711,14 @@
       </p:sp>
       <p:sp>
         <p:nvSpPr>
-          <p:cNvPr id="9" name="TextBox 8"/>
+          <p:cNvPr id="8" name="TextBox 7"/>
           <p:cNvSpPr txBox="1"/>
           <p:nvPr/>
         </p:nvSpPr>
         <p:spPr>
           <a:xfrm>
-            <a:off x="6080760" y="2726055"/>
-            <a:ext cx="4750307" cy="1280160"/>
+            <a:off x="822960" y="2103120"/>
+            <a:ext cx="10515600" cy="4023360"/>
           </a:xfrm>
           <a:prstGeom prst="rect">
             <a:avLst/>
@@ -8003,27 +8731,228 @@
           </a:bodyPr>
           <a:lstStyle/>
           <a:p>
-            <a:pPr algn="ctr"/>
-            <a:r>
-              <a:rPr sz="1400" b="1" i="0">
-                <a:solidFill>
-                  <a:srgbClr val="64748B"/>
-                </a:solidFill>
-                <a:latin typeface="Montserrat"/>
-              </a:rPr>
-              <a:t>IMAGEN REALISTA</a:t>
-            </a:r>
-          </a:p>
-          <a:p>
-            <a:pPr algn="ctr"/>
-            <a:r>
-              <a:rPr sz="1100" b="0" i="1">
-                <a:solidFill>
-                  <a:srgbClr val="64748B"/>
-                </a:solidFill>
-                <a:latin typeface="Montserrat"/>
-              </a:rPr>
-              <a:t>camper van gas installation</a:t>
+            <a:pPr>
+              <a:spcAft>
+                <a:spcPts val="900"/>
+              </a:spcAft>
+            </a:pPr>
+            <a:r>
+              <a:rPr sz="1800" b="1" i="0">
+                <a:solidFill>
+                  <a:srgbClr val="E8801A"/>
+                </a:solidFill>
+                <a:latin typeface="Montserrat"/>
+              </a:rPr>
+              <a:t>01   </a:t>
+            </a:r>
+            <a:r>
+              <a:rPr sz="1700" b="0" i="0">
+                <a:solidFill>
+                  <a:srgbClr val="1B2330"/>
+                </a:solidFill>
+                <a:latin typeface="Montserrat"/>
+              </a:rPr>
+              <a:t>Apartado 1</a:t>
+            </a:r>
+          </a:p>
+          <a:p>
+            <a:pPr>
+              <a:spcAft>
+                <a:spcPts val="900"/>
+              </a:spcAft>
+            </a:pPr>
+            <a:r>
+              <a:rPr sz="1800" b="1" i="0">
+                <a:solidFill>
+                  <a:srgbClr val="E8801A"/>
+                </a:solidFill>
+                <a:latin typeface="Montserrat"/>
+              </a:rPr>
+              <a:t>02   </a:t>
+            </a:r>
+            <a:r>
+              <a:rPr sz="1700" b="0" i="0">
+                <a:solidFill>
+                  <a:srgbClr val="1B2330"/>
+                </a:solidFill>
+                <a:latin typeface="Montserrat"/>
+              </a:rPr>
+              <a:t>Apartado 2</a:t>
+            </a:r>
+          </a:p>
+          <a:p>
+            <a:pPr>
+              <a:spcAft>
+                <a:spcPts val="900"/>
+              </a:spcAft>
+            </a:pPr>
+            <a:r>
+              <a:rPr sz="1800" b="1" i="0">
+                <a:solidFill>
+                  <a:srgbClr val="E8801A"/>
+                </a:solidFill>
+                <a:latin typeface="Montserrat"/>
+              </a:rPr>
+              <a:t>03   </a:t>
+            </a:r>
+            <a:r>
+              <a:rPr sz="1700" b="0" i="0">
+                <a:solidFill>
+                  <a:srgbClr val="1B2330"/>
+                </a:solidFill>
+                <a:latin typeface="Montserrat"/>
+              </a:rPr>
+              <a:t>Apartado 3</a:t>
+            </a:r>
+          </a:p>
+          <a:p>
+            <a:pPr>
+              <a:spcAft>
+                <a:spcPts val="900"/>
+              </a:spcAft>
+            </a:pPr>
+            <a:r>
+              <a:rPr sz="1800" b="1" i="0">
+                <a:solidFill>
+                  <a:srgbClr val="E8801A"/>
+                </a:solidFill>
+                <a:latin typeface="Montserrat"/>
+              </a:rPr>
+              <a:t>04   </a:t>
+            </a:r>
+            <a:r>
+              <a:rPr sz="1700" b="0" i="0">
+                <a:solidFill>
+                  <a:srgbClr val="1B2330"/>
+                </a:solidFill>
+                <a:latin typeface="Montserrat"/>
+              </a:rPr>
+              <a:t>Apartado 4.1</a:t>
+            </a:r>
+          </a:p>
+          <a:p>
+            <a:pPr>
+              <a:spcAft>
+                <a:spcPts val="900"/>
+              </a:spcAft>
+            </a:pPr>
+            <a:r>
+              <a:rPr sz="1800" b="1" i="0">
+                <a:solidFill>
+                  <a:srgbClr val="E8801A"/>
+                </a:solidFill>
+                <a:latin typeface="Montserrat"/>
+              </a:rPr>
+              <a:t>05   </a:t>
+            </a:r>
+            <a:r>
+              <a:rPr sz="1700" b="0" i="0">
+                <a:solidFill>
+                  <a:srgbClr val="1B2330"/>
+                </a:solidFill>
+                <a:latin typeface="Montserrat"/>
+              </a:rPr>
+              <a:t>Apartado 4.2</a:t>
+            </a:r>
+          </a:p>
+          <a:p>
+            <a:pPr>
+              <a:spcAft>
+                <a:spcPts val="900"/>
+              </a:spcAft>
+            </a:pPr>
+            <a:r>
+              <a:rPr sz="1800" b="1" i="0">
+                <a:solidFill>
+                  <a:srgbClr val="E8801A"/>
+                </a:solidFill>
+                <a:latin typeface="Montserrat"/>
+              </a:rPr>
+              <a:t>06   </a:t>
+            </a:r>
+            <a:r>
+              <a:rPr sz="1700" b="0" i="0">
+                <a:solidFill>
+                  <a:srgbClr val="1B2330"/>
+                </a:solidFill>
+                <a:latin typeface="Montserrat"/>
+              </a:rPr>
+              <a:t>Apartado 4.3</a:t>
+            </a:r>
+          </a:p>
+          <a:p>
+            <a:pPr>
+              <a:spcAft>
+                <a:spcPts val="900"/>
+              </a:spcAft>
+            </a:pPr>
+            <a:r>
+              <a:rPr sz="1800" b="1" i="0">
+                <a:solidFill>
+                  <a:srgbClr val="E8801A"/>
+                </a:solidFill>
+                <a:latin typeface="Montserrat"/>
+              </a:rPr>
+              <a:t>07   </a:t>
+            </a:r>
+            <a:r>
+              <a:rPr sz="1700" b="0" i="0">
+                <a:solidFill>
+                  <a:srgbClr val="1B2330"/>
+                </a:solidFill>
+                <a:latin typeface="Montserrat"/>
+              </a:rPr>
+              <a:t>Apartado 4.4</a:t>
+            </a:r>
+          </a:p>
+          <a:p>
+            <a:pPr>
+              <a:spcAft>
+                <a:spcPts val="900"/>
+              </a:spcAft>
+            </a:pPr>
+            <a:r>
+              <a:rPr sz="1800" b="1" i="0">
+                <a:solidFill>
+                  <a:srgbClr val="E8801A"/>
+                </a:solidFill>
+                <a:latin typeface="Montserrat"/>
+              </a:rPr>
+              <a:t>08   </a:t>
+            </a:r>
+            <a:r>
+              <a:rPr sz="1700" b="0" i="0">
+                <a:solidFill>
+                  <a:srgbClr val="1B2330"/>
+                </a:solidFill>
+                <a:latin typeface="Montserrat"/>
+              </a:rPr>
+              <a:t>Apartado 5</a:t>
+            </a:r>
+          </a:p>
+          <a:p>
+            <a:pPr>
+              <a:spcAft>
+                <a:spcPts val="900"/>
+              </a:spcAft>
+            </a:pPr>
+            <a:r>
+              <a:rPr sz="1800" b="1" i="0">
+                <a:solidFill>
+                  <a:srgbClr val="E8801A"/>
+                </a:solidFill>
+                <a:latin typeface="Montserrat"/>
+              </a:rPr>
+              <a:t>09   </a:t>
+            </a:r>
+            <a:r>
+              <a:rPr sz="1700" b="0" i="0">
+                <a:solidFill>
+                  <a:srgbClr val="1B2330"/>
+                </a:solidFill>
+                <a:latin typeface="Montserrat"/>
+              </a:rPr>
+              <a:t>Apartado 6</a:t>
             </a:r>
           </a:p>
         </p:txBody>
@@ -8120,7 +9049,7 @@
                 </a:solidFill>
                 <a:latin typeface="Montserrat"/>
               </a:rPr>
-              <a:t>004 / 015</a:t>
+              <a:t>004 / 016</a:t>
             </a:r>
           </a:p>
         </p:txBody>
@@ -8168,7 +9097,7 @@
         <p:spPr>
           <a:xfrm>
             <a:off x="822960" y="457200"/>
-            <a:ext cx="8229600" cy="365760"/>
+            <a:ext cx="10058400" cy="365760"/>
           </a:xfrm>
           <a:prstGeom prst="rect">
             <a:avLst/>
@@ -8182,13 +9111,13 @@
           <a:lstStyle/>
           <a:p>
             <a:r>
-              <a:rPr sz="1200" b="1" i="0">
-                <a:solidFill>
-                  <a:srgbClr val="64748B"/>
-                </a:solidFill>
-                <a:latin typeface="Montserrat"/>
-              </a:rPr>
-              <a:t>APARTADO 2 · CAMPO DE APLICACIÓN</a:t>
+              <a:rPr sz="1300" b="1" i="0">
+                <a:solidFill>
+                  <a:srgbClr val="E8801A"/>
+                </a:solidFill>
+                <a:latin typeface="Montserrat"/>
+              </a:rPr>
+              <a:t>APARTADO 1 · OBJETO</a:t>
             </a:r>
           </a:p>
         </p:txBody>
@@ -8216,26 +9145,70 @@
           <a:lstStyle/>
           <a:p>
             <a:r>
-              <a:rPr sz="2700" b="1" i="0">
+              <a:rPr sz="2800" b="1" i="0">
                 <a:solidFill>
                   <a:srgbClr val="1E2761"/>
                 </a:solidFill>
                 <a:latin typeface="Montserrat"/>
               </a:rPr>
-              <a:t>A qué se aplica</a:t>
-            </a:r>
-          </a:p>
-        </p:txBody>
-      </p:sp>
-      <p:sp>
-        <p:nvSpPr>
-          <p:cNvPr id="7" name="TextBox 6"/>
+              <a:t>¿Qué regula esta ITC?</a:t>
+            </a:r>
+          </a:p>
+        </p:txBody>
+      </p:sp>
+      <p:sp>
+        <p:nvSpPr>
+          <p:cNvPr id="7" name="Rounded Rectangle 6"/>
+          <p:cNvSpPr/>
+          <p:nvPr/>
+        </p:nvSpPr>
+        <p:spPr>
+          <a:xfrm>
+            <a:off x="868680" y="1627632"/>
+            <a:ext cx="2011680" cy="73152"/>
+          </a:xfrm>
+          <a:prstGeom prst="roundRect">
+            <a:avLst/>
+          </a:prstGeom>
+          <a:solidFill>
+            <a:srgbClr val="E8801A"/>
+          </a:solidFill>
+          <a:ln>
+            <a:noFill/>
+          </a:ln>
+          <a:effectLst/>
+        </p:spPr>
+        <p:style>
+          <a:lnRef idx="1">
+            <a:schemeClr val="accent1"/>
+          </a:lnRef>
+          <a:fillRef idx="3">
+            <a:schemeClr val="accent1"/>
+          </a:fillRef>
+          <a:effectRef idx="2">
+            <a:schemeClr val="accent1"/>
+          </a:effectRef>
+          <a:fontRef idx="minor">
+            <a:schemeClr val="lt1"/>
+          </a:fontRef>
+        </p:style>
+        <p:txBody>
+          <a:bodyPr rtlCol="0" anchor="ctr"/>
+          <a:lstStyle/>
+          <a:p>
+            <a:pPr algn="ctr"/>
+          </a:p>
+        </p:txBody>
+      </p:sp>
+      <p:sp>
+        <p:nvSpPr>
+          <p:cNvPr id="8" name="TextBox 7"/>
           <p:cNvSpPr txBox="1"/>
           <p:nvPr/>
         </p:nvSpPr>
         <p:spPr>
           <a:xfrm>
-            <a:off x="822960" y="1920240"/>
+            <a:off x="822960" y="1965960"/>
             <a:ext cx="4983480" cy="4206240"/>
           </a:xfrm>
           <a:prstGeom prst="rect">
@@ -8251,17 +9224,17 @@
           <a:p>
             <a:pPr>
               <a:spcAft>
-                <a:spcPts val="1000"/>
+                <a:spcPts val="1100"/>
               </a:spcAft>
             </a:pPr>
             <a:r>
               <a:rPr sz="1600" b="1" i="0">
                 <a:solidFill>
-                  <a:srgbClr val="2E3A80"/>
-                </a:solidFill>
-                <a:latin typeface="Montserrat"/>
-              </a:rPr>
-              <a:t>•  </a:t>
+                  <a:srgbClr val="E8801A"/>
+                </a:solidFill>
+                <a:latin typeface="Montserrat"/>
+              </a:rPr>
+              <a:t>▸  </a:t>
             </a:r>
             <a:r>
               <a:rPr sz="1600" b="0" i="0">
@@ -8270,23 +9243,23 @@
                 </a:solidFill>
                 <a:latin typeface="Montserrat"/>
               </a:rPr>
-              <a:t>Instalaciones y aparatos de GLP doméstico</a:t>
+              <a:t>Requisitos técnicos y medidas de seguridad</a:t>
             </a:r>
           </a:p>
           <a:p>
             <a:pPr>
               <a:spcAft>
-                <a:spcPts val="1000"/>
+                <a:spcPts val="1100"/>
               </a:spcAft>
             </a:pPr>
             <a:r>
               <a:rPr sz="1600" b="1" i="0">
                 <a:solidFill>
-                  <a:srgbClr val="2E3A80"/>
-                </a:solidFill>
-                <a:latin typeface="Montserrat"/>
-              </a:rPr>
-              <a:t>•  </a:t>
+                  <a:srgbClr val="E8801A"/>
+                </a:solidFill>
+                <a:latin typeface="Montserrat"/>
+              </a:rPr>
+              <a:t>▸  </a:t>
             </a:r>
             <a:r>
               <a:rPr sz="1600" b="0" i="0">
@@ -8295,23 +9268,23 @@
                 </a:solidFill>
                 <a:latin typeface="Montserrat"/>
               </a:rPr>
-              <a:t>Vehículos habitables de recreo de carretera</a:t>
+              <a:t>Diseño, construcción, pruebas, instalación y uso</a:t>
             </a:r>
           </a:p>
           <a:p>
             <a:pPr>
               <a:spcAft>
-                <a:spcPts val="1000"/>
+                <a:spcPts val="1100"/>
               </a:spcAft>
             </a:pPr>
             <a:r>
               <a:rPr sz="1600" b="1" i="0">
                 <a:solidFill>
-                  <a:srgbClr val="2E3A80"/>
-                </a:solidFill>
-                <a:latin typeface="Montserrat"/>
-              </a:rPr>
-              <a:t>•  </a:t>
+                  <a:srgbClr val="E8801A"/>
+                </a:solidFill>
+                <a:latin typeface="Montserrat"/>
+              </a:rPr>
+              <a:t>▸  </a:t>
             </a:r>
             <a:r>
               <a:rPr sz="1600" b="0" i="0">
@@ -8320,14 +9293,39 @@
                 </a:solidFill>
                 <a:latin typeface="Montserrat"/>
               </a:rPr>
-              <a:t>Mantenimiento: vale para nuevas y existentes</a:t>
-            </a:r>
-          </a:p>
-        </p:txBody>
-      </p:sp>
-      <p:sp>
-        <p:nvSpPr>
-          <p:cNvPr id="8" name="imgph" descr="IMGQ:caravan interior kitchen stove"/>
+              <a:t>GLP doméstico en caravanas y autocaravanas</a:t>
+            </a:r>
+          </a:p>
+          <a:p>
+            <a:pPr>
+              <a:spcAft>
+                <a:spcPts val="1100"/>
+              </a:spcAft>
+            </a:pPr>
+            <a:r>
+              <a:rPr sz="1600" b="1" i="0">
+                <a:solidFill>
+                  <a:srgbClr val="E8801A"/>
+                </a:solidFill>
+                <a:latin typeface="Montserrat"/>
+              </a:rPr>
+              <a:t>▸  </a:t>
+            </a:r>
+            <a:r>
+              <a:rPr sz="1600" b="0" i="0">
+                <a:solidFill>
+                  <a:srgbClr val="1B2330"/>
+                </a:solidFill>
+                <a:latin typeface="Montserrat"/>
+              </a:rPr>
+              <a:t>Desarrolla el artículo 2.1,g) del Reglamento</a:t>
+            </a:r>
+          </a:p>
+        </p:txBody>
+      </p:sp>
+      <p:sp>
+        <p:nvSpPr>
+          <p:cNvPr id="9" name="imgph" descr="IMGQ:camper van gas installation"/>
           <p:cNvSpPr/>
           <p:nvPr/>
         </p:nvSpPr>
@@ -8373,7 +9371,7 @@
       </p:sp>
       <p:sp>
         <p:nvSpPr>
-          <p:cNvPr id="9" name="TextBox 8"/>
+          <p:cNvPr id="10" name="TextBox 9"/>
           <p:cNvSpPr txBox="1"/>
           <p:nvPr/>
         </p:nvSpPr>
@@ -8413,7 +9411,7 @@
                 </a:solidFill>
                 <a:latin typeface="Montserrat"/>
               </a:rPr>
-              <a:t>caravan interior kitchen stove</a:t>
+              <a:t>camper van gas installation</a:t>
             </a:r>
           </a:p>
         </p:txBody>
@@ -8510,7 +9508,7 @@
                 </a:solidFill>
                 <a:latin typeface="Montserrat"/>
               </a:rPr>
-              <a:t>005 / 015</a:t>
+              <a:t>005 / 016</a:t>
             </a:r>
           </a:p>
         </p:txBody>
@@ -8558,7 +9556,7 @@
         <p:spPr>
           <a:xfrm>
             <a:off x="822960" y="457200"/>
-            <a:ext cx="8229600" cy="365760"/>
+            <a:ext cx="10058400" cy="365760"/>
           </a:xfrm>
           <a:prstGeom prst="rect">
             <a:avLst/>
@@ -8572,13 +9570,13 @@
           <a:lstStyle/>
           <a:p>
             <a:r>
-              <a:rPr sz="1200" b="1" i="0">
-                <a:solidFill>
-                  <a:srgbClr val="64748B"/>
-                </a:solidFill>
-                <a:latin typeface="Montserrat"/>
-              </a:rPr>
-              <a:t>APARTADO 2 · EXCLUSIONES</a:t>
+              <a:rPr sz="1300" b="1" i="0">
+                <a:solidFill>
+                  <a:srgbClr val="E8801A"/>
+                </a:solidFill>
+                <a:latin typeface="Montserrat"/>
+              </a:rPr>
+              <a:t>APARTADO 2 · CAMPO DE APLICACIÓN</a:t>
             </a:r>
           </a:p>
         </p:txBody>
@@ -8606,26 +9604,70 @@
           <a:lstStyle/>
           <a:p>
             <a:r>
-              <a:rPr sz="2700" b="1" i="0">
+              <a:rPr sz="2800" b="1" i="0">
                 <a:solidFill>
                   <a:srgbClr val="1E2761"/>
                 </a:solidFill>
                 <a:latin typeface="Montserrat"/>
               </a:rPr>
-              <a:t>Qué queda fuera</a:t>
-            </a:r>
-          </a:p>
-        </p:txBody>
-      </p:sp>
-      <p:sp>
-        <p:nvSpPr>
-          <p:cNvPr id="7" name="TextBox 6"/>
+              <a:t>A qué se aplica</a:t>
+            </a:r>
+          </a:p>
+        </p:txBody>
+      </p:sp>
+      <p:sp>
+        <p:nvSpPr>
+          <p:cNvPr id="7" name="Rounded Rectangle 6"/>
+          <p:cNvSpPr/>
+          <p:nvPr/>
+        </p:nvSpPr>
+        <p:spPr>
+          <a:xfrm>
+            <a:off x="868680" y="1627632"/>
+            <a:ext cx="2011680" cy="73152"/>
+          </a:xfrm>
+          <a:prstGeom prst="roundRect">
+            <a:avLst/>
+          </a:prstGeom>
+          <a:solidFill>
+            <a:srgbClr val="E8801A"/>
+          </a:solidFill>
+          <a:ln>
+            <a:noFill/>
+          </a:ln>
+          <a:effectLst/>
+        </p:spPr>
+        <p:style>
+          <a:lnRef idx="1">
+            <a:schemeClr val="accent1"/>
+          </a:lnRef>
+          <a:fillRef idx="3">
+            <a:schemeClr val="accent1"/>
+          </a:fillRef>
+          <a:effectRef idx="2">
+            <a:schemeClr val="accent1"/>
+          </a:effectRef>
+          <a:fontRef idx="minor">
+            <a:schemeClr val="lt1"/>
+          </a:fontRef>
+        </p:style>
+        <p:txBody>
+          <a:bodyPr rtlCol="0" anchor="ctr"/>
+          <a:lstStyle/>
+          <a:p>
+            <a:pPr algn="ctr"/>
+          </a:p>
+        </p:txBody>
+      </p:sp>
+      <p:sp>
+        <p:nvSpPr>
+          <p:cNvPr id="8" name="TextBox 7"/>
           <p:cNvSpPr txBox="1"/>
           <p:nvPr/>
         </p:nvSpPr>
         <p:spPr>
           <a:xfrm>
-            <a:off x="822960" y="1920240"/>
+            <a:off x="822960" y="1965960"/>
             <a:ext cx="4983480" cy="4206240"/>
           </a:xfrm>
           <a:prstGeom prst="rect">
@@ -8641,17 +9683,17 @@
           <a:p>
             <a:pPr>
               <a:spcAft>
-                <a:spcPts val="1000"/>
+                <a:spcPts val="1100"/>
               </a:spcAft>
             </a:pPr>
             <a:r>
               <a:rPr sz="1600" b="1" i="0">
                 <a:solidFill>
-                  <a:srgbClr val="2E3A80"/>
-                </a:solidFill>
-                <a:latin typeface="Montserrat"/>
-              </a:rPr>
-              <a:t>•  </a:t>
+                  <a:srgbClr val="E8801A"/>
+                </a:solidFill>
+                <a:latin typeface="Montserrat"/>
+              </a:rPr>
+              <a:t>▸  </a:t>
             </a:r>
             <a:r>
               <a:rPr sz="1600" b="0" i="0">
@@ -8660,23 +9702,23 @@
                 </a:solidFill>
                 <a:latin typeface="Montserrat"/>
               </a:rPr>
-              <a:t>Aparatos portátiles con su propia alimentación</a:t>
+              <a:t>Instalaciones y aparatos de GLP doméstico</a:t>
             </a:r>
           </a:p>
           <a:p>
             <a:pPr>
               <a:spcAft>
-                <a:spcPts val="1000"/>
+                <a:spcPts val="1100"/>
               </a:spcAft>
             </a:pPr>
             <a:r>
               <a:rPr sz="1600" b="1" i="0">
                 <a:solidFill>
-                  <a:srgbClr val="2E3A80"/>
-                </a:solidFill>
-                <a:latin typeface="Montserrat"/>
-              </a:rPr>
-              <a:t>•  </a:t>
+                  <a:srgbClr val="E8801A"/>
+                </a:solidFill>
+                <a:latin typeface="Montserrat"/>
+              </a:rPr>
+              <a:t>▸  </a:t>
             </a:r>
             <a:r>
               <a:rPr sz="1600" b="0" i="0">
@@ -8685,23 +9727,23 @@
                 </a:solidFill>
                 <a:latin typeface="Montserrat"/>
               </a:rPr>
-              <a:t>Hornillo de cartucho, estufa de camping</a:t>
+              <a:t>Vehículos habitables de recreo de carretera</a:t>
             </a:r>
           </a:p>
           <a:p>
             <a:pPr>
               <a:spcAft>
-                <a:spcPts val="1000"/>
+                <a:spcPts val="1100"/>
               </a:spcAft>
             </a:pPr>
             <a:r>
               <a:rPr sz="1600" b="1" i="0">
                 <a:solidFill>
-                  <a:srgbClr val="2E3A80"/>
-                </a:solidFill>
-                <a:latin typeface="Montserrat"/>
-              </a:rPr>
-              <a:t>•  </a:t>
+                  <a:srgbClr val="E8801A"/>
+                </a:solidFill>
+                <a:latin typeface="Montserrat"/>
+              </a:rPr>
+              <a:t>▸  </a:t>
             </a:r>
             <a:r>
               <a:rPr sz="1600" b="0" i="0">
@@ -8710,14 +9752,14 @@
                 </a:solidFill>
                 <a:latin typeface="Montserrat"/>
               </a:rPr>
-              <a:t>La ITC regula solo la instalación fija</a:t>
-            </a:r>
-          </a:p>
-        </p:txBody>
-      </p:sp>
-      <p:sp>
-        <p:nvSpPr>
-          <p:cNvPr id="8" name="imgph" descr="IMGQ:portable camping gas stove cartridge"/>
+              <a:t>Mantenimiento: vale para nuevas y existentes</a:t>
+            </a:r>
+          </a:p>
+        </p:txBody>
+      </p:sp>
+      <p:sp>
+        <p:nvSpPr>
+          <p:cNvPr id="9" name="imgph" descr="IMGQ:caravan interior kitchen stove"/>
           <p:cNvSpPr/>
           <p:nvPr/>
         </p:nvSpPr>
@@ -8763,7 +9805,7 @@
       </p:sp>
       <p:sp>
         <p:nvSpPr>
-          <p:cNvPr id="9" name="TextBox 8"/>
+          <p:cNvPr id="10" name="TextBox 9"/>
           <p:cNvSpPr txBox="1"/>
           <p:nvPr/>
         </p:nvSpPr>
@@ -8803,7 +9845,7 @@
                 </a:solidFill>
                 <a:latin typeface="Montserrat"/>
               </a:rPr>
-              <a:t>portable camping gas stove cartridge</a:t>
+              <a:t>caravan interior kitchen stove</a:t>
             </a:r>
           </a:p>
         </p:txBody>
@@ -8900,7 +9942,7 @@
                 </a:solidFill>
                 <a:latin typeface="Montserrat"/>
               </a:rPr>
-              <a:t>006 / 015</a:t>
+              <a:t>006 / 016</a:t>
             </a:r>
           </a:p>
         </p:txBody>
@@ -8948,7 +9990,7 @@
         <p:spPr>
           <a:xfrm>
             <a:off x="822960" y="457200"/>
-            <a:ext cx="8229600" cy="365760"/>
+            <a:ext cx="10058400" cy="365760"/>
           </a:xfrm>
           <a:prstGeom prst="rect">
             <a:avLst/>
@@ -8962,13 +10004,13 @@
           <a:lstStyle/>
           <a:p>
             <a:r>
-              <a:rPr sz="1200" b="1" i="0">
-                <a:solidFill>
-                  <a:srgbClr val="64748B"/>
-                </a:solidFill>
-                <a:latin typeface="Montserrat"/>
-              </a:rPr>
-              <a:t>APARTADO 3 · DISEÑO Y EJECUCIÓN</a:t>
+              <a:rPr sz="1300" b="1" i="0">
+                <a:solidFill>
+                  <a:srgbClr val="E8801A"/>
+                </a:solidFill>
+                <a:latin typeface="Montserrat"/>
+              </a:rPr>
+              <a:t>APARTADO 2 · EXCLUSIONES</a:t>
             </a:r>
           </a:p>
         </p:txBody>
@@ -8996,26 +10038,70 @@
           <a:lstStyle/>
           <a:p>
             <a:r>
-              <a:rPr sz="2700" b="1" i="0">
+              <a:rPr sz="2800" b="1" i="0">
                 <a:solidFill>
                   <a:srgbClr val="1E2761"/>
                 </a:solidFill>
                 <a:latin typeface="Montserrat"/>
               </a:rPr>
-              <a:t>La norma y quién la monta</a:t>
-            </a:r>
-          </a:p>
-        </p:txBody>
-      </p:sp>
-      <p:sp>
-        <p:nvSpPr>
-          <p:cNvPr id="7" name="TextBox 6"/>
+              <a:t>Qué queda fuera</a:t>
+            </a:r>
+          </a:p>
+        </p:txBody>
+      </p:sp>
+      <p:sp>
+        <p:nvSpPr>
+          <p:cNvPr id="7" name="Rounded Rectangle 6"/>
+          <p:cNvSpPr/>
+          <p:nvPr/>
+        </p:nvSpPr>
+        <p:spPr>
+          <a:xfrm>
+            <a:off x="868680" y="1627632"/>
+            <a:ext cx="2011680" cy="73152"/>
+          </a:xfrm>
+          <a:prstGeom prst="roundRect">
+            <a:avLst/>
+          </a:prstGeom>
+          <a:solidFill>
+            <a:srgbClr val="E8801A"/>
+          </a:solidFill>
+          <a:ln>
+            <a:noFill/>
+          </a:ln>
+          <a:effectLst/>
+        </p:spPr>
+        <p:style>
+          <a:lnRef idx="1">
+            <a:schemeClr val="accent1"/>
+          </a:lnRef>
+          <a:fillRef idx="3">
+            <a:schemeClr val="accent1"/>
+          </a:fillRef>
+          <a:effectRef idx="2">
+            <a:schemeClr val="accent1"/>
+          </a:effectRef>
+          <a:fontRef idx="minor">
+            <a:schemeClr val="lt1"/>
+          </a:fontRef>
+        </p:style>
+        <p:txBody>
+          <a:bodyPr rtlCol="0" anchor="ctr"/>
+          <a:lstStyle/>
+          <a:p>
+            <a:pPr algn="ctr"/>
+          </a:p>
+        </p:txBody>
+      </p:sp>
+      <p:sp>
+        <p:nvSpPr>
+          <p:cNvPr id="8" name="TextBox 7"/>
           <p:cNvSpPr txBox="1"/>
           <p:nvPr/>
         </p:nvSpPr>
         <p:spPr>
           <a:xfrm>
-            <a:off x="822960" y="1920240"/>
+            <a:off x="822960" y="1965960"/>
             <a:ext cx="4983480" cy="4206240"/>
           </a:xfrm>
           <a:prstGeom prst="rect">
@@ -9031,17 +10117,17 @@
           <a:p>
             <a:pPr>
               <a:spcAft>
-                <a:spcPts val="1000"/>
+                <a:spcPts val="1100"/>
               </a:spcAft>
             </a:pPr>
             <a:r>
               <a:rPr sz="1600" b="1" i="0">
                 <a:solidFill>
-                  <a:srgbClr val="2E3A80"/>
-                </a:solidFill>
-                <a:latin typeface="Montserrat"/>
-              </a:rPr>
-              <a:t>•  </a:t>
+                  <a:srgbClr val="E8801A"/>
+                </a:solidFill>
+                <a:latin typeface="Montserrat"/>
+              </a:rPr>
+              <a:t>▸  </a:t>
             </a:r>
             <a:r>
               <a:rPr sz="1600" b="0" i="0">
@@ -9050,23 +10136,23 @@
                 </a:solidFill>
                 <a:latin typeface="Montserrat"/>
               </a:rPr>
-              <a:t>Diseño y montaje según UNE-EN 1949</a:t>
+              <a:t>Aparatos portátiles con su propia alimentación</a:t>
             </a:r>
           </a:p>
           <a:p>
             <a:pPr>
               <a:spcAft>
-                <a:spcPts val="1000"/>
+                <a:spcPts val="1100"/>
               </a:spcAft>
             </a:pPr>
             <a:r>
               <a:rPr sz="1600" b="1" i="0">
                 <a:solidFill>
-                  <a:srgbClr val="2E3A80"/>
-                </a:solidFill>
-                <a:latin typeface="Montserrat"/>
-              </a:rPr>
-              <a:t>•  </a:t>
+                  <a:srgbClr val="E8801A"/>
+                </a:solidFill>
+                <a:latin typeface="Montserrat"/>
+              </a:rPr>
+              <a:t>▸  </a:t>
             </a:r>
             <a:r>
               <a:rPr sz="1600" b="0" i="0">
@@ -9075,23 +10161,23 @@
                 </a:solidFill>
                 <a:latin typeface="Montserrat"/>
               </a:rPr>
-              <a:t>Aparatos: directivas europeas o ITC-ICG 08</a:t>
+              <a:t>Hornillo de cartucho, estufa de camping</a:t>
             </a:r>
           </a:p>
           <a:p>
             <a:pPr>
               <a:spcAft>
-                <a:spcPts val="1000"/>
+                <a:spcPts val="1100"/>
               </a:spcAft>
             </a:pPr>
             <a:r>
               <a:rPr sz="1600" b="1" i="0">
                 <a:solidFill>
-                  <a:srgbClr val="2E3A80"/>
-                </a:solidFill>
-                <a:latin typeface="Montserrat"/>
-              </a:rPr>
-              <a:t>•  </a:t>
+                  <a:srgbClr val="E8801A"/>
+                </a:solidFill>
+                <a:latin typeface="Montserrat"/>
+              </a:rPr>
+              <a:t>▸  </a:t>
             </a:r>
             <a:r>
               <a:rPr sz="1600" b="0" i="0">
@@ -9100,14 +10186,14 @@
                 </a:solidFill>
                 <a:latin typeface="Montserrat"/>
               </a:rPr>
-              <a:t>La ejecuta una empresa instaladora de gas</a:t>
-            </a:r>
-          </a:p>
-        </p:txBody>
-      </p:sp>
-      <p:sp>
-        <p:nvSpPr>
-          <p:cNvPr id="8" name="imgph" descr="IMGQ:technician installing gas pipe"/>
+              <a:t>La ITC regula solo la instalación fija</a:t>
+            </a:r>
+          </a:p>
+        </p:txBody>
+      </p:sp>
+      <p:sp>
+        <p:nvSpPr>
+          <p:cNvPr id="9" name="imgph" descr="IMGQ:portable camping gas stove cartridge"/>
           <p:cNvSpPr/>
           <p:nvPr/>
         </p:nvSpPr>
@@ -9153,7 +10239,7 @@
       </p:sp>
       <p:sp>
         <p:nvSpPr>
-          <p:cNvPr id="9" name="TextBox 8"/>
+          <p:cNvPr id="10" name="TextBox 9"/>
           <p:cNvSpPr txBox="1"/>
           <p:nvPr/>
         </p:nvSpPr>
@@ -9193,7 +10279,7 @@
                 </a:solidFill>
                 <a:latin typeface="Montserrat"/>
               </a:rPr>
-              <a:t>technician installing gas pipe</a:t>
+              <a:t>portable camping gas stove cartridge</a:t>
             </a:r>
           </a:p>
         </p:txBody>
@@ -9290,7 +10376,7 @@
                 </a:solidFill>
                 <a:latin typeface="Montserrat"/>
               </a:rPr>
-              <a:t>007 / 015</a:t>
+              <a:t>007 / 016</a:t>
             </a:r>
           </a:p>
         </p:txBody>
@@ -9338,7 +10424,7 @@
         <p:spPr>
           <a:xfrm>
             <a:off x="822960" y="457200"/>
-            <a:ext cx="8229600" cy="365760"/>
+            <a:ext cx="10058400" cy="365760"/>
           </a:xfrm>
           <a:prstGeom prst="rect">
             <a:avLst/>
@@ -9352,13 +10438,13 @@
           <a:lstStyle/>
           <a:p>
             <a:r>
-              <a:rPr sz="1200" b="1" i="0">
-                <a:solidFill>
-                  <a:srgbClr val="64748B"/>
-                </a:solidFill>
-                <a:latin typeface="Montserrat"/>
-              </a:rPr>
-              <a:t>APARTADO 4.1 · PRUEBAS PREVIAS</a:t>
+              <a:rPr sz="1300" b="1" i="0">
+                <a:solidFill>
+                  <a:srgbClr val="E8801A"/>
+                </a:solidFill>
+                <a:latin typeface="Montserrat"/>
+              </a:rPr>
+              <a:t>APARTADO 3 · DISEÑO Y EJECUCIÓN</a:t>
             </a:r>
           </a:p>
         </p:txBody>
@@ -9386,26 +10472,70 @@
           <a:lstStyle/>
           <a:p>
             <a:r>
-              <a:rPr sz="2700" b="1" i="0">
+              <a:rPr sz="2800" b="1" i="0">
                 <a:solidFill>
                   <a:srgbClr val="1E2761"/>
                 </a:solidFill>
                 <a:latin typeface="Montserrat"/>
               </a:rPr>
-              <a:t>La prueba de estanquidad</a:t>
-            </a:r>
-          </a:p>
-        </p:txBody>
-      </p:sp>
-      <p:sp>
-        <p:nvSpPr>
-          <p:cNvPr id="7" name="TextBox 6"/>
+              <a:t>La norma y quién la monta</a:t>
+            </a:r>
+          </a:p>
+        </p:txBody>
+      </p:sp>
+      <p:sp>
+        <p:nvSpPr>
+          <p:cNvPr id="7" name="Rounded Rectangle 6"/>
+          <p:cNvSpPr/>
+          <p:nvPr/>
+        </p:nvSpPr>
+        <p:spPr>
+          <a:xfrm>
+            <a:off x="868680" y="1627632"/>
+            <a:ext cx="2011680" cy="73152"/>
+          </a:xfrm>
+          <a:prstGeom prst="roundRect">
+            <a:avLst/>
+          </a:prstGeom>
+          <a:solidFill>
+            <a:srgbClr val="E8801A"/>
+          </a:solidFill>
+          <a:ln>
+            <a:noFill/>
+          </a:ln>
+          <a:effectLst/>
+        </p:spPr>
+        <p:style>
+          <a:lnRef idx="1">
+            <a:schemeClr val="accent1"/>
+          </a:lnRef>
+          <a:fillRef idx="3">
+            <a:schemeClr val="accent1"/>
+          </a:fillRef>
+          <a:effectRef idx="2">
+            <a:schemeClr val="accent1"/>
+          </a:effectRef>
+          <a:fontRef idx="minor">
+            <a:schemeClr val="lt1"/>
+          </a:fontRef>
+        </p:style>
+        <p:txBody>
+          <a:bodyPr rtlCol="0" anchor="ctr"/>
+          <a:lstStyle/>
+          <a:p>
+            <a:pPr algn="ctr"/>
+          </a:p>
+        </p:txBody>
+      </p:sp>
+      <p:sp>
+        <p:nvSpPr>
+          <p:cNvPr id="8" name="TextBox 7"/>
           <p:cNvSpPr txBox="1"/>
           <p:nvPr/>
         </p:nvSpPr>
         <p:spPr>
           <a:xfrm>
-            <a:off x="822960" y="1920240"/>
+            <a:off x="822960" y="1965960"/>
             <a:ext cx="4983480" cy="4206240"/>
           </a:xfrm>
           <a:prstGeom prst="rect">
@@ -9421,17 +10551,17 @@
           <a:p>
             <a:pPr>
               <a:spcAft>
-                <a:spcPts val="1000"/>
+                <a:spcPts val="1100"/>
               </a:spcAft>
             </a:pPr>
             <a:r>
               <a:rPr sz="1600" b="1" i="0">
                 <a:solidFill>
-                  <a:srgbClr val="2E3A80"/>
-                </a:solidFill>
-                <a:latin typeface="Montserrat"/>
-              </a:rPr>
-              <a:t>•  </a:t>
+                  <a:srgbClr val="E8801A"/>
+                </a:solidFill>
+                <a:latin typeface="Montserrat"/>
+              </a:rPr>
+              <a:t>▸  </a:t>
             </a:r>
             <a:r>
               <a:rPr sz="1600" b="0" i="0">
@@ -9440,23 +10570,23 @@
                 </a:solidFill>
                 <a:latin typeface="Montserrat"/>
               </a:rPr>
-              <a:t>Antes de la puesta en servicio</a:t>
+              <a:t>Diseño y montaje según UNE-EN 1949</a:t>
             </a:r>
           </a:p>
           <a:p>
             <a:pPr>
               <a:spcAft>
-                <a:spcPts val="1000"/>
+                <a:spcPts val="1100"/>
               </a:spcAft>
             </a:pPr>
             <a:r>
               <a:rPr sz="1600" b="1" i="0">
                 <a:solidFill>
-                  <a:srgbClr val="2E3A80"/>
-                </a:solidFill>
-                <a:latin typeface="Montserrat"/>
-              </a:rPr>
-              <a:t>•  </a:t>
+                  <a:srgbClr val="E8801A"/>
+                </a:solidFill>
+                <a:latin typeface="Montserrat"/>
+              </a:rPr>
+              <a:t>▸  </a:t>
             </a:r>
             <a:r>
               <a:rPr sz="1600" b="0" i="0">
@@ -9465,23 +10595,23 @@
                 </a:solidFill>
                 <a:latin typeface="Montserrat"/>
               </a:rPr>
-              <a:t>Manómetro 0-1 bar, clase 1</a:t>
+              <a:t>Aparatos: directivas europeas o ITC-ICG 08</a:t>
             </a:r>
           </a:p>
           <a:p>
             <a:pPr>
               <a:spcAft>
-                <a:spcPts val="1000"/>
+                <a:spcPts val="1100"/>
               </a:spcAft>
             </a:pPr>
             <a:r>
               <a:rPr sz="1600" b="1" i="0">
                 <a:solidFill>
-                  <a:srgbClr val="2E3A80"/>
-                </a:solidFill>
-                <a:latin typeface="Montserrat"/>
-              </a:rPr>
-              <a:t>•  </a:t>
+                  <a:srgbClr val="E8801A"/>
+                </a:solidFill>
+                <a:latin typeface="Montserrat"/>
+              </a:rPr>
+              <a:t>▸  </a:t>
             </a:r>
             <a:r>
               <a:rPr sz="1600" b="0" i="0">
@@ -9490,39 +10620,14 @@
                 </a:solidFill>
                 <a:latin typeface="Montserrat"/>
               </a:rPr>
-              <a:t>Escala de 20 mbar o manotermógrafo</a:t>
-            </a:r>
-          </a:p>
-          <a:p>
-            <a:pPr>
-              <a:spcAft>
-                <a:spcPts val="1000"/>
-              </a:spcAft>
-            </a:pPr>
-            <a:r>
-              <a:rPr sz="1600" b="1" i="0">
-                <a:solidFill>
-                  <a:srgbClr val="2E3A80"/>
-                </a:solidFill>
-                <a:latin typeface="Montserrat"/>
-              </a:rPr>
-              <a:t>•  </a:t>
-            </a:r>
-            <a:r>
-              <a:rPr sz="1600" b="0" i="0">
-                <a:solidFill>
-                  <a:srgbClr val="1B2330"/>
-                </a:solidFill>
-                <a:latin typeface="Montserrat"/>
-              </a:rPr>
-              <a:t>Correcta si no baja en 15 min mínimo</a:t>
-            </a:r>
-          </a:p>
-        </p:txBody>
-      </p:sp>
-      <p:sp>
-        <p:nvSpPr>
-          <p:cNvPr id="8" name="imgph" descr="IMGQ:pressure gauge manometer gas"/>
+              <a:t>La ejecuta una empresa instaladora de gas</a:t>
+            </a:r>
+          </a:p>
+        </p:txBody>
+      </p:sp>
+      <p:sp>
+        <p:nvSpPr>
+          <p:cNvPr id="9" name="imgph" descr="IMGQ:technician installing gas pipe"/>
           <p:cNvSpPr/>
           <p:nvPr/>
         </p:nvSpPr>
@@ -9568,7 +10673,7 @@
       </p:sp>
       <p:sp>
         <p:nvSpPr>
-          <p:cNvPr id="9" name="TextBox 8"/>
+          <p:cNvPr id="10" name="TextBox 9"/>
           <p:cNvSpPr txBox="1"/>
           <p:nvPr/>
         </p:nvSpPr>
@@ -9608,7 +10713,7 @@
                 </a:solidFill>
                 <a:latin typeface="Montserrat"/>
               </a:rPr>
-              <a:t>pressure gauge manometer gas</a:t>
+              <a:t>technician installing gas pipe</a:t>
             </a:r>
           </a:p>
         </p:txBody>
@@ -9705,7 +10810,7 @@
                 </a:solidFill>
                 <a:latin typeface="Montserrat"/>
               </a:rPr>
-              <a:t>008 / 015</a:t>
+              <a:t>008 / 016</a:t>
             </a:r>
           </a:p>
         </p:txBody>
@@ -9753,7 +10858,7 @@
         <p:spPr>
           <a:xfrm>
             <a:off x="822960" y="457200"/>
-            <a:ext cx="8229600" cy="365760"/>
+            <a:ext cx="10058400" cy="365760"/>
           </a:xfrm>
           <a:prstGeom prst="rect">
             <a:avLst/>
@@ -9767,13 +10872,13 @@
           <a:lstStyle/>
           <a:p>
             <a:r>
-              <a:rPr sz="1200" b="1" i="0">
-                <a:solidFill>
-                  <a:srgbClr val="64748B"/>
-                </a:solidFill>
-                <a:latin typeface="Montserrat"/>
-              </a:rPr>
-              <a:t>APARTADO 4.2 · CERTIFICADOS</a:t>
+              <a:rPr sz="1300" b="1" i="0">
+                <a:solidFill>
+                  <a:srgbClr val="E8801A"/>
+                </a:solidFill>
+                <a:latin typeface="Montserrat"/>
+              </a:rPr>
+              <a:t>APARTADO 4.1 · PRUEBAS PREVIAS</a:t>
             </a:r>
           </a:p>
         </p:txBody>
@@ -9801,26 +10906,70 @@
           <a:lstStyle/>
           <a:p>
             <a:r>
-              <a:rPr sz="2700" b="1" i="0">
+              <a:rPr sz="2800" b="1" i="0">
                 <a:solidFill>
                   <a:srgbClr val="1E2761"/>
                 </a:solidFill>
                 <a:latin typeface="Montserrat"/>
               </a:rPr>
-              <a:t>El certificado de instalación</a:t>
-            </a:r>
-          </a:p>
-        </p:txBody>
-      </p:sp>
-      <p:sp>
-        <p:nvSpPr>
-          <p:cNvPr id="7" name="TextBox 6"/>
+              <a:t>La prueba de estanquidad</a:t>
+            </a:r>
+          </a:p>
+        </p:txBody>
+      </p:sp>
+      <p:sp>
+        <p:nvSpPr>
+          <p:cNvPr id="7" name="Rounded Rectangle 6"/>
+          <p:cNvSpPr/>
+          <p:nvPr/>
+        </p:nvSpPr>
+        <p:spPr>
+          <a:xfrm>
+            <a:off x="868680" y="1627632"/>
+            <a:ext cx="2011680" cy="73152"/>
+          </a:xfrm>
+          <a:prstGeom prst="roundRect">
+            <a:avLst/>
+          </a:prstGeom>
+          <a:solidFill>
+            <a:srgbClr val="E8801A"/>
+          </a:solidFill>
+          <a:ln>
+            <a:noFill/>
+          </a:ln>
+          <a:effectLst/>
+        </p:spPr>
+        <p:style>
+          <a:lnRef idx="1">
+            <a:schemeClr val="accent1"/>
+          </a:lnRef>
+          <a:fillRef idx="3">
+            <a:schemeClr val="accent1"/>
+          </a:fillRef>
+          <a:effectRef idx="2">
+            <a:schemeClr val="accent1"/>
+          </a:effectRef>
+          <a:fontRef idx="minor">
+            <a:schemeClr val="lt1"/>
+          </a:fontRef>
+        </p:style>
+        <p:txBody>
+          <a:bodyPr rtlCol="0" anchor="ctr"/>
+          <a:lstStyle/>
+          <a:p>
+            <a:pPr algn="ctr"/>
+          </a:p>
+        </p:txBody>
+      </p:sp>
+      <p:sp>
+        <p:nvSpPr>
+          <p:cNvPr id="8" name="TextBox 7"/>
           <p:cNvSpPr txBox="1"/>
           <p:nvPr/>
         </p:nvSpPr>
         <p:spPr>
           <a:xfrm>
-            <a:off x="822960" y="1920240"/>
+            <a:off x="822960" y="1965960"/>
             <a:ext cx="4983480" cy="4206240"/>
           </a:xfrm>
           <a:prstGeom prst="rect">
@@ -9836,17 +10985,17 @@
           <a:p>
             <a:pPr>
               <a:spcAft>
-                <a:spcPts val="1000"/>
+                <a:spcPts val="1100"/>
               </a:spcAft>
             </a:pPr>
             <a:r>
               <a:rPr sz="1600" b="1" i="0">
                 <a:solidFill>
-                  <a:srgbClr val="2E3A80"/>
-                </a:solidFill>
-                <a:latin typeface="Montserrat"/>
-              </a:rPr>
-              <a:t>•  </a:t>
+                  <a:srgbClr val="E8801A"/>
+                </a:solidFill>
+                <a:latin typeface="Montserrat"/>
+              </a:rPr>
+              <a:t>▸  </a:t>
             </a:r>
             <a:r>
               <a:rPr sz="1600" b="0" i="0">
@@ -9855,23 +11004,23 @@
                 </a:solidFill>
                 <a:latin typeface="Montserrat"/>
               </a:rPr>
-              <a:t>Modelo IRV-1 del anexo 1</a:t>
+              <a:t>Antes de la puesta en servicio</a:t>
             </a:r>
           </a:p>
           <a:p>
             <a:pPr>
               <a:spcAft>
-                <a:spcPts val="1000"/>
+                <a:spcPts val="1100"/>
               </a:spcAft>
             </a:pPr>
             <a:r>
               <a:rPr sz="1600" b="1" i="0">
                 <a:solidFill>
-                  <a:srgbClr val="2E3A80"/>
-                </a:solidFill>
-                <a:latin typeface="Montserrat"/>
-              </a:rPr>
-              <a:t>•  </a:t>
+                  <a:srgbClr val="E8801A"/>
+                </a:solidFill>
+                <a:latin typeface="Montserrat"/>
+              </a:rPr>
+              <a:t>▸  </a:t>
             </a:r>
             <a:r>
               <a:rPr sz="1600" b="0" i="0">
@@ -9880,23 +11029,23 @@
                 </a:solidFill>
                 <a:latin typeface="Montserrat"/>
               </a:rPr>
-              <a:t>Por triplicado</a:t>
+              <a:t>Manómetro 0-1 bar, clase 1</a:t>
             </a:r>
           </a:p>
           <a:p>
             <a:pPr>
               <a:spcAft>
-                <a:spcPts val="1000"/>
+                <a:spcPts val="1100"/>
               </a:spcAft>
             </a:pPr>
             <a:r>
               <a:rPr sz="1600" b="1" i="0">
                 <a:solidFill>
-                  <a:srgbClr val="2E3A80"/>
-                </a:solidFill>
-                <a:latin typeface="Montserrat"/>
-              </a:rPr>
-              <a:t>•  </a:t>
+                  <a:srgbClr val="E8801A"/>
+                </a:solidFill>
+                <a:latin typeface="Montserrat"/>
+              </a:rPr>
+              <a:t>▸  </a:t>
             </a:r>
             <a:r>
               <a:rPr sz="1600" b="0" i="0">
@@ -9905,14 +11054,39 @@
                 </a:solidFill>
                 <a:latin typeface="Montserrat"/>
               </a:rPr>
-              <a:t>Copias: instaladora, titular y Comunidad Autónoma</a:t>
-            </a:r>
-          </a:p>
-        </p:txBody>
-      </p:sp>
-      <p:sp>
-        <p:nvSpPr>
-          <p:cNvPr id="8" name="imgph" descr="IMGQ:installation certificate document signature"/>
+              <a:t>Escala de 20 mbar o manotermógrafo</a:t>
+            </a:r>
+          </a:p>
+          <a:p>
+            <a:pPr>
+              <a:spcAft>
+                <a:spcPts val="1100"/>
+              </a:spcAft>
+            </a:pPr>
+            <a:r>
+              <a:rPr sz="1600" b="1" i="0">
+                <a:solidFill>
+                  <a:srgbClr val="E8801A"/>
+                </a:solidFill>
+                <a:latin typeface="Montserrat"/>
+              </a:rPr>
+              <a:t>▸  </a:t>
+            </a:r>
+            <a:r>
+              <a:rPr sz="1600" b="0" i="0">
+                <a:solidFill>
+                  <a:srgbClr val="1B2330"/>
+                </a:solidFill>
+                <a:latin typeface="Montserrat"/>
+              </a:rPr>
+              <a:t>Correcta si no baja en 15 min mínimo</a:t>
+            </a:r>
+          </a:p>
+        </p:txBody>
+      </p:sp>
+      <p:sp>
+        <p:nvSpPr>
+          <p:cNvPr id="9" name="imgph" descr="IMGQ:pressure gauge manometer gas"/>
           <p:cNvSpPr/>
           <p:nvPr/>
         </p:nvSpPr>
@@ -9958,7 +11132,7 @@
       </p:sp>
       <p:sp>
         <p:nvSpPr>
-          <p:cNvPr id="9" name="TextBox 8"/>
+          <p:cNvPr id="10" name="TextBox 9"/>
           <p:cNvSpPr txBox="1"/>
           <p:nvPr/>
         </p:nvSpPr>
@@ -9998,7 +11172,7 @@
                 </a:solidFill>
                 <a:latin typeface="Montserrat"/>
               </a:rPr>
-              <a:t>installation certificate document signature</a:t>
+              <a:t>pressure gauge manometer gas</a:t>
             </a:r>
           </a:p>
         </p:txBody>
@@ -10095,7 +11269,7 @@
                 </a:solidFill>
                 <a:latin typeface="Montserrat"/>
               </a:rPr>
-              <a:t>009 / 015</a:t>
+              <a:t>009 / 016</a:t>
             </a:r>
           </a:p>
         </p:txBody>
@@ -10143,7 +11317,7 @@
         <p:spPr>
           <a:xfrm>
             <a:off x="822960" y="457200"/>
-            <a:ext cx="8229600" cy="365760"/>
+            <a:ext cx="10058400" cy="365760"/>
           </a:xfrm>
           <a:prstGeom prst="rect">
             <a:avLst/>
@@ -10157,13 +11331,13 @@
           <a:lstStyle/>
           <a:p>
             <a:r>
-              <a:rPr sz="1200" b="1" i="0">
-                <a:solidFill>
-                  <a:srgbClr val="64748B"/>
-                </a:solidFill>
-                <a:latin typeface="Montserrat"/>
-              </a:rPr>
-              <a:t>APARTADO 4.3 · PUESTA EN SERVICIO</a:t>
+              <a:rPr sz="1300" b="1" i="0">
+                <a:solidFill>
+                  <a:srgbClr val="E8801A"/>
+                </a:solidFill>
+                <a:latin typeface="Montserrat"/>
+              </a:rPr>
+              <a:t>APARTADO 4.2 · CERTIFICADOS</a:t>
             </a:r>
           </a:p>
         </p:txBody>
@@ -10191,26 +11365,70 @@
           <a:lstStyle/>
           <a:p>
             <a:r>
-              <a:rPr sz="2700" b="1" i="0">
+              <a:rPr sz="2800" b="1" i="0">
                 <a:solidFill>
                   <a:srgbClr val="1E2761"/>
                 </a:solidFill>
                 <a:latin typeface="Montserrat"/>
               </a:rPr>
-              <a:t>El papel abre el gas</a:t>
-            </a:r>
-          </a:p>
-        </p:txBody>
-      </p:sp>
-      <p:sp>
-        <p:nvSpPr>
-          <p:cNvPr id="7" name="TextBox 6"/>
+              <a:t>El certificado de instalación</a:t>
+            </a:r>
+          </a:p>
+        </p:txBody>
+      </p:sp>
+      <p:sp>
+        <p:nvSpPr>
+          <p:cNvPr id="7" name="Rounded Rectangle 6"/>
+          <p:cNvSpPr/>
+          <p:nvPr/>
+        </p:nvSpPr>
+        <p:spPr>
+          <a:xfrm>
+            <a:off x="868680" y="1627632"/>
+            <a:ext cx="2011680" cy="73152"/>
+          </a:xfrm>
+          <a:prstGeom prst="roundRect">
+            <a:avLst/>
+          </a:prstGeom>
+          <a:solidFill>
+            <a:srgbClr val="E8801A"/>
+          </a:solidFill>
+          <a:ln>
+            <a:noFill/>
+          </a:ln>
+          <a:effectLst/>
+        </p:spPr>
+        <p:style>
+          <a:lnRef idx="1">
+            <a:schemeClr val="accent1"/>
+          </a:lnRef>
+          <a:fillRef idx="3">
+            <a:schemeClr val="accent1"/>
+          </a:fillRef>
+          <a:effectRef idx="2">
+            <a:schemeClr val="accent1"/>
+          </a:effectRef>
+          <a:fontRef idx="minor">
+            <a:schemeClr val="lt1"/>
+          </a:fontRef>
+        </p:style>
+        <p:txBody>
+          <a:bodyPr rtlCol="0" anchor="ctr"/>
+          <a:lstStyle/>
+          <a:p>
+            <a:pPr algn="ctr"/>
+          </a:p>
+        </p:txBody>
+      </p:sp>
+      <p:sp>
+        <p:nvSpPr>
+          <p:cNvPr id="8" name="TextBox 7"/>
           <p:cNvSpPr txBox="1"/>
           <p:nvPr/>
         </p:nvSpPr>
         <p:spPr>
           <a:xfrm>
-            <a:off x="822960" y="1920240"/>
+            <a:off x="822960" y="1965960"/>
             <a:ext cx="4983480" cy="4206240"/>
           </a:xfrm>
           <a:prstGeom prst="rect">
@@ -10226,17 +11444,17 @@
           <a:p>
             <a:pPr>
               <a:spcAft>
-                <a:spcPts val="1000"/>
+                <a:spcPts val="1100"/>
               </a:spcAft>
             </a:pPr>
             <a:r>
               <a:rPr sz="1600" b="1" i="0">
                 <a:solidFill>
-                  <a:srgbClr val="2E3A80"/>
-                </a:solidFill>
-                <a:latin typeface="Montserrat"/>
-              </a:rPr>
-              <a:t>•  </a:t>
+                  <a:srgbClr val="E8801A"/>
+                </a:solidFill>
+                <a:latin typeface="Montserrat"/>
+              </a:rPr>
+              <a:t>▸  </a:t>
             </a:r>
             <a:r>
               <a:rPr sz="1600" b="0" i="0">
@@ -10245,23 +11463,23 @@
                 </a:solidFill>
                 <a:latin typeface="Montserrat"/>
               </a:rPr>
-              <a:t>Con el certificado expedido, ya hay servicio</a:t>
+              <a:t>Modelo IRV-1 del anexo 1</a:t>
             </a:r>
           </a:p>
           <a:p>
             <a:pPr>
               <a:spcAft>
-                <a:spcPts val="1000"/>
+                <a:spcPts val="1100"/>
               </a:spcAft>
             </a:pPr>
             <a:r>
               <a:rPr sz="1600" b="1" i="0">
                 <a:solidFill>
-                  <a:srgbClr val="2E3A80"/>
-                </a:solidFill>
-                <a:latin typeface="Montserrat"/>
-              </a:rPr>
-              <a:t>•  </a:t>
+                  <a:srgbClr val="E8801A"/>
+                </a:solidFill>
+                <a:latin typeface="Montserrat"/>
+              </a:rPr>
+              <a:t>▸  </a:t>
             </a:r>
             <a:r>
               <a:rPr sz="1600" b="0" i="0">
@@ -10270,23 +11488,23 @@
                 </a:solidFill>
                 <a:latin typeface="Montserrat"/>
               </a:rPr>
-              <a:t>El titular pide los envases al suministrador</a:t>
+              <a:t>Por triplicado</a:t>
             </a:r>
           </a:p>
           <a:p>
             <a:pPr>
               <a:spcAft>
-                <a:spcPts val="1000"/>
+                <a:spcPts val="1100"/>
               </a:spcAft>
             </a:pPr>
             <a:r>
               <a:rPr sz="1600" b="1" i="0">
                 <a:solidFill>
-                  <a:srgbClr val="2E3A80"/>
-                </a:solidFill>
-                <a:latin typeface="Montserrat"/>
-              </a:rPr>
-              <a:t>•  </a:t>
+                  <a:srgbClr val="E8801A"/>
+                </a:solidFill>
+                <a:latin typeface="Montserrat"/>
+              </a:rPr>
+              <a:t>▸  </a:t>
             </a:r>
             <a:r>
               <a:rPr sz="1600" b="0" i="0">
@@ -10295,14 +11513,14 @@
                 </a:solidFill>
                 <a:latin typeface="Montserrat"/>
               </a:rPr>
-              <a:t>Primero el papel, luego el gas</a:t>
-            </a:r>
-          </a:p>
-        </p:txBody>
-      </p:sp>
-      <p:sp>
-        <p:nvSpPr>
-          <p:cNvPr id="8" name="imgph" descr="IMGQ:propane gas cylinder delivery"/>
+              <a:t>Copias: instaladora, titular y Comunidad Autónoma</a:t>
+            </a:r>
+          </a:p>
+        </p:txBody>
+      </p:sp>
+      <p:sp>
+        <p:nvSpPr>
+          <p:cNvPr id="9" name="imgph" descr="IMGQ:installation certificate document signature"/>
           <p:cNvSpPr/>
           <p:nvPr/>
         </p:nvSpPr>
@@ -10348,7 +11566,7 @@
       </p:sp>
       <p:sp>
         <p:nvSpPr>
-          <p:cNvPr id="9" name="TextBox 8"/>
+          <p:cNvPr id="10" name="TextBox 9"/>
           <p:cNvSpPr txBox="1"/>
           <p:nvPr/>
         </p:nvSpPr>
@@ -10388,7 +11606,7 @@
                 </a:solidFill>
                 <a:latin typeface="Montserrat"/>
               </a:rPr>
-              <a:t>propane gas cylinder delivery</a:t>
+              <a:t>installation certificate document signature</a:t>
             </a:r>
           </a:p>
         </p:txBody>

--- a/Curso Gas B/07 - ITC-ICG 10 - GLP de uso domestico en caravanas y autocaravanas/07 - ITC-ICG 10 - GLP de uso domestico en caravanas y autocaravanas - Vídeo 1.pptx
+++ b/Curso Gas B/07 - ITC-ICG 10 - GLP de uso domestico en caravanas y autocaravanas/07 - ITC-ICG 10 - GLP de uso domestico en caravanas y autocaravanas - Vídeo 1.pptx
@@ -21,6 +21,12 @@
     <p:sldId id="269" r:id="rId21"/>
     <p:sldId id="270" r:id="rId22"/>
     <p:sldId id="271" r:id="rId23"/>
+    <p:sldId id="272" r:id="rId24"/>
+    <p:sldId id="273" r:id="rId25"/>
+    <p:sldId id="274" r:id="rId26"/>
+    <p:sldId id="275" r:id="rId27"/>
+    <p:sldId id="276" r:id="rId28"/>
+    <p:sldId id="277" r:id="rId29"/>
   </p:sldIdLst>
   <p:sldSz cx="12191695" cy="6858000" type="screen4x3"/>
   <p:notesSz cx="6858000" cy="9144000"/>
@@ -592,12 +598,12 @@
           <a:lstStyle/>
           <a:p>
             <a:r>
-              <a:t>N1: ¿Cuándo puede el dueño pedir sus bombonas?</a:t>
-            </a:r>
-          </a:p>
-          <a:p>
-            <a:r>
-              <a:t>N2: Piensa en el certificado como en la llave que abre el gas. Una vez que la instaladora lo ha expedido, la instalación se considera en disposición de servicio, es decir, lista y con garantías para funcionar. Y en ese momento, no antes, el titular puede solicitar al suministrador los envases de GLP, o sea, pedir sus bombonas. Hasta que la instaladora no firma, no hay puesta en servicio y no hay gas que valga. La secuencia es clarísima, y precisamente por eso la preguntan: primero el papel, luego el gas. Nunca al revés. Si alguien mete las bombonas antes de tener el certificado, esa instalación no está en servicio legalmente.</a:t>
+              <a:t>N1: ¿Por qué esa y no otra?</a:t>
+            </a:r>
+          </a:p>
+          <a:p>
+            <a:r>
+              <a:t>N2: La norma dice no inferior a quince minutos, es decir, como mínimo quince. El truco está en la palabra: no inferior significa que puedes esperar más, pero nunca menos. Si la presión baja antes, hay fuga y no se cierra.</a:t>
             </a:r>
           </a:p>
         </p:txBody>
@@ -667,12 +673,12 @@
           <a:lstStyle/>
           <a:p>
             <a:r>
-              <a:t>N1: Aquí me huelo la trampa. ¿Hay que comunicar la puesta en servicio a la Administración?</a:t>
-            </a:r>
-          </a:p>
-          <a:p>
-            <a:r>
-              <a:t>N2: No. Y esta es LA excepción que tienes que llevarte grabada. En casi todo el Reglamento, tras la puesta en servicio el titular tiene que comunicarlo a la Comunidad Autónoma dentro de un plazo; acuérdate de los treinta días del artículo cinco punto siete. Pues bien, en la caravana la cosa cambia: aquí no hay que comunicar nada. Lo único que se exige es que el titular guarde el certificado y lo tenga a mano por si la Administración se lo reclama. Nada de plazos, nada de registrar. ¿Por qué te insisto tanto? Porque el examinador lo usa de cebo: si ves una pregunta que dice que en las instalaciones de GLP de caravanas hay que comunicar a la Administración en treinta días, es falsa, tachada. No se comunica; solo se conserva el certificado. Es de sus trampas favoritas.</a:t>
+              <a:t>N1: ¿Cuántas copias del certificado se hacen y para quién?</a:t>
+            </a:r>
+          </a:p>
+          <a:p>
+            <a:r>
+              <a:t>N2: Cuando la instaladora termina, rellena el certificado de instalación, que es el modelo IRV uno del anexo uno de la propia ITC. Y aquí viene el dato: se emite por triplicado, o sea, tres copias con tres destinos. Una se la queda la propia empresa instaladora, otra es para el titular, que es el dueño de la caravana, y otra para el órgano competente de la Comunidad Autónoma. Fíjate en una sutileza que gusta preguntar: el texto de la ITC solo nombra dos destinatarios de copia, el titular y la Comunidad Autónoma; pero como dice por triplicado, se entiende que la tercera se la queda la instaladora. Tres copias, tres manos. Y una pista para el examen: si ves las siglas IRV en una pregunta, ya sabes que hablan del certificado de la caravana.</a:t>
             </a:r>
           </a:p>
         </p:txBody>
@@ -742,12 +748,12 @@
           <a:lstStyle/>
           <a:p>
             <a:r>
-              <a:t>N1: ¿Por qué son tan importantes esos treinta milibares, y por qué se atan las bombonas?</a:t>
-            </a:r>
-          </a:p>
-          <a:p>
-            <a:r>
-              <a:t>N2: Vamos por partes. Los aparatos de la caravana funcionan a treinta milibares, que es la presión típica del GLP con regulador doméstico. Es un valor fijo que se pregunta tal cual, pero no es un capricho: con la presión o el regulador equivocados aparece mala combustión, o sea, llama amarilla en vez de azul, tiznado y hollín en los aparatos, y lo grave de verdad, monóxido de carbono, un gas que no huele y que en pocos metros cúbicos, como los de una caravana, mata. Por eso, si un usuario se te queja de olores raros, de un aparato que ahúma o que se apaga solo, empieza mirando presión y ventilación: en una caravana una ventilación mal hecha mata. Y ahora las bombonas: siempre sujetas, llenas o vacías, dentro o fuera del habitáculo, tanto en uso como conduciendo. Piensa en un vehículo en marcha: una bombona suelta golpeando en una curva puede romper el grifo y provocar una fuga circulando. Detalle de examen: la obligación de amarrarlas aplica también a los envases vacíos. Y en estacionamientos largos, como el invernaje, se desconectan de la instalación: menos gas conectado sin vigilancia, menos riesgo.</a:t>
+              <a:t>N1: ¿Cuándo puede el dueño pedir sus bombonas?</a:t>
+            </a:r>
+          </a:p>
+          <a:p>
+            <a:r>
+              <a:t>N2: Piensa en el certificado como en la llave que abre el gas. Una vez que la instaladora lo ha expedido, la instalación se considera en disposición de servicio, es decir, lista y con garantías para funcionar. Y en ese momento, no antes, el titular puede solicitar al suministrador los envases de GLP, o sea, pedir sus bombonas. Hasta que la instaladora no firma, no hay puesta en servicio y no hay gas que valga. La secuencia es clarísima, y precisamente por eso la preguntan: primero el papel, luego el gas. Nunca al revés. Si alguien mete las bombonas antes de tener el certificado, esa instalación no está en servicio legalmente.</a:t>
             </a:r>
           </a:p>
         </p:txBody>
@@ -817,12 +823,12 @@
           <a:lstStyle/>
           <a:p>
             <a:r>
-              <a:t>N1: ¿Se puede enganchar la toma de tierra a la tubería de gas?</a:t>
-            </a:r>
-          </a:p>
-          <a:p>
-            <a:r>
-              <a:t>N2: Jamás. Las tuberías de gas no se pueden usar nunca como conductor de puesta a tierra, ni como parte de una instalación eléctrica, ni de una de radio. Piénsalo un segundo: enganchar un cable eléctrico a la tubería de gas es meter una posible chispa justo donde hay combustible. Y en un habitáculo pequeño y cerrado como el de una caravana, eso es una receta directa para el incendio. Por eso el Reglamento lo prohíbe de plano. Este punto cae en examen, y la respuesta correcta siempre es que está prohibido, sin matices. En obra lo vas a ver en revisiones: gente que, por comodidad, ha atado el negativo de la batería o la tierra a un tubo de gas. Eso se corrige en el sitio, sí o sí, antes de firmar nada.</a:t>
+              <a:t>N1: Aquí me huelo la trampa. ¿Hay que comunicar la puesta en servicio a la Administración?</a:t>
+            </a:r>
+          </a:p>
+          <a:p>
+            <a:r>
+              <a:t>N2: No. Y esta es LA excepción que tienes que llevarte grabada. En casi todo el Reglamento, tras la puesta en servicio el titular tiene que comunicarlo a la Comunidad Autónoma dentro de un plazo; acuérdate de los treinta días del artículo cinco punto siete. Pues bien, en la caravana la cosa cambia: aquí no hay que comunicar nada. Lo único que se exige es que el titular guarde el certificado y lo tenga a mano por si la Administración se lo reclama. Nada de plazos, nada de registrar. ¿Por qué te insisto tanto? Porque el examinador lo usa de cebo: si ves una pregunta que dice que en las instalaciones de GLP de caravanas hay que comunicar a la Administración en treinta días, es falsa, tachada. No se comunica; solo se conserva el certificado. Es de sus trampas favoritas.</a:t>
             </a:r>
           </a:p>
         </p:txBody>
@@ -892,12 +898,12 @@
           <a:lstStyle/>
           <a:p>
             <a:r>
-              <a:t>N1: ¿Cada cuánto se revisa, quién lo encarga, y por qué se llama revisión y no inspección?</a:t>
-            </a:r>
-          </a:p>
-          <a:p>
-            <a:r>
-              <a:t>N2: Tres datos que se preguntan juntos, así que los atamos juntos. Primero, cada cuánto: cada cuatro años hay que revisar la instalación y los aparatos de la caravana. Segundo, quién manda hacerlo: el responsable del buen estado es el titular, el dueño, y en su defecto el usuario; y es el titular quien tiene que encargar la revisión a una empresa instaladora. La instaladora ejecuta y recomienda, pero quien responde de que la caravana esté en condiciones es el propietario, igual que con el coche: el taller te lo mira, pero llevarlo a pasar la ITV es cosa tuya. Y tercero, muy importante: aquí se llama revisión, no inspección. ¿Por qué esa palabra y no la otra? Porque, como viste en el artículo siete del Reglamento, la caravana funciona con bombonas propias y no cuelga de una red de distribución; y todo lo que no cuelga de la red se revisa, no se inspecciona. La chuleta es fácil: caravana, bombonas, sin red, revisión, cada cuatro años. Se documenta con el modelo IRV dos, que comprueba ventilaciones, evacuación de humos, estanquidad y funcionamiento de los aparatos según la UNE-EN mil novecientos cuarenta y nueve.</a:t>
+              <a:t>N1: Ojo, que aquí hay una de las trampas favoritas del examen.</a:t>
+            </a:r>
+          </a:p>
+          <a:p>
+            <a:r>
+              <a:t>N2: Compara con el régimen general del Reglamento y sus plazos; en la caravana la regla es justo la contraria.</a:t>
             </a:r>
           </a:p>
         </p:txBody>
@@ -967,12 +973,12 @@
           <a:lstStyle/>
           <a:p>
             <a:r>
-              <a:t>N1: ¿Qué diferencia hay entre el IRV-1 y el IRV-2? Se me lían.</a:t>
-            </a:r>
-          </a:p>
-          <a:p>
-            <a:r>
-              <a:t>N2: Muy sencillo, y así no vuelves a confundirlos. La ITC trae en su anexo uno dos impresos oficiales, los dos con las siglas IRV, que quieren decir instalación receptora de vehículo. El primero, el IRV uno, es el certificado de instalación: lo rellena la empresa instaladora cuando termina de montar y probar la caravana, se emite por triplicado, y es la llave que pone el gas en servicio. El segundo, el IRV dos, es el certificado de revisión periódica: es el que se rellena cada cuatro años cuando toca revisar, y deja constancia de que se han comprobado ventilaciones, evacuación de humos, caducidad de componentes, estanquidad y funcionamiento de los aparatos según la UNE-EN mil novecientos cuarenta y nueve. Chuleta para el examen: el uno es para instalar, el dos es para revisar. No hace falta que te aprendas el impreso casilla a casilla; basta con saber que el modelo está normalizado en el anexo uno, y que en cuanto veas las siglas IRV en una pregunta, están hablando de la caravana.</a:t>
+              <a:t>N1: ¿Por qué esta?</a:t>
+            </a:r>
+          </a:p>
+          <a:p>
+            <a:r>
+              <a:t>N2: A diferencia de casi todo el Reglamento, en la caravana no hay que comunicar nada a la Administración. El titular solo guarda el certificado y lo tiene a mano por si se lo piden. Si en la pregunta aparece un plazo de treinta días, ese es el cebo: es falso.</a:t>
             </a:r>
           </a:p>
         </p:txBody>
@@ -1042,22 +1048,237 @@
           <a:lstStyle/>
           <a:p>
             <a:r>
-              <a:t>N1: Vale, es corta pero tiene mucha chicha. ¿Cómo lo ordeno todo en la cabeza para el examen?</a:t>
-            </a:r>
-          </a:p>
-          <a:p>
-            <a:r>
-              <a:t>N2: Vamos a atar el hilo entero, que verás que encaja solo. Empieza por el sitio: la ITC-ICG diez desarrolla la letra ge del artículo dos punto uno del Reglamento, y regula la instalación fija de gas de caravanas y autocaravanas; los cacharros portátiles con su propio cartucho se quedan fuera. Su norma de cabecera, la que tienes que asociar siempre a caravanas, es la UNE-EN mil novecientos cuarenta y nueve, sin año. Segundo, la seguridad: antes de dar gas, prueba de estanquidad con manómetro de cero a uno bar, clase uno y escala de veinte milibares, y la presión no puede bajar en al menos quince minutos. ¿Por qué tanto detalle? Porque una fuga de GLP en un habitáculo cerrado que además circula es la avería más grave que vas a evitar. En uso, treinta milibares, bombonas siempre sujetas, llenas o vacías, y desconectadas en los parones largos; y la tubería de gas nunca como toma de tierra, que es poner una chispa donde hay combustible. Tercero, el papeleo y las dos trampas: la instaladora firma el certificado, modelo IRV uno, por triplicado, y eso es la puesta en servicio. Trampa uno, aquí no se comunica nada a la Administración, solo se guarda el certificado. Trampa dos, la revisión es cada cuatro años y se llama revisión, no inspección, porque la caravana va con bombonas y no cuelga de una red; se documenta con el IRV dos.</a:t>
-            </a:r>
-          </a:p>
-          <a:p>
-            <a:r>
-              <a:t>N1: ¿Y cómo cae esto en el examen y en la obra?</a:t>
-            </a:r>
-          </a:p>
-          <a:p>
-            <a:r>
-              <a:t>N2: En el examen te lo preguntan por datos sueltos: los quince minutos, los treinta milibares, los cuatro años, el artículo dos punto uno letra ge, y sobre todo las dos trampas, la de no comunicar y la de revisión y no inspección. En la obra lo vives en un boletín de revisión de caravana: compruebas la estanquidad con agua jabonosa en regulador y racores, miras que las bombonas vayan amarradas y que nadie haya colgado un cable de la tubería, corriges lo que falle y rellenas el IRV dos. Con esto cierras el tema y, de paso, cierras el bloque de las ITC. Hoy ya eres bastante más gasista que ayer: te has ganado el aprobado de este tema. Enhorabuena, y a por lo que venga.</a:t>
+              <a:t>N1: ¿Por qué son tan importantes esos treinta milibares, y por qué se atan las bombonas?</a:t>
+            </a:r>
+          </a:p>
+          <a:p>
+            <a:r>
+              <a:t>N2: Vamos por partes. Los aparatos de la caravana funcionan a treinta milibares, que es la presión típica del GLP con regulador doméstico. Es un valor fijo que se pregunta tal cual, pero no es un capricho: con la presión o el regulador equivocados aparece mala combustión, o sea, llama amarilla en vez de azul, tiznado y hollín en los aparatos, y lo grave de verdad, monóxido de carbono, un gas que no huele y que en pocos metros cúbicos, como los de una caravana, mata. Por eso, si un usuario se te queja de olores raros, de un aparato que ahúma o que se apaga solo, empieza mirando presión y ventilación: en una caravana una ventilación mal hecha mata. Y ahora las bombonas: siempre sujetas, llenas o vacías, dentro o fuera del habitáculo, tanto en uso como conduciendo. Piensa en un vehículo en marcha: una bombona suelta golpeando en una curva puede romper el grifo y provocar una fuga circulando. Detalle de examen: la obligación de amarrarlas aplica también a los envases vacíos. Y en estacionamientos largos, como el invernaje, se desconectan de la instalación: menos gas conectado sin vigilancia, menos riesgo.</a:t>
+            </a:r>
+          </a:p>
+        </p:txBody>
+      </p:sp>
+      <p:sp>
+        <p:nvSpPr>
+          <p:cNvPr id="4" name="Slide Number Placeholder 3"/>
+          <p:cNvSpPr>
+            <a:spLocks noGrp="1"/>
+          </p:cNvSpPr>
+          <p:nvPr>
+            <p:ph type="sldNum" idx="5" sz="quarter"/>
+          </p:nvPr>
+        </p:nvSpPr>
+        <p:spPr/>
+      </p:sp>
+    </p:spTree>
+  </p:cSld>
+  <p:clrMapOvr>
+    <a:masterClrMapping/>
+  </p:clrMapOvr>
+</p:notes>
+</file>
+
+<file path=ppt/notesSlides/notesSlide17.xml><?xml version="1.0" encoding="utf-8"?>
+<p:notes xmlns:a="http://schemas.openxmlformats.org/drawingml/2006/main" xmlns:p="http://schemas.openxmlformats.org/presentationml/2006/main" xmlns:r="http://schemas.openxmlformats.org/officeDocument/2006/relationships">
+  <p:cSld>
+    <p:spTree>
+      <p:nvGrpSpPr>
+        <p:cNvPr id="1" name=""/>
+        <p:cNvGrpSpPr/>
+        <p:nvPr/>
+      </p:nvGrpSpPr>
+      <p:grpSpPr>
+        <a:xfrm>
+          <a:off x="0" y="0"/>
+          <a:ext cx="0" cy="0"/>
+          <a:chOff x="0" y="0"/>
+          <a:chExt cx="0" cy="0"/>
+        </a:xfrm>
+      </p:grpSpPr>
+      <p:sp>
+        <p:nvSpPr>
+          <p:cNvPr id="2" name="Slide Image Placeholder 1"/>
+          <p:cNvSpPr>
+            <a:spLocks noGrp="1"/>
+          </p:cNvSpPr>
+          <p:nvPr>
+            <p:ph type="sldImg" idx="2"/>
+          </p:nvPr>
+        </p:nvSpPr>
+        <p:spPr/>
+      </p:sp>
+      <p:sp>
+        <p:nvSpPr>
+          <p:cNvPr id="3" name="Notes Placeholder 2"/>
+          <p:cNvSpPr>
+            <a:spLocks noGrp="1"/>
+          </p:cNvSpPr>
+          <p:nvPr>
+            <p:ph type="body" idx="3" sz="quarter"/>
+          </p:nvPr>
+        </p:nvSpPr>
+        <p:spPr/>
+        <p:txBody>
+          <a:bodyPr/>
+          <a:lstStyle/>
+          <a:p>
+            <a:r>
+              <a:t>N1: ¿Se puede enganchar la toma de tierra a la tubería de gas?</a:t>
+            </a:r>
+          </a:p>
+          <a:p>
+            <a:r>
+              <a:t>N2: Jamás. Las tuberías de gas no se pueden usar nunca como conductor de puesta a tierra, ni como parte de una instalación eléctrica, ni de una de radio. Piénsalo un segundo: enganchar un cable eléctrico a la tubería de gas es meter una posible chispa justo donde hay combustible. Y en un habitáculo pequeño y cerrado como el de una caravana, eso es una receta directa para el incendio. Por eso el Reglamento lo prohíbe de plano. Este punto cae en examen, y la respuesta correcta siempre es que está prohibido, sin matices. En obra lo vas a ver en revisiones: gente que, por comodidad, ha atado el negativo de la batería o la tierra a un tubo de gas. Eso se corrige en el sitio, sí o sí, antes de firmar nada.</a:t>
+            </a:r>
+          </a:p>
+        </p:txBody>
+      </p:sp>
+      <p:sp>
+        <p:nvSpPr>
+          <p:cNvPr id="4" name="Slide Number Placeholder 3"/>
+          <p:cNvSpPr>
+            <a:spLocks noGrp="1"/>
+          </p:cNvSpPr>
+          <p:nvPr>
+            <p:ph type="sldNum" idx="5" sz="quarter"/>
+          </p:nvPr>
+        </p:nvSpPr>
+        <p:spPr/>
+      </p:sp>
+    </p:spTree>
+  </p:cSld>
+  <p:clrMapOvr>
+    <a:masterClrMapping/>
+  </p:clrMapOvr>
+</p:notes>
+</file>
+
+<file path=ppt/notesSlides/notesSlide18.xml><?xml version="1.0" encoding="utf-8"?>
+<p:notes xmlns:a="http://schemas.openxmlformats.org/drawingml/2006/main" xmlns:p="http://schemas.openxmlformats.org/presentationml/2006/main" xmlns:r="http://schemas.openxmlformats.org/officeDocument/2006/relationships">
+  <p:cSld>
+    <p:spTree>
+      <p:nvGrpSpPr>
+        <p:cNvPr id="1" name=""/>
+        <p:cNvGrpSpPr/>
+        <p:nvPr/>
+      </p:nvGrpSpPr>
+      <p:grpSpPr>
+        <a:xfrm>
+          <a:off x="0" y="0"/>
+          <a:ext cx="0" cy="0"/>
+          <a:chOff x="0" y="0"/>
+          <a:chExt cx="0" cy="0"/>
+        </a:xfrm>
+      </p:grpSpPr>
+      <p:sp>
+        <p:nvSpPr>
+          <p:cNvPr id="2" name="Slide Image Placeholder 1"/>
+          <p:cNvSpPr>
+            <a:spLocks noGrp="1"/>
+          </p:cNvSpPr>
+          <p:nvPr>
+            <p:ph type="sldImg" idx="2"/>
+          </p:nvPr>
+        </p:nvSpPr>
+        <p:spPr/>
+      </p:sp>
+      <p:sp>
+        <p:nvSpPr>
+          <p:cNvPr id="3" name="Notes Placeholder 2"/>
+          <p:cNvSpPr>
+            <a:spLocks noGrp="1"/>
+          </p:cNvSpPr>
+          <p:nvPr>
+            <p:ph type="body" idx="3" sz="quarter"/>
+          </p:nvPr>
+        </p:nvSpPr>
+        <p:spPr/>
+        <p:txBody>
+          <a:bodyPr/>
+          <a:lstStyle/>
+          <a:p>
+            <a:r>
+              <a:t>N1: ¿Cada cuánto se revisa, quién lo encarga, y por qué se llama revisión y no inspección?</a:t>
+            </a:r>
+          </a:p>
+          <a:p>
+            <a:r>
+              <a:t>N2: Tres datos que se preguntan juntos, así que los atamos juntos. Primero, cada cuánto: cada cuatro años hay que revisar la instalación y los aparatos de la caravana. Segundo, quién manda hacerlo: el responsable del buen estado es el titular, el dueño, y en su defecto el usuario; y es el titular quien tiene que encargar la revisión a una empresa instaladora. La instaladora ejecuta y recomienda, pero quien responde de que la caravana esté en condiciones es el propietario, igual que con el coche: el taller te lo mira, pero llevarlo a pasar la ITV es cosa tuya. Y tercero, muy importante: aquí se llama revisión, no inspección. ¿Por qué esa palabra y no la otra? Porque, como viste en el artículo siete del Reglamento, la caravana funciona con bombonas propias y no cuelga de una red de distribución; y todo lo que no cuelga de la red se revisa, no se inspecciona. La chuleta es fácil: caravana, bombonas, sin red, revisión, cada cuatro años. Se documenta con el modelo IRV dos, que comprueba ventilaciones, evacuación de humos, estanquidad y funcionamiento de los aparatos según la UNE-EN mil novecientos cuarenta y nueve.</a:t>
+            </a:r>
+          </a:p>
+        </p:txBody>
+      </p:sp>
+      <p:sp>
+        <p:nvSpPr>
+          <p:cNvPr id="4" name="Slide Number Placeholder 3"/>
+          <p:cNvSpPr>
+            <a:spLocks noGrp="1"/>
+          </p:cNvSpPr>
+          <p:nvPr>
+            <p:ph type="sldNum" idx="5" sz="quarter"/>
+          </p:nvPr>
+        </p:nvSpPr>
+        <p:spPr/>
+      </p:sp>
+    </p:spTree>
+  </p:cSld>
+  <p:clrMapOvr>
+    <a:masterClrMapping/>
+  </p:clrMapOvr>
+</p:notes>
+</file>
+
+<file path=ppt/notesSlides/notesSlide19.xml><?xml version="1.0" encoding="utf-8"?>
+<p:notes xmlns:a="http://schemas.openxmlformats.org/drawingml/2006/main" xmlns:p="http://schemas.openxmlformats.org/presentationml/2006/main" xmlns:r="http://schemas.openxmlformats.org/officeDocument/2006/relationships">
+  <p:cSld>
+    <p:spTree>
+      <p:nvGrpSpPr>
+        <p:cNvPr id="1" name=""/>
+        <p:cNvGrpSpPr/>
+        <p:nvPr/>
+      </p:nvGrpSpPr>
+      <p:grpSpPr>
+        <a:xfrm>
+          <a:off x="0" y="0"/>
+          <a:ext cx="0" cy="0"/>
+          <a:chOff x="0" y="0"/>
+          <a:chExt cx="0" cy="0"/>
+        </a:xfrm>
+      </p:grpSpPr>
+      <p:sp>
+        <p:nvSpPr>
+          <p:cNvPr id="2" name="Slide Image Placeholder 1"/>
+          <p:cNvSpPr>
+            <a:spLocks noGrp="1"/>
+          </p:cNvSpPr>
+          <p:nvPr>
+            <p:ph type="sldImg" idx="2"/>
+          </p:nvPr>
+        </p:nvSpPr>
+        <p:spPr/>
+      </p:sp>
+      <p:sp>
+        <p:nvSpPr>
+          <p:cNvPr id="3" name="Notes Placeholder 2"/>
+          <p:cNvSpPr>
+            <a:spLocks noGrp="1"/>
+          </p:cNvSpPr>
+          <p:nvPr>
+            <p:ph type="body" idx="3" sz="quarter"/>
+          </p:nvPr>
+        </p:nvSpPr>
+        <p:spPr/>
+        <p:txBody>
+          <a:bodyPr/>
+          <a:lstStyle/>
+          <a:p>
+            <a:r>
+              <a:t>N1: Dos trampas en una sola pregunta: el plazo y la palabra.</a:t>
+            </a:r>
+          </a:p>
+          <a:p>
+            <a:r>
+              <a:t>N2: Acuérdate de que la caravana va con bombonas y no cuelga de ninguna red de distribución.</a:t>
             </a:r>
           </a:p>
         </p:txBody>
@@ -1157,6 +1378,241 @@
 </p:notes>
 </file>
 
+<file path=ppt/notesSlides/notesSlide20.xml><?xml version="1.0" encoding="utf-8"?>
+<p:notes xmlns:a="http://schemas.openxmlformats.org/drawingml/2006/main" xmlns:p="http://schemas.openxmlformats.org/presentationml/2006/main" xmlns:r="http://schemas.openxmlformats.org/officeDocument/2006/relationships">
+  <p:cSld>
+    <p:spTree>
+      <p:nvGrpSpPr>
+        <p:cNvPr id="1" name=""/>
+        <p:cNvGrpSpPr/>
+        <p:nvPr/>
+      </p:nvGrpSpPr>
+      <p:grpSpPr>
+        <a:xfrm>
+          <a:off x="0" y="0"/>
+          <a:ext cx="0" cy="0"/>
+          <a:chOff x="0" y="0"/>
+          <a:chExt cx="0" cy="0"/>
+        </a:xfrm>
+      </p:grpSpPr>
+      <p:sp>
+        <p:nvSpPr>
+          <p:cNvPr id="2" name="Slide Image Placeholder 1"/>
+          <p:cNvSpPr>
+            <a:spLocks noGrp="1"/>
+          </p:cNvSpPr>
+          <p:nvPr>
+            <p:ph type="sldImg" idx="2"/>
+          </p:nvPr>
+        </p:nvSpPr>
+        <p:spPr/>
+      </p:sp>
+      <p:sp>
+        <p:nvSpPr>
+          <p:cNvPr id="3" name="Notes Placeholder 2"/>
+          <p:cNvSpPr>
+            <a:spLocks noGrp="1"/>
+          </p:cNvSpPr>
+          <p:nvPr>
+            <p:ph type="body" idx="3" sz="quarter"/>
+          </p:nvPr>
+        </p:nvSpPr>
+        <p:spPr/>
+        <p:txBody>
+          <a:bodyPr/>
+          <a:lstStyle/>
+          <a:p>
+            <a:r>
+              <a:t>N1: ¿Por qué?</a:t>
+            </a:r>
+          </a:p>
+          <a:p>
+            <a:r>
+              <a:t>N2: Todo lo que no cuelga de una red se revisa, no se inspecciona; y el plazo es cada cuatro años. La chuleta es fácil: caravana, bombonas, sin red, revisión, cada cuatro años.</a:t>
+            </a:r>
+          </a:p>
+        </p:txBody>
+      </p:sp>
+      <p:sp>
+        <p:nvSpPr>
+          <p:cNvPr id="4" name="Slide Number Placeholder 3"/>
+          <p:cNvSpPr>
+            <a:spLocks noGrp="1"/>
+          </p:cNvSpPr>
+          <p:nvPr>
+            <p:ph type="sldNum" idx="5" sz="quarter"/>
+          </p:nvPr>
+        </p:nvSpPr>
+        <p:spPr/>
+      </p:sp>
+    </p:spTree>
+  </p:cSld>
+  <p:clrMapOvr>
+    <a:masterClrMapping/>
+  </p:clrMapOvr>
+</p:notes>
+</file>
+
+<file path=ppt/notesSlides/notesSlide21.xml><?xml version="1.0" encoding="utf-8"?>
+<p:notes xmlns:a="http://schemas.openxmlformats.org/drawingml/2006/main" xmlns:p="http://schemas.openxmlformats.org/presentationml/2006/main" xmlns:r="http://schemas.openxmlformats.org/officeDocument/2006/relationships">
+  <p:cSld>
+    <p:spTree>
+      <p:nvGrpSpPr>
+        <p:cNvPr id="1" name=""/>
+        <p:cNvGrpSpPr/>
+        <p:nvPr/>
+      </p:nvGrpSpPr>
+      <p:grpSpPr>
+        <a:xfrm>
+          <a:off x="0" y="0"/>
+          <a:ext cx="0" cy="0"/>
+          <a:chOff x="0" y="0"/>
+          <a:chExt cx="0" cy="0"/>
+        </a:xfrm>
+      </p:grpSpPr>
+      <p:sp>
+        <p:nvSpPr>
+          <p:cNvPr id="2" name="Slide Image Placeholder 1"/>
+          <p:cNvSpPr>
+            <a:spLocks noGrp="1"/>
+          </p:cNvSpPr>
+          <p:nvPr>
+            <p:ph type="sldImg" idx="2"/>
+          </p:nvPr>
+        </p:nvSpPr>
+        <p:spPr/>
+      </p:sp>
+      <p:sp>
+        <p:nvSpPr>
+          <p:cNvPr id="3" name="Notes Placeholder 2"/>
+          <p:cNvSpPr>
+            <a:spLocks noGrp="1"/>
+          </p:cNvSpPr>
+          <p:nvPr>
+            <p:ph type="body" idx="3" sz="quarter"/>
+          </p:nvPr>
+        </p:nvSpPr>
+        <p:spPr/>
+        <p:txBody>
+          <a:bodyPr/>
+          <a:lstStyle/>
+          <a:p>
+            <a:r>
+              <a:t>N1: ¿Qué diferencia hay entre el IRV-1 y el IRV-2? Se me lían.</a:t>
+            </a:r>
+          </a:p>
+          <a:p>
+            <a:r>
+              <a:t>N2: Muy sencillo, y así no vuelves a confundirlos. La ITC trae en su anexo uno dos impresos oficiales, los dos con las siglas IRV, que quieren decir instalación receptora de vehículo. El primero, el IRV uno, es el certificado de instalación: lo rellena la empresa instaladora cuando termina de montar y probar la caravana, se emite por triplicado, y es la llave que pone el gas en servicio. El segundo, el IRV dos, es el certificado de revisión periódica: es el que se rellena cada cuatro años cuando toca revisar, y deja constancia de que se han comprobado ventilaciones, evacuación de humos, caducidad de componentes, estanquidad y funcionamiento de los aparatos según la UNE-EN mil novecientos cuarenta y nueve. Chuleta para el examen: el uno es para instalar, el dos es para revisar. No hace falta que te aprendas el impreso casilla a casilla; basta con saber que el modelo está normalizado en el anexo uno, y que en cuanto veas las siglas IRV en una pregunta, están hablando de la caravana.</a:t>
+            </a:r>
+          </a:p>
+        </p:txBody>
+      </p:sp>
+      <p:sp>
+        <p:nvSpPr>
+          <p:cNvPr id="4" name="Slide Number Placeholder 3"/>
+          <p:cNvSpPr>
+            <a:spLocks noGrp="1"/>
+          </p:cNvSpPr>
+          <p:nvPr>
+            <p:ph type="sldNum" idx="5" sz="quarter"/>
+          </p:nvPr>
+        </p:nvSpPr>
+        <p:spPr/>
+      </p:sp>
+    </p:spTree>
+  </p:cSld>
+  <p:clrMapOvr>
+    <a:masterClrMapping/>
+  </p:clrMapOvr>
+</p:notes>
+</file>
+
+<file path=ppt/notesSlides/notesSlide22.xml><?xml version="1.0" encoding="utf-8"?>
+<p:notes xmlns:a="http://schemas.openxmlformats.org/drawingml/2006/main" xmlns:p="http://schemas.openxmlformats.org/presentationml/2006/main" xmlns:r="http://schemas.openxmlformats.org/officeDocument/2006/relationships">
+  <p:cSld>
+    <p:spTree>
+      <p:nvGrpSpPr>
+        <p:cNvPr id="1" name=""/>
+        <p:cNvGrpSpPr/>
+        <p:nvPr/>
+      </p:nvGrpSpPr>
+      <p:grpSpPr>
+        <a:xfrm>
+          <a:off x="0" y="0"/>
+          <a:ext cx="0" cy="0"/>
+          <a:chOff x="0" y="0"/>
+          <a:chExt cx="0" cy="0"/>
+        </a:xfrm>
+      </p:grpSpPr>
+      <p:sp>
+        <p:nvSpPr>
+          <p:cNvPr id="2" name="Slide Image Placeholder 1"/>
+          <p:cNvSpPr>
+            <a:spLocks noGrp="1"/>
+          </p:cNvSpPr>
+          <p:nvPr>
+            <p:ph type="sldImg" idx="2"/>
+          </p:nvPr>
+        </p:nvSpPr>
+        <p:spPr/>
+      </p:sp>
+      <p:sp>
+        <p:nvSpPr>
+          <p:cNvPr id="3" name="Notes Placeholder 2"/>
+          <p:cNvSpPr>
+            <a:spLocks noGrp="1"/>
+          </p:cNvSpPr>
+          <p:nvPr>
+            <p:ph type="body" idx="3" sz="quarter"/>
+          </p:nvPr>
+        </p:nvSpPr>
+        <p:spPr/>
+        <p:txBody>
+          <a:bodyPr/>
+          <a:lstStyle/>
+          <a:p>
+            <a:r>
+              <a:t>N1: Vale, es corta pero tiene mucha chicha. ¿Cómo lo ordeno todo en la cabeza para el examen?</a:t>
+            </a:r>
+          </a:p>
+          <a:p>
+            <a:r>
+              <a:t>N2: Vamos a atar el hilo entero, que verás que encaja solo. Empieza por el sitio: la ITC-ICG diez desarrolla la letra ge del artículo dos punto uno del Reglamento, y regula la instalación fija de gas de caravanas y autocaravanas; los cacharros portátiles con su propio cartucho se quedan fuera. Su norma de cabecera, la que tienes que asociar siempre a caravanas, es la UNE-EN mil novecientos cuarenta y nueve, sin año. Segundo, la seguridad: antes de dar gas, prueba de estanquidad con manómetro de cero a uno bar, clase uno y escala de veinte milibares, y la presión no puede bajar en al menos quince minutos. ¿Por qué tanto detalle? Porque una fuga de GLP en un habitáculo cerrado que además circula es la avería más grave que vas a evitar. En uso, treinta milibares, bombonas siempre sujetas, llenas o vacías, y desconectadas en los parones largos; y la tubería de gas nunca como toma de tierra, que es poner una chispa donde hay combustible. Tercero, el papeleo y las dos trampas: la instaladora firma el certificado, modelo IRV uno, por triplicado, y eso es la puesta en servicio. Trampa uno, aquí no se comunica nada a la Administración, solo se guarda el certificado. Trampa dos, la revisión es cada cuatro años y se llama revisión, no inspección, porque la caravana va con bombonas y no cuelga de una red; se documenta con el IRV dos.</a:t>
+            </a:r>
+          </a:p>
+          <a:p>
+            <a:r>
+              <a:t>N1: ¿Y cómo cae esto en el examen y en la obra?</a:t>
+            </a:r>
+          </a:p>
+          <a:p>
+            <a:r>
+              <a:t>N2: En el examen te lo preguntan por datos sueltos: los quince minutos, los treinta milibares, los cuatro años, el artículo dos punto uno letra ge, y sobre todo las dos trampas, la de no comunicar y la de revisión y no inspección. En la obra lo vives en un boletín de revisión de caravana: compruebas la estanquidad con agua jabonosa en regulador y racores, miras que las bombonas vayan amarradas y que nadie haya colgado un cable de la tubería, corriges lo que falle y rellenas el IRV dos. Con esto cierras el tema y, de paso, cierras el bloque de las ITC. Hoy ya eres bastante más gasista que ayer: te has ganado el aprobado de este tema. Enhorabuena, y a por lo que venga.</a:t>
+            </a:r>
+          </a:p>
+        </p:txBody>
+      </p:sp>
+      <p:sp>
+        <p:nvSpPr>
+          <p:cNvPr id="4" name="Slide Number Placeholder 3"/>
+          <p:cNvSpPr>
+            <a:spLocks noGrp="1"/>
+          </p:cNvSpPr>
+          <p:nvPr>
+            <p:ph type="sldNum" idx="5" sz="quarter"/>
+          </p:nvPr>
+        </p:nvSpPr>
+        <p:spPr/>
+      </p:sp>
+    </p:spTree>
+  </p:cSld>
+  <p:clrMapOvr>
+    <a:masterClrMapping/>
+  </p:clrMapOvr>
+</p:notes>
+</file>
+
 <file path=ppt/notesSlides/notesSlide3.xml><?xml version="1.0" encoding="utf-8"?>
 <p:notes xmlns:a="http://schemas.openxmlformats.org/drawingml/2006/main" xmlns:p="http://schemas.openxmlformats.org/presentationml/2006/main" xmlns:r="http://schemas.openxmlformats.org/officeDocument/2006/relationships">
   <p:cSld>
@@ -1643,12 +2099,12 @@
           <a:lstStyle/>
           <a:p>
             <a:r>
-              <a:t>N1: ¿Cuántas copias del certificado se hacen y para quién?</a:t>
-            </a:r>
-          </a:p>
-          <a:p>
-            <a:r>
-              <a:t>N2: Cuando la instaladora termina, rellena el certificado de instalación, que es el modelo IRV uno del anexo uno de la propia ITC. Y aquí viene el dato: se emite por triplicado, o sea, tres copias con tres destinos. Una se la queda la propia empresa instaladora, otra es para el titular, que es el dueño de la caravana, y otra para el órgano competente de la Comunidad Autónoma. Fíjate en una sutileza que gusta preguntar: el texto de la ITC solo nombra dos destinatarios de copia, el titular y la Comunidad Autónoma; pero como dice por triplicado, se entiende que la tercera se la queda la instaladora. Tres copias, tres manos. Y una pista para el examen: si ves las siglas IRV en una pregunta, ya sabes que hablan del certificado de la caravana.</a:t>
+              <a:t>N1: Cronómetro en mano, ¿cuánto tiene que aguantar la aguja sin moverse?</a:t>
+            </a:r>
+          </a:p>
+          <a:p>
+            <a:r>
+              <a:t>N2: Piensa en un cuarto de hora; ni un tiempo más corto vale, ni hace falta uno entero.</a:t>
             </a:r>
           </a:p>
         </p:txBody>
@@ -4734,7 +5190,7 @@
       </p:sp>
       <p:sp>
         <p:nvSpPr>
-          <p:cNvPr id="4" name="Rounded Rectangle 3"/>
+          <p:cNvPr id="4" name="Rectangle 3"/>
           <p:cNvSpPr/>
           <p:nvPr/>
         </p:nvSpPr>
@@ -4743,7 +5199,7 @@
             <a:off x="868680" y="2057400"/>
             <a:ext cx="1463040" cy="82296"/>
           </a:xfrm>
-          <a:prstGeom prst="roundRect">
+          <a:prstGeom prst="rect">
             <a:avLst/>
           </a:prstGeom>
           <a:solidFill>
@@ -4860,6 +5316,18 @@
   <p:clrMapOvr>
     <a:masterClrMapping/>
   </p:clrMapOvr>
+  <mc:AlternateContent xmlns:mc="http://schemas.openxmlformats.org/markup-compatibility/2006">
+    <mc:Choice xmlns:p14="http://schemas.microsoft.com/office/powerpoint/2010/main" Requires="p14">
+      <p:transition spd="med" p14:dur="700">
+        <p14:cube dir="l"/>
+      </p:transition>
+    </mc:Choice>
+    <mc:Fallback>
+      <p:transition spd="med">
+        <p:push dir="l"/>
+      </p:transition>
+    </mc:Fallback>
+  </mc:AlternateContent>
 </p:sld>
 </file>
 
@@ -4947,7 +5415,7 @@
                 </a:solidFill>
                 <a:latin typeface="Montserrat"/>
               </a:rPr>
-              <a:t>010 / 016</a:t>
+              <a:t>010 / 022</a:t>
             </a:r>
           </a:p>
         </p:txBody>
@@ -4988,88 +5456,20 @@
       </p:sp>
       <p:sp>
         <p:nvSpPr>
-          <p:cNvPr id="5" name="TextBox 4"/>
-          <p:cNvSpPr txBox="1"/>
-          <p:nvPr/>
-        </p:nvSpPr>
-        <p:spPr>
-          <a:xfrm>
-            <a:off x="822960" y="457200"/>
-            <a:ext cx="10058400" cy="365760"/>
-          </a:xfrm>
-          <a:prstGeom prst="rect">
-            <a:avLst/>
-          </a:prstGeom>
-          <a:noFill/>
-        </p:spPr>
-        <p:txBody>
-          <a:bodyPr wrap="square">
-            <a:spAutoFit/>
-          </a:bodyPr>
-          <a:lstStyle/>
-          <a:p>
-            <a:r>
-              <a:rPr sz="1300" b="1" i="0">
-                <a:solidFill>
-                  <a:srgbClr val="E8801A"/>
-                </a:solidFill>
-                <a:latin typeface="Montserrat"/>
-              </a:rPr>
-              <a:t>APARTADO 4.3 · PUESTA EN SERVICIO</a:t>
-            </a:r>
-          </a:p>
-        </p:txBody>
-      </p:sp>
-      <p:sp>
-        <p:nvSpPr>
-          <p:cNvPr id="6" name="TextBox 5"/>
-          <p:cNvSpPr txBox="1"/>
-          <p:nvPr/>
-        </p:nvSpPr>
-        <p:spPr>
-          <a:xfrm>
-            <a:off x="822960" y="868680"/>
-            <a:ext cx="10515600" cy="914400"/>
-          </a:xfrm>
-          <a:prstGeom prst="rect">
-            <a:avLst/>
-          </a:prstGeom>
-          <a:noFill/>
-        </p:spPr>
-        <p:txBody>
-          <a:bodyPr wrap="square">
-            <a:spAutoFit/>
-          </a:bodyPr>
-          <a:lstStyle/>
-          <a:p>
-            <a:r>
-              <a:rPr sz="2800" b="1" i="0">
-                <a:solidFill>
-                  <a:srgbClr val="1E2761"/>
-                </a:solidFill>
-                <a:latin typeface="Montserrat"/>
-              </a:rPr>
-              <a:t>El papel abre el gas</a:t>
-            </a:r>
-          </a:p>
-        </p:txBody>
-      </p:sp>
-      <p:sp>
-        <p:nvSpPr>
-          <p:cNvPr id="7" name="Rounded Rectangle 6"/>
+          <p:cNvPr id="5" name="Rectangle 4"/>
           <p:cNvSpPr/>
           <p:nvPr/>
         </p:nvSpPr>
         <p:spPr>
           <a:xfrm>
-            <a:off x="868680" y="1627632"/>
-            <a:ext cx="2011680" cy="73152"/>
-          </a:xfrm>
-          <a:prstGeom prst="roundRect">
+            <a:off x="0" y="0"/>
+            <a:ext cx="12191695" cy="1143000"/>
+          </a:xfrm>
+          <a:prstGeom prst="rect">
             <a:avLst/>
           </a:prstGeom>
           <a:solidFill>
-            <a:srgbClr val="E8801A"/>
+            <a:srgbClr val="1E8E4B"/>
           </a:solidFill>
           <a:ln>
             <a:noFill/>
@@ -5100,14 +5500,14 @@
       </p:sp>
       <p:sp>
         <p:nvSpPr>
-          <p:cNvPr id="8" name="TextBox 7"/>
+          <p:cNvPr id="6" name="TextBox 5"/>
           <p:cNvSpPr txBox="1"/>
           <p:nvPr/>
         </p:nvSpPr>
         <p:spPr>
           <a:xfrm>
-            <a:off x="822960" y="1965960"/>
-            <a:ext cx="4983480" cy="4206240"/>
+            <a:off x="822960" y="274320"/>
+            <a:ext cx="10515600" cy="640080"/>
           </a:xfrm>
           <a:prstGeom prst="rect">
             <a:avLst/>
@@ -5120,102 +5520,72 @@
           </a:bodyPr>
           <a:lstStyle/>
           <a:p>
-            <a:pPr>
-              <a:spcAft>
-                <a:spcPts val="1100"/>
-              </a:spcAft>
-            </a:pPr>
-            <a:r>
-              <a:rPr sz="1600" b="1" i="0">
-                <a:solidFill>
-                  <a:srgbClr val="E8801A"/>
-                </a:solidFill>
-                <a:latin typeface="Montserrat"/>
-              </a:rPr>
-              <a:t>▸  </a:t>
-            </a:r>
-            <a:r>
-              <a:rPr sz="1600" b="0" i="0">
-                <a:solidFill>
-                  <a:srgbClr val="1B2330"/>
-                </a:solidFill>
-                <a:latin typeface="Montserrat"/>
-              </a:rPr>
-              <a:t>Con el certificado expedido, ya hay servicio</a:t>
-            </a:r>
-          </a:p>
-          <a:p>
-            <a:pPr>
-              <a:spcAft>
-                <a:spcPts val="1100"/>
-              </a:spcAft>
-            </a:pPr>
-            <a:r>
-              <a:rPr sz="1600" b="1" i="0">
-                <a:solidFill>
-                  <a:srgbClr val="E8801A"/>
-                </a:solidFill>
-                <a:latin typeface="Montserrat"/>
-              </a:rPr>
-              <a:t>▸  </a:t>
-            </a:r>
-            <a:r>
-              <a:rPr sz="1600" b="0" i="0">
-                <a:solidFill>
-                  <a:srgbClr val="1B2330"/>
-                </a:solidFill>
-                <a:latin typeface="Montserrat"/>
-              </a:rPr>
-              <a:t>El titular pide los envases al suministrador</a:t>
-            </a:r>
-          </a:p>
-          <a:p>
-            <a:pPr>
-              <a:spcAft>
-                <a:spcPts val="1100"/>
-              </a:spcAft>
-            </a:pPr>
-            <a:r>
-              <a:rPr sz="1600" b="1" i="0">
-                <a:solidFill>
-                  <a:srgbClr val="E8801A"/>
-                </a:solidFill>
-                <a:latin typeface="Montserrat"/>
-              </a:rPr>
-              <a:t>▸  </a:t>
-            </a:r>
-            <a:r>
-              <a:rPr sz="1600" b="0" i="0">
-                <a:solidFill>
-                  <a:srgbClr val="1B2330"/>
-                </a:solidFill>
-                <a:latin typeface="Montserrat"/>
-              </a:rPr>
-              <a:t>Primero el papel, luego el gas</a:t>
-            </a:r>
-          </a:p>
-        </p:txBody>
-      </p:sp>
-      <p:sp>
-        <p:nvSpPr>
-          <p:cNvPr id="9" name="imgph" descr="IMGQ:propane gas cylinder delivery"/>
+            <a:r>
+              <a:rPr sz="2400" b="1" i="0">
+                <a:solidFill>
+                  <a:srgbClr val="FFFFFF"/>
+                </a:solidFill>
+                <a:latin typeface="Montserrat"/>
+              </a:rPr>
+              <a:t>✔  RESPUESTA:  C</a:t>
+            </a:r>
+          </a:p>
+        </p:txBody>
+      </p:sp>
+      <p:sp>
+        <p:nvSpPr>
+          <p:cNvPr id="7" name="TextBox 6"/>
+          <p:cNvSpPr txBox="1"/>
+          <p:nvPr/>
+        </p:nvSpPr>
+        <p:spPr>
+          <a:xfrm>
+            <a:off x="822960" y="1417320"/>
+            <a:ext cx="10515600" cy="914400"/>
+          </a:xfrm>
+          <a:prstGeom prst="rect">
+            <a:avLst/>
+          </a:prstGeom>
+          <a:noFill/>
+        </p:spPr>
+        <p:txBody>
+          <a:bodyPr wrap="square">
+            <a:spAutoFit/>
+          </a:bodyPr>
+          <a:lstStyle/>
+          <a:p>
+            <a:r>
+              <a:rPr sz="1800" b="1" i="0">
+                <a:solidFill>
+                  <a:srgbClr val="64748B"/>
+                </a:solidFill>
+                <a:latin typeface="Montserrat"/>
+              </a:rPr>
+              <a:t>¿Durante cuánto tiempo, como mínimo, no debe bajar la presión en la prueba de estanquidad?</a:t>
+            </a:r>
+          </a:p>
+        </p:txBody>
+      </p:sp>
+      <p:sp>
+        <p:nvSpPr>
+          <p:cNvPr id="8" name="Rounded Rectangle 7"/>
           <p:cNvSpPr/>
           <p:nvPr/>
         </p:nvSpPr>
         <p:spPr>
           <a:xfrm>
-            <a:off x="5806440" y="1051560"/>
-            <a:ext cx="5298947" cy="4629150"/>
+            <a:off x="822960" y="2514600"/>
+            <a:ext cx="10515600" cy="914400"/>
           </a:xfrm>
           <a:prstGeom prst="roundRect">
             <a:avLst/>
           </a:prstGeom>
           <a:solidFill>
-            <a:srgbClr val="F3F6FB"/>
+            <a:srgbClr val="E9F6EE"/>
           </a:solidFill>
           <a:ln w="12700">
             <a:solidFill>
-              <a:srgbClr val="C7D2E6"/>
+              <a:srgbClr val="1E8E4B"/>
             </a:solidFill>
           </a:ln>
           <a:effectLst/>
@@ -5244,14 +5614,14 @@
       </p:sp>
       <p:sp>
         <p:nvSpPr>
-          <p:cNvPr id="10" name="TextBox 9"/>
+          <p:cNvPr id="9" name="TextBox 8"/>
           <p:cNvSpPr txBox="1"/>
           <p:nvPr/>
         </p:nvSpPr>
         <p:spPr>
           <a:xfrm>
-            <a:off x="6080760" y="2726055"/>
-            <a:ext cx="4750307" cy="1280160"/>
+            <a:off x="1097280" y="2697480"/>
+            <a:ext cx="10058400" cy="640080"/>
           </a:xfrm>
           <a:prstGeom prst="rect">
             <a:avLst/>
@@ -5264,27 +5634,66 @@
           </a:bodyPr>
           <a:lstStyle/>
           <a:p>
-            <a:pPr algn="ctr"/>
-            <a:r>
-              <a:rPr sz="1400" b="1" i="0">
-                <a:solidFill>
-                  <a:srgbClr val="64748B"/>
-                </a:solidFill>
-                <a:latin typeface="Montserrat"/>
-              </a:rPr>
-              <a:t>IMAGEN REALISTA</a:t>
-            </a:r>
-          </a:p>
-          <a:p>
-            <a:pPr algn="ctr"/>
-            <a:r>
-              <a:rPr sz="1100" b="0" i="1">
-                <a:solidFill>
-                  <a:srgbClr val="64748B"/>
-                </a:solidFill>
-                <a:latin typeface="Montserrat"/>
-              </a:rPr>
-              <a:t>propane gas cylinder delivery</a:t>
+            <a:r>
+              <a:rPr sz="1800" b="1" i="0">
+                <a:solidFill>
+                  <a:srgbClr val="1E8E4B"/>
+                </a:solidFill>
+                <a:latin typeface="Montserrat"/>
+              </a:rPr>
+              <a:t>C.  </a:t>
+            </a:r>
+            <a:r>
+              <a:rPr sz="1800" b="1" i="0">
+                <a:solidFill>
+                  <a:srgbClr val="1E2761"/>
+                </a:solidFill>
+                <a:latin typeface="Montserrat"/>
+              </a:rPr>
+              <a:t>15 minutos</a:t>
+            </a:r>
+          </a:p>
+        </p:txBody>
+      </p:sp>
+      <p:sp>
+        <p:nvSpPr>
+          <p:cNvPr id="10" name="TextBox 9"/>
+          <p:cNvSpPr txBox="1"/>
+          <p:nvPr/>
+        </p:nvSpPr>
+        <p:spPr>
+          <a:xfrm>
+            <a:off x="822960" y="3749039"/>
+            <a:ext cx="10515600" cy="2194560"/>
+          </a:xfrm>
+          <a:prstGeom prst="rect">
+            <a:avLst/>
+          </a:prstGeom>
+          <a:noFill/>
+        </p:spPr>
+        <p:txBody>
+          <a:bodyPr wrap="square">
+            <a:spAutoFit/>
+          </a:bodyPr>
+          <a:lstStyle/>
+          <a:p>
+            <a:r>
+              <a:rPr sz="1500" b="1" i="0">
+                <a:solidFill>
+                  <a:srgbClr val="E8801A"/>
+                </a:solidFill>
+                <a:latin typeface="Montserrat"/>
+              </a:rPr>
+              <a:t>Por qué:  </a:t>
+            </a:r>
+            <a:r>
+              <a:rPr sz="1500" b="0" i="0">
+                <a:solidFill>
+                  <a:srgbClr val="1B2330"/>
+                </a:solidFill>
+                <a:latin typeface="Montserrat"/>
+              </a:rPr>
+              <a:t>La ITC exige que la presión no disminuya durante un período no inferior a quince minutos desde la primera lectura.</a:t>
             </a:r>
           </a:p>
         </p:txBody>
@@ -5294,6 +5703,18 @@
   <p:clrMapOvr>
     <a:masterClrMapping/>
   </p:clrMapOvr>
+  <mc:AlternateContent xmlns:mc="http://schemas.openxmlformats.org/markup-compatibility/2006">
+    <mc:Choice xmlns:p14="http://schemas.microsoft.com/office/powerpoint/2010/main" Requires="p14">
+      <p:transition spd="med" p14:dur="700">
+        <p14:cube dir="r"/>
+      </p:transition>
+    </mc:Choice>
+    <mc:Fallback>
+      <p:transition spd="med">
+        <p:push dir="r"/>
+      </p:transition>
+    </mc:Fallback>
+  </mc:AlternateContent>
 </p:sld>
 </file>
 
@@ -5381,7 +5802,7 @@
                 </a:solidFill>
                 <a:latin typeface="Montserrat"/>
               </a:rPr>
-              <a:t>011 / 016</a:t>
+              <a:t>011 / 022</a:t>
             </a:r>
           </a:p>
         </p:txBody>
@@ -5449,7 +5870,7 @@
                 </a:solidFill>
                 <a:latin typeface="Montserrat"/>
               </a:rPr>
-              <a:t>APARTADO 4.4 · COMUNICACIÓN</a:t>
+              <a:t>APARTADO 4.2 · CERTIFICADOS</a:t>
             </a:r>
           </a:p>
         </p:txBody>
@@ -5483,14 +5904,14 @@
                 </a:solidFill>
                 <a:latin typeface="Montserrat"/>
               </a:rPr>
-              <a:t>La excepción: no se comunica</a:t>
-            </a:r>
-          </a:p>
-        </p:txBody>
-      </p:sp>
-      <p:sp>
-        <p:nvSpPr>
-          <p:cNvPr id="7" name="Rounded Rectangle 6"/>
+              <a:t>El certificado de instalación</a:t>
+            </a:r>
+          </a:p>
+        </p:txBody>
+      </p:sp>
+      <p:sp>
+        <p:nvSpPr>
+          <p:cNvPr id="7" name="Rectangle 6"/>
           <p:cNvSpPr/>
           <p:nvPr/>
         </p:nvSpPr>
@@ -5499,7 +5920,7 @@
             <a:off x="868680" y="1627632"/>
             <a:ext cx="2011680" cy="73152"/>
           </a:xfrm>
-          <a:prstGeom prst="roundRect">
+          <a:prstGeom prst="rect">
             <a:avLst/>
           </a:prstGeom>
           <a:solidFill>
@@ -5540,8 +5961,8 @@
         </p:nvSpPr>
         <p:spPr>
           <a:xfrm>
-            <a:off x="822960" y="1965960"/>
-            <a:ext cx="4983480" cy="4206240"/>
+            <a:off x="6355080" y="1965960"/>
+            <a:ext cx="5029200" cy="4206240"/>
           </a:xfrm>
           <a:prstGeom prst="rect">
             <a:avLst/>
@@ -5575,7 +5996,7 @@
                 </a:solidFill>
                 <a:latin typeface="Montserrat"/>
               </a:rPr>
-              <a:t>No es precisa ninguna comunicación</a:t>
+              <a:t>Modelo IRV-1 del anexo 1</a:t>
             </a:r>
           </a:p>
           <a:p>
@@ -5600,7 +6021,7 @@
                 </a:solidFill>
                 <a:latin typeface="Montserrat"/>
               </a:rPr>
-              <a:t>El titular conserva el certificado</a:t>
+              <a:t>Por triplicado</a:t>
             </a:r>
           </a:p>
           <a:p>
@@ -5625,21 +6046,21 @@
                 </a:solidFill>
                 <a:latin typeface="Montserrat"/>
               </a:rPr>
-              <a:t>A disposición de la Administración si lo pide</a:t>
-            </a:r>
-          </a:p>
-        </p:txBody>
-      </p:sp>
-      <p:sp>
-        <p:nvSpPr>
-          <p:cNvPr id="9" name="imgph" descr="IMGQ:filing documents folder cabinet"/>
+              <a:t>Copias: instaladora, titular y Comunidad Autónoma</a:t>
+            </a:r>
+          </a:p>
+        </p:txBody>
+      </p:sp>
+      <p:sp>
+        <p:nvSpPr>
+          <p:cNvPr id="9" name="imgph" descr="IMGQ:installation certificate document signature"/>
           <p:cNvSpPr/>
           <p:nvPr/>
         </p:nvSpPr>
         <p:spPr>
           <a:xfrm>
-            <a:off x="5806440" y="1051560"/>
-            <a:ext cx="5298947" cy="4629150"/>
+            <a:off x="822960" y="1965960"/>
+            <a:ext cx="5303520" cy="4572000"/>
           </a:xfrm>
           <a:prstGeom prst="roundRect">
             <a:avLst/>
@@ -5684,8 +6105,8 @@
         </p:nvSpPr>
         <p:spPr>
           <a:xfrm>
-            <a:off x="6080760" y="2726055"/>
-            <a:ext cx="4750307" cy="1280160"/>
+            <a:off x="1097280" y="3611880"/>
+            <a:ext cx="4754880" cy="1280160"/>
           </a:xfrm>
           <a:prstGeom prst="rect">
             <a:avLst/>
@@ -5706,7 +6127,7 @@
                 </a:solidFill>
                 <a:latin typeface="Montserrat"/>
               </a:rPr>
-              <a:t>IMAGEN REALISTA</a:t>
+              <a:t>IMAGEN</a:t>
             </a:r>
           </a:p>
           <a:p>
@@ -5718,7 +6139,7 @@
                 </a:solidFill>
                 <a:latin typeface="Montserrat"/>
               </a:rPr>
-              <a:t>filing documents folder cabinet</a:t>
+              <a:t>installation certificate document signature</a:t>
             </a:r>
           </a:p>
         </p:txBody>
@@ -5728,6 +6149,18 @@
   <p:clrMapOvr>
     <a:masterClrMapping/>
   </p:clrMapOvr>
+  <mc:AlternateContent xmlns:mc="http://schemas.openxmlformats.org/markup-compatibility/2006">
+    <mc:Choice xmlns:p14="http://schemas.microsoft.com/office/powerpoint/2010/main" Requires="p14">
+      <p:transition spd="med" p14:dur="700">
+        <p14:cube dir="l"/>
+      </p:transition>
+    </mc:Choice>
+    <mc:Fallback>
+      <p:transition spd="med">
+        <p:push dir="l"/>
+      </p:transition>
+    </mc:Fallback>
+  </mc:AlternateContent>
 </p:sld>
 </file>
 
@@ -5815,7 +6248,7 @@
                 </a:solidFill>
                 <a:latin typeface="Montserrat"/>
               </a:rPr>
-              <a:t>012 / 016</a:t>
+              <a:t>012 / 022</a:t>
             </a:r>
           </a:p>
         </p:txBody>
@@ -5883,7 +6316,7 @@
                 </a:solidFill>
                 <a:latin typeface="Montserrat"/>
               </a:rPr>
-              <a:t>APARTADO 5 · UTILIZACIÓN</a:t>
+              <a:t>APARTADO 4.3 · PUESTA EN SERVICIO</a:t>
             </a:r>
           </a:p>
         </p:txBody>
@@ -5917,14 +6350,14 @@
                 </a:solidFill>
                 <a:latin typeface="Montserrat"/>
               </a:rPr>
-              <a:t>Presión y bombonas</a:t>
-            </a:r>
-          </a:p>
-        </p:txBody>
-      </p:sp>
-      <p:sp>
-        <p:nvSpPr>
-          <p:cNvPr id="7" name="Rounded Rectangle 6"/>
+              <a:t>El papel abre el gas</a:t>
+            </a:r>
+          </a:p>
+        </p:txBody>
+      </p:sp>
+      <p:sp>
+        <p:nvSpPr>
+          <p:cNvPr id="7" name="Rectangle 6"/>
           <p:cNvSpPr/>
           <p:nvPr/>
         </p:nvSpPr>
@@ -5933,7 +6366,7 @@
             <a:off x="868680" y="1627632"/>
             <a:ext cx="2011680" cy="73152"/>
           </a:xfrm>
-          <a:prstGeom prst="roundRect">
+          <a:prstGeom prst="rect">
             <a:avLst/>
           </a:prstGeom>
           <a:solidFill>
@@ -5975,7 +6408,7 @@
         <p:spPr>
           <a:xfrm>
             <a:off x="822960" y="1965960"/>
-            <a:ext cx="4983480" cy="4206240"/>
+            <a:ext cx="5029200" cy="4206240"/>
           </a:xfrm>
           <a:prstGeom prst="rect">
             <a:avLst/>
@@ -6009,7 +6442,7 @@
                 </a:solidFill>
                 <a:latin typeface="Montserrat"/>
               </a:rPr>
-              <a:t>Presión de funcionamiento: 30 mbar</a:t>
+              <a:t>Con el certificado expedido, ya hay servicio</a:t>
             </a:r>
           </a:p>
           <a:p>
@@ -6034,7 +6467,7 @@
                 </a:solidFill>
                 <a:latin typeface="Montserrat"/>
               </a:rPr>
-              <a:t>Envases siempre sujetos, llenos o vacíos</a:t>
+              <a:t>El titular pide los envases al suministrador</a:t>
             </a:r>
           </a:p>
           <a:p>
@@ -6059,46 +6492,21 @@
                 </a:solidFill>
                 <a:latin typeface="Montserrat"/>
               </a:rPr>
-              <a:t>Dentro o fuera, en uso y en marcha</a:t>
-            </a:r>
-          </a:p>
-          <a:p>
-            <a:pPr>
-              <a:spcAft>
-                <a:spcPts val="1100"/>
-              </a:spcAft>
-            </a:pPr>
-            <a:r>
-              <a:rPr sz="1600" b="1" i="0">
-                <a:solidFill>
-                  <a:srgbClr val="E8801A"/>
-                </a:solidFill>
-                <a:latin typeface="Montserrat"/>
-              </a:rPr>
-              <a:t>▸  </a:t>
-            </a:r>
-            <a:r>
-              <a:rPr sz="1600" b="0" i="0">
-                <a:solidFill>
-                  <a:srgbClr val="1B2330"/>
-                </a:solidFill>
-                <a:latin typeface="Montserrat"/>
-              </a:rPr>
-              <a:t>Desconectar en estacionamiento prolongado</a:t>
-            </a:r>
-          </a:p>
-        </p:txBody>
-      </p:sp>
-      <p:sp>
-        <p:nvSpPr>
-          <p:cNvPr id="9" name="imgph" descr="IMGQ:propane gas cylinder strap secured"/>
+              <a:t>Primero el papel, luego el gas</a:t>
+            </a:r>
+          </a:p>
+        </p:txBody>
+      </p:sp>
+      <p:sp>
+        <p:nvSpPr>
+          <p:cNvPr id="9" name="imgph" descr="IMGQ:propane gas cylinder delivery"/>
           <p:cNvSpPr/>
           <p:nvPr/>
         </p:nvSpPr>
         <p:spPr>
           <a:xfrm>
-            <a:off x="5806440" y="1051560"/>
-            <a:ext cx="5298947" cy="4629150"/>
+            <a:off x="6080760" y="1965960"/>
+            <a:ext cx="5303520" cy="4572000"/>
           </a:xfrm>
           <a:prstGeom prst="roundRect">
             <a:avLst/>
@@ -6143,8 +6551,8 @@
         </p:nvSpPr>
         <p:spPr>
           <a:xfrm>
-            <a:off x="6080760" y="2726055"/>
-            <a:ext cx="4750307" cy="1280160"/>
+            <a:off x="6355080" y="3611880"/>
+            <a:ext cx="4754880" cy="1280160"/>
           </a:xfrm>
           <a:prstGeom prst="rect">
             <a:avLst/>
@@ -6165,7 +6573,7 @@
                 </a:solidFill>
                 <a:latin typeface="Montserrat"/>
               </a:rPr>
-              <a:t>IMAGEN REALISTA</a:t>
+              <a:t>IMAGEN</a:t>
             </a:r>
           </a:p>
           <a:p>
@@ -6177,7 +6585,7 @@
                 </a:solidFill>
                 <a:latin typeface="Montserrat"/>
               </a:rPr>
-              <a:t>propane gas cylinder strap secured</a:t>
+              <a:t>propane gas cylinder delivery</a:t>
             </a:r>
           </a:p>
         </p:txBody>
@@ -6187,6 +6595,18 @@
   <p:clrMapOvr>
     <a:masterClrMapping/>
   </p:clrMapOvr>
+  <mc:AlternateContent xmlns:mc="http://schemas.openxmlformats.org/markup-compatibility/2006">
+    <mc:Choice xmlns:p14="http://schemas.microsoft.com/office/powerpoint/2010/main" Requires="p14">
+      <p:transition spd="med" p14:dur="700">
+        <p14:cube dir="r"/>
+      </p:transition>
+    </mc:Choice>
+    <mc:Fallback>
+      <p:transition spd="med">
+        <p:push dir="r"/>
+      </p:transition>
+    </mc:Fallback>
+  </mc:AlternateContent>
 </p:sld>
 </file>
 
@@ -6274,7 +6694,7 @@
                 </a:solidFill>
                 <a:latin typeface="Montserrat"/>
               </a:rPr>
-              <a:t>013 / 016</a:t>
+              <a:t>013 / 022</a:t>
             </a:r>
           </a:p>
         </p:txBody>
@@ -6342,7 +6762,7 @@
                 </a:solidFill>
                 <a:latin typeface="Montserrat"/>
               </a:rPr>
-              <a:t>APARTADO 5 · PROHIBICIÓN</a:t>
+              <a:t>APARTADO 4.4 · COMUNICACIÓN</a:t>
             </a:r>
           </a:p>
         </p:txBody>
@@ -6376,14 +6796,14 @@
                 </a:solidFill>
                 <a:latin typeface="Montserrat"/>
               </a:rPr>
-              <a:t>La tubería no es un cable</a:t>
-            </a:r>
-          </a:p>
-        </p:txBody>
-      </p:sp>
-      <p:sp>
-        <p:nvSpPr>
-          <p:cNvPr id="7" name="Rounded Rectangle 6"/>
+              <a:t>La excepción: no se comunica</a:t>
+            </a:r>
+          </a:p>
+        </p:txBody>
+      </p:sp>
+      <p:sp>
+        <p:nvSpPr>
+          <p:cNvPr id="7" name="Rectangle 6"/>
           <p:cNvSpPr/>
           <p:nvPr/>
         </p:nvSpPr>
@@ -6392,7 +6812,7 @@
             <a:off x="868680" y="1627632"/>
             <a:ext cx="2011680" cy="73152"/>
           </a:xfrm>
-          <a:prstGeom prst="roundRect">
+          <a:prstGeom prst="rect">
             <a:avLst/>
           </a:prstGeom>
           <a:solidFill>
@@ -6433,8 +6853,8 @@
         </p:nvSpPr>
         <p:spPr>
           <a:xfrm>
-            <a:off x="822960" y="1965960"/>
-            <a:ext cx="4983480" cy="4206240"/>
+            <a:off x="6355080" y="1965960"/>
+            <a:ext cx="5029200" cy="4206240"/>
           </a:xfrm>
           <a:prstGeom prst="rect">
             <a:avLst/>
@@ -6468,7 +6888,7 @@
                 </a:solidFill>
                 <a:latin typeface="Montserrat"/>
               </a:rPr>
-              <a:t>Prohibido usarla como toma de tierra</a:t>
+              <a:t>No es precisa ninguna comunicación</a:t>
             </a:r>
           </a:p>
           <a:p>
@@ -6493,7 +6913,7 @@
                 </a:solidFill>
                 <a:latin typeface="Montserrat"/>
               </a:rPr>
-              <a:t>Ni para instalaciones eléctricas</a:t>
+              <a:t>El titular conserva el certificado</a:t>
             </a:r>
           </a:p>
           <a:p>
@@ -6518,21 +6938,21 @@
                 </a:solidFill>
                 <a:latin typeface="Montserrat"/>
               </a:rPr>
-              <a:t>Ni para instalaciones radioeléctricas</a:t>
-            </a:r>
-          </a:p>
-        </p:txBody>
-      </p:sp>
-      <p:sp>
-        <p:nvSpPr>
-          <p:cNvPr id="9" name="imgph" descr="IMGQ:electrical grounding wire clamp"/>
+              <a:t>A disposición de la Administración si lo pide</a:t>
+            </a:r>
+          </a:p>
+        </p:txBody>
+      </p:sp>
+      <p:sp>
+        <p:nvSpPr>
+          <p:cNvPr id="9" name="imgph" descr="IMGQ:filing documents folder cabinet"/>
           <p:cNvSpPr/>
           <p:nvPr/>
         </p:nvSpPr>
         <p:spPr>
           <a:xfrm>
-            <a:off x="5806440" y="1051560"/>
-            <a:ext cx="5298947" cy="4629150"/>
+            <a:off x="822960" y="1965960"/>
+            <a:ext cx="5303520" cy="4572000"/>
           </a:xfrm>
           <a:prstGeom prst="roundRect">
             <a:avLst/>
@@ -6577,8 +6997,8 @@
         </p:nvSpPr>
         <p:spPr>
           <a:xfrm>
-            <a:off x="6080760" y="2726055"/>
-            <a:ext cx="4750307" cy="1280160"/>
+            <a:off x="1097280" y="3611880"/>
+            <a:ext cx="4754880" cy="1280160"/>
           </a:xfrm>
           <a:prstGeom prst="rect">
             <a:avLst/>
@@ -6599,7 +7019,7 @@
                 </a:solidFill>
                 <a:latin typeface="Montserrat"/>
               </a:rPr>
-              <a:t>IMAGEN REALISTA</a:t>
+              <a:t>IMAGEN</a:t>
             </a:r>
           </a:p>
           <a:p>
@@ -6611,7 +7031,7 @@
                 </a:solidFill>
                 <a:latin typeface="Montserrat"/>
               </a:rPr>
-              <a:t>electrical grounding wire clamp</a:t>
+              <a:t>filing documents folder cabinet</a:t>
             </a:r>
           </a:p>
         </p:txBody>
@@ -6621,6 +7041,18 @@
   <p:clrMapOvr>
     <a:masterClrMapping/>
   </p:clrMapOvr>
+  <mc:AlternateContent xmlns:mc="http://schemas.openxmlformats.org/markup-compatibility/2006">
+    <mc:Choice xmlns:p14="http://schemas.microsoft.com/office/powerpoint/2010/main" Requires="p14">
+      <p:transition spd="med" p14:dur="700">
+        <p14:cube dir="l"/>
+      </p:transition>
+    </mc:Choice>
+    <mc:Fallback>
+      <p:transition spd="med">
+        <p:push dir="l"/>
+      </p:transition>
+    </mc:Fallback>
+  </mc:AlternateContent>
 </p:sld>
 </file>
 
@@ -6708,7 +7140,7 @@
                 </a:solidFill>
                 <a:latin typeface="Montserrat"/>
               </a:rPr>
-              <a:t>014 / 016</a:t>
+              <a:t>014 / 022</a:t>
             </a:r>
           </a:p>
         </p:txBody>
@@ -6749,84 +7181,16 @@
       </p:sp>
       <p:sp>
         <p:nvSpPr>
-          <p:cNvPr id="5" name="TextBox 4"/>
-          <p:cNvSpPr txBox="1"/>
-          <p:nvPr/>
-        </p:nvSpPr>
-        <p:spPr>
-          <a:xfrm>
-            <a:off x="822960" y="457200"/>
-            <a:ext cx="10058400" cy="365760"/>
-          </a:xfrm>
-          <a:prstGeom prst="rect">
-            <a:avLst/>
-          </a:prstGeom>
-          <a:noFill/>
-        </p:spPr>
-        <p:txBody>
-          <a:bodyPr wrap="square">
-            <a:spAutoFit/>
-          </a:bodyPr>
-          <a:lstStyle/>
-          <a:p>
-            <a:r>
-              <a:rPr sz="1300" b="1" i="0">
-                <a:solidFill>
-                  <a:srgbClr val="E8801A"/>
-                </a:solidFill>
-                <a:latin typeface="Montserrat"/>
-              </a:rPr>
-              <a:t>APARTADO 6 · MANTENIMIENTO</a:t>
-            </a:r>
-          </a:p>
-        </p:txBody>
-      </p:sp>
-      <p:sp>
-        <p:nvSpPr>
-          <p:cNvPr id="6" name="TextBox 5"/>
-          <p:cNvSpPr txBox="1"/>
-          <p:nvPr/>
-        </p:nvSpPr>
-        <p:spPr>
-          <a:xfrm>
-            <a:off x="822960" y="868680"/>
-            <a:ext cx="10515600" cy="914400"/>
-          </a:xfrm>
-          <a:prstGeom prst="rect">
-            <a:avLst/>
-          </a:prstGeom>
-          <a:noFill/>
-        </p:spPr>
-        <p:txBody>
-          <a:bodyPr wrap="square">
-            <a:spAutoFit/>
-          </a:bodyPr>
-          <a:lstStyle/>
-          <a:p>
-            <a:r>
-              <a:rPr sz="2800" b="1" i="0">
-                <a:solidFill>
-                  <a:srgbClr val="1E2761"/>
-                </a:solidFill>
-                <a:latin typeface="Montserrat"/>
-              </a:rPr>
-              <a:t>Revisión cada 4 años</a:t>
-            </a:r>
-          </a:p>
-        </p:txBody>
-      </p:sp>
-      <p:sp>
-        <p:nvSpPr>
-          <p:cNvPr id="7" name="Rounded Rectangle 6"/>
+          <p:cNvPr id="5" name="Rectangle 4"/>
           <p:cNvSpPr/>
           <p:nvPr/>
         </p:nvSpPr>
         <p:spPr>
           <a:xfrm>
-            <a:off x="868680" y="1627632"/>
-            <a:ext cx="2011680" cy="73152"/>
-          </a:xfrm>
-          <a:prstGeom prst="roundRect">
+            <a:off x="0" y="0"/>
+            <a:ext cx="12191695" cy="1143000"/>
+          </a:xfrm>
+          <a:prstGeom prst="rect">
             <a:avLst/>
           </a:prstGeom>
           <a:solidFill>
@@ -6861,14 +7225,14 @@
       </p:sp>
       <p:sp>
         <p:nvSpPr>
-          <p:cNvPr id="8" name="TextBox 7"/>
+          <p:cNvPr id="6" name="TextBox 5"/>
           <p:cNvSpPr txBox="1"/>
           <p:nvPr/>
         </p:nvSpPr>
         <p:spPr>
           <a:xfrm>
-            <a:off x="822960" y="1965960"/>
-            <a:ext cx="4983480" cy="4206240"/>
+            <a:off x="822960" y="274320"/>
+            <a:ext cx="10515600" cy="640080"/>
           </a:xfrm>
           <a:prstGeom prst="rect">
             <a:avLst/>
@@ -6881,117 +7245,62 @@
           </a:bodyPr>
           <a:lstStyle/>
           <a:p>
-            <a:pPr>
-              <a:spcAft>
-                <a:spcPts val="1100"/>
-              </a:spcAft>
-            </a:pPr>
-            <a:r>
-              <a:rPr sz="1600" b="1" i="0">
-                <a:solidFill>
-                  <a:srgbClr val="E8801A"/>
-                </a:solidFill>
-                <a:latin typeface="Montserrat"/>
-              </a:rPr>
-              <a:t>▸  </a:t>
-            </a:r>
-            <a:r>
-              <a:rPr sz="1600" b="0" i="0">
-                <a:solidFill>
-                  <a:srgbClr val="1B2330"/>
-                </a:solidFill>
-                <a:latin typeface="Montserrat"/>
-              </a:rPr>
-              <a:t>El titular es el responsable</a:t>
-            </a:r>
-          </a:p>
-          <a:p>
-            <a:pPr>
-              <a:spcAft>
-                <a:spcPts val="1100"/>
-              </a:spcAft>
-            </a:pPr>
-            <a:r>
-              <a:rPr sz="1600" b="1" i="0">
-                <a:solidFill>
-                  <a:srgbClr val="E8801A"/>
-                </a:solidFill>
-                <a:latin typeface="Montserrat"/>
-              </a:rPr>
-              <a:t>▸  </a:t>
-            </a:r>
-            <a:r>
-              <a:rPr sz="1600" b="0" i="0">
-                <a:solidFill>
-                  <a:srgbClr val="1B2330"/>
-                </a:solidFill>
-                <a:latin typeface="Montserrat"/>
-              </a:rPr>
-              <a:t>Encarga la revisión a una instaladora</a:t>
-            </a:r>
-          </a:p>
-          <a:p>
-            <a:pPr>
-              <a:spcAft>
-                <a:spcPts val="1100"/>
-              </a:spcAft>
-            </a:pPr>
-            <a:r>
-              <a:rPr sz="1600" b="1" i="0">
-                <a:solidFill>
-                  <a:srgbClr val="E8801A"/>
-                </a:solidFill>
-                <a:latin typeface="Montserrat"/>
-              </a:rPr>
-              <a:t>▸  </a:t>
-            </a:r>
-            <a:r>
-              <a:rPr sz="1600" b="0" i="0">
-                <a:solidFill>
-                  <a:srgbClr val="1B2330"/>
-                </a:solidFill>
-                <a:latin typeface="Montserrat"/>
-              </a:rPr>
-              <a:t>Cada 4 años · es revisión, no inspección</a:t>
-            </a:r>
-          </a:p>
-          <a:p>
-            <a:pPr>
-              <a:spcAft>
-                <a:spcPts val="1100"/>
-              </a:spcAft>
-            </a:pPr>
-            <a:r>
-              <a:rPr sz="1600" b="1" i="0">
-                <a:solidFill>
-                  <a:srgbClr val="E8801A"/>
-                </a:solidFill>
-                <a:latin typeface="Montserrat"/>
-              </a:rPr>
-              <a:t>▸  </a:t>
-            </a:r>
-            <a:r>
-              <a:rPr sz="1600" b="0" i="0">
-                <a:solidFill>
-                  <a:srgbClr val="1B2330"/>
-                </a:solidFill>
-                <a:latin typeface="Montserrat"/>
-              </a:rPr>
-              <a:t>Se documenta con el modelo IRV-2</a:t>
-            </a:r>
-          </a:p>
-        </p:txBody>
-      </p:sp>
-      <p:sp>
-        <p:nvSpPr>
-          <p:cNvPr id="9" name="imgph" descr="IMGQ:technician checking gas installation caravan"/>
+            <a:r>
+              <a:rPr sz="2400" b="1" i="0">
+                <a:solidFill>
+                  <a:srgbClr val="FFFFFF"/>
+                </a:solidFill>
+                <a:latin typeface="Montserrat"/>
+              </a:rPr>
+              <a:t>⚡  PREGUNTA RÁPIDA</a:t>
+            </a:r>
+          </a:p>
+        </p:txBody>
+      </p:sp>
+      <p:sp>
+        <p:nvSpPr>
+          <p:cNvPr id="7" name="TextBox 6"/>
+          <p:cNvSpPr txBox="1"/>
+          <p:nvPr/>
+        </p:nvSpPr>
+        <p:spPr>
+          <a:xfrm>
+            <a:off x="822960" y="1508760"/>
+            <a:ext cx="10515600" cy="1371600"/>
+          </a:xfrm>
+          <a:prstGeom prst="rect">
+            <a:avLst/>
+          </a:prstGeom>
+          <a:noFill/>
+        </p:spPr>
+        <p:txBody>
+          <a:bodyPr wrap="square">
+            <a:spAutoFit/>
+          </a:bodyPr>
+          <a:lstStyle/>
+          <a:p>
+            <a:r>
+              <a:rPr sz="2400" b="1" i="0">
+                <a:solidFill>
+                  <a:srgbClr val="1E2761"/>
+                </a:solidFill>
+                <a:latin typeface="Montserrat"/>
+              </a:rPr>
+              <a:t>Tras la puesta en servicio de una instalación de GLP en caravana, ¿qué debe hacer el titular?</a:t>
+            </a:r>
+          </a:p>
+        </p:txBody>
+      </p:sp>
+      <p:sp>
+        <p:nvSpPr>
+          <p:cNvPr id="8" name="Rounded Rectangle 7"/>
           <p:cNvSpPr/>
           <p:nvPr/>
         </p:nvSpPr>
         <p:spPr>
           <a:xfrm>
-            <a:off x="5806440" y="1051560"/>
-            <a:ext cx="5298947" cy="4629150"/>
+            <a:off x="822960" y="3291840"/>
+            <a:ext cx="4983480" cy="1143000"/>
           </a:xfrm>
           <a:prstGeom prst="roundRect">
             <a:avLst/>
@@ -7030,14 +7339,58 @@
       </p:sp>
       <p:sp>
         <p:nvSpPr>
+          <p:cNvPr id="9" name="Rectangle 8"/>
+          <p:cNvSpPr/>
+          <p:nvPr/>
+        </p:nvSpPr>
+        <p:spPr>
+          <a:xfrm>
+            <a:off x="822960" y="3291840"/>
+            <a:ext cx="640080" cy="1143000"/>
+          </a:xfrm>
+          <a:prstGeom prst="rect">
+            <a:avLst/>
+          </a:prstGeom>
+          <a:solidFill>
+            <a:srgbClr val="1E2761"/>
+          </a:solidFill>
+          <a:ln>
+            <a:noFill/>
+          </a:ln>
+          <a:effectLst/>
+        </p:spPr>
+        <p:style>
+          <a:lnRef idx="1">
+            <a:schemeClr val="accent1"/>
+          </a:lnRef>
+          <a:fillRef idx="3">
+            <a:schemeClr val="accent1"/>
+          </a:fillRef>
+          <a:effectRef idx="2">
+            <a:schemeClr val="accent1"/>
+          </a:effectRef>
+          <a:fontRef idx="minor">
+            <a:schemeClr val="lt1"/>
+          </a:fontRef>
+        </p:style>
+        <p:txBody>
+          <a:bodyPr rtlCol="0" anchor="ctr"/>
+          <a:lstStyle/>
+          <a:p>
+            <a:pPr algn="ctr"/>
+          </a:p>
+        </p:txBody>
+      </p:sp>
+      <p:sp>
+        <p:nvSpPr>
           <p:cNvPr id="10" name="TextBox 9"/>
           <p:cNvSpPr txBox="1"/>
           <p:nvPr/>
         </p:nvSpPr>
         <p:spPr>
           <a:xfrm>
-            <a:off x="6080760" y="2726055"/>
-            <a:ext cx="4750307" cy="1280160"/>
+            <a:off x="822960" y="3611880"/>
+            <a:ext cx="640080" cy="548640"/>
           </a:xfrm>
           <a:prstGeom prst="rect">
             <a:avLst/>
@@ -7052,25 +7405,524 @@
           <a:p>
             <a:pPr algn="ctr"/>
             <a:r>
-              <a:rPr sz="1400" b="1" i="0">
-                <a:solidFill>
-                  <a:srgbClr val="64748B"/>
-                </a:solidFill>
-                <a:latin typeface="Montserrat"/>
-              </a:rPr>
-              <a:t>IMAGEN REALISTA</a:t>
-            </a:r>
-          </a:p>
+              <a:rPr sz="2200" b="1" i="0">
+                <a:solidFill>
+                  <a:srgbClr val="FFFFFF"/>
+                </a:solidFill>
+                <a:latin typeface="Montserrat"/>
+              </a:rPr>
+              <a:t>A</a:t>
+            </a:r>
+          </a:p>
+        </p:txBody>
+      </p:sp>
+      <p:sp>
+        <p:nvSpPr>
+          <p:cNvPr id="11" name="TextBox 10"/>
+          <p:cNvSpPr txBox="1"/>
+          <p:nvPr/>
+        </p:nvSpPr>
+        <p:spPr>
+          <a:xfrm>
+            <a:off x="1600200" y="3474720"/>
+            <a:ext cx="4114800" cy="868680"/>
+          </a:xfrm>
+          <a:prstGeom prst="rect">
+            <a:avLst/>
+          </a:prstGeom>
+          <a:noFill/>
+        </p:spPr>
+        <p:txBody>
+          <a:bodyPr wrap="square">
+            <a:spAutoFit/>
+          </a:bodyPr>
+          <a:lstStyle/>
+          <a:p>
+            <a:r>
+              <a:rPr sz="1400" b="0" i="0">
+                <a:solidFill>
+                  <a:srgbClr val="1B2330"/>
+                </a:solidFill>
+                <a:latin typeface="Montserrat"/>
+              </a:rPr>
+              <a:t>Comunicarla a la Comunidad Autónoma en 30 días</a:t>
+            </a:r>
+          </a:p>
+        </p:txBody>
+      </p:sp>
+      <p:sp>
+        <p:nvSpPr>
+          <p:cNvPr id="12" name="Rounded Rectangle 11"/>
+          <p:cNvSpPr/>
+          <p:nvPr/>
+        </p:nvSpPr>
+        <p:spPr>
+          <a:xfrm>
+            <a:off x="6355080" y="3291840"/>
+            <a:ext cx="4983480" cy="1143000"/>
+          </a:xfrm>
+          <a:prstGeom prst="roundRect">
+            <a:avLst/>
+          </a:prstGeom>
+          <a:solidFill>
+            <a:srgbClr val="F3F6FB"/>
+          </a:solidFill>
+          <a:ln w="12700">
+            <a:solidFill>
+              <a:srgbClr val="C7D2E6"/>
+            </a:solidFill>
+          </a:ln>
+          <a:effectLst/>
+        </p:spPr>
+        <p:style>
+          <a:lnRef idx="1">
+            <a:schemeClr val="accent1"/>
+          </a:lnRef>
+          <a:fillRef idx="3">
+            <a:schemeClr val="accent1"/>
+          </a:fillRef>
+          <a:effectRef idx="2">
+            <a:schemeClr val="accent1"/>
+          </a:effectRef>
+          <a:fontRef idx="minor">
+            <a:schemeClr val="lt1"/>
+          </a:fontRef>
+        </p:style>
+        <p:txBody>
+          <a:bodyPr rtlCol="0" anchor="ctr"/>
+          <a:lstStyle/>
           <a:p>
             <a:pPr algn="ctr"/>
-            <a:r>
-              <a:rPr sz="1100" b="0" i="1">
-                <a:solidFill>
-                  <a:srgbClr val="64748B"/>
-                </a:solidFill>
-                <a:latin typeface="Montserrat"/>
-              </a:rPr>
-              <a:t>technician checking gas installation caravan</a:t>
+          </a:p>
+        </p:txBody>
+      </p:sp>
+      <p:sp>
+        <p:nvSpPr>
+          <p:cNvPr id="13" name="Rectangle 12"/>
+          <p:cNvSpPr/>
+          <p:nvPr/>
+        </p:nvSpPr>
+        <p:spPr>
+          <a:xfrm>
+            <a:off x="6355080" y="3291840"/>
+            <a:ext cx="640080" cy="1143000"/>
+          </a:xfrm>
+          <a:prstGeom prst="rect">
+            <a:avLst/>
+          </a:prstGeom>
+          <a:solidFill>
+            <a:srgbClr val="1E2761"/>
+          </a:solidFill>
+          <a:ln>
+            <a:noFill/>
+          </a:ln>
+          <a:effectLst/>
+        </p:spPr>
+        <p:style>
+          <a:lnRef idx="1">
+            <a:schemeClr val="accent1"/>
+          </a:lnRef>
+          <a:fillRef idx="3">
+            <a:schemeClr val="accent1"/>
+          </a:fillRef>
+          <a:effectRef idx="2">
+            <a:schemeClr val="accent1"/>
+          </a:effectRef>
+          <a:fontRef idx="minor">
+            <a:schemeClr val="lt1"/>
+          </a:fontRef>
+        </p:style>
+        <p:txBody>
+          <a:bodyPr rtlCol="0" anchor="ctr"/>
+          <a:lstStyle/>
+          <a:p>
+            <a:pPr algn="ctr"/>
+          </a:p>
+        </p:txBody>
+      </p:sp>
+      <p:sp>
+        <p:nvSpPr>
+          <p:cNvPr id="14" name="TextBox 13"/>
+          <p:cNvSpPr txBox="1"/>
+          <p:nvPr/>
+        </p:nvSpPr>
+        <p:spPr>
+          <a:xfrm>
+            <a:off x="6355080" y="3611880"/>
+            <a:ext cx="640080" cy="548640"/>
+          </a:xfrm>
+          <a:prstGeom prst="rect">
+            <a:avLst/>
+          </a:prstGeom>
+          <a:noFill/>
+        </p:spPr>
+        <p:txBody>
+          <a:bodyPr wrap="square">
+            <a:spAutoFit/>
+          </a:bodyPr>
+          <a:lstStyle/>
+          <a:p>
+            <a:pPr algn="ctr"/>
+            <a:r>
+              <a:rPr sz="2200" b="1" i="0">
+                <a:solidFill>
+                  <a:srgbClr val="FFFFFF"/>
+                </a:solidFill>
+                <a:latin typeface="Montserrat"/>
+              </a:rPr>
+              <a:t>B</a:t>
+            </a:r>
+          </a:p>
+        </p:txBody>
+      </p:sp>
+      <p:sp>
+        <p:nvSpPr>
+          <p:cNvPr id="15" name="TextBox 14"/>
+          <p:cNvSpPr txBox="1"/>
+          <p:nvPr/>
+        </p:nvSpPr>
+        <p:spPr>
+          <a:xfrm>
+            <a:off x="7132320" y="3474720"/>
+            <a:ext cx="4114800" cy="868680"/>
+          </a:xfrm>
+          <a:prstGeom prst="rect">
+            <a:avLst/>
+          </a:prstGeom>
+          <a:noFill/>
+        </p:spPr>
+        <p:txBody>
+          <a:bodyPr wrap="square">
+            <a:spAutoFit/>
+          </a:bodyPr>
+          <a:lstStyle/>
+          <a:p>
+            <a:r>
+              <a:rPr sz="1400" b="0" i="0">
+                <a:solidFill>
+                  <a:srgbClr val="1B2330"/>
+                </a:solidFill>
+                <a:latin typeface="Montserrat"/>
+              </a:rPr>
+              <a:t>No comunicar nada y conservar el certificado</a:t>
+            </a:r>
+          </a:p>
+        </p:txBody>
+      </p:sp>
+      <p:sp>
+        <p:nvSpPr>
+          <p:cNvPr id="16" name="Rounded Rectangle 15"/>
+          <p:cNvSpPr/>
+          <p:nvPr/>
+        </p:nvSpPr>
+        <p:spPr>
+          <a:xfrm>
+            <a:off x="822960" y="4617720"/>
+            <a:ext cx="4983480" cy="1143000"/>
+          </a:xfrm>
+          <a:prstGeom prst="roundRect">
+            <a:avLst/>
+          </a:prstGeom>
+          <a:solidFill>
+            <a:srgbClr val="F3F6FB"/>
+          </a:solidFill>
+          <a:ln w="12700">
+            <a:solidFill>
+              <a:srgbClr val="C7D2E6"/>
+            </a:solidFill>
+          </a:ln>
+          <a:effectLst/>
+        </p:spPr>
+        <p:style>
+          <a:lnRef idx="1">
+            <a:schemeClr val="accent1"/>
+          </a:lnRef>
+          <a:fillRef idx="3">
+            <a:schemeClr val="accent1"/>
+          </a:fillRef>
+          <a:effectRef idx="2">
+            <a:schemeClr val="accent1"/>
+          </a:effectRef>
+          <a:fontRef idx="minor">
+            <a:schemeClr val="lt1"/>
+          </a:fontRef>
+        </p:style>
+        <p:txBody>
+          <a:bodyPr rtlCol="0" anchor="ctr"/>
+          <a:lstStyle/>
+          <a:p>
+            <a:pPr algn="ctr"/>
+          </a:p>
+        </p:txBody>
+      </p:sp>
+      <p:sp>
+        <p:nvSpPr>
+          <p:cNvPr id="17" name="Rectangle 16"/>
+          <p:cNvSpPr/>
+          <p:nvPr/>
+        </p:nvSpPr>
+        <p:spPr>
+          <a:xfrm>
+            <a:off x="822960" y="4617720"/>
+            <a:ext cx="640080" cy="1143000"/>
+          </a:xfrm>
+          <a:prstGeom prst="rect">
+            <a:avLst/>
+          </a:prstGeom>
+          <a:solidFill>
+            <a:srgbClr val="1E2761"/>
+          </a:solidFill>
+          <a:ln>
+            <a:noFill/>
+          </a:ln>
+          <a:effectLst/>
+        </p:spPr>
+        <p:style>
+          <a:lnRef idx="1">
+            <a:schemeClr val="accent1"/>
+          </a:lnRef>
+          <a:fillRef idx="3">
+            <a:schemeClr val="accent1"/>
+          </a:fillRef>
+          <a:effectRef idx="2">
+            <a:schemeClr val="accent1"/>
+          </a:effectRef>
+          <a:fontRef idx="minor">
+            <a:schemeClr val="lt1"/>
+          </a:fontRef>
+        </p:style>
+        <p:txBody>
+          <a:bodyPr rtlCol="0" anchor="ctr"/>
+          <a:lstStyle/>
+          <a:p>
+            <a:pPr algn="ctr"/>
+          </a:p>
+        </p:txBody>
+      </p:sp>
+      <p:sp>
+        <p:nvSpPr>
+          <p:cNvPr id="18" name="TextBox 17"/>
+          <p:cNvSpPr txBox="1"/>
+          <p:nvPr/>
+        </p:nvSpPr>
+        <p:spPr>
+          <a:xfrm>
+            <a:off x="822960" y="4937760"/>
+            <a:ext cx="640080" cy="548640"/>
+          </a:xfrm>
+          <a:prstGeom prst="rect">
+            <a:avLst/>
+          </a:prstGeom>
+          <a:noFill/>
+        </p:spPr>
+        <p:txBody>
+          <a:bodyPr wrap="square">
+            <a:spAutoFit/>
+          </a:bodyPr>
+          <a:lstStyle/>
+          <a:p>
+            <a:pPr algn="ctr"/>
+            <a:r>
+              <a:rPr sz="2200" b="1" i="0">
+                <a:solidFill>
+                  <a:srgbClr val="FFFFFF"/>
+                </a:solidFill>
+                <a:latin typeface="Montserrat"/>
+              </a:rPr>
+              <a:t>C</a:t>
+            </a:r>
+          </a:p>
+        </p:txBody>
+      </p:sp>
+      <p:sp>
+        <p:nvSpPr>
+          <p:cNvPr id="19" name="TextBox 18"/>
+          <p:cNvSpPr txBox="1"/>
+          <p:nvPr/>
+        </p:nvSpPr>
+        <p:spPr>
+          <a:xfrm>
+            <a:off x="1600200" y="4800600"/>
+            <a:ext cx="4114800" cy="868680"/>
+          </a:xfrm>
+          <a:prstGeom prst="rect">
+            <a:avLst/>
+          </a:prstGeom>
+          <a:noFill/>
+        </p:spPr>
+        <p:txBody>
+          <a:bodyPr wrap="square">
+            <a:spAutoFit/>
+          </a:bodyPr>
+          <a:lstStyle/>
+          <a:p>
+            <a:r>
+              <a:rPr sz="1400" b="0" i="0">
+                <a:solidFill>
+                  <a:srgbClr val="1B2330"/>
+                </a:solidFill>
+                <a:latin typeface="Montserrat"/>
+              </a:rPr>
+              <a:t>Registrarla ante el Ministerio</a:t>
+            </a:r>
+          </a:p>
+        </p:txBody>
+      </p:sp>
+      <p:sp>
+        <p:nvSpPr>
+          <p:cNvPr id="20" name="Rounded Rectangle 19"/>
+          <p:cNvSpPr/>
+          <p:nvPr/>
+        </p:nvSpPr>
+        <p:spPr>
+          <a:xfrm>
+            <a:off x="6355080" y="4617720"/>
+            <a:ext cx="4983480" cy="1143000"/>
+          </a:xfrm>
+          <a:prstGeom prst="roundRect">
+            <a:avLst/>
+          </a:prstGeom>
+          <a:solidFill>
+            <a:srgbClr val="F3F6FB"/>
+          </a:solidFill>
+          <a:ln w="12700">
+            <a:solidFill>
+              <a:srgbClr val="C7D2E6"/>
+            </a:solidFill>
+          </a:ln>
+          <a:effectLst/>
+        </p:spPr>
+        <p:style>
+          <a:lnRef idx="1">
+            <a:schemeClr val="accent1"/>
+          </a:lnRef>
+          <a:fillRef idx="3">
+            <a:schemeClr val="accent1"/>
+          </a:fillRef>
+          <a:effectRef idx="2">
+            <a:schemeClr val="accent1"/>
+          </a:effectRef>
+          <a:fontRef idx="minor">
+            <a:schemeClr val="lt1"/>
+          </a:fontRef>
+        </p:style>
+        <p:txBody>
+          <a:bodyPr rtlCol="0" anchor="ctr"/>
+          <a:lstStyle/>
+          <a:p>
+            <a:pPr algn="ctr"/>
+          </a:p>
+        </p:txBody>
+      </p:sp>
+      <p:sp>
+        <p:nvSpPr>
+          <p:cNvPr id="21" name="Rectangle 20"/>
+          <p:cNvSpPr/>
+          <p:nvPr/>
+        </p:nvSpPr>
+        <p:spPr>
+          <a:xfrm>
+            <a:off x="6355080" y="4617720"/>
+            <a:ext cx="640080" cy="1143000"/>
+          </a:xfrm>
+          <a:prstGeom prst="rect">
+            <a:avLst/>
+          </a:prstGeom>
+          <a:solidFill>
+            <a:srgbClr val="1E2761"/>
+          </a:solidFill>
+          <a:ln>
+            <a:noFill/>
+          </a:ln>
+          <a:effectLst/>
+        </p:spPr>
+        <p:style>
+          <a:lnRef idx="1">
+            <a:schemeClr val="accent1"/>
+          </a:lnRef>
+          <a:fillRef idx="3">
+            <a:schemeClr val="accent1"/>
+          </a:fillRef>
+          <a:effectRef idx="2">
+            <a:schemeClr val="accent1"/>
+          </a:effectRef>
+          <a:fontRef idx="minor">
+            <a:schemeClr val="lt1"/>
+          </a:fontRef>
+        </p:style>
+        <p:txBody>
+          <a:bodyPr rtlCol="0" anchor="ctr"/>
+          <a:lstStyle/>
+          <a:p>
+            <a:pPr algn="ctr"/>
+          </a:p>
+        </p:txBody>
+      </p:sp>
+      <p:sp>
+        <p:nvSpPr>
+          <p:cNvPr id="22" name="TextBox 21"/>
+          <p:cNvSpPr txBox="1"/>
+          <p:nvPr/>
+        </p:nvSpPr>
+        <p:spPr>
+          <a:xfrm>
+            <a:off x="6355080" y="4937760"/>
+            <a:ext cx="640080" cy="548640"/>
+          </a:xfrm>
+          <a:prstGeom prst="rect">
+            <a:avLst/>
+          </a:prstGeom>
+          <a:noFill/>
+        </p:spPr>
+        <p:txBody>
+          <a:bodyPr wrap="square">
+            <a:spAutoFit/>
+          </a:bodyPr>
+          <a:lstStyle/>
+          <a:p>
+            <a:pPr algn="ctr"/>
+            <a:r>
+              <a:rPr sz="2200" b="1" i="0">
+                <a:solidFill>
+                  <a:srgbClr val="FFFFFF"/>
+                </a:solidFill>
+                <a:latin typeface="Montserrat"/>
+              </a:rPr>
+              <a:t>D</a:t>
+            </a:r>
+          </a:p>
+        </p:txBody>
+      </p:sp>
+      <p:sp>
+        <p:nvSpPr>
+          <p:cNvPr id="23" name="TextBox 22"/>
+          <p:cNvSpPr txBox="1"/>
+          <p:nvPr/>
+        </p:nvSpPr>
+        <p:spPr>
+          <a:xfrm>
+            <a:off x="7132320" y="4800600"/>
+            <a:ext cx="4114800" cy="868680"/>
+          </a:xfrm>
+          <a:prstGeom prst="rect">
+            <a:avLst/>
+          </a:prstGeom>
+          <a:noFill/>
+        </p:spPr>
+        <p:txBody>
+          <a:bodyPr wrap="square">
+            <a:spAutoFit/>
+          </a:bodyPr>
+          <a:lstStyle/>
+          <a:p>
+            <a:r>
+              <a:rPr sz="1400" b="0" i="0">
+                <a:solidFill>
+                  <a:srgbClr val="1B2330"/>
+                </a:solidFill>
+                <a:latin typeface="Montserrat"/>
+              </a:rPr>
+              <a:t>Solicitar una inspección oficial</a:t>
             </a:r>
           </a:p>
         </p:txBody>
@@ -7080,6 +7932,18 @@
   <p:clrMapOvr>
     <a:masterClrMapping/>
   </p:clrMapOvr>
+  <mc:AlternateContent xmlns:mc="http://schemas.openxmlformats.org/markup-compatibility/2006">
+    <mc:Choice xmlns:p14="http://schemas.microsoft.com/office/powerpoint/2010/main" Requires="p14">
+      <p:transition spd="med" p14:dur="700">
+        <p14:cube dir="r"/>
+      </p:transition>
+    </mc:Choice>
+    <mc:Fallback>
+      <p:transition spd="med">
+        <p:push dir="r"/>
+      </p:transition>
+    </mc:Fallback>
+  </mc:AlternateContent>
 </p:sld>
 </file>
 
@@ -7167,7 +8031,7 @@
                 </a:solidFill>
                 <a:latin typeface="Montserrat"/>
               </a:rPr>
-              <a:t>015 / 016</a:t>
+              <a:t>015 / 022</a:t>
             </a:r>
           </a:p>
         </p:txBody>
@@ -7208,88 +8072,20 @@
       </p:sp>
       <p:sp>
         <p:nvSpPr>
-          <p:cNvPr id="5" name="TextBox 4"/>
-          <p:cNvSpPr txBox="1"/>
-          <p:nvPr/>
-        </p:nvSpPr>
-        <p:spPr>
-          <a:xfrm>
-            <a:off x="822960" y="457200"/>
-            <a:ext cx="10058400" cy="365760"/>
-          </a:xfrm>
-          <a:prstGeom prst="rect">
-            <a:avLst/>
-          </a:prstGeom>
-          <a:noFill/>
-        </p:spPr>
-        <p:txBody>
-          <a:bodyPr wrap="square">
-            <a:spAutoFit/>
-          </a:bodyPr>
-          <a:lstStyle/>
-          <a:p>
-            <a:r>
-              <a:rPr sz="1300" b="1" i="0">
-                <a:solidFill>
-                  <a:srgbClr val="E8801A"/>
-                </a:solidFill>
-                <a:latin typeface="Montserrat"/>
-              </a:rPr>
-              <a:t>ANEXO 1 · MODELOS IRV</a:t>
-            </a:r>
-          </a:p>
-        </p:txBody>
-      </p:sp>
-      <p:sp>
-        <p:nvSpPr>
-          <p:cNvPr id="6" name="TextBox 5"/>
-          <p:cNvSpPr txBox="1"/>
-          <p:nvPr/>
-        </p:nvSpPr>
-        <p:spPr>
-          <a:xfrm>
-            <a:off x="822960" y="868680"/>
-            <a:ext cx="10515600" cy="914400"/>
-          </a:xfrm>
-          <a:prstGeom prst="rect">
-            <a:avLst/>
-          </a:prstGeom>
-          <a:noFill/>
-        </p:spPr>
-        <p:txBody>
-          <a:bodyPr wrap="square">
-            <a:spAutoFit/>
-          </a:bodyPr>
-          <a:lstStyle/>
-          <a:p>
-            <a:r>
-              <a:rPr sz="2800" b="1" i="0">
-                <a:solidFill>
-                  <a:srgbClr val="1E2761"/>
-                </a:solidFill>
-                <a:latin typeface="Montserrat"/>
-              </a:rPr>
-              <a:t>Los dos impresos oficiales</a:t>
-            </a:r>
-          </a:p>
-        </p:txBody>
-      </p:sp>
-      <p:sp>
-        <p:nvSpPr>
-          <p:cNvPr id="7" name="Rounded Rectangle 6"/>
+          <p:cNvPr id="5" name="Rectangle 4"/>
           <p:cNvSpPr/>
           <p:nvPr/>
         </p:nvSpPr>
         <p:spPr>
           <a:xfrm>
-            <a:off x="868680" y="1627632"/>
-            <a:ext cx="2011680" cy="73152"/>
-          </a:xfrm>
-          <a:prstGeom prst="roundRect">
+            <a:off x="0" y="0"/>
+            <a:ext cx="12191695" cy="1143000"/>
+          </a:xfrm>
+          <a:prstGeom prst="rect">
             <a:avLst/>
           </a:prstGeom>
           <a:solidFill>
-            <a:srgbClr val="E8801A"/>
+            <a:srgbClr val="1E8E4B"/>
           </a:solidFill>
           <a:ln>
             <a:noFill/>
@@ -7320,14 +8116,14 @@
       </p:sp>
       <p:sp>
         <p:nvSpPr>
-          <p:cNvPr id="8" name="TextBox 7"/>
+          <p:cNvPr id="6" name="TextBox 5"/>
           <p:cNvSpPr txBox="1"/>
           <p:nvPr/>
         </p:nvSpPr>
         <p:spPr>
           <a:xfrm>
-            <a:off x="822960" y="1965960"/>
-            <a:ext cx="4983480" cy="4206240"/>
+            <a:off x="822960" y="274320"/>
+            <a:ext cx="10515600" cy="640080"/>
           </a:xfrm>
           <a:prstGeom prst="rect">
             <a:avLst/>
@@ -7340,127 +8136,72 @@
           </a:bodyPr>
           <a:lstStyle/>
           <a:p>
-            <a:pPr>
-              <a:spcAft>
-                <a:spcPts val="1100"/>
-              </a:spcAft>
-            </a:pPr>
-            <a:r>
-              <a:rPr sz="1600" b="1" i="0">
-                <a:solidFill>
-                  <a:srgbClr val="E8801A"/>
-                </a:solidFill>
-                <a:latin typeface="Montserrat"/>
-              </a:rPr>
-              <a:t>▸  </a:t>
-            </a:r>
-            <a:r>
-              <a:rPr sz="1600" b="0" i="0">
-                <a:solidFill>
-                  <a:srgbClr val="1B2330"/>
-                </a:solidFill>
-                <a:latin typeface="Montserrat"/>
-              </a:rPr>
-              <a:t>IRV-1: certificado de instalación</a:t>
-            </a:r>
-          </a:p>
-          <a:p>
-            <a:pPr>
-              <a:spcAft>
-                <a:spcPts val="1100"/>
-              </a:spcAft>
-            </a:pPr>
-            <a:r>
-              <a:rPr sz="1600" b="1" i="0">
-                <a:solidFill>
-                  <a:srgbClr val="E8801A"/>
-                </a:solidFill>
-                <a:latin typeface="Montserrat"/>
-              </a:rPr>
-              <a:t>▸  </a:t>
-            </a:r>
-            <a:r>
-              <a:rPr sz="1600" b="0" i="0">
-                <a:solidFill>
-                  <a:srgbClr val="1B2330"/>
-                </a:solidFill>
-                <a:latin typeface="Montserrat"/>
-              </a:rPr>
-              <a:t>IRV-2: certificado de revisión periódica</a:t>
-            </a:r>
-          </a:p>
-          <a:p>
-            <a:pPr>
-              <a:spcAft>
-                <a:spcPts val="1100"/>
-              </a:spcAft>
-            </a:pPr>
-            <a:r>
-              <a:rPr sz="1600" b="1" i="0">
-                <a:solidFill>
-                  <a:srgbClr val="E8801A"/>
-                </a:solidFill>
-                <a:latin typeface="Montserrat"/>
-              </a:rPr>
-              <a:t>▸  </a:t>
-            </a:r>
-            <a:r>
-              <a:rPr sz="1600" b="0" i="0">
-                <a:solidFill>
-                  <a:srgbClr val="1B2330"/>
-                </a:solidFill>
-                <a:latin typeface="Montserrat"/>
-              </a:rPr>
-              <a:t>Modelos normalizados en el anexo 1</a:t>
-            </a:r>
-          </a:p>
-          <a:p>
-            <a:pPr>
-              <a:spcAft>
-                <a:spcPts val="1100"/>
-              </a:spcAft>
-            </a:pPr>
-            <a:r>
-              <a:rPr sz="1600" b="1" i="0">
-                <a:solidFill>
-                  <a:srgbClr val="E8801A"/>
-                </a:solidFill>
-                <a:latin typeface="Montserrat"/>
-              </a:rPr>
-              <a:t>▸  </a:t>
-            </a:r>
-            <a:r>
-              <a:rPr sz="1600" b="0" i="0">
-                <a:solidFill>
-                  <a:srgbClr val="1B2330"/>
-                </a:solidFill>
-                <a:latin typeface="Montserrat"/>
-              </a:rPr>
-              <a:t>Si ves 'IRV', piensa en caravana</a:t>
-            </a:r>
-          </a:p>
-        </p:txBody>
-      </p:sp>
-      <p:sp>
-        <p:nvSpPr>
-          <p:cNvPr id="9" name="imgph" descr="IMGQ:official gas installation certificate form"/>
+            <a:r>
+              <a:rPr sz="2400" b="1" i="0">
+                <a:solidFill>
+                  <a:srgbClr val="FFFFFF"/>
+                </a:solidFill>
+                <a:latin typeface="Montserrat"/>
+              </a:rPr>
+              <a:t>✔  RESPUESTA:  B</a:t>
+            </a:r>
+          </a:p>
+        </p:txBody>
+      </p:sp>
+      <p:sp>
+        <p:nvSpPr>
+          <p:cNvPr id="7" name="TextBox 6"/>
+          <p:cNvSpPr txBox="1"/>
+          <p:nvPr/>
+        </p:nvSpPr>
+        <p:spPr>
+          <a:xfrm>
+            <a:off x="822960" y="1417320"/>
+            <a:ext cx="10515600" cy="914400"/>
+          </a:xfrm>
+          <a:prstGeom prst="rect">
+            <a:avLst/>
+          </a:prstGeom>
+          <a:noFill/>
+        </p:spPr>
+        <p:txBody>
+          <a:bodyPr wrap="square">
+            <a:spAutoFit/>
+          </a:bodyPr>
+          <a:lstStyle/>
+          <a:p>
+            <a:r>
+              <a:rPr sz="1800" b="1" i="0">
+                <a:solidFill>
+                  <a:srgbClr val="64748B"/>
+                </a:solidFill>
+                <a:latin typeface="Montserrat"/>
+              </a:rPr>
+              <a:t>Tras la puesta en servicio de una instalación de GLP en caravana, ¿qué debe hacer el titular?</a:t>
+            </a:r>
+          </a:p>
+        </p:txBody>
+      </p:sp>
+      <p:sp>
+        <p:nvSpPr>
+          <p:cNvPr id="8" name="Rounded Rectangle 7"/>
           <p:cNvSpPr/>
           <p:nvPr/>
         </p:nvSpPr>
         <p:spPr>
           <a:xfrm>
-            <a:off x="5806440" y="1051560"/>
-            <a:ext cx="5298947" cy="4629150"/>
+            <a:off x="822960" y="2514600"/>
+            <a:ext cx="10515600" cy="914400"/>
           </a:xfrm>
           <a:prstGeom prst="roundRect">
             <a:avLst/>
           </a:prstGeom>
           <a:solidFill>
-            <a:srgbClr val="F3F6FB"/>
+            <a:srgbClr val="E9F6EE"/>
           </a:solidFill>
           <a:ln w="12700">
             <a:solidFill>
-              <a:srgbClr val="C7D2E6"/>
+              <a:srgbClr val="1E8E4B"/>
             </a:solidFill>
           </a:ln>
           <a:effectLst/>
@@ -7489,14 +8230,14 @@
       </p:sp>
       <p:sp>
         <p:nvSpPr>
-          <p:cNvPr id="10" name="TextBox 9"/>
+          <p:cNvPr id="9" name="TextBox 8"/>
           <p:cNvSpPr txBox="1"/>
           <p:nvPr/>
         </p:nvSpPr>
         <p:spPr>
           <a:xfrm>
-            <a:off x="6080760" y="2726055"/>
-            <a:ext cx="4750307" cy="1280160"/>
+            <a:off x="1097280" y="2697480"/>
+            <a:ext cx="10058400" cy="640080"/>
           </a:xfrm>
           <a:prstGeom prst="rect">
             <a:avLst/>
@@ -7509,27 +8250,66 @@
           </a:bodyPr>
           <a:lstStyle/>
           <a:p>
-            <a:pPr algn="ctr"/>
-            <a:r>
-              <a:rPr sz="1400" b="1" i="0">
-                <a:solidFill>
-                  <a:srgbClr val="64748B"/>
-                </a:solidFill>
-                <a:latin typeface="Montserrat"/>
-              </a:rPr>
-              <a:t>IMAGEN REALISTA</a:t>
-            </a:r>
-          </a:p>
-          <a:p>
-            <a:pPr algn="ctr"/>
-            <a:r>
-              <a:rPr sz="1100" b="0" i="1">
-                <a:solidFill>
-                  <a:srgbClr val="64748B"/>
-                </a:solidFill>
-                <a:latin typeface="Montserrat"/>
-              </a:rPr>
-              <a:t>official gas installation certificate form</a:t>
+            <a:r>
+              <a:rPr sz="1800" b="1" i="0">
+                <a:solidFill>
+                  <a:srgbClr val="1E8E4B"/>
+                </a:solidFill>
+                <a:latin typeface="Montserrat"/>
+              </a:rPr>
+              <a:t>B.  </a:t>
+            </a:r>
+            <a:r>
+              <a:rPr sz="1800" b="1" i="0">
+                <a:solidFill>
+                  <a:srgbClr val="1E2761"/>
+                </a:solidFill>
+                <a:latin typeface="Montserrat"/>
+              </a:rPr>
+              <a:t>No comunicar nada y conservar el certificado</a:t>
+            </a:r>
+          </a:p>
+        </p:txBody>
+      </p:sp>
+      <p:sp>
+        <p:nvSpPr>
+          <p:cNvPr id="10" name="TextBox 9"/>
+          <p:cNvSpPr txBox="1"/>
+          <p:nvPr/>
+        </p:nvSpPr>
+        <p:spPr>
+          <a:xfrm>
+            <a:off x="822960" y="3749039"/>
+            <a:ext cx="10515600" cy="2194560"/>
+          </a:xfrm>
+          <a:prstGeom prst="rect">
+            <a:avLst/>
+          </a:prstGeom>
+          <a:noFill/>
+        </p:spPr>
+        <p:txBody>
+          <a:bodyPr wrap="square">
+            <a:spAutoFit/>
+          </a:bodyPr>
+          <a:lstStyle/>
+          <a:p>
+            <a:r>
+              <a:rPr sz="1500" b="1" i="0">
+                <a:solidFill>
+                  <a:srgbClr val="E8801A"/>
+                </a:solidFill>
+                <a:latin typeface="Montserrat"/>
+              </a:rPr>
+              <a:t>Por qué:  </a:t>
+            </a:r>
+            <a:r>
+              <a:rPr sz="1500" b="0" i="0">
+                <a:solidFill>
+                  <a:srgbClr val="1B2330"/>
+                </a:solidFill>
+                <a:latin typeface="Montserrat"/>
+              </a:rPr>
+              <a:t>En esta ITC no es precisa ninguna comunicación; basta con que el titular conserve el certificado a disposición de la Administración.</a:t>
             </a:r>
           </a:p>
         </p:txBody>
@@ -7539,6 +8319,18 @@
   <p:clrMapOvr>
     <a:masterClrMapping/>
   </p:clrMapOvr>
+  <mc:AlternateContent xmlns:mc="http://schemas.openxmlformats.org/markup-compatibility/2006">
+    <mc:Choice xmlns:p14="http://schemas.microsoft.com/office/powerpoint/2010/main" Requires="p14">
+      <p:transition spd="med" p14:dur="700">
+        <p14:cube dir="l"/>
+      </p:transition>
+    </mc:Choice>
+    <mc:Fallback>
+      <p:transition spd="med">
+        <p:push dir="l"/>
+      </p:transition>
+    </mc:Fallback>
+  </mc:AlternateContent>
 </p:sld>
 </file>
 
@@ -7567,7 +8359,7 @@
             <a:avLst/>
           </a:prstGeom>
           <a:solidFill>
-            <a:srgbClr val="1E2761"/>
+            <a:srgbClr val="FFFFFF"/>
           </a:solidFill>
           <a:ln>
             <a:noFill/>
@@ -7604,8 +8396,8 @@
         </p:nvSpPr>
         <p:spPr>
           <a:xfrm>
-            <a:off x="822960" y="640080"/>
-            <a:ext cx="10515600" cy="457200"/>
+            <a:off x="10607040" y="320040"/>
+            <a:ext cx="1371600" cy="365760"/>
           </a:xfrm>
           <a:prstGeom prst="rect">
             <a:avLst/>
@@ -7618,30 +8410,133 @@
           </a:bodyPr>
           <a:lstStyle/>
           <a:p>
-            <a:r>
-              <a:rPr sz="1400" b="1" i="0">
-                <a:solidFill>
-                  <a:srgbClr val="F4A24C"/>
-                </a:solidFill>
-                <a:latin typeface="Montserrat"/>
-              </a:rPr>
-              <a:t>LO QUE YA DOMINAS</a:t>
-            </a:r>
-          </a:p>
-        </p:txBody>
-      </p:sp>
-      <p:sp>
-        <p:nvSpPr>
-          <p:cNvPr id="4" name="Rounded Rectangle 3"/>
+            <a:pPr algn="r"/>
+            <a:r>
+              <a:rPr sz="1000" b="1" i="0">
+                <a:solidFill>
+                  <a:srgbClr val="64748B"/>
+                </a:solidFill>
+                <a:latin typeface="Montserrat"/>
+              </a:rPr>
+              <a:t>016 / 022</a:t>
+            </a:r>
+          </a:p>
+        </p:txBody>
+      </p:sp>
+      <p:sp>
+        <p:nvSpPr>
+          <p:cNvPr id="4" name="TextBox 3"/>
+          <p:cNvSpPr txBox="1"/>
+          <p:nvPr/>
+        </p:nvSpPr>
+        <p:spPr>
+          <a:xfrm>
+            <a:off x="457200" y="6419088"/>
+            <a:ext cx="8229600" cy="365760"/>
+          </a:xfrm>
+          <a:prstGeom prst="rect">
+            <a:avLst/>
+          </a:prstGeom>
+          <a:noFill/>
+        </p:spPr>
+        <p:txBody>
+          <a:bodyPr wrap="square">
+            <a:spAutoFit/>
+          </a:bodyPr>
+          <a:lstStyle/>
+          <a:p>
+            <a:r>
+              <a:rPr sz="900" b="0" i="0">
+                <a:solidFill>
+                  <a:srgbClr val="64748B"/>
+                </a:solidFill>
+                <a:latin typeface="Montserrat"/>
+              </a:rPr>
+              <a:t>Curso Gas B · Tema 07 · ITC-ICG 10 · Caravanas</a:t>
+            </a:r>
+          </a:p>
+        </p:txBody>
+      </p:sp>
+      <p:sp>
+        <p:nvSpPr>
+          <p:cNvPr id="5" name="TextBox 4"/>
+          <p:cNvSpPr txBox="1"/>
+          <p:nvPr/>
+        </p:nvSpPr>
+        <p:spPr>
+          <a:xfrm>
+            <a:off x="822960" y="457200"/>
+            <a:ext cx="10058400" cy="365760"/>
+          </a:xfrm>
+          <a:prstGeom prst="rect">
+            <a:avLst/>
+          </a:prstGeom>
+          <a:noFill/>
+        </p:spPr>
+        <p:txBody>
+          <a:bodyPr wrap="square">
+            <a:spAutoFit/>
+          </a:bodyPr>
+          <a:lstStyle/>
+          <a:p>
+            <a:r>
+              <a:rPr sz="1300" b="1" i="0">
+                <a:solidFill>
+                  <a:srgbClr val="E8801A"/>
+                </a:solidFill>
+                <a:latin typeface="Montserrat"/>
+              </a:rPr>
+              <a:t>APARTADO 5 · UTILIZACIÓN</a:t>
+            </a:r>
+          </a:p>
+        </p:txBody>
+      </p:sp>
+      <p:sp>
+        <p:nvSpPr>
+          <p:cNvPr id="6" name="TextBox 5"/>
+          <p:cNvSpPr txBox="1"/>
+          <p:nvPr/>
+        </p:nvSpPr>
+        <p:spPr>
+          <a:xfrm>
+            <a:off x="822960" y="868680"/>
+            <a:ext cx="10515600" cy="914400"/>
+          </a:xfrm>
+          <a:prstGeom prst="rect">
+            <a:avLst/>
+          </a:prstGeom>
+          <a:noFill/>
+        </p:spPr>
+        <p:txBody>
+          <a:bodyPr wrap="square">
+            <a:spAutoFit/>
+          </a:bodyPr>
+          <a:lstStyle/>
+          <a:p>
+            <a:r>
+              <a:rPr sz="2800" b="1" i="0">
+                <a:solidFill>
+                  <a:srgbClr val="1E2761"/>
+                </a:solidFill>
+                <a:latin typeface="Montserrat"/>
+              </a:rPr>
+              <a:t>Presión y bombonas</a:t>
+            </a:r>
+          </a:p>
+        </p:txBody>
+      </p:sp>
+      <p:sp>
+        <p:nvSpPr>
+          <p:cNvPr id="7" name="Rectangle 6"/>
           <p:cNvSpPr/>
           <p:nvPr/>
         </p:nvSpPr>
         <p:spPr>
           <a:xfrm>
-            <a:off x="868680" y="1051560"/>
-            <a:ext cx="1463040" cy="82296"/>
-          </a:xfrm>
-          <a:prstGeom prst="roundRect">
+            <a:off x="868680" y="1627632"/>
+            <a:ext cx="2011680" cy="73152"/>
+          </a:xfrm>
+          <a:prstGeom prst="rect">
             <a:avLst/>
           </a:prstGeom>
           <a:solidFill>
@@ -7676,14 +8571,14 @@
       </p:sp>
       <p:sp>
         <p:nvSpPr>
-          <p:cNvPr id="5" name="TextBox 4"/>
+          <p:cNvPr id="8" name="TextBox 7"/>
           <p:cNvSpPr txBox="1"/>
           <p:nvPr/>
         </p:nvSpPr>
         <p:spPr>
           <a:xfrm>
-            <a:off x="822960" y="1234440"/>
-            <a:ext cx="10515600" cy="1097280"/>
+            <a:off x="822960" y="1965960"/>
+            <a:ext cx="5029200" cy="4206240"/>
           </a:xfrm>
           <a:prstGeom prst="rect">
             <a:avLst/>
@@ -7696,28 +8591,163 @@
           </a:bodyPr>
           <a:lstStyle/>
           <a:p>
-            <a:r>
-              <a:rPr sz="3400" b="1" i="0">
-                <a:solidFill>
-                  <a:srgbClr val="FFFFFF"/>
-                </a:solidFill>
-                <a:latin typeface="Montserrat"/>
-              </a:rPr>
-              <a:t>Ya te sabes la ITC de las caravanas entera</a:t>
-            </a:r>
-          </a:p>
-        </p:txBody>
-      </p:sp>
-      <p:sp>
-        <p:nvSpPr>
-          <p:cNvPr id="6" name="TextBox 5"/>
+            <a:pPr>
+              <a:spcAft>
+                <a:spcPts val="1100"/>
+              </a:spcAft>
+            </a:pPr>
+            <a:r>
+              <a:rPr sz="1600" b="1" i="0">
+                <a:solidFill>
+                  <a:srgbClr val="E8801A"/>
+                </a:solidFill>
+                <a:latin typeface="Montserrat"/>
+              </a:rPr>
+              <a:t>▸  </a:t>
+            </a:r>
+            <a:r>
+              <a:rPr sz="1600" b="0" i="0">
+                <a:solidFill>
+                  <a:srgbClr val="1B2330"/>
+                </a:solidFill>
+                <a:latin typeface="Montserrat"/>
+              </a:rPr>
+              <a:t>Presión de funcionamiento: 30 mbar</a:t>
+            </a:r>
+          </a:p>
+          <a:p>
+            <a:pPr>
+              <a:spcAft>
+                <a:spcPts val="1100"/>
+              </a:spcAft>
+            </a:pPr>
+            <a:r>
+              <a:rPr sz="1600" b="1" i="0">
+                <a:solidFill>
+                  <a:srgbClr val="E8801A"/>
+                </a:solidFill>
+                <a:latin typeface="Montserrat"/>
+              </a:rPr>
+              <a:t>▸  </a:t>
+            </a:r>
+            <a:r>
+              <a:rPr sz="1600" b="0" i="0">
+                <a:solidFill>
+                  <a:srgbClr val="1B2330"/>
+                </a:solidFill>
+                <a:latin typeface="Montserrat"/>
+              </a:rPr>
+              <a:t>Envases siempre sujetos, llenos o vacíos</a:t>
+            </a:r>
+          </a:p>
+          <a:p>
+            <a:pPr>
+              <a:spcAft>
+                <a:spcPts val="1100"/>
+              </a:spcAft>
+            </a:pPr>
+            <a:r>
+              <a:rPr sz="1600" b="1" i="0">
+                <a:solidFill>
+                  <a:srgbClr val="E8801A"/>
+                </a:solidFill>
+                <a:latin typeface="Montserrat"/>
+              </a:rPr>
+              <a:t>▸  </a:t>
+            </a:r>
+            <a:r>
+              <a:rPr sz="1600" b="0" i="0">
+                <a:solidFill>
+                  <a:srgbClr val="1B2330"/>
+                </a:solidFill>
+                <a:latin typeface="Montserrat"/>
+              </a:rPr>
+              <a:t>Dentro o fuera, en uso y en marcha</a:t>
+            </a:r>
+          </a:p>
+          <a:p>
+            <a:pPr>
+              <a:spcAft>
+                <a:spcPts val="1100"/>
+              </a:spcAft>
+            </a:pPr>
+            <a:r>
+              <a:rPr sz="1600" b="1" i="0">
+                <a:solidFill>
+                  <a:srgbClr val="E8801A"/>
+                </a:solidFill>
+                <a:latin typeface="Montserrat"/>
+              </a:rPr>
+              <a:t>▸  </a:t>
+            </a:r>
+            <a:r>
+              <a:rPr sz="1600" b="0" i="0">
+                <a:solidFill>
+                  <a:srgbClr val="1B2330"/>
+                </a:solidFill>
+                <a:latin typeface="Montserrat"/>
+              </a:rPr>
+              <a:t>Desconectar en estacionamiento prolongado</a:t>
+            </a:r>
+          </a:p>
+        </p:txBody>
+      </p:sp>
+      <p:sp>
+        <p:nvSpPr>
+          <p:cNvPr id="9" name="imgph" descr="IMGQ:propane gas cylinder strap secured"/>
+          <p:cNvSpPr/>
+          <p:nvPr/>
+        </p:nvSpPr>
+        <p:spPr>
+          <a:xfrm>
+            <a:off x="6080760" y="1965960"/>
+            <a:ext cx="5303520" cy="4572000"/>
+          </a:xfrm>
+          <a:prstGeom prst="roundRect">
+            <a:avLst/>
+          </a:prstGeom>
+          <a:solidFill>
+            <a:srgbClr val="F3F6FB"/>
+          </a:solidFill>
+          <a:ln w="12700">
+            <a:solidFill>
+              <a:srgbClr val="C7D2E6"/>
+            </a:solidFill>
+          </a:ln>
+          <a:effectLst/>
+        </p:spPr>
+        <p:style>
+          <a:lnRef idx="1">
+            <a:schemeClr val="accent1"/>
+          </a:lnRef>
+          <a:fillRef idx="3">
+            <a:schemeClr val="accent1"/>
+          </a:fillRef>
+          <a:effectRef idx="2">
+            <a:schemeClr val="accent1"/>
+          </a:effectRef>
+          <a:fontRef idx="minor">
+            <a:schemeClr val="lt1"/>
+          </a:fontRef>
+        </p:style>
+        <p:txBody>
+          <a:bodyPr rtlCol="0" anchor="ctr"/>
+          <a:lstStyle/>
+          <a:p>
+            <a:pPr algn="ctr"/>
+          </a:p>
+        </p:txBody>
+      </p:sp>
+      <p:sp>
+        <p:nvSpPr>
+          <p:cNvPr id="10" name="TextBox 9"/>
           <p:cNvSpPr txBox="1"/>
           <p:nvPr/>
         </p:nvSpPr>
         <p:spPr>
           <a:xfrm>
-            <a:off x="822960" y="2606040"/>
-            <a:ext cx="10515600" cy="2743200"/>
+            <a:off x="6355080" y="3611880"/>
+            <a:ext cx="4754880" cy="1280160"/>
           </a:xfrm>
           <a:prstGeom prst="rect">
             <a:avLst/>
@@ -7730,119 +8760,254 @@
           </a:bodyPr>
           <a:lstStyle/>
           <a:p>
-            <a:pPr>
-              <a:spcAft>
-                <a:spcPts val="1200"/>
-              </a:spcAft>
-            </a:pPr>
-            <a:r>
-              <a:rPr sz="2000" b="1" i="0">
-                <a:solidFill>
-                  <a:srgbClr val="F4A24C"/>
-                </a:solidFill>
-                <a:latin typeface="Montserrat"/>
-              </a:rPr>
-              <a:t>✓  </a:t>
-            </a:r>
-            <a:r>
-              <a:rPr sz="1900" b="0" i="0">
-                <a:solidFill>
-                  <a:srgbClr val="FFFFFF"/>
-                </a:solidFill>
-                <a:latin typeface="Montserrat"/>
-              </a:rPr>
-              <a:t>De dónde cuelga: artículo 2.1,g) y UNE-EN 1949</a:t>
-            </a:r>
-          </a:p>
-          <a:p>
-            <a:pPr>
-              <a:spcAft>
-                <a:spcPts val="1200"/>
-              </a:spcAft>
-            </a:pPr>
-            <a:r>
-              <a:rPr sz="2000" b="1" i="0">
-                <a:solidFill>
-                  <a:srgbClr val="F4A24C"/>
-                </a:solidFill>
-                <a:latin typeface="Montserrat"/>
-              </a:rPr>
-              <a:t>✓  </a:t>
-            </a:r>
-            <a:r>
-              <a:rPr sz="1900" b="0" i="0">
-                <a:solidFill>
-                  <a:srgbClr val="FFFFFF"/>
-                </a:solidFill>
-                <a:latin typeface="Montserrat"/>
-              </a:rPr>
-              <a:t>Estanquidad: no baja en 15 min · uso a 30 mbar</a:t>
-            </a:r>
-          </a:p>
-          <a:p>
-            <a:pPr>
-              <a:spcAft>
-                <a:spcPts val="1200"/>
-              </a:spcAft>
-            </a:pPr>
-            <a:r>
-              <a:rPr sz="2000" b="1" i="0">
-                <a:solidFill>
-                  <a:srgbClr val="F4A24C"/>
-                </a:solidFill>
-                <a:latin typeface="Montserrat"/>
-              </a:rPr>
-              <a:t>✓  </a:t>
-            </a:r>
-            <a:r>
-              <a:rPr sz="1900" b="0" i="0">
-                <a:solidFill>
-                  <a:srgbClr val="FFFFFF"/>
-                </a:solidFill>
-                <a:latin typeface="Montserrat"/>
-              </a:rPr>
-              <a:t>Bombonas sujetas · tubería nunca es cable</a:t>
-            </a:r>
-          </a:p>
-          <a:p>
-            <a:pPr>
-              <a:spcAft>
-                <a:spcPts val="1200"/>
-              </a:spcAft>
-            </a:pPr>
-            <a:r>
-              <a:rPr sz="2000" b="1" i="0">
-                <a:solidFill>
-                  <a:srgbClr val="F4A24C"/>
-                </a:solidFill>
-                <a:latin typeface="Montserrat"/>
-              </a:rPr>
-              <a:t>✓  </a:t>
-            </a:r>
-            <a:r>
-              <a:rPr sz="1900" b="0" i="0">
-                <a:solidFill>
-                  <a:srgbClr val="FFFFFF"/>
-                </a:solidFill>
-                <a:latin typeface="Montserrat"/>
-              </a:rPr>
-              <a:t>No se comunica · revisión cada 4 años (IRV)</a:t>
-            </a:r>
-          </a:p>
-        </p:txBody>
-      </p:sp>
-      <p:sp>
-        <p:nvSpPr>
-          <p:cNvPr id="7" name="Rounded Rectangle 6"/>
+            <a:pPr algn="ctr"/>
+            <a:r>
+              <a:rPr sz="1400" b="1" i="0">
+                <a:solidFill>
+                  <a:srgbClr val="64748B"/>
+                </a:solidFill>
+                <a:latin typeface="Montserrat"/>
+              </a:rPr>
+              <a:t>IMAGEN</a:t>
+            </a:r>
+          </a:p>
+          <a:p>
+            <a:pPr algn="ctr"/>
+            <a:r>
+              <a:rPr sz="1100" b="0" i="1">
+                <a:solidFill>
+                  <a:srgbClr val="64748B"/>
+                </a:solidFill>
+                <a:latin typeface="Montserrat"/>
+              </a:rPr>
+              <a:t>propane gas cylinder strap secured</a:t>
+            </a:r>
+          </a:p>
+        </p:txBody>
+      </p:sp>
+    </p:spTree>
+  </p:cSld>
+  <p:clrMapOvr>
+    <a:masterClrMapping/>
+  </p:clrMapOvr>
+  <mc:AlternateContent xmlns:mc="http://schemas.openxmlformats.org/markup-compatibility/2006">
+    <mc:Choice xmlns:p14="http://schemas.microsoft.com/office/powerpoint/2010/main" Requires="p14">
+      <p:transition spd="med" p14:dur="700">
+        <p14:cube dir="r"/>
+      </p:transition>
+    </mc:Choice>
+    <mc:Fallback>
+      <p:transition spd="med">
+        <p:push dir="r"/>
+      </p:transition>
+    </mc:Fallback>
+  </mc:AlternateContent>
+</p:sld>
+</file>
+
+<file path=ppt/slides/slide17.xml><?xml version="1.0" encoding="utf-8"?>
+<p:sld xmlns:a="http://schemas.openxmlformats.org/drawingml/2006/main" xmlns:p="http://schemas.openxmlformats.org/presentationml/2006/main" xmlns:r="http://schemas.openxmlformats.org/officeDocument/2006/relationships">
+  <p:cSld>
+    <p:spTree>
+      <p:nvGrpSpPr>
+        <p:cNvPr id="1" name=""/>
+        <p:cNvGrpSpPr/>
+        <p:nvPr/>
+      </p:nvGrpSpPr>
+      <p:grpSpPr/>
+      <p:sp>
+        <p:nvSpPr>
+          <p:cNvPr id="2" name="Rectangle 1"/>
           <p:cNvSpPr/>
           <p:nvPr/>
         </p:nvSpPr>
         <p:spPr>
           <a:xfrm>
-            <a:off x="822960" y="5532120"/>
-            <a:ext cx="10515600" cy="822960"/>
-          </a:xfrm>
-          <a:prstGeom prst="roundRect">
+            <a:off x="0" y="0"/>
+            <a:ext cx="12191695" cy="6858000"/>
+          </a:xfrm>
+          <a:prstGeom prst="rect">
+            <a:avLst/>
+          </a:prstGeom>
+          <a:solidFill>
+            <a:srgbClr val="FFFFFF"/>
+          </a:solidFill>
+          <a:ln>
+            <a:noFill/>
+          </a:ln>
+          <a:effectLst/>
+        </p:spPr>
+        <p:style>
+          <a:lnRef idx="1">
+            <a:schemeClr val="accent1"/>
+          </a:lnRef>
+          <a:fillRef idx="3">
+            <a:schemeClr val="accent1"/>
+          </a:fillRef>
+          <a:effectRef idx="2">
+            <a:schemeClr val="accent1"/>
+          </a:effectRef>
+          <a:fontRef idx="minor">
+            <a:schemeClr val="lt1"/>
+          </a:fontRef>
+        </p:style>
+        <p:txBody>
+          <a:bodyPr rtlCol="0" anchor="ctr"/>
+          <a:lstStyle/>
+          <a:p>
+            <a:pPr algn="ctr"/>
+          </a:p>
+        </p:txBody>
+      </p:sp>
+      <p:sp>
+        <p:nvSpPr>
+          <p:cNvPr id="3" name="TextBox 2"/>
+          <p:cNvSpPr txBox="1"/>
+          <p:nvPr/>
+        </p:nvSpPr>
+        <p:spPr>
+          <a:xfrm>
+            <a:off x="10607040" y="320040"/>
+            <a:ext cx="1371600" cy="365760"/>
+          </a:xfrm>
+          <a:prstGeom prst="rect">
+            <a:avLst/>
+          </a:prstGeom>
+          <a:noFill/>
+        </p:spPr>
+        <p:txBody>
+          <a:bodyPr wrap="square">
+            <a:spAutoFit/>
+          </a:bodyPr>
+          <a:lstStyle/>
+          <a:p>
+            <a:pPr algn="r"/>
+            <a:r>
+              <a:rPr sz="1000" b="1" i="0">
+                <a:solidFill>
+                  <a:srgbClr val="64748B"/>
+                </a:solidFill>
+                <a:latin typeface="Montserrat"/>
+              </a:rPr>
+              <a:t>017 / 022</a:t>
+            </a:r>
+          </a:p>
+        </p:txBody>
+      </p:sp>
+      <p:sp>
+        <p:nvSpPr>
+          <p:cNvPr id="4" name="TextBox 3"/>
+          <p:cNvSpPr txBox="1"/>
+          <p:nvPr/>
+        </p:nvSpPr>
+        <p:spPr>
+          <a:xfrm>
+            <a:off x="457200" y="6419088"/>
+            <a:ext cx="8229600" cy="365760"/>
+          </a:xfrm>
+          <a:prstGeom prst="rect">
+            <a:avLst/>
+          </a:prstGeom>
+          <a:noFill/>
+        </p:spPr>
+        <p:txBody>
+          <a:bodyPr wrap="square">
+            <a:spAutoFit/>
+          </a:bodyPr>
+          <a:lstStyle/>
+          <a:p>
+            <a:r>
+              <a:rPr sz="900" b="0" i="0">
+                <a:solidFill>
+                  <a:srgbClr val="64748B"/>
+                </a:solidFill>
+                <a:latin typeface="Montserrat"/>
+              </a:rPr>
+              <a:t>Curso Gas B · Tema 07 · ITC-ICG 10 · Caravanas</a:t>
+            </a:r>
+          </a:p>
+        </p:txBody>
+      </p:sp>
+      <p:sp>
+        <p:nvSpPr>
+          <p:cNvPr id="5" name="TextBox 4"/>
+          <p:cNvSpPr txBox="1"/>
+          <p:nvPr/>
+        </p:nvSpPr>
+        <p:spPr>
+          <a:xfrm>
+            <a:off x="822960" y="457200"/>
+            <a:ext cx="10058400" cy="365760"/>
+          </a:xfrm>
+          <a:prstGeom prst="rect">
+            <a:avLst/>
+          </a:prstGeom>
+          <a:noFill/>
+        </p:spPr>
+        <p:txBody>
+          <a:bodyPr wrap="square">
+            <a:spAutoFit/>
+          </a:bodyPr>
+          <a:lstStyle/>
+          <a:p>
+            <a:r>
+              <a:rPr sz="1300" b="1" i="0">
+                <a:solidFill>
+                  <a:srgbClr val="E8801A"/>
+                </a:solidFill>
+                <a:latin typeface="Montserrat"/>
+              </a:rPr>
+              <a:t>APARTADO 5 · PROHIBICIÓN</a:t>
+            </a:r>
+          </a:p>
+        </p:txBody>
+      </p:sp>
+      <p:sp>
+        <p:nvSpPr>
+          <p:cNvPr id="6" name="TextBox 5"/>
+          <p:cNvSpPr txBox="1"/>
+          <p:nvPr/>
+        </p:nvSpPr>
+        <p:spPr>
+          <a:xfrm>
+            <a:off x="822960" y="868680"/>
+            <a:ext cx="10515600" cy="914400"/>
+          </a:xfrm>
+          <a:prstGeom prst="rect">
+            <a:avLst/>
+          </a:prstGeom>
+          <a:noFill/>
+        </p:spPr>
+        <p:txBody>
+          <a:bodyPr wrap="square">
+            <a:spAutoFit/>
+          </a:bodyPr>
+          <a:lstStyle/>
+          <a:p>
+            <a:r>
+              <a:rPr sz="2800" b="1" i="0">
+                <a:solidFill>
+                  <a:srgbClr val="1E2761"/>
+                </a:solidFill>
+                <a:latin typeface="Montserrat"/>
+              </a:rPr>
+              <a:t>La tubería no es un cable</a:t>
+            </a:r>
+          </a:p>
+        </p:txBody>
+      </p:sp>
+      <p:sp>
+        <p:nvSpPr>
+          <p:cNvPr id="7" name="Rectangle 6"/>
+          <p:cNvSpPr/>
+          <p:nvPr/>
+        </p:nvSpPr>
+        <p:spPr>
+          <a:xfrm>
+            <a:off x="868680" y="1627632"/>
+            <a:ext cx="2011680" cy="73152"/>
+          </a:xfrm>
+          <a:prstGeom prst="rect">
             <a:avLst/>
           </a:prstGeom>
           <a:solidFill>
@@ -7883,8 +9048,8 @@
         </p:nvSpPr>
         <p:spPr>
           <a:xfrm>
-            <a:off x="1051560" y="5623560"/>
-            <a:ext cx="10058400" cy="640080"/>
+            <a:off x="6355080" y="1965960"/>
+            <a:ext cx="5029200" cy="4206240"/>
           </a:xfrm>
           <a:prstGeom prst="rect">
             <a:avLst/>
@@ -7897,14 +9062,171 @@
           </a:bodyPr>
           <a:lstStyle/>
           <a:p>
-            <a:r>
-              <a:rPr sz="1500" b="1" i="1">
-                <a:solidFill>
-                  <a:srgbClr val="1E2761"/>
-                </a:solidFill>
-                <a:latin typeface="Montserrat"/>
-              </a:rPr>
-              <a:t>Una ITC corta, pero de las que más caen. Ya es tuya.</a:t>
+            <a:pPr>
+              <a:spcAft>
+                <a:spcPts val="1100"/>
+              </a:spcAft>
+            </a:pPr>
+            <a:r>
+              <a:rPr sz="1600" b="1" i="0">
+                <a:solidFill>
+                  <a:srgbClr val="E8801A"/>
+                </a:solidFill>
+                <a:latin typeface="Montserrat"/>
+              </a:rPr>
+              <a:t>▸  </a:t>
+            </a:r>
+            <a:r>
+              <a:rPr sz="1600" b="0" i="0">
+                <a:solidFill>
+                  <a:srgbClr val="1B2330"/>
+                </a:solidFill>
+                <a:latin typeface="Montserrat"/>
+              </a:rPr>
+              <a:t>Prohibido usarla como toma de tierra</a:t>
+            </a:r>
+          </a:p>
+          <a:p>
+            <a:pPr>
+              <a:spcAft>
+                <a:spcPts val="1100"/>
+              </a:spcAft>
+            </a:pPr>
+            <a:r>
+              <a:rPr sz="1600" b="1" i="0">
+                <a:solidFill>
+                  <a:srgbClr val="E8801A"/>
+                </a:solidFill>
+                <a:latin typeface="Montserrat"/>
+              </a:rPr>
+              <a:t>▸  </a:t>
+            </a:r>
+            <a:r>
+              <a:rPr sz="1600" b="0" i="0">
+                <a:solidFill>
+                  <a:srgbClr val="1B2330"/>
+                </a:solidFill>
+                <a:latin typeface="Montserrat"/>
+              </a:rPr>
+              <a:t>Ni para instalaciones eléctricas</a:t>
+            </a:r>
+          </a:p>
+          <a:p>
+            <a:pPr>
+              <a:spcAft>
+                <a:spcPts val="1100"/>
+              </a:spcAft>
+            </a:pPr>
+            <a:r>
+              <a:rPr sz="1600" b="1" i="0">
+                <a:solidFill>
+                  <a:srgbClr val="E8801A"/>
+                </a:solidFill>
+                <a:latin typeface="Montserrat"/>
+              </a:rPr>
+              <a:t>▸  </a:t>
+            </a:r>
+            <a:r>
+              <a:rPr sz="1600" b="0" i="0">
+                <a:solidFill>
+                  <a:srgbClr val="1B2330"/>
+                </a:solidFill>
+                <a:latin typeface="Montserrat"/>
+              </a:rPr>
+              <a:t>Ni para instalaciones radioeléctricas</a:t>
+            </a:r>
+          </a:p>
+        </p:txBody>
+      </p:sp>
+      <p:sp>
+        <p:nvSpPr>
+          <p:cNvPr id="9" name="imgph" descr="IMGQ:electrical grounding wire clamp"/>
+          <p:cNvSpPr/>
+          <p:nvPr/>
+        </p:nvSpPr>
+        <p:spPr>
+          <a:xfrm>
+            <a:off x="822960" y="1965960"/>
+            <a:ext cx="5303520" cy="4572000"/>
+          </a:xfrm>
+          <a:prstGeom prst="roundRect">
+            <a:avLst/>
+          </a:prstGeom>
+          <a:solidFill>
+            <a:srgbClr val="F3F6FB"/>
+          </a:solidFill>
+          <a:ln w="12700">
+            <a:solidFill>
+              <a:srgbClr val="C7D2E6"/>
+            </a:solidFill>
+          </a:ln>
+          <a:effectLst/>
+        </p:spPr>
+        <p:style>
+          <a:lnRef idx="1">
+            <a:schemeClr val="accent1"/>
+          </a:lnRef>
+          <a:fillRef idx="3">
+            <a:schemeClr val="accent1"/>
+          </a:fillRef>
+          <a:effectRef idx="2">
+            <a:schemeClr val="accent1"/>
+          </a:effectRef>
+          <a:fontRef idx="minor">
+            <a:schemeClr val="lt1"/>
+          </a:fontRef>
+        </p:style>
+        <p:txBody>
+          <a:bodyPr rtlCol="0" anchor="ctr"/>
+          <a:lstStyle/>
+          <a:p>
+            <a:pPr algn="ctr"/>
+          </a:p>
+        </p:txBody>
+      </p:sp>
+      <p:sp>
+        <p:nvSpPr>
+          <p:cNvPr id="10" name="TextBox 9"/>
+          <p:cNvSpPr txBox="1"/>
+          <p:nvPr/>
+        </p:nvSpPr>
+        <p:spPr>
+          <a:xfrm>
+            <a:off x="1097280" y="3611880"/>
+            <a:ext cx="4754880" cy="1280160"/>
+          </a:xfrm>
+          <a:prstGeom prst="rect">
+            <a:avLst/>
+          </a:prstGeom>
+          <a:noFill/>
+        </p:spPr>
+        <p:txBody>
+          <a:bodyPr wrap="square">
+            <a:spAutoFit/>
+          </a:bodyPr>
+          <a:lstStyle/>
+          <a:p>
+            <a:pPr algn="ctr"/>
+            <a:r>
+              <a:rPr sz="1400" b="1" i="0">
+                <a:solidFill>
+                  <a:srgbClr val="64748B"/>
+                </a:solidFill>
+                <a:latin typeface="Montserrat"/>
+              </a:rPr>
+              <a:t>IMAGEN</a:t>
+            </a:r>
+          </a:p>
+          <a:p>
+            <a:pPr algn="ctr"/>
+            <a:r>
+              <a:rPr sz="1100" b="0" i="1">
+                <a:solidFill>
+                  <a:srgbClr val="64748B"/>
+                </a:solidFill>
+                <a:latin typeface="Montserrat"/>
+              </a:rPr>
+              <a:t>electrical grounding wire clamp</a:t>
             </a:r>
           </a:p>
         </p:txBody>
@@ -7914,6 +9236,1380 @@
   <p:clrMapOvr>
     <a:masterClrMapping/>
   </p:clrMapOvr>
+  <mc:AlternateContent xmlns:mc="http://schemas.openxmlformats.org/markup-compatibility/2006">
+    <mc:Choice xmlns:p14="http://schemas.microsoft.com/office/powerpoint/2010/main" Requires="p14">
+      <p:transition spd="med" p14:dur="700">
+        <p14:cube dir="l"/>
+      </p:transition>
+    </mc:Choice>
+    <mc:Fallback>
+      <p:transition spd="med">
+        <p:push dir="l"/>
+      </p:transition>
+    </mc:Fallback>
+  </mc:AlternateContent>
+</p:sld>
+</file>
+
+<file path=ppt/slides/slide18.xml><?xml version="1.0" encoding="utf-8"?>
+<p:sld xmlns:a="http://schemas.openxmlformats.org/drawingml/2006/main" xmlns:p="http://schemas.openxmlformats.org/presentationml/2006/main" xmlns:r="http://schemas.openxmlformats.org/officeDocument/2006/relationships">
+  <p:cSld>
+    <p:spTree>
+      <p:nvGrpSpPr>
+        <p:cNvPr id="1" name=""/>
+        <p:cNvGrpSpPr/>
+        <p:nvPr/>
+      </p:nvGrpSpPr>
+      <p:grpSpPr/>
+      <p:sp>
+        <p:nvSpPr>
+          <p:cNvPr id="2" name="Rectangle 1"/>
+          <p:cNvSpPr/>
+          <p:nvPr/>
+        </p:nvSpPr>
+        <p:spPr>
+          <a:xfrm>
+            <a:off x="0" y="0"/>
+            <a:ext cx="12191695" cy="6858000"/>
+          </a:xfrm>
+          <a:prstGeom prst="rect">
+            <a:avLst/>
+          </a:prstGeom>
+          <a:solidFill>
+            <a:srgbClr val="FFFFFF"/>
+          </a:solidFill>
+          <a:ln>
+            <a:noFill/>
+          </a:ln>
+          <a:effectLst/>
+        </p:spPr>
+        <p:style>
+          <a:lnRef idx="1">
+            <a:schemeClr val="accent1"/>
+          </a:lnRef>
+          <a:fillRef idx="3">
+            <a:schemeClr val="accent1"/>
+          </a:fillRef>
+          <a:effectRef idx="2">
+            <a:schemeClr val="accent1"/>
+          </a:effectRef>
+          <a:fontRef idx="minor">
+            <a:schemeClr val="lt1"/>
+          </a:fontRef>
+        </p:style>
+        <p:txBody>
+          <a:bodyPr rtlCol="0" anchor="ctr"/>
+          <a:lstStyle/>
+          <a:p>
+            <a:pPr algn="ctr"/>
+          </a:p>
+        </p:txBody>
+      </p:sp>
+      <p:sp>
+        <p:nvSpPr>
+          <p:cNvPr id="3" name="TextBox 2"/>
+          <p:cNvSpPr txBox="1"/>
+          <p:nvPr/>
+        </p:nvSpPr>
+        <p:spPr>
+          <a:xfrm>
+            <a:off x="10607040" y="320040"/>
+            <a:ext cx="1371600" cy="365760"/>
+          </a:xfrm>
+          <a:prstGeom prst="rect">
+            <a:avLst/>
+          </a:prstGeom>
+          <a:noFill/>
+        </p:spPr>
+        <p:txBody>
+          <a:bodyPr wrap="square">
+            <a:spAutoFit/>
+          </a:bodyPr>
+          <a:lstStyle/>
+          <a:p>
+            <a:pPr algn="r"/>
+            <a:r>
+              <a:rPr sz="1000" b="1" i="0">
+                <a:solidFill>
+                  <a:srgbClr val="64748B"/>
+                </a:solidFill>
+                <a:latin typeface="Montserrat"/>
+              </a:rPr>
+              <a:t>018 / 022</a:t>
+            </a:r>
+          </a:p>
+        </p:txBody>
+      </p:sp>
+      <p:sp>
+        <p:nvSpPr>
+          <p:cNvPr id="4" name="TextBox 3"/>
+          <p:cNvSpPr txBox="1"/>
+          <p:nvPr/>
+        </p:nvSpPr>
+        <p:spPr>
+          <a:xfrm>
+            <a:off x="457200" y="6419088"/>
+            <a:ext cx="8229600" cy="365760"/>
+          </a:xfrm>
+          <a:prstGeom prst="rect">
+            <a:avLst/>
+          </a:prstGeom>
+          <a:noFill/>
+        </p:spPr>
+        <p:txBody>
+          <a:bodyPr wrap="square">
+            <a:spAutoFit/>
+          </a:bodyPr>
+          <a:lstStyle/>
+          <a:p>
+            <a:r>
+              <a:rPr sz="900" b="0" i="0">
+                <a:solidFill>
+                  <a:srgbClr val="64748B"/>
+                </a:solidFill>
+                <a:latin typeface="Montserrat"/>
+              </a:rPr>
+              <a:t>Curso Gas B · Tema 07 · ITC-ICG 10 · Caravanas</a:t>
+            </a:r>
+          </a:p>
+        </p:txBody>
+      </p:sp>
+      <p:sp>
+        <p:nvSpPr>
+          <p:cNvPr id="5" name="TextBox 4"/>
+          <p:cNvSpPr txBox="1"/>
+          <p:nvPr/>
+        </p:nvSpPr>
+        <p:spPr>
+          <a:xfrm>
+            <a:off x="822960" y="457200"/>
+            <a:ext cx="10058400" cy="365760"/>
+          </a:xfrm>
+          <a:prstGeom prst="rect">
+            <a:avLst/>
+          </a:prstGeom>
+          <a:noFill/>
+        </p:spPr>
+        <p:txBody>
+          <a:bodyPr wrap="square">
+            <a:spAutoFit/>
+          </a:bodyPr>
+          <a:lstStyle/>
+          <a:p>
+            <a:r>
+              <a:rPr sz="1300" b="1" i="0">
+                <a:solidFill>
+                  <a:srgbClr val="E8801A"/>
+                </a:solidFill>
+                <a:latin typeface="Montserrat"/>
+              </a:rPr>
+              <a:t>APARTADO 6 · MANTENIMIENTO</a:t>
+            </a:r>
+          </a:p>
+        </p:txBody>
+      </p:sp>
+      <p:sp>
+        <p:nvSpPr>
+          <p:cNvPr id="6" name="TextBox 5"/>
+          <p:cNvSpPr txBox="1"/>
+          <p:nvPr/>
+        </p:nvSpPr>
+        <p:spPr>
+          <a:xfrm>
+            <a:off x="822960" y="868680"/>
+            <a:ext cx="10515600" cy="914400"/>
+          </a:xfrm>
+          <a:prstGeom prst="rect">
+            <a:avLst/>
+          </a:prstGeom>
+          <a:noFill/>
+        </p:spPr>
+        <p:txBody>
+          <a:bodyPr wrap="square">
+            <a:spAutoFit/>
+          </a:bodyPr>
+          <a:lstStyle/>
+          <a:p>
+            <a:r>
+              <a:rPr sz="2800" b="1" i="0">
+                <a:solidFill>
+                  <a:srgbClr val="1E2761"/>
+                </a:solidFill>
+                <a:latin typeface="Montserrat"/>
+              </a:rPr>
+              <a:t>Revisión cada 4 años</a:t>
+            </a:r>
+          </a:p>
+        </p:txBody>
+      </p:sp>
+      <p:sp>
+        <p:nvSpPr>
+          <p:cNvPr id="7" name="Rectangle 6"/>
+          <p:cNvSpPr/>
+          <p:nvPr/>
+        </p:nvSpPr>
+        <p:spPr>
+          <a:xfrm>
+            <a:off x="868680" y="1627632"/>
+            <a:ext cx="2011680" cy="73152"/>
+          </a:xfrm>
+          <a:prstGeom prst="rect">
+            <a:avLst/>
+          </a:prstGeom>
+          <a:solidFill>
+            <a:srgbClr val="E8801A"/>
+          </a:solidFill>
+          <a:ln>
+            <a:noFill/>
+          </a:ln>
+          <a:effectLst/>
+        </p:spPr>
+        <p:style>
+          <a:lnRef idx="1">
+            <a:schemeClr val="accent1"/>
+          </a:lnRef>
+          <a:fillRef idx="3">
+            <a:schemeClr val="accent1"/>
+          </a:fillRef>
+          <a:effectRef idx="2">
+            <a:schemeClr val="accent1"/>
+          </a:effectRef>
+          <a:fontRef idx="minor">
+            <a:schemeClr val="lt1"/>
+          </a:fontRef>
+        </p:style>
+        <p:txBody>
+          <a:bodyPr rtlCol="0" anchor="ctr"/>
+          <a:lstStyle/>
+          <a:p>
+            <a:pPr algn="ctr"/>
+          </a:p>
+        </p:txBody>
+      </p:sp>
+      <p:sp>
+        <p:nvSpPr>
+          <p:cNvPr id="8" name="TextBox 7"/>
+          <p:cNvSpPr txBox="1"/>
+          <p:nvPr/>
+        </p:nvSpPr>
+        <p:spPr>
+          <a:xfrm>
+            <a:off x="822960" y="1965960"/>
+            <a:ext cx="5029200" cy="4206240"/>
+          </a:xfrm>
+          <a:prstGeom prst="rect">
+            <a:avLst/>
+          </a:prstGeom>
+          <a:noFill/>
+        </p:spPr>
+        <p:txBody>
+          <a:bodyPr wrap="square">
+            <a:spAutoFit/>
+          </a:bodyPr>
+          <a:lstStyle/>
+          <a:p>
+            <a:pPr>
+              <a:spcAft>
+                <a:spcPts val="1100"/>
+              </a:spcAft>
+            </a:pPr>
+            <a:r>
+              <a:rPr sz="1600" b="1" i="0">
+                <a:solidFill>
+                  <a:srgbClr val="E8801A"/>
+                </a:solidFill>
+                <a:latin typeface="Montserrat"/>
+              </a:rPr>
+              <a:t>▸  </a:t>
+            </a:r>
+            <a:r>
+              <a:rPr sz="1600" b="0" i="0">
+                <a:solidFill>
+                  <a:srgbClr val="1B2330"/>
+                </a:solidFill>
+                <a:latin typeface="Montserrat"/>
+              </a:rPr>
+              <a:t>El titular es el responsable</a:t>
+            </a:r>
+          </a:p>
+          <a:p>
+            <a:pPr>
+              <a:spcAft>
+                <a:spcPts val="1100"/>
+              </a:spcAft>
+            </a:pPr>
+            <a:r>
+              <a:rPr sz="1600" b="1" i="0">
+                <a:solidFill>
+                  <a:srgbClr val="E8801A"/>
+                </a:solidFill>
+                <a:latin typeface="Montserrat"/>
+              </a:rPr>
+              <a:t>▸  </a:t>
+            </a:r>
+            <a:r>
+              <a:rPr sz="1600" b="0" i="0">
+                <a:solidFill>
+                  <a:srgbClr val="1B2330"/>
+                </a:solidFill>
+                <a:latin typeface="Montserrat"/>
+              </a:rPr>
+              <a:t>Encarga la revisión a una instaladora</a:t>
+            </a:r>
+          </a:p>
+          <a:p>
+            <a:pPr>
+              <a:spcAft>
+                <a:spcPts val="1100"/>
+              </a:spcAft>
+            </a:pPr>
+            <a:r>
+              <a:rPr sz="1600" b="1" i="0">
+                <a:solidFill>
+                  <a:srgbClr val="E8801A"/>
+                </a:solidFill>
+                <a:latin typeface="Montserrat"/>
+              </a:rPr>
+              <a:t>▸  </a:t>
+            </a:r>
+            <a:r>
+              <a:rPr sz="1600" b="0" i="0">
+                <a:solidFill>
+                  <a:srgbClr val="1B2330"/>
+                </a:solidFill>
+                <a:latin typeface="Montserrat"/>
+              </a:rPr>
+              <a:t>Cada 4 años · es revisión, no inspección</a:t>
+            </a:r>
+          </a:p>
+          <a:p>
+            <a:pPr>
+              <a:spcAft>
+                <a:spcPts val="1100"/>
+              </a:spcAft>
+            </a:pPr>
+            <a:r>
+              <a:rPr sz="1600" b="1" i="0">
+                <a:solidFill>
+                  <a:srgbClr val="E8801A"/>
+                </a:solidFill>
+                <a:latin typeface="Montserrat"/>
+              </a:rPr>
+              <a:t>▸  </a:t>
+            </a:r>
+            <a:r>
+              <a:rPr sz="1600" b="0" i="0">
+                <a:solidFill>
+                  <a:srgbClr val="1B2330"/>
+                </a:solidFill>
+                <a:latin typeface="Montserrat"/>
+              </a:rPr>
+              <a:t>Se documenta con el modelo IRV-2</a:t>
+            </a:r>
+          </a:p>
+        </p:txBody>
+      </p:sp>
+      <p:sp>
+        <p:nvSpPr>
+          <p:cNvPr id="9" name="imgph" descr="IMGQ:technician checking gas installation caravan"/>
+          <p:cNvSpPr/>
+          <p:nvPr/>
+        </p:nvSpPr>
+        <p:spPr>
+          <a:xfrm>
+            <a:off x="6080760" y="1965960"/>
+            <a:ext cx="5303520" cy="4572000"/>
+          </a:xfrm>
+          <a:prstGeom prst="roundRect">
+            <a:avLst/>
+          </a:prstGeom>
+          <a:solidFill>
+            <a:srgbClr val="F3F6FB"/>
+          </a:solidFill>
+          <a:ln w="12700">
+            <a:solidFill>
+              <a:srgbClr val="C7D2E6"/>
+            </a:solidFill>
+          </a:ln>
+          <a:effectLst/>
+        </p:spPr>
+        <p:style>
+          <a:lnRef idx="1">
+            <a:schemeClr val="accent1"/>
+          </a:lnRef>
+          <a:fillRef idx="3">
+            <a:schemeClr val="accent1"/>
+          </a:fillRef>
+          <a:effectRef idx="2">
+            <a:schemeClr val="accent1"/>
+          </a:effectRef>
+          <a:fontRef idx="minor">
+            <a:schemeClr val="lt1"/>
+          </a:fontRef>
+        </p:style>
+        <p:txBody>
+          <a:bodyPr rtlCol="0" anchor="ctr"/>
+          <a:lstStyle/>
+          <a:p>
+            <a:pPr algn="ctr"/>
+          </a:p>
+        </p:txBody>
+      </p:sp>
+      <p:sp>
+        <p:nvSpPr>
+          <p:cNvPr id="10" name="TextBox 9"/>
+          <p:cNvSpPr txBox="1"/>
+          <p:nvPr/>
+        </p:nvSpPr>
+        <p:spPr>
+          <a:xfrm>
+            <a:off x="6355080" y="3611880"/>
+            <a:ext cx="4754880" cy="1280160"/>
+          </a:xfrm>
+          <a:prstGeom prst="rect">
+            <a:avLst/>
+          </a:prstGeom>
+          <a:noFill/>
+        </p:spPr>
+        <p:txBody>
+          <a:bodyPr wrap="square">
+            <a:spAutoFit/>
+          </a:bodyPr>
+          <a:lstStyle/>
+          <a:p>
+            <a:pPr algn="ctr"/>
+            <a:r>
+              <a:rPr sz="1400" b="1" i="0">
+                <a:solidFill>
+                  <a:srgbClr val="64748B"/>
+                </a:solidFill>
+                <a:latin typeface="Montserrat"/>
+              </a:rPr>
+              <a:t>IMAGEN</a:t>
+            </a:r>
+          </a:p>
+          <a:p>
+            <a:pPr algn="ctr"/>
+            <a:r>
+              <a:rPr sz="1100" b="0" i="1">
+                <a:solidFill>
+                  <a:srgbClr val="64748B"/>
+                </a:solidFill>
+                <a:latin typeface="Montserrat"/>
+              </a:rPr>
+              <a:t>technician checking gas installation caravan</a:t>
+            </a:r>
+          </a:p>
+        </p:txBody>
+      </p:sp>
+    </p:spTree>
+  </p:cSld>
+  <p:clrMapOvr>
+    <a:masterClrMapping/>
+  </p:clrMapOvr>
+  <mc:AlternateContent xmlns:mc="http://schemas.openxmlformats.org/markup-compatibility/2006">
+    <mc:Choice xmlns:p14="http://schemas.microsoft.com/office/powerpoint/2010/main" Requires="p14">
+      <p:transition spd="med" p14:dur="700">
+        <p14:cube dir="r"/>
+      </p:transition>
+    </mc:Choice>
+    <mc:Fallback>
+      <p:transition spd="med">
+        <p:push dir="r"/>
+      </p:transition>
+    </mc:Fallback>
+  </mc:AlternateContent>
+</p:sld>
+</file>
+
+<file path=ppt/slides/slide19.xml><?xml version="1.0" encoding="utf-8"?>
+<p:sld xmlns:a="http://schemas.openxmlformats.org/drawingml/2006/main" xmlns:p="http://schemas.openxmlformats.org/presentationml/2006/main" xmlns:r="http://schemas.openxmlformats.org/officeDocument/2006/relationships">
+  <p:cSld>
+    <p:spTree>
+      <p:nvGrpSpPr>
+        <p:cNvPr id="1" name=""/>
+        <p:cNvGrpSpPr/>
+        <p:nvPr/>
+      </p:nvGrpSpPr>
+      <p:grpSpPr/>
+      <p:sp>
+        <p:nvSpPr>
+          <p:cNvPr id="2" name="Rectangle 1"/>
+          <p:cNvSpPr/>
+          <p:nvPr/>
+        </p:nvSpPr>
+        <p:spPr>
+          <a:xfrm>
+            <a:off x="0" y="0"/>
+            <a:ext cx="12191695" cy="6858000"/>
+          </a:xfrm>
+          <a:prstGeom prst="rect">
+            <a:avLst/>
+          </a:prstGeom>
+          <a:solidFill>
+            <a:srgbClr val="FFFFFF"/>
+          </a:solidFill>
+          <a:ln>
+            <a:noFill/>
+          </a:ln>
+          <a:effectLst/>
+        </p:spPr>
+        <p:style>
+          <a:lnRef idx="1">
+            <a:schemeClr val="accent1"/>
+          </a:lnRef>
+          <a:fillRef idx="3">
+            <a:schemeClr val="accent1"/>
+          </a:fillRef>
+          <a:effectRef idx="2">
+            <a:schemeClr val="accent1"/>
+          </a:effectRef>
+          <a:fontRef idx="minor">
+            <a:schemeClr val="lt1"/>
+          </a:fontRef>
+        </p:style>
+        <p:txBody>
+          <a:bodyPr rtlCol="0" anchor="ctr"/>
+          <a:lstStyle/>
+          <a:p>
+            <a:pPr algn="ctr"/>
+          </a:p>
+        </p:txBody>
+      </p:sp>
+      <p:sp>
+        <p:nvSpPr>
+          <p:cNvPr id="3" name="TextBox 2"/>
+          <p:cNvSpPr txBox="1"/>
+          <p:nvPr/>
+        </p:nvSpPr>
+        <p:spPr>
+          <a:xfrm>
+            <a:off x="10607040" y="320040"/>
+            <a:ext cx="1371600" cy="365760"/>
+          </a:xfrm>
+          <a:prstGeom prst="rect">
+            <a:avLst/>
+          </a:prstGeom>
+          <a:noFill/>
+        </p:spPr>
+        <p:txBody>
+          <a:bodyPr wrap="square">
+            <a:spAutoFit/>
+          </a:bodyPr>
+          <a:lstStyle/>
+          <a:p>
+            <a:pPr algn="r"/>
+            <a:r>
+              <a:rPr sz="1000" b="1" i="0">
+                <a:solidFill>
+                  <a:srgbClr val="64748B"/>
+                </a:solidFill>
+                <a:latin typeface="Montserrat"/>
+              </a:rPr>
+              <a:t>019 / 022</a:t>
+            </a:r>
+          </a:p>
+        </p:txBody>
+      </p:sp>
+      <p:sp>
+        <p:nvSpPr>
+          <p:cNvPr id="4" name="TextBox 3"/>
+          <p:cNvSpPr txBox="1"/>
+          <p:nvPr/>
+        </p:nvSpPr>
+        <p:spPr>
+          <a:xfrm>
+            <a:off x="457200" y="6419088"/>
+            <a:ext cx="8229600" cy="365760"/>
+          </a:xfrm>
+          <a:prstGeom prst="rect">
+            <a:avLst/>
+          </a:prstGeom>
+          <a:noFill/>
+        </p:spPr>
+        <p:txBody>
+          <a:bodyPr wrap="square">
+            <a:spAutoFit/>
+          </a:bodyPr>
+          <a:lstStyle/>
+          <a:p>
+            <a:r>
+              <a:rPr sz="900" b="0" i="0">
+                <a:solidFill>
+                  <a:srgbClr val="64748B"/>
+                </a:solidFill>
+                <a:latin typeface="Montserrat"/>
+              </a:rPr>
+              <a:t>Curso Gas B · Tema 07 · ITC-ICG 10 · Caravanas</a:t>
+            </a:r>
+          </a:p>
+        </p:txBody>
+      </p:sp>
+      <p:sp>
+        <p:nvSpPr>
+          <p:cNvPr id="5" name="Rectangle 4"/>
+          <p:cNvSpPr/>
+          <p:nvPr/>
+        </p:nvSpPr>
+        <p:spPr>
+          <a:xfrm>
+            <a:off x="0" y="0"/>
+            <a:ext cx="12191695" cy="1143000"/>
+          </a:xfrm>
+          <a:prstGeom prst="rect">
+            <a:avLst/>
+          </a:prstGeom>
+          <a:solidFill>
+            <a:srgbClr val="E8801A"/>
+          </a:solidFill>
+          <a:ln>
+            <a:noFill/>
+          </a:ln>
+          <a:effectLst/>
+        </p:spPr>
+        <p:style>
+          <a:lnRef idx="1">
+            <a:schemeClr val="accent1"/>
+          </a:lnRef>
+          <a:fillRef idx="3">
+            <a:schemeClr val="accent1"/>
+          </a:fillRef>
+          <a:effectRef idx="2">
+            <a:schemeClr val="accent1"/>
+          </a:effectRef>
+          <a:fontRef idx="minor">
+            <a:schemeClr val="lt1"/>
+          </a:fontRef>
+        </p:style>
+        <p:txBody>
+          <a:bodyPr rtlCol="0" anchor="ctr"/>
+          <a:lstStyle/>
+          <a:p>
+            <a:pPr algn="ctr"/>
+          </a:p>
+        </p:txBody>
+      </p:sp>
+      <p:sp>
+        <p:nvSpPr>
+          <p:cNvPr id="6" name="TextBox 5"/>
+          <p:cNvSpPr txBox="1"/>
+          <p:nvPr/>
+        </p:nvSpPr>
+        <p:spPr>
+          <a:xfrm>
+            <a:off x="822960" y="274320"/>
+            <a:ext cx="10515600" cy="640080"/>
+          </a:xfrm>
+          <a:prstGeom prst="rect">
+            <a:avLst/>
+          </a:prstGeom>
+          <a:noFill/>
+        </p:spPr>
+        <p:txBody>
+          <a:bodyPr wrap="square">
+            <a:spAutoFit/>
+          </a:bodyPr>
+          <a:lstStyle/>
+          <a:p>
+            <a:r>
+              <a:rPr sz="2400" b="1" i="0">
+                <a:solidFill>
+                  <a:srgbClr val="FFFFFF"/>
+                </a:solidFill>
+                <a:latin typeface="Montserrat"/>
+              </a:rPr>
+              <a:t>⚡  PREGUNTA RÁPIDA</a:t>
+            </a:r>
+          </a:p>
+        </p:txBody>
+      </p:sp>
+      <p:sp>
+        <p:nvSpPr>
+          <p:cNvPr id="7" name="TextBox 6"/>
+          <p:cNvSpPr txBox="1"/>
+          <p:nvPr/>
+        </p:nvSpPr>
+        <p:spPr>
+          <a:xfrm>
+            <a:off x="822960" y="1508760"/>
+            <a:ext cx="10515600" cy="1371600"/>
+          </a:xfrm>
+          <a:prstGeom prst="rect">
+            <a:avLst/>
+          </a:prstGeom>
+          <a:noFill/>
+        </p:spPr>
+        <p:txBody>
+          <a:bodyPr wrap="square">
+            <a:spAutoFit/>
+          </a:bodyPr>
+          <a:lstStyle/>
+          <a:p>
+            <a:r>
+              <a:rPr sz="2400" b="1" i="0">
+                <a:solidFill>
+                  <a:srgbClr val="1E2761"/>
+                </a:solidFill>
+                <a:latin typeface="Montserrat"/>
+              </a:rPr>
+              <a:t>¿Cada cuánto y con qué nombre se controla periódicamente la instalación de una caravana?</a:t>
+            </a:r>
+          </a:p>
+        </p:txBody>
+      </p:sp>
+      <p:sp>
+        <p:nvSpPr>
+          <p:cNvPr id="8" name="Rounded Rectangle 7"/>
+          <p:cNvSpPr/>
+          <p:nvPr/>
+        </p:nvSpPr>
+        <p:spPr>
+          <a:xfrm>
+            <a:off x="822960" y="3291840"/>
+            <a:ext cx="4983480" cy="1143000"/>
+          </a:xfrm>
+          <a:prstGeom prst="roundRect">
+            <a:avLst/>
+          </a:prstGeom>
+          <a:solidFill>
+            <a:srgbClr val="F3F6FB"/>
+          </a:solidFill>
+          <a:ln w="12700">
+            <a:solidFill>
+              <a:srgbClr val="C7D2E6"/>
+            </a:solidFill>
+          </a:ln>
+          <a:effectLst/>
+        </p:spPr>
+        <p:style>
+          <a:lnRef idx="1">
+            <a:schemeClr val="accent1"/>
+          </a:lnRef>
+          <a:fillRef idx="3">
+            <a:schemeClr val="accent1"/>
+          </a:fillRef>
+          <a:effectRef idx="2">
+            <a:schemeClr val="accent1"/>
+          </a:effectRef>
+          <a:fontRef idx="minor">
+            <a:schemeClr val="lt1"/>
+          </a:fontRef>
+        </p:style>
+        <p:txBody>
+          <a:bodyPr rtlCol="0" anchor="ctr"/>
+          <a:lstStyle/>
+          <a:p>
+            <a:pPr algn="ctr"/>
+          </a:p>
+        </p:txBody>
+      </p:sp>
+      <p:sp>
+        <p:nvSpPr>
+          <p:cNvPr id="9" name="Rectangle 8"/>
+          <p:cNvSpPr/>
+          <p:nvPr/>
+        </p:nvSpPr>
+        <p:spPr>
+          <a:xfrm>
+            <a:off x="822960" y="3291840"/>
+            <a:ext cx="640080" cy="1143000"/>
+          </a:xfrm>
+          <a:prstGeom prst="rect">
+            <a:avLst/>
+          </a:prstGeom>
+          <a:solidFill>
+            <a:srgbClr val="1E2761"/>
+          </a:solidFill>
+          <a:ln>
+            <a:noFill/>
+          </a:ln>
+          <a:effectLst/>
+        </p:spPr>
+        <p:style>
+          <a:lnRef idx="1">
+            <a:schemeClr val="accent1"/>
+          </a:lnRef>
+          <a:fillRef idx="3">
+            <a:schemeClr val="accent1"/>
+          </a:fillRef>
+          <a:effectRef idx="2">
+            <a:schemeClr val="accent1"/>
+          </a:effectRef>
+          <a:fontRef idx="minor">
+            <a:schemeClr val="lt1"/>
+          </a:fontRef>
+        </p:style>
+        <p:txBody>
+          <a:bodyPr rtlCol="0" anchor="ctr"/>
+          <a:lstStyle/>
+          <a:p>
+            <a:pPr algn="ctr"/>
+          </a:p>
+        </p:txBody>
+      </p:sp>
+      <p:sp>
+        <p:nvSpPr>
+          <p:cNvPr id="10" name="TextBox 9"/>
+          <p:cNvSpPr txBox="1"/>
+          <p:nvPr/>
+        </p:nvSpPr>
+        <p:spPr>
+          <a:xfrm>
+            <a:off x="822960" y="3611880"/>
+            <a:ext cx="640080" cy="548640"/>
+          </a:xfrm>
+          <a:prstGeom prst="rect">
+            <a:avLst/>
+          </a:prstGeom>
+          <a:noFill/>
+        </p:spPr>
+        <p:txBody>
+          <a:bodyPr wrap="square">
+            <a:spAutoFit/>
+          </a:bodyPr>
+          <a:lstStyle/>
+          <a:p>
+            <a:pPr algn="ctr"/>
+            <a:r>
+              <a:rPr sz="2200" b="1" i="0">
+                <a:solidFill>
+                  <a:srgbClr val="FFFFFF"/>
+                </a:solidFill>
+                <a:latin typeface="Montserrat"/>
+              </a:rPr>
+              <a:t>A</a:t>
+            </a:r>
+          </a:p>
+        </p:txBody>
+      </p:sp>
+      <p:sp>
+        <p:nvSpPr>
+          <p:cNvPr id="11" name="TextBox 10"/>
+          <p:cNvSpPr txBox="1"/>
+          <p:nvPr/>
+        </p:nvSpPr>
+        <p:spPr>
+          <a:xfrm>
+            <a:off x="1600200" y="3474720"/>
+            <a:ext cx="4114800" cy="868680"/>
+          </a:xfrm>
+          <a:prstGeom prst="rect">
+            <a:avLst/>
+          </a:prstGeom>
+          <a:noFill/>
+        </p:spPr>
+        <p:txBody>
+          <a:bodyPr wrap="square">
+            <a:spAutoFit/>
+          </a:bodyPr>
+          <a:lstStyle/>
+          <a:p>
+            <a:r>
+              <a:rPr sz="1400" b="0" i="0">
+                <a:solidFill>
+                  <a:srgbClr val="1B2330"/>
+                </a:solidFill>
+                <a:latin typeface="Montserrat"/>
+              </a:rPr>
+              <a:t>Inspección cada 5 años</a:t>
+            </a:r>
+          </a:p>
+        </p:txBody>
+      </p:sp>
+      <p:sp>
+        <p:nvSpPr>
+          <p:cNvPr id="12" name="Rounded Rectangle 11"/>
+          <p:cNvSpPr/>
+          <p:nvPr/>
+        </p:nvSpPr>
+        <p:spPr>
+          <a:xfrm>
+            <a:off x="6355080" y="3291840"/>
+            <a:ext cx="4983480" cy="1143000"/>
+          </a:xfrm>
+          <a:prstGeom prst="roundRect">
+            <a:avLst/>
+          </a:prstGeom>
+          <a:solidFill>
+            <a:srgbClr val="F3F6FB"/>
+          </a:solidFill>
+          <a:ln w="12700">
+            <a:solidFill>
+              <a:srgbClr val="C7D2E6"/>
+            </a:solidFill>
+          </a:ln>
+          <a:effectLst/>
+        </p:spPr>
+        <p:style>
+          <a:lnRef idx="1">
+            <a:schemeClr val="accent1"/>
+          </a:lnRef>
+          <a:fillRef idx="3">
+            <a:schemeClr val="accent1"/>
+          </a:fillRef>
+          <a:effectRef idx="2">
+            <a:schemeClr val="accent1"/>
+          </a:effectRef>
+          <a:fontRef idx="minor">
+            <a:schemeClr val="lt1"/>
+          </a:fontRef>
+        </p:style>
+        <p:txBody>
+          <a:bodyPr rtlCol="0" anchor="ctr"/>
+          <a:lstStyle/>
+          <a:p>
+            <a:pPr algn="ctr"/>
+          </a:p>
+        </p:txBody>
+      </p:sp>
+      <p:sp>
+        <p:nvSpPr>
+          <p:cNvPr id="13" name="Rectangle 12"/>
+          <p:cNvSpPr/>
+          <p:nvPr/>
+        </p:nvSpPr>
+        <p:spPr>
+          <a:xfrm>
+            <a:off x="6355080" y="3291840"/>
+            <a:ext cx="640080" cy="1143000"/>
+          </a:xfrm>
+          <a:prstGeom prst="rect">
+            <a:avLst/>
+          </a:prstGeom>
+          <a:solidFill>
+            <a:srgbClr val="1E2761"/>
+          </a:solidFill>
+          <a:ln>
+            <a:noFill/>
+          </a:ln>
+          <a:effectLst/>
+        </p:spPr>
+        <p:style>
+          <a:lnRef idx="1">
+            <a:schemeClr val="accent1"/>
+          </a:lnRef>
+          <a:fillRef idx="3">
+            <a:schemeClr val="accent1"/>
+          </a:fillRef>
+          <a:effectRef idx="2">
+            <a:schemeClr val="accent1"/>
+          </a:effectRef>
+          <a:fontRef idx="minor">
+            <a:schemeClr val="lt1"/>
+          </a:fontRef>
+        </p:style>
+        <p:txBody>
+          <a:bodyPr rtlCol="0" anchor="ctr"/>
+          <a:lstStyle/>
+          <a:p>
+            <a:pPr algn="ctr"/>
+          </a:p>
+        </p:txBody>
+      </p:sp>
+      <p:sp>
+        <p:nvSpPr>
+          <p:cNvPr id="14" name="TextBox 13"/>
+          <p:cNvSpPr txBox="1"/>
+          <p:nvPr/>
+        </p:nvSpPr>
+        <p:spPr>
+          <a:xfrm>
+            <a:off x="6355080" y="3611880"/>
+            <a:ext cx="640080" cy="548640"/>
+          </a:xfrm>
+          <a:prstGeom prst="rect">
+            <a:avLst/>
+          </a:prstGeom>
+          <a:noFill/>
+        </p:spPr>
+        <p:txBody>
+          <a:bodyPr wrap="square">
+            <a:spAutoFit/>
+          </a:bodyPr>
+          <a:lstStyle/>
+          <a:p>
+            <a:pPr algn="ctr"/>
+            <a:r>
+              <a:rPr sz="2200" b="1" i="0">
+                <a:solidFill>
+                  <a:srgbClr val="FFFFFF"/>
+                </a:solidFill>
+                <a:latin typeface="Montserrat"/>
+              </a:rPr>
+              <a:t>B</a:t>
+            </a:r>
+          </a:p>
+        </p:txBody>
+      </p:sp>
+      <p:sp>
+        <p:nvSpPr>
+          <p:cNvPr id="15" name="TextBox 14"/>
+          <p:cNvSpPr txBox="1"/>
+          <p:nvPr/>
+        </p:nvSpPr>
+        <p:spPr>
+          <a:xfrm>
+            <a:off x="7132320" y="3474720"/>
+            <a:ext cx="4114800" cy="868680"/>
+          </a:xfrm>
+          <a:prstGeom prst="rect">
+            <a:avLst/>
+          </a:prstGeom>
+          <a:noFill/>
+        </p:spPr>
+        <p:txBody>
+          <a:bodyPr wrap="square">
+            <a:spAutoFit/>
+          </a:bodyPr>
+          <a:lstStyle/>
+          <a:p>
+            <a:r>
+              <a:rPr sz="1400" b="0" i="0">
+                <a:solidFill>
+                  <a:srgbClr val="1B2330"/>
+                </a:solidFill>
+                <a:latin typeface="Montserrat"/>
+              </a:rPr>
+              <a:t>Revisión cada 4 años</a:t>
+            </a:r>
+          </a:p>
+        </p:txBody>
+      </p:sp>
+      <p:sp>
+        <p:nvSpPr>
+          <p:cNvPr id="16" name="Rounded Rectangle 15"/>
+          <p:cNvSpPr/>
+          <p:nvPr/>
+        </p:nvSpPr>
+        <p:spPr>
+          <a:xfrm>
+            <a:off x="822960" y="4617720"/>
+            <a:ext cx="4983480" cy="1143000"/>
+          </a:xfrm>
+          <a:prstGeom prst="roundRect">
+            <a:avLst/>
+          </a:prstGeom>
+          <a:solidFill>
+            <a:srgbClr val="F3F6FB"/>
+          </a:solidFill>
+          <a:ln w="12700">
+            <a:solidFill>
+              <a:srgbClr val="C7D2E6"/>
+            </a:solidFill>
+          </a:ln>
+          <a:effectLst/>
+        </p:spPr>
+        <p:style>
+          <a:lnRef idx="1">
+            <a:schemeClr val="accent1"/>
+          </a:lnRef>
+          <a:fillRef idx="3">
+            <a:schemeClr val="accent1"/>
+          </a:fillRef>
+          <a:effectRef idx="2">
+            <a:schemeClr val="accent1"/>
+          </a:effectRef>
+          <a:fontRef idx="minor">
+            <a:schemeClr val="lt1"/>
+          </a:fontRef>
+        </p:style>
+        <p:txBody>
+          <a:bodyPr rtlCol="0" anchor="ctr"/>
+          <a:lstStyle/>
+          <a:p>
+            <a:pPr algn="ctr"/>
+          </a:p>
+        </p:txBody>
+      </p:sp>
+      <p:sp>
+        <p:nvSpPr>
+          <p:cNvPr id="17" name="Rectangle 16"/>
+          <p:cNvSpPr/>
+          <p:nvPr/>
+        </p:nvSpPr>
+        <p:spPr>
+          <a:xfrm>
+            <a:off x="822960" y="4617720"/>
+            <a:ext cx="640080" cy="1143000"/>
+          </a:xfrm>
+          <a:prstGeom prst="rect">
+            <a:avLst/>
+          </a:prstGeom>
+          <a:solidFill>
+            <a:srgbClr val="1E2761"/>
+          </a:solidFill>
+          <a:ln>
+            <a:noFill/>
+          </a:ln>
+          <a:effectLst/>
+        </p:spPr>
+        <p:style>
+          <a:lnRef idx="1">
+            <a:schemeClr val="accent1"/>
+          </a:lnRef>
+          <a:fillRef idx="3">
+            <a:schemeClr val="accent1"/>
+          </a:fillRef>
+          <a:effectRef idx="2">
+            <a:schemeClr val="accent1"/>
+          </a:effectRef>
+          <a:fontRef idx="minor">
+            <a:schemeClr val="lt1"/>
+          </a:fontRef>
+        </p:style>
+        <p:txBody>
+          <a:bodyPr rtlCol="0" anchor="ctr"/>
+          <a:lstStyle/>
+          <a:p>
+            <a:pPr algn="ctr"/>
+          </a:p>
+        </p:txBody>
+      </p:sp>
+      <p:sp>
+        <p:nvSpPr>
+          <p:cNvPr id="18" name="TextBox 17"/>
+          <p:cNvSpPr txBox="1"/>
+          <p:nvPr/>
+        </p:nvSpPr>
+        <p:spPr>
+          <a:xfrm>
+            <a:off x="822960" y="4937760"/>
+            <a:ext cx="640080" cy="548640"/>
+          </a:xfrm>
+          <a:prstGeom prst="rect">
+            <a:avLst/>
+          </a:prstGeom>
+          <a:noFill/>
+        </p:spPr>
+        <p:txBody>
+          <a:bodyPr wrap="square">
+            <a:spAutoFit/>
+          </a:bodyPr>
+          <a:lstStyle/>
+          <a:p>
+            <a:pPr algn="ctr"/>
+            <a:r>
+              <a:rPr sz="2200" b="1" i="0">
+                <a:solidFill>
+                  <a:srgbClr val="FFFFFF"/>
+                </a:solidFill>
+                <a:latin typeface="Montserrat"/>
+              </a:rPr>
+              <a:t>C</a:t>
+            </a:r>
+          </a:p>
+        </p:txBody>
+      </p:sp>
+      <p:sp>
+        <p:nvSpPr>
+          <p:cNvPr id="19" name="TextBox 18"/>
+          <p:cNvSpPr txBox="1"/>
+          <p:nvPr/>
+        </p:nvSpPr>
+        <p:spPr>
+          <a:xfrm>
+            <a:off x="1600200" y="4800600"/>
+            <a:ext cx="4114800" cy="868680"/>
+          </a:xfrm>
+          <a:prstGeom prst="rect">
+            <a:avLst/>
+          </a:prstGeom>
+          <a:noFill/>
+        </p:spPr>
+        <p:txBody>
+          <a:bodyPr wrap="square">
+            <a:spAutoFit/>
+          </a:bodyPr>
+          <a:lstStyle/>
+          <a:p>
+            <a:r>
+              <a:rPr sz="1400" b="0" i="0">
+                <a:solidFill>
+                  <a:srgbClr val="1B2330"/>
+                </a:solidFill>
+                <a:latin typeface="Montserrat"/>
+              </a:rPr>
+              <a:t>Inspección cada 4 años</a:t>
+            </a:r>
+          </a:p>
+        </p:txBody>
+      </p:sp>
+      <p:sp>
+        <p:nvSpPr>
+          <p:cNvPr id="20" name="Rounded Rectangle 19"/>
+          <p:cNvSpPr/>
+          <p:nvPr/>
+        </p:nvSpPr>
+        <p:spPr>
+          <a:xfrm>
+            <a:off x="6355080" y="4617720"/>
+            <a:ext cx="4983480" cy="1143000"/>
+          </a:xfrm>
+          <a:prstGeom prst="roundRect">
+            <a:avLst/>
+          </a:prstGeom>
+          <a:solidFill>
+            <a:srgbClr val="F3F6FB"/>
+          </a:solidFill>
+          <a:ln w="12700">
+            <a:solidFill>
+              <a:srgbClr val="C7D2E6"/>
+            </a:solidFill>
+          </a:ln>
+          <a:effectLst/>
+        </p:spPr>
+        <p:style>
+          <a:lnRef idx="1">
+            <a:schemeClr val="accent1"/>
+          </a:lnRef>
+          <a:fillRef idx="3">
+            <a:schemeClr val="accent1"/>
+          </a:fillRef>
+          <a:effectRef idx="2">
+            <a:schemeClr val="accent1"/>
+          </a:effectRef>
+          <a:fontRef idx="minor">
+            <a:schemeClr val="lt1"/>
+          </a:fontRef>
+        </p:style>
+        <p:txBody>
+          <a:bodyPr rtlCol="0" anchor="ctr"/>
+          <a:lstStyle/>
+          <a:p>
+            <a:pPr algn="ctr"/>
+          </a:p>
+        </p:txBody>
+      </p:sp>
+      <p:sp>
+        <p:nvSpPr>
+          <p:cNvPr id="21" name="Rectangle 20"/>
+          <p:cNvSpPr/>
+          <p:nvPr/>
+        </p:nvSpPr>
+        <p:spPr>
+          <a:xfrm>
+            <a:off x="6355080" y="4617720"/>
+            <a:ext cx="640080" cy="1143000"/>
+          </a:xfrm>
+          <a:prstGeom prst="rect">
+            <a:avLst/>
+          </a:prstGeom>
+          <a:solidFill>
+            <a:srgbClr val="1E2761"/>
+          </a:solidFill>
+          <a:ln>
+            <a:noFill/>
+          </a:ln>
+          <a:effectLst/>
+        </p:spPr>
+        <p:style>
+          <a:lnRef idx="1">
+            <a:schemeClr val="accent1"/>
+          </a:lnRef>
+          <a:fillRef idx="3">
+            <a:schemeClr val="accent1"/>
+          </a:fillRef>
+          <a:effectRef idx="2">
+            <a:schemeClr val="accent1"/>
+          </a:effectRef>
+          <a:fontRef idx="minor">
+            <a:schemeClr val="lt1"/>
+          </a:fontRef>
+        </p:style>
+        <p:txBody>
+          <a:bodyPr rtlCol="0" anchor="ctr"/>
+          <a:lstStyle/>
+          <a:p>
+            <a:pPr algn="ctr"/>
+          </a:p>
+        </p:txBody>
+      </p:sp>
+      <p:sp>
+        <p:nvSpPr>
+          <p:cNvPr id="22" name="TextBox 21"/>
+          <p:cNvSpPr txBox="1"/>
+          <p:nvPr/>
+        </p:nvSpPr>
+        <p:spPr>
+          <a:xfrm>
+            <a:off x="6355080" y="4937760"/>
+            <a:ext cx="640080" cy="548640"/>
+          </a:xfrm>
+          <a:prstGeom prst="rect">
+            <a:avLst/>
+          </a:prstGeom>
+          <a:noFill/>
+        </p:spPr>
+        <p:txBody>
+          <a:bodyPr wrap="square">
+            <a:spAutoFit/>
+          </a:bodyPr>
+          <a:lstStyle/>
+          <a:p>
+            <a:pPr algn="ctr"/>
+            <a:r>
+              <a:rPr sz="2200" b="1" i="0">
+                <a:solidFill>
+                  <a:srgbClr val="FFFFFF"/>
+                </a:solidFill>
+                <a:latin typeface="Montserrat"/>
+              </a:rPr>
+              <a:t>D</a:t>
+            </a:r>
+          </a:p>
+        </p:txBody>
+      </p:sp>
+      <p:sp>
+        <p:nvSpPr>
+          <p:cNvPr id="23" name="TextBox 22"/>
+          <p:cNvSpPr txBox="1"/>
+          <p:nvPr/>
+        </p:nvSpPr>
+        <p:spPr>
+          <a:xfrm>
+            <a:off x="7132320" y="4800600"/>
+            <a:ext cx="4114800" cy="868680"/>
+          </a:xfrm>
+          <a:prstGeom prst="rect">
+            <a:avLst/>
+          </a:prstGeom>
+          <a:noFill/>
+        </p:spPr>
+        <p:txBody>
+          <a:bodyPr wrap="square">
+            <a:spAutoFit/>
+          </a:bodyPr>
+          <a:lstStyle/>
+          <a:p>
+            <a:r>
+              <a:rPr sz="1400" b="0" i="0">
+                <a:solidFill>
+                  <a:srgbClr val="1B2330"/>
+                </a:solidFill>
+                <a:latin typeface="Montserrat"/>
+              </a:rPr>
+              <a:t>Revisión cada 2 años</a:t>
+            </a:r>
+          </a:p>
+        </p:txBody>
+      </p:sp>
+    </p:spTree>
+  </p:cSld>
+  <p:clrMapOvr>
+    <a:masterClrMapping/>
+  </p:clrMapOvr>
+  <mc:AlternateContent xmlns:mc="http://schemas.openxmlformats.org/markup-compatibility/2006">
+    <mc:Choice xmlns:p14="http://schemas.microsoft.com/office/powerpoint/2010/main" Requires="p14">
+      <p:transition spd="med" p14:dur="700">
+        <p14:cube dir="l"/>
+      </p:transition>
+    </mc:Choice>
+    <mc:Fallback>
+      <p:transition spd="med">
+        <p:push dir="l"/>
+      </p:transition>
+    </mc:Fallback>
+  </mc:AlternateContent>
 </p:sld>
 </file>
 
@@ -8001,7 +10697,7 @@
                 </a:solidFill>
                 <a:latin typeface="Montserrat"/>
               </a:rPr>
-              <a:t>002 / 016</a:t>
+              <a:t>002 / 022</a:t>
             </a:r>
           </a:p>
         </p:txBody>
@@ -8076,7 +10772,7 @@
       </p:sp>
       <p:sp>
         <p:nvSpPr>
-          <p:cNvPr id="6" name="Rounded Rectangle 5"/>
+          <p:cNvPr id="6" name="Rectangle 5"/>
           <p:cNvSpPr/>
           <p:nvPr/>
         </p:nvSpPr>
@@ -8085,7 +10781,7 @@
             <a:off x="868680" y="1234440"/>
             <a:ext cx="1463040" cy="73152"/>
           </a:xfrm>
-          <a:prstGeom prst="roundRect">
+          <a:prstGeom prst="rect">
             <a:avLst/>
           </a:prstGeom>
           <a:solidFill>
@@ -8166,14 +10862,58 @@
       </p:sp>
       <p:sp>
         <p:nvSpPr>
-          <p:cNvPr id="8" name="TextBox 7"/>
+          <p:cNvPr id="8" name="Rectangle 7"/>
+          <p:cNvSpPr/>
+          <p:nvPr/>
+        </p:nvSpPr>
+        <p:spPr>
+          <a:xfrm>
+            <a:off x="822960" y="2011680"/>
+            <a:ext cx="3017520" cy="128016"/>
+          </a:xfrm>
+          <a:prstGeom prst="rect">
+            <a:avLst/>
+          </a:prstGeom>
+          <a:solidFill>
+            <a:srgbClr val="E8801A"/>
+          </a:solidFill>
+          <a:ln>
+            <a:noFill/>
+          </a:ln>
+          <a:effectLst/>
+        </p:spPr>
+        <p:style>
+          <a:lnRef idx="1">
+            <a:schemeClr val="accent1"/>
+          </a:lnRef>
+          <a:fillRef idx="3">
+            <a:schemeClr val="accent1"/>
+          </a:fillRef>
+          <a:effectRef idx="2">
+            <a:schemeClr val="accent1"/>
+          </a:effectRef>
+          <a:fontRef idx="minor">
+            <a:schemeClr val="lt1"/>
+          </a:fontRef>
+        </p:style>
+        <p:txBody>
+          <a:bodyPr rtlCol="0" anchor="ctr"/>
+          <a:lstStyle/>
+          <a:p>
+            <a:pPr algn="ctr"/>
+          </a:p>
+        </p:txBody>
+      </p:sp>
+      <p:sp>
+        <p:nvSpPr>
+          <p:cNvPr id="9" name="TextBox 8"/>
           <p:cNvSpPr txBox="1"/>
           <p:nvPr/>
         </p:nvSpPr>
         <p:spPr>
           <a:xfrm>
-            <a:off x="822960" y="2331720"/>
-            <a:ext cx="3017520" cy="1463040"/>
+            <a:off x="822960" y="2377440"/>
+            <a:ext cx="3017520" cy="1371600"/>
           </a:xfrm>
           <a:prstGeom prst="rect">
             <a:avLst/>
@@ -8188,7 +10928,7 @@
           <a:p>
             <a:pPr algn="ctr"/>
             <a:r>
-              <a:rPr sz="6000" b="1" i="0">
+              <a:rPr sz="5800" b="1" i="0">
                 <a:solidFill>
                   <a:srgbClr val="1E2761"/>
                 </a:solidFill>
@@ -8201,13 +10941,13 @@
       </p:sp>
       <p:sp>
         <p:nvSpPr>
-          <p:cNvPr id="9" name="TextBox 8"/>
+          <p:cNvPr id="10" name="TextBox 9"/>
           <p:cNvSpPr txBox="1"/>
           <p:nvPr/>
         </p:nvSpPr>
         <p:spPr>
           <a:xfrm>
-            <a:off x="1051560" y="3611880"/>
+            <a:off x="1051560" y="3657600"/>
             <a:ext cx="2560320" cy="1005840"/>
           </a:xfrm>
           <a:prstGeom prst="rect">
@@ -8236,7 +10976,7 @@
       </p:sp>
       <p:sp>
         <p:nvSpPr>
-          <p:cNvPr id="10" name="Rounded Rectangle 9"/>
+          <p:cNvPr id="11" name="Rounded Rectangle 10"/>
           <p:cNvSpPr/>
           <p:nvPr/>
         </p:nvSpPr>
@@ -8282,14 +11022,58 @@
       </p:sp>
       <p:sp>
         <p:nvSpPr>
-          <p:cNvPr id="11" name="TextBox 10"/>
+          <p:cNvPr id="12" name="Rectangle 11"/>
+          <p:cNvSpPr/>
+          <p:nvPr/>
+        </p:nvSpPr>
+        <p:spPr>
+          <a:xfrm>
+            <a:off x="4617720" y="2011680"/>
+            <a:ext cx="3017520" cy="128016"/>
+          </a:xfrm>
+          <a:prstGeom prst="rect">
+            <a:avLst/>
+          </a:prstGeom>
+          <a:solidFill>
+            <a:srgbClr val="E8801A"/>
+          </a:solidFill>
+          <a:ln>
+            <a:noFill/>
+          </a:ln>
+          <a:effectLst/>
+        </p:spPr>
+        <p:style>
+          <a:lnRef idx="1">
+            <a:schemeClr val="accent1"/>
+          </a:lnRef>
+          <a:fillRef idx="3">
+            <a:schemeClr val="accent1"/>
+          </a:fillRef>
+          <a:effectRef idx="2">
+            <a:schemeClr val="accent1"/>
+          </a:effectRef>
+          <a:fontRef idx="minor">
+            <a:schemeClr val="lt1"/>
+          </a:fontRef>
+        </p:style>
+        <p:txBody>
+          <a:bodyPr rtlCol="0" anchor="ctr"/>
+          <a:lstStyle/>
+          <a:p>
+            <a:pPr algn="ctr"/>
+          </a:p>
+        </p:txBody>
+      </p:sp>
+      <p:sp>
+        <p:nvSpPr>
+          <p:cNvPr id="13" name="TextBox 12"/>
           <p:cNvSpPr txBox="1"/>
           <p:nvPr/>
         </p:nvSpPr>
         <p:spPr>
           <a:xfrm>
-            <a:off x="4617720" y="2331720"/>
-            <a:ext cx="3017520" cy="1463040"/>
+            <a:off x="4617720" y="2377440"/>
+            <a:ext cx="3017520" cy="1371600"/>
           </a:xfrm>
           <a:prstGeom prst="rect">
             <a:avLst/>
@@ -8304,7 +11088,7 @@
           <a:p>
             <a:pPr algn="ctr"/>
             <a:r>
-              <a:rPr sz="6000" b="1" i="0">
+              <a:rPr sz="5800" b="1" i="0">
                 <a:solidFill>
                   <a:srgbClr val="1E2761"/>
                 </a:solidFill>
@@ -8317,13 +11101,13 @@
       </p:sp>
       <p:sp>
         <p:nvSpPr>
-          <p:cNvPr id="12" name="TextBox 11"/>
+          <p:cNvPr id="14" name="TextBox 13"/>
           <p:cNvSpPr txBox="1"/>
           <p:nvPr/>
         </p:nvSpPr>
         <p:spPr>
           <a:xfrm>
-            <a:off x="4846320" y="3611880"/>
+            <a:off x="4846320" y="3657600"/>
             <a:ext cx="2560320" cy="1005840"/>
           </a:xfrm>
           <a:prstGeom prst="rect">
@@ -8352,7 +11136,7 @@
       </p:sp>
       <p:sp>
         <p:nvSpPr>
-          <p:cNvPr id="13" name="Rounded Rectangle 12"/>
+          <p:cNvPr id="15" name="Rounded Rectangle 14"/>
           <p:cNvSpPr/>
           <p:nvPr/>
         </p:nvSpPr>
@@ -8398,14 +11182,58 @@
       </p:sp>
       <p:sp>
         <p:nvSpPr>
-          <p:cNvPr id="14" name="TextBox 13"/>
+          <p:cNvPr id="16" name="Rectangle 15"/>
+          <p:cNvSpPr/>
+          <p:nvPr/>
+        </p:nvSpPr>
+        <p:spPr>
+          <a:xfrm>
+            <a:off x="8412480" y="2011680"/>
+            <a:ext cx="3017520" cy="128016"/>
+          </a:xfrm>
+          <a:prstGeom prst="rect">
+            <a:avLst/>
+          </a:prstGeom>
+          <a:solidFill>
+            <a:srgbClr val="E8801A"/>
+          </a:solidFill>
+          <a:ln>
+            <a:noFill/>
+          </a:ln>
+          <a:effectLst/>
+        </p:spPr>
+        <p:style>
+          <a:lnRef idx="1">
+            <a:schemeClr val="accent1"/>
+          </a:lnRef>
+          <a:fillRef idx="3">
+            <a:schemeClr val="accent1"/>
+          </a:fillRef>
+          <a:effectRef idx="2">
+            <a:schemeClr val="accent1"/>
+          </a:effectRef>
+          <a:fontRef idx="minor">
+            <a:schemeClr val="lt1"/>
+          </a:fontRef>
+        </p:style>
+        <p:txBody>
+          <a:bodyPr rtlCol="0" anchor="ctr"/>
+          <a:lstStyle/>
+          <a:p>
+            <a:pPr algn="ctr"/>
+          </a:p>
+        </p:txBody>
+      </p:sp>
+      <p:sp>
+        <p:nvSpPr>
+          <p:cNvPr id="17" name="TextBox 16"/>
           <p:cNvSpPr txBox="1"/>
           <p:nvPr/>
         </p:nvSpPr>
         <p:spPr>
           <a:xfrm>
-            <a:off x="8412480" y="2331720"/>
-            <a:ext cx="3017520" cy="1463040"/>
+            <a:off x="8412480" y="2377440"/>
+            <a:ext cx="3017520" cy="1371600"/>
           </a:xfrm>
           <a:prstGeom prst="rect">
             <a:avLst/>
@@ -8420,7 +11248,7 @@
           <a:p>
             <a:pPr algn="ctr"/>
             <a:r>
-              <a:rPr sz="6000" b="1" i="0">
+              <a:rPr sz="5800" b="1" i="0">
                 <a:solidFill>
                   <a:srgbClr val="1E2761"/>
                 </a:solidFill>
@@ -8433,13 +11261,13 @@
       </p:sp>
       <p:sp>
         <p:nvSpPr>
-          <p:cNvPr id="15" name="TextBox 14"/>
+          <p:cNvPr id="18" name="TextBox 17"/>
           <p:cNvSpPr txBox="1"/>
           <p:nvPr/>
         </p:nvSpPr>
         <p:spPr>
           <a:xfrm>
-            <a:off x="8641080" y="3611880"/>
+            <a:off x="8641080" y="3657600"/>
             <a:ext cx="2560320" cy="1005840"/>
           </a:xfrm>
           <a:prstGeom prst="rect">
@@ -8471,6 +11299,1263 @@
   <p:clrMapOvr>
     <a:masterClrMapping/>
   </p:clrMapOvr>
+  <mc:AlternateContent xmlns:mc="http://schemas.openxmlformats.org/markup-compatibility/2006">
+    <mc:Choice xmlns:p14="http://schemas.microsoft.com/office/powerpoint/2010/main" Requires="p14">
+      <p:transition spd="med" p14:dur="700">
+        <p14:cube dir="r"/>
+      </p:transition>
+    </mc:Choice>
+    <mc:Fallback>
+      <p:transition spd="med">
+        <p:push dir="r"/>
+      </p:transition>
+    </mc:Fallback>
+  </mc:AlternateContent>
+</p:sld>
+</file>
+
+<file path=ppt/slides/slide20.xml><?xml version="1.0" encoding="utf-8"?>
+<p:sld xmlns:a="http://schemas.openxmlformats.org/drawingml/2006/main" xmlns:p="http://schemas.openxmlformats.org/presentationml/2006/main" xmlns:r="http://schemas.openxmlformats.org/officeDocument/2006/relationships">
+  <p:cSld>
+    <p:spTree>
+      <p:nvGrpSpPr>
+        <p:cNvPr id="1" name=""/>
+        <p:cNvGrpSpPr/>
+        <p:nvPr/>
+      </p:nvGrpSpPr>
+      <p:grpSpPr/>
+      <p:sp>
+        <p:nvSpPr>
+          <p:cNvPr id="2" name="Rectangle 1"/>
+          <p:cNvSpPr/>
+          <p:nvPr/>
+        </p:nvSpPr>
+        <p:spPr>
+          <a:xfrm>
+            <a:off x="0" y="0"/>
+            <a:ext cx="12191695" cy="6858000"/>
+          </a:xfrm>
+          <a:prstGeom prst="rect">
+            <a:avLst/>
+          </a:prstGeom>
+          <a:solidFill>
+            <a:srgbClr val="FFFFFF"/>
+          </a:solidFill>
+          <a:ln>
+            <a:noFill/>
+          </a:ln>
+          <a:effectLst/>
+        </p:spPr>
+        <p:style>
+          <a:lnRef idx="1">
+            <a:schemeClr val="accent1"/>
+          </a:lnRef>
+          <a:fillRef idx="3">
+            <a:schemeClr val="accent1"/>
+          </a:fillRef>
+          <a:effectRef idx="2">
+            <a:schemeClr val="accent1"/>
+          </a:effectRef>
+          <a:fontRef idx="minor">
+            <a:schemeClr val="lt1"/>
+          </a:fontRef>
+        </p:style>
+        <p:txBody>
+          <a:bodyPr rtlCol="0" anchor="ctr"/>
+          <a:lstStyle/>
+          <a:p>
+            <a:pPr algn="ctr"/>
+          </a:p>
+        </p:txBody>
+      </p:sp>
+      <p:sp>
+        <p:nvSpPr>
+          <p:cNvPr id="3" name="TextBox 2"/>
+          <p:cNvSpPr txBox="1"/>
+          <p:nvPr/>
+        </p:nvSpPr>
+        <p:spPr>
+          <a:xfrm>
+            <a:off x="10607040" y="320040"/>
+            <a:ext cx="1371600" cy="365760"/>
+          </a:xfrm>
+          <a:prstGeom prst="rect">
+            <a:avLst/>
+          </a:prstGeom>
+          <a:noFill/>
+        </p:spPr>
+        <p:txBody>
+          <a:bodyPr wrap="square">
+            <a:spAutoFit/>
+          </a:bodyPr>
+          <a:lstStyle/>
+          <a:p>
+            <a:pPr algn="r"/>
+            <a:r>
+              <a:rPr sz="1000" b="1" i="0">
+                <a:solidFill>
+                  <a:srgbClr val="64748B"/>
+                </a:solidFill>
+                <a:latin typeface="Montserrat"/>
+              </a:rPr>
+              <a:t>020 / 022</a:t>
+            </a:r>
+          </a:p>
+        </p:txBody>
+      </p:sp>
+      <p:sp>
+        <p:nvSpPr>
+          <p:cNvPr id="4" name="TextBox 3"/>
+          <p:cNvSpPr txBox="1"/>
+          <p:nvPr/>
+        </p:nvSpPr>
+        <p:spPr>
+          <a:xfrm>
+            <a:off x="457200" y="6419088"/>
+            <a:ext cx="8229600" cy="365760"/>
+          </a:xfrm>
+          <a:prstGeom prst="rect">
+            <a:avLst/>
+          </a:prstGeom>
+          <a:noFill/>
+        </p:spPr>
+        <p:txBody>
+          <a:bodyPr wrap="square">
+            <a:spAutoFit/>
+          </a:bodyPr>
+          <a:lstStyle/>
+          <a:p>
+            <a:r>
+              <a:rPr sz="900" b="0" i="0">
+                <a:solidFill>
+                  <a:srgbClr val="64748B"/>
+                </a:solidFill>
+                <a:latin typeface="Montserrat"/>
+              </a:rPr>
+              <a:t>Curso Gas B · Tema 07 · ITC-ICG 10 · Caravanas</a:t>
+            </a:r>
+          </a:p>
+        </p:txBody>
+      </p:sp>
+      <p:sp>
+        <p:nvSpPr>
+          <p:cNvPr id="5" name="Rectangle 4"/>
+          <p:cNvSpPr/>
+          <p:nvPr/>
+        </p:nvSpPr>
+        <p:spPr>
+          <a:xfrm>
+            <a:off x="0" y="0"/>
+            <a:ext cx="12191695" cy="1143000"/>
+          </a:xfrm>
+          <a:prstGeom prst="rect">
+            <a:avLst/>
+          </a:prstGeom>
+          <a:solidFill>
+            <a:srgbClr val="1E8E4B"/>
+          </a:solidFill>
+          <a:ln>
+            <a:noFill/>
+          </a:ln>
+          <a:effectLst/>
+        </p:spPr>
+        <p:style>
+          <a:lnRef idx="1">
+            <a:schemeClr val="accent1"/>
+          </a:lnRef>
+          <a:fillRef idx="3">
+            <a:schemeClr val="accent1"/>
+          </a:fillRef>
+          <a:effectRef idx="2">
+            <a:schemeClr val="accent1"/>
+          </a:effectRef>
+          <a:fontRef idx="minor">
+            <a:schemeClr val="lt1"/>
+          </a:fontRef>
+        </p:style>
+        <p:txBody>
+          <a:bodyPr rtlCol="0" anchor="ctr"/>
+          <a:lstStyle/>
+          <a:p>
+            <a:pPr algn="ctr"/>
+          </a:p>
+        </p:txBody>
+      </p:sp>
+      <p:sp>
+        <p:nvSpPr>
+          <p:cNvPr id="6" name="TextBox 5"/>
+          <p:cNvSpPr txBox="1"/>
+          <p:nvPr/>
+        </p:nvSpPr>
+        <p:spPr>
+          <a:xfrm>
+            <a:off x="822960" y="274320"/>
+            <a:ext cx="10515600" cy="640080"/>
+          </a:xfrm>
+          <a:prstGeom prst="rect">
+            <a:avLst/>
+          </a:prstGeom>
+          <a:noFill/>
+        </p:spPr>
+        <p:txBody>
+          <a:bodyPr wrap="square">
+            <a:spAutoFit/>
+          </a:bodyPr>
+          <a:lstStyle/>
+          <a:p>
+            <a:r>
+              <a:rPr sz="2400" b="1" i="0">
+                <a:solidFill>
+                  <a:srgbClr val="FFFFFF"/>
+                </a:solidFill>
+                <a:latin typeface="Montserrat"/>
+              </a:rPr>
+              <a:t>✔  RESPUESTA:  B</a:t>
+            </a:r>
+          </a:p>
+        </p:txBody>
+      </p:sp>
+      <p:sp>
+        <p:nvSpPr>
+          <p:cNvPr id="7" name="TextBox 6"/>
+          <p:cNvSpPr txBox="1"/>
+          <p:nvPr/>
+        </p:nvSpPr>
+        <p:spPr>
+          <a:xfrm>
+            <a:off x="822960" y="1417320"/>
+            <a:ext cx="10515600" cy="914400"/>
+          </a:xfrm>
+          <a:prstGeom prst="rect">
+            <a:avLst/>
+          </a:prstGeom>
+          <a:noFill/>
+        </p:spPr>
+        <p:txBody>
+          <a:bodyPr wrap="square">
+            <a:spAutoFit/>
+          </a:bodyPr>
+          <a:lstStyle/>
+          <a:p>
+            <a:r>
+              <a:rPr sz="1800" b="1" i="0">
+                <a:solidFill>
+                  <a:srgbClr val="64748B"/>
+                </a:solidFill>
+                <a:latin typeface="Montserrat"/>
+              </a:rPr>
+              <a:t>¿Cada cuánto y con qué nombre se controla periódicamente la instalación de una caravana?</a:t>
+            </a:r>
+          </a:p>
+        </p:txBody>
+      </p:sp>
+      <p:sp>
+        <p:nvSpPr>
+          <p:cNvPr id="8" name="Rounded Rectangle 7"/>
+          <p:cNvSpPr/>
+          <p:nvPr/>
+        </p:nvSpPr>
+        <p:spPr>
+          <a:xfrm>
+            <a:off x="822960" y="2514600"/>
+            <a:ext cx="10515600" cy="914400"/>
+          </a:xfrm>
+          <a:prstGeom prst="roundRect">
+            <a:avLst/>
+          </a:prstGeom>
+          <a:solidFill>
+            <a:srgbClr val="E9F6EE"/>
+          </a:solidFill>
+          <a:ln w="12700">
+            <a:solidFill>
+              <a:srgbClr val="1E8E4B"/>
+            </a:solidFill>
+          </a:ln>
+          <a:effectLst/>
+        </p:spPr>
+        <p:style>
+          <a:lnRef idx="1">
+            <a:schemeClr val="accent1"/>
+          </a:lnRef>
+          <a:fillRef idx="3">
+            <a:schemeClr val="accent1"/>
+          </a:fillRef>
+          <a:effectRef idx="2">
+            <a:schemeClr val="accent1"/>
+          </a:effectRef>
+          <a:fontRef idx="minor">
+            <a:schemeClr val="lt1"/>
+          </a:fontRef>
+        </p:style>
+        <p:txBody>
+          <a:bodyPr rtlCol="0" anchor="ctr"/>
+          <a:lstStyle/>
+          <a:p>
+            <a:pPr algn="ctr"/>
+          </a:p>
+        </p:txBody>
+      </p:sp>
+      <p:sp>
+        <p:nvSpPr>
+          <p:cNvPr id="9" name="TextBox 8"/>
+          <p:cNvSpPr txBox="1"/>
+          <p:nvPr/>
+        </p:nvSpPr>
+        <p:spPr>
+          <a:xfrm>
+            <a:off x="1097280" y="2697480"/>
+            <a:ext cx="10058400" cy="640080"/>
+          </a:xfrm>
+          <a:prstGeom prst="rect">
+            <a:avLst/>
+          </a:prstGeom>
+          <a:noFill/>
+        </p:spPr>
+        <p:txBody>
+          <a:bodyPr wrap="square">
+            <a:spAutoFit/>
+          </a:bodyPr>
+          <a:lstStyle/>
+          <a:p>
+            <a:r>
+              <a:rPr sz="1800" b="1" i="0">
+                <a:solidFill>
+                  <a:srgbClr val="1E8E4B"/>
+                </a:solidFill>
+                <a:latin typeface="Montserrat"/>
+              </a:rPr>
+              <a:t>B.  </a:t>
+            </a:r>
+            <a:r>
+              <a:rPr sz="1800" b="1" i="0">
+                <a:solidFill>
+                  <a:srgbClr val="1E2761"/>
+                </a:solidFill>
+                <a:latin typeface="Montserrat"/>
+              </a:rPr>
+              <a:t>Revisión cada 4 años</a:t>
+            </a:r>
+          </a:p>
+        </p:txBody>
+      </p:sp>
+      <p:sp>
+        <p:nvSpPr>
+          <p:cNvPr id="10" name="TextBox 9"/>
+          <p:cNvSpPr txBox="1"/>
+          <p:nvPr/>
+        </p:nvSpPr>
+        <p:spPr>
+          <a:xfrm>
+            <a:off x="822960" y="3749039"/>
+            <a:ext cx="10515600" cy="2194560"/>
+          </a:xfrm>
+          <a:prstGeom prst="rect">
+            <a:avLst/>
+          </a:prstGeom>
+          <a:noFill/>
+        </p:spPr>
+        <p:txBody>
+          <a:bodyPr wrap="square">
+            <a:spAutoFit/>
+          </a:bodyPr>
+          <a:lstStyle/>
+          <a:p>
+            <a:r>
+              <a:rPr sz="1500" b="1" i="0">
+                <a:solidFill>
+                  <a:srgbClr val="E8801A"/>
+                </a:solidFill>
+                <a:latin typeface="Montserrat"/>
+              </a:rPr>
+              <a:t>Por qué:  </a:t>
+            </a:r>
+            <a:r>
+              <a:rPr sz="1500" b="0" i="0">
+                <a:solidFill>
+                  <a:srgbClr val="1B2330"/>
+                </a:solidFill>
+                <a:latin typeface="Montserrat"/>
+              </a:rPr>
+              <a:t>Al funcionar con bombonas propias y no colgar de una red, la instalación se revisa (no se inspecciona) cada cuatro años.</a:t>
+            </a:r>
+          </a:p>
+        </p:txBody>
+      </p:sp>
+    </p:spTree>
+  </p:cSld>
+  <p:clrMapOvr>
+    <a:masterClrMapping/>
+  </p:clrMapOvr>
+  <mc:AlternateContent xmlns:mc="http://schemas.openxmlformats.org/markup-compatibility/2006">
+    <mc:Choice xmlns:p14="http://schemas.microsoft.com/office/powerpoint/2010/main" Requires="p14">
+      <p:transition spd="med" p14:dur="700">
+        <p14:cube dir="r"/>
+      </p:transition>
+    </mc:Choice>
+    <mc:Fallback>
+      <p:transition spd="med">
+        <p:push dir="r"/>
+      </p:transition>
+    </mc:Fallback>
+  </mc:AlternateContent>
+</p:sld>
+</file>
+
+<file path=ppt/slides/slide21.xml><?xml version="1.0" encoding="utf-8"?>
+<p:sld xmlns:a="http://schemas.openxmlformats.org/drawingml/2006/main" xmlns:p="http://schemas.openxmlformats.org/presentationml/2006/main" xmlns:r="http://schemas.openxmlformats.org/officeDocument/2006/relationships">
+  <p:cSld>
+    <p:spTree>
+      <p:nvGrpSpPr>
+        <p:cNvPr id="1" name=""/>
+        <p:cNvGrpSpPr/>
+        <p:nvPr/>
+      </p:nvGrpSpPr>
+      <p:grpSpPr/>
+      <p:sp>
+        <p:nvSpPr>
+          <p:cNvPr id="2" name="Rectangle 1"/>
+          <p:cNvSpPr/>
+          <p:nvPr/>
+        </p:nvSpPr>
+        <p:spPr>
+          <a:xfrm>
+            <a:off x="0" y="0"/>
+            <a:ext cx="12191695" cy="6858000"/>
+          </a:xfrm>
+          <a:prstGeom prst="rect">
+            <a:avLst/>
+          </a:prstGeom>
+          <a:solidFill>
+            <a:srgbClr val="FFFFFF"/>
+          </a:solidFill>
+          <a:ln>
+            <a:noFill/>
+          </a:ln>
+          <a:effectLst/>
+        </p:spPr>
+        <p:style>
+          <a:lnRef idx="1">
+            <a:schemeClr val="accent1"/>
+          </a:lnRef>
+          <a:fillRef idx="3">
+            <a:schemeClr val="accent1"/>
+          </a:fillRef>
+          <a:effectRef idx="2">
+            <a:schemeClr val="accent1"/>
+          </a:effectRef>
+          <a:fontRef idx="minor">
+            <a:schemeClr val="lt1"/>
+          </a:fontRef>
+        </p:style>
+        <p:txBody>
+          <a:bodyPr rtlCol="0" anchor="ctr"/>
+          <a:lstStyle/>
+          <a:p>
+            <a:pPr algn="ctr"/>
+          </a:p>
+        </p:txBody>
+      </p:sp>
+      <p:sp>
+        <p:nvSpPr>
+          <p:cNvPr id="3" name="TextBox 2"/>
+          <p:cNvSpPr txBox="1"/>
+          <p:nvPr/>
+        </p:nvSpPr>
+        <p:spPr>
+          <a:xfrm>
+            <a:off x="10607040" y="320040"/>
+            <a:ext cx="1371600" cy="365760"/>
+          </a:xfrm>
+          <a:prstGeom prst="rect">
+            <a:avLst/>
+          </a:prstGeom>
+          <a:noFill/>
+        </p:spPr>
+        <p:txBody>
+          <a:bodyPr wrap="square">
+            <a:spAutoFit/>
+          </a:bodyPr>
+          <a:lstStyle/>
+          <a:p>
+            <a:pPr algn="r"/>
+            <a:r>
+              <a:rPr sz="1000" b="1" i="0">
+                <a:solidFill>
+                  <a:srgbClr val="64748B"/>
+                </a:solidFill>
+                <a:latin typeface="Montserrat"/>
+              </a:rPr>
+              <a:t>021 / 022</a:t>
+            </a:r>
+          </a:p>
+        </p:txBody>
+      </p:sp>
+      <p:sp>
+        <p:nvSpPr>
+          <p:cNvPr id="4" name="TextBox 3"/>
+          <p:cNvSpPr txBox="1"/>
+          <p:nvPr/>
+        </p:nvSpPr>
+        <p:spPr>
+          <a:xfrm>
+            <a:off x="457200" y="6419088"/>
+            <a:ext cx="8229600" cy="365760"/>
+          </a:xfrm>
+          <a:prstGeom prst="rect">
+            <a:avLst/>
+          </a:prstGeom>
+          <a:noFill/>
+        </p:spPr>
+        <p:txBody>
+          <a:bodyPr wrap="square">
+            <a:spAutoFit/>
+          </a:bodyPr>
+          <a:lstStyle/>
+          <a:p>
+            <a:r>
+              <a:rPr sz="900" b="0" i="0">
+                <a:solidFill>
+                  <a:srgbClr val="64748B"/>
+                </a:solidFill>
+                <a:latin typeface="Montserrat"/>
+              </a:rPr>
+              <a:t>Curso Gas B · Tema 07 · ITC-ICG 10 · Caravanas</a:t>
+            </a:r>
+          </a:p>
+        </p:txBody>
+      </p:sp>
+      <p:sp>
+        <p:nvSpPr>
+          <p:cNvPr id="5" name="TextBox 4"/>
+          <p:cNvSpPr txBox="1"/>
+          <p:nvPr/>
+        </p:nvSpPr>
+        <p:spPr>
+          <a:xfrm>
+            <a:off x="822960" y="457200"/>
+            <a:ext cx="10058400" cy="365760"/>
+          </a:xfrm>
+          <a:prstGeom prst="rect">
+            <a:avLst/>
+          </a:prstGeom>
+          <a:noFill/>
+        </p:spPr>
+        <p:txBody>
+          <a:bodyPr wrap="square">
+            <a:spAutoFit/>
+          </a:bodyPr>
+          <a:lstStyle/>
+          <a:p>
+            <a:r>
+              <a:rPr sz="1300" b="1" i="0">
+                <a:solidFill>
+                  <a:srgbClr val="E8801A"/>
+                </a:solidFill>
+                <a:latin typeface="Montserrat"/>
+              </a:rPr>
+              <a:t>ANEXO 1 · MODELOS IRV</a:t>
+            </a:r>
+          </a:p>
+        </p:txBody>
+      </p:sp>
+      <p:sp>
+        <p:nvSpPr>
+          <p:cNvPr id="6" name="TextBox 5"/>
+          <p:cNvSpPr txBox="1"/>
+          <p:nvPr/>
+        </p:nvSpPr>
+        <p:spPr>
+          <a:xfrm>
+            <a:off x="822960" y="868680"/>
+            <a:ext cx="10515600" cy="914400"/>
+          </a:xfrm>
+          <a:prstGeom prst="rect">
+            <a:avLst/>
+          </a:prstGeom>
+          <a:noFill/>
+        </p:spPr>
+        <p:txBody>
+          <a:bodyPr wrap="square">
+            <a:spAutoFit/>
+          </a:bodyPr>
+          <a:lstStyle/>
+          <a:p>
+            <a:r>
+              <a:rPr sz="2800" b="1" i="0">
+                <a:solidFill>
+                  <a:srgbClr val="1E2761"/>
+                </a:solidFill>
+                <a:latin typeface="Montserrat"/>
+              </a:rPr>
+              <a:t>Los dos impresos oficiales</a:t>
+            </a:r>
+          </a:p>
+        </p:txBody>
+      </p:sp>
+      <p:sp>
+        <p:nvSpPr>
+          <p:cNvPr id="7" name="Rectangle 6"/>
+          <p:cNvSpPr/>
+          <p:nvPr/>
+        </p:nvSpPr>
+        <p:spPr>
+          <a:xfrm>
+            <a:off x="868680" y="1627632"/>
+            <a:ext cx="2011680" cy="73152"/>
+          </a:xfrm>
+          <a:prstGeom prst="rect">
+            <a:avLst/>
+          </a:prstGeom>
+          <a:solidFill>
+            <a:srgbClr val="E8801A"/>
+          </a:solidFill>
+          <a:ln>
+            <a:noFill/>
+          </a:ln>
+          <a:effectLst/>
+        </p:spPr>
+        <p:style>
+          <a:lnRef idx="1">
+            <a:schemeClr val="accent1"/>
+          </a:lnRef>
+          <a:fillRef idx="3">
+            <a:schemeClr val="accent1"/>
+          </a:fillRef>
+          <a:effectRef idx="2">
+            <a:schemeClr val="accent1"/>
+          </a:effectRef>
+          <a:fontRef idx="minor">
+            <a:schemeClr val="lt1"/>
+          </a:fontRef>
+        </p:style>
+        <p:txBody>
+          <a:bodyPr rtlCol="0" anchor="ctr"/>
+          <a:lstStyle/>
+          <a:p>
+            <a:pPr algn="ctr"/>
+          </a:p>
+        </p:txBody>
+      </p:sp>
+      <p:sp>
+        <p:nvSpPr>
+          <p:cNvPr id="8" name="TextBox 7"/>
+          <p:cNvSpPr txBox="1"/>
+          <p:nvPr/>
+        </p:nvSpPr>
+        <p:spPr>
+          <a:xfrm>
+            <a:off x="6355080" y="1965960"/>
+            <a:ext cx="5029200" cy="4206240"/>
+          </a:xfrm>
+          <a:prstGeom prst="rect">
+            <a:avLst/>
+          </a:prstGeom>
+          <a:noFill/>
+        </p:spPr>
+        <p:txBody>
+          <a:bodyPr wrap="square">
+            <a:spAutoFit/>
+          </a:bodyPr>
+          <a:lstStyle/>
+          <a:p>
+            <a:pPr>
+              <a:spcAft>
+                <a:spcPts val="1100"/>
+              </a:spcAft>
+            </a:pPr>
+            <a:r>
+              <a:rPr sz="1600" b="1" i="0">
+                <a:solidFill>
+                  <a:srgbClr val="E8801A"/>
+                </a:solidFill>
+                <a:latin typeface="Montserrat"/>
+              </a:rPr>
+              <a:t>▸  </a:t>
+            </a:r>
+            <a:r>
+              <a:rPr sz="1600" b="0" i="0">
+                <a:solidFill>
+                  <a:srgbClr val="1B2330"/>
+                </a:solidFill>
+                <a:latin typeface="Montserrat"/>
+              </a:rPr>
+              <a:t>IRV-1: certificado de instalación</a:t>
+            </a:r>
+          </a:p>
+          <a:p>
+            <a:pPr>
+              <a:spcAft>
+                <a:spcPts val="1100"/>
+              </a:spcAft>
+            </a:pPr>
+            <a:r>
+              <a:rPr sz="1600" b="1" i="0">
+                <a:solidFill>
+                  <a:srgbClr val="E8801A"/>
+                </a:solidFill>
+                <a:latin typeface="Montserrat"/>
+              </a:rPr>
+              <a:t>▸  </a:t>
+            </a:r>
+            <a:r>
+              <a:rPr sz="1600" b="0" i="0">
+                <a:solidFill>
+                  <a:srgbClr val="1B2330"/>
+                </a:solidFill>
+                <a:latin typeface="Montserrat"/>
+              </a:rPr>
+              <a:t>IRV-2: certificado de revisión periódica</a:t>
+            </a:r>
+          </a:p>
+          <a:p>
+            <a:pPr>
+              <a:spcAft>
+                <a:spcPts val="1100"/>
+              </a:spcAft>
+            </a:pPr>
+            <a:r>
+              <a:rPr sz="1600" b="1" i="0">
+                <a:solidFill>
+                  <a:srgbClr val="E8801A"/>
+                </a:solidFill>
+                <a:latin typeface="Montserrat"/>
+              </a:rPr>
+              <a:t>▸  </a:t>
+            </a:r>
+            <a:r>
+              <a:rPr sz="1600" b="0" i="0">
+                <a:solidFill>
+                  <a:srgbClr val="1B2330"/>
+                </a:solidFill>
+                <a:latin typeface="Montserrat"/>
+              </a:rPr>
+              <a:t>Modelos normalizados en el anexo 1</a:t>
+            </a:r>
+          </a:p>
+          <a:p>
+            <a:pPr>
+              <a:spcAft>
+                <a:spcPts val="1100"/>
+              </a:spcAft>
+            </a:pPr>
+            <a:r>
+              <a:rPr sz="1600" b="1" i="0">
+                <a:solidFill>
+                  <a:srgbClr val="E8801A"/>
+                </a:solidFill>
+                <a:latin typeface="Montserrat"/>
+              </a:rPr>
+              <a:t>▸  </a:t>
+            </a:r>
+            <a:r>
+              <a:rPr sz="1600" b="0" i="0">
+                <a:solidFill>
+                  <a:srgbClr val="1B2330"/>
+                </a:solidFill>
+                <a:latin typeface="Montserrat"/>
+              </a:rPr>
+              <a:t>Si ves 'IRV', piensa en caravana</a:t>
+            </a:r>
+          </a:p>
+        </p:txBody>
+      </p:sp>
+      <p:sp>
+        <p:nvSpPr>
+          <p:cNvPr id="9" name="imgph" descr="IMGQ:official gas installation certificate form"/>
+          <p:cNvSpPr/>
+          <p:nvPr/>
+        </p:nvSpPr>
+        <p:spPr>
+          <a:xfrm>
+            <a:off x="822960" y="1965960"/>
+            <a:ext cx="5303520" cy="4572000"/>
+          </a:xfrm>
+          <a:prstGeom prst="roundRect">
+            <a:avLst/>
+          </a:prstGeom>
+          <a:solidFill>
+            <a:srgbClr val="F3F6FB"/>
+          </a:solidFill>
+          <a:ln w="12700">
+            <a:solidFill>
+              <a:srgbClr val="C7D2E6"/>
+            </a:solidFill>
+          </a:ln>
+          <a:effectLst/>
+        </p:spPr>
+        <p:style>
+          <a:lnRef idx="1">
+            <a:schemeClr val="accent1"/>
+          </a:lnRef>
+          <a:fillRef idx="3">
+            <a:schemeClr val="accent1"/>
+          </a:fillRef>
+          <a:effectRef idx="2">
+            <a:schemeClr val="accent1"/>
+          </a:effectRef>
+          <a:fontRef idx="minor">
+            <a:schemeClr val="lt1"/>
+          </a:fontRef>
+        </p:style>
+        <p:txBody>
+          <a:bodyPr rtlCol="0" anchor="ctr"/>
+          <a:lstStyle/>
+          <a:p>
+            <a:pPr algn="ctr"/>
+          </a:p>
+        </p:txBody>
+      </p:sp>
+      <p:sp>
+        <p:nvSpPr>
+          <p:cNvPr id="10" name="TextBox 9"/>
+          <p:cNvSpPr txBox="1"/>
+          <p:nvPr/>
+        </p:nvSpPr>
+        <p:spPr>
+          <a:xfrm>
+            <a:off x="1097280" y="3611880"/>
+            <a:ext cx="4754880" cy="1280160"/>
+          </a:xfrm>
+          <a:prstGeom prst="rect">
+            <a:avLst/>
+          </a:prstGeom>
+          <a:noFill/>
+        </p:spPr>
+        <p:txBody>
+          <a:bodyPr wrap="square">
+            <a:spAutoFit/>
+          </a:bodyPr>
+          <a:lstStyle/>
+          <a:p>
+            <a:pPr algn="ctr"/>
+            <a:r>
+              <a:rPr sz="1400" b="1" i="0">
+                <a:solidFill>
+                  <a:srgbClr val="64748B"/>
+                </a:solidFill>
+                <a:latin typeface="Montserrat"/>
+              </a:rPr>
+              <a:t>IMAGEN</a:t>
+            </a:r>
+          </a:p>
+          <a:p>
+            <a:pPr algn="ctr"/>
+            <a:r>
+              <a:rPr sz="1100" b="0" i="1">
+                <a:solidFill>
+                  <a:srgbClr val="64748B"/>
+                </a:solidFill>
+                <a:latin typeface="Montserrat"/>
+              </a:rPr>
+              <a:t>official gas installation certificate form</a:t>
+            </a:r>
+          </a:p>
+        </p:txBody>
+      </p:sp>
+    </p:spTree>
+  </p:cSld>
+  <p:clrMapOvr>
+    <a:masterClrMapping/>
+  </p:clrMapOvr>
+  <mc:AlternateContent xmlns:mc="http://schemas.openxmlformats.org/markup-compatibility/2006">
+    <mc:Choice xmlns:p14="http://schemas.microsoft.com/office/powerpoint/2010/main" Requires="p14">
+      <p:transition spd="med" p14:dur="700">
+        <p14:cube dir="l"/>
+      </p:transition>
+    </mc:Choice>
+    <mc:Fallback>
+      <p:transition spd="med">
+        <p:push dir="l"/>
+      </p:transition>
+    </mc:Fallback>
+  </mc:AlternateContent>
+</p:sld>
+</file>
+
+<file path=ppt/slides/slide22.xml><?xml version="1.0" encoding="utf-8"?>
+<p:sld xmlns:a="http://schemas.openxmlformats.org/drawingml/2006/main" xmlns:p="http://schemas.openxmlformats.org/presentationml/2006/main" xmlns:r="http://schemas.openxmlformats.org/officeDocument/2006/relationships">
+  <p:cSld>
+    <p:spTree>
+      <p:nvGrpSpPr>
+        <p:cNvPr id="1" name=""/>
+        <p:cNvGrpSpPr/>
+        <p:nvPr/>
+      </p:nvGrpSpPr>
+      <p:grpSpPr/>
+      <p:sp>
+        <p:nvSpPr>
+          <p:cNvPr id="2" name="Rectangle 1"/>
+          <p:cNvSpPr/>
+          <p:nvPr/>
+        </p:nvSpPr>
+        <p:spPr>
+          <a:xfrm>
+            <a:off x="0" y="0"/>
+            <a:ext cx="12191695" cy="6858000"/>
+          </a:xfrm>
+          <a:prstGeom prst="rect">
+            <a:avLst/>
+          </a:prstGeom>
+          <a:solidFill>
+            <a:srgbClr val="1E2761"/>
+          </a:solidFill>
+          <a:ln>
+            <a:noFill/>
+          </a:ln>
+          <a:effectLst/>
+        </p:spPr>
+        <p:style>
+          <a:lnRef idx="1">
+            <a:schemeClr val="accent1"/>
+          </a:lnRef>
+          <a:fillRef idx="3">
+            <a:schemeClr val="accent1"/>
+          </a:fillRef>
+          <a:effectRef idx="2">
+            <a:schemeClr val="accent1"/>
+          </a:effectRef>
+          <a:fontRef idx="minor">
+            <a:schemeClr val="lt1"/>
+          </a:fontRef>
+        </p:style>
+        <p:txBody>
+          <a:bodyPr rtlCol="0" anchor="ctr"/>
+          <a:lstStyle/>
+          <a:p>
+            <a:pPr algn="ctr"/>
+          </a:p>
+        </p:txBody>
+      </p:sp>
+      <p:sp>
+        <p:nvSpPr>
+          <p:cNvPr id="3" name="TextBox 2"/>
+          <p:cNvSpPr txBox="1"/>
+          <p:nvPr/>
+        </p:nvSpPr>
+        <p:spPr>
+          <a:xfrm>
+            <a:off x="822960" y="640080"/>
+            <a:ext cx="10515600" cy="457200"/>
+          </a:xfrm>
+          <a:prstGeom prst="rect">
+            <a:avLst/>
+          </a:prstGeom>
+          <a:noFill/>
+        </p:spPr>
+        <p:txBody>
+          <a:bodyPr wrap="square">
+            <a:spAutoFit/>
+          </a:bodyPr>
+          <a:lstStyle/>
+          <a:p>
+            <a:r>
+              <a:rPr sz="1400" b="1" i="0">
+                <a:solidFill>
+                  <a:srgbClr val="F4A24C"/>
+                </a:solidFill>
+                <a:latin typeface="Montserrat"/>
+              </a:rPr>
+              <a:t>LO QUE YA DOMINAS</a:t>
+            </a:r>
+          </a:p>
+        </p:txBody>
+      </p:sp>
+      <p:sp>
+        <p:nvSpPr>
+          <p:cNvPr id="4" name="Rectangle 3"/>
+          <p:cNvSpPr/>
+          <p:nvPr/>
+        </p:nvSpPr>
+        <p:spPr>
+          <a:xfrm>
+            <a:off x="868680" y="1051560"/>
+            <a:ext cx="1463040" cy="82296"/>
+          </a:xfrm>
+          <a:prstGeom prst="rect">
+            <a:avLst/>
+          </a:prstGeom>
+          <a:solidFill>
+            <a:srgbClr val="E8801A"/>
+          </a:solidFill>
+          <a:ln>
+            <a:noFill/>
+          </a:ln>
+          <a:effectLst/>
+        </p:spPr>
+        <p:style>
+          <a:lnRef idx="1">
+            <a:schemeClr val="accent1"/>
+          </a:lnRef>
+          <a:fillRef idx="3">
+            <a:schemeClr val="accent1"/>
+          </a:fillRef>
+          <a:effectRef idx="2">
+            <a:schemeClr val="accent1"/>
+          </a:effectRef>
+          <a:fontRef idx="minor">
+            <a:schemeClr val="lt1"/>
+          </a:fontRef>
+        </p:style>
+        <p:txBody>
+          <a:bodyPr rtlCol="0" anchor="ctr"/>
+          <a:lstStyle/>
+          <a:p>
+            <a:pPr algn="ctr"/>
+          </a:p>
+        </p:txBody>
+      </p:sp>
+      <p:sp>
+        <p:nvSpPr>
+          <p:cNvPr id="5" name="TextBox 4"/>
+          <p:cNvSpPr txBox="1"/>
+          <p:nvPr/>
+        </p:nvSpPr>
+        <p:spPr>
+          <a:xfrm>
+            <a:off x="822960" y="1234440"/>
+            <a:ext cx="10515600" cy="1097280"/>
+          </a:xfrm>
+          <a:prstGeom prst="rect">
+            <a:avLst/>
+          </a:prstGeom>
+          <a:noFill/>
+        </p:spPr>
+        <p:txBody>
+          <a:bodyPr wrap="square">
+            <a:spAutoFit/>
+          </a:bodyPr>
+          <a:lstStyle/>
+          <a:p>
+            <a:r>
+              <a:rPr sz="3400" b="1" i="0">
+                <a:solidFill>
+                  <a:srgbClr val="FFFFFF"/>
+                </a:solidFill>
+                <a:latin typeface="Montserrat"/>
+              </a:rPr>
+              <a:t>Ya te sabes la ITC de las caravanas entera</a:t>
+            </a:r>
+          </a:p>
+        </p:txBody>
+      </p:sp>
+      <p:sp>
+        <p:nvSpPr>
+          <p:cNvPr id="6" name="TextBox 5"/>
+          <p:cNvSpPr txBox="1"/>
+          <p:nvPr/>
+        </p:nvSpPr>
+        <p:spPr>
+          <a:xfrm>
+            <a:off x="822960" y="2606040"/>
+            <a:ext cx="10515600" cy="2743200"/>
+          </a:xfrm>
+          <a:prstGeom prst="rect">
+            <a:avLst/>
+          </a:prstGeom>
+          <a:noFill/>
+        </p:spPr>
+        <p:txBody>
+          <a:bodyPr wrap="square">
+            <a:spAutoFit/>
+          </a:bodyPr>
+          <a:lstStyle/>
+          <a:p>
+            <a:pPr>
+              <a:spcAft>
+                <a:spcPts val="1200"/>
+              </a:spcAft>
+            </a:pPr>
+            <a:r>
+              <a:rPr sz="2000" b="1" i="0">
+                <a:solidFill>
+                  <a:srgbClr val="F4A24C"/>
+                </a:solidFill>
+                <a:latin typeface="Montserrat"/>
+              </a:rPr>
+              <a:t>✓  </a:t>
+            </a:r>
+            <a:r>
+              <a:rPr sz="1900" b="0" i="0">
+                <a:solidFill>
+                  <a:srgbClr val="FFFFFF"/>
+                </a:solidFill>
+                <a:latin typeface="Montserrat"/>
+              </a:rPr>
+              <a:t>De dónde cuelga: artículo 2.1,g) y UNE-EN 1949</a:t>
+            </a:r>
+          </a:p>
+          <a:p>
+            <a:pPr>
+              <a:spcAft>
+                <a:spcPts val="1200"/>
+              </a:spcAft>
+            </a:pPr>
+            <a:r>
+              <a:rPr sz="2000" b="1" i="0">
+                <a:solidFill>
+                  <a:srgbClr val="F4A24C"/>
+                </a:solidFill>
+                <a:latin typeface="Montserrat"/>
+              </a:rPr>
+              <a:t>✓  </a:t>
+            </a:r>
+            <a:r>
+              <a:rPr sz="1900" b="0" i="0">
+                <a:solidFill>
+                  <a:srgbClr val="FFFFFF"/>
+                </a:solidFill>
+                <a:latin typeface="Montserrat"/>
+              </a:rPr>
+              <a:t>Estanquidad: no baja en 15 min · uso a 30 mbar</a:t>
+            </a:r>
+          </a:p>
+          <a:p>
+            <a:pPr>
+              <a:spcAft>
+                <a:spcPts val="1200"/>
+              </a:spcAft>
+            </a:pPr>
+            <a:r>
+              <a:rPr sz="2000" b="1" i="0">
+                <a:solidFill>
+                  <a:srgbClr val="F4A24C"/>
+                </a:solidFill>
+                <a:latin typeface="Montserrat"/>
+              </a:rPr>
+              <a:t>✓  </a:t>
+            </a:r>
+            <a:r>
+              <a:rPr sz="1900" b="0" i="0">
+                <a:solidFill>
+                  <a:srgbClr val="FFFFFF"/>
+                </a:solidFill>
+                <a:latin typeface="Montserrat"/>
+              </a:rPr>
+              <a:t>Bombonas sujetas · tubería nunca es cable</a:t>
+            </a:r>
+          </a:p>
+          <a:p>
+            <a:pPr>
+              <a:spcAft>
+                <a:spcPts val="1200"/>
+              </a:spcAft>
+            </a:pPr>
+            <a:r>
+              <a:rPr sz="2000" b="1" i="0">
+                <a:solidFill>
+                  <a:srgbClr val="F4A24C"/>
+                </a:solidFill>
+                <a:latin typeface="Montserrat"/>
+              </a:rPr>
+              <a:t>✓  </a:t>
+            </a:r>
+            <a:r>
+              <a:rPr sz="1900" b="0" i="0">
+                <a:solidFill>
+                  <a:srgbClr val="FFFFFF"/>
+                </a:solidFill>
+                <a:latin typeface="Montserrat"/>
+              </a:rPr>
+              <a:t>No se comunica · revisión cada 4 años (IRV)</a:t>
+            </a:r>
+          </a:p>
+        </p:txBody>
+      </p:sp>
+      <p:sp>
+        <p:nvSpPr>
+          <p:cNvPr id="7" name="Rounded Rectangle 6"/>
+          <p:cNvSpPr/>
+          <p:nvPr/>
+        </p:nvSpPr>
+        <p:spPr>
+          <a:xfrm>
+            <a:off x="822960" y="5532120"/>
+            <a:ext cx="10515600" cy="822960"/>
+          </a:xfrm>
+          <a:prstGeom prst="roundRect">
+            <a:avLst/>
+          </a:prstGeom>
+          <a:solidFill>
+            <a:srgbClr val="E8801A"/>
+          </a:solidFill>
+          <a:ln>
+            <a:noFill/>
+          </a:ln>
+          <a:effectLst/>
+        </p:spPr>
+        <p:style>
+          <a:lnRef idx="1">
+            <a:schemeClr val="accent1"/>
+          </a:lnRef>
+          <a:fillRef idx="3">
+            <a:schemeClr val="accent1"/>
+          </a:fillRef>
+          <a:effectRef idx="2">
+            <a:schemeClr val="accent1"/>
+          </a:effectRef>
+          <a:fontRef idx="minor">
+            <a:schemeClr val="lt1"/>
+          </a:fontRef>
+        </p:style>
+        <p:txBody>
+          <a:bodyPr rtlCol="0" anchor="ctr"/>
+          <a:lstStyle/>
+          <a:p>
+            <a:pPr algn="ctr"/>
+          </a:p>
+        </p:txBody>
+      </p:sp>
+      <p:sp>
+        <p:nvSpPr>
+          <p:cNvPr id="8" name="TextBox 7"/>
+          <p:cNvSpPr txBox="1"/>
+          <p:nvPr/>
+        </p:nvSpPr>
+        <p:spPr>
+          <a:xfrm>
+            <a:off x="1051560" y="5623560"/>
+            <a:ext cx="10058400" cy="640080"/>
+          </a:xfrm>
+          <a:prstGeom prst="rect">
+            <a:avLst/>
+          </a:prstGeom>
+          <a:noFill/>
+        </p:spPr>
+        <p:txBody>
+          <a:bodyPr wrap="square">
+            <a:spAutoFit/>
+          </a:bodyPr>
+          <a:lstStyle/>
+          <a:p>
+            <a:r>
+              <a:rPr sz="1500" b="1" i="1">
+                <a:solidFill>
+                  <a:srgbClr val="1E2761"/>
+                </a:solidFill>
+                <a:latin typeface="Montserrat"/>
+              </a:rPr>
+              <a:t>Una ITC corta, pero de las que más caen. Ya es tuya.</a:t>
+            </a:r>
+          </a:p>
+        </p:txBody>
+      </p:sp>
+    </p:spTree>
+  </p:cSld>
+  <p:clrMapOvr>
+    <a:masterClrMapping/>
+  </p:clrMapOvr>
+  <mc:AlternateContent xmlns:mc="http://schemas.openxmlformats.org/markup-compatibility/2006">
+    <mc:Choice xmlns:p14="http://schemas.microsoft.com/office/powerpoint/2010/main" Requires="p14">
+      <p:transition spd="med" p14:dur="700">
+        <p14:cube dir="r"/>
+      </p:transition>
+    </mc:Choice>
+    <mc:Fallback>
+      <p:transition spd="med">
+        <p:push dir="r"/>
+      </p:transition>
+    </mc:Fallback>
+  </mc:AlternateContent>
 </p:sld>
 </file>
 
@@ -8558,7 +12643,7 @@
                 </a:solidFill>
                 <a:latin typeface="Montserrat"/>
               </a:rPr>
-              <a:t>003 / 016</a:t>
+              <a:t>003 / 022</a:t>
             </a:r>
           </a:p>
         </p:txBody>
@@ -8667,7 +12752,7 @@
       </p:sp>
       <p:sp>
         <p:nvSpPr>
-          <p:cNvPr id="7" name="Rounded Rectangle 6"/>
+          <p:cNvPr id="7" name="Rectangle 6"/>
           <p:cNvSpPr/>
           <p:nvPr/>
         </p:nvSpPr>
@@ -8676,7 +12761,7 @@
             <a:off x="868680" y="1673352"/>
             <a:ext cx="2011680" cy="73152"/>
           </a:xfrm>
-          <a:prstGeom prst="roundRect">
+          <a:prstGeom prst="rect">
             <a:avLst/>
           </a:prstGeom>
           <a:solidFill>
@@ -8962,6 +13047,18 @@
   <p:clrMapOvr>
     <a:masterClrMapping/>
   </p:clrMapOvr>
+  <mc:AlternateContent xmlns:mc="http://schemas.openxmlformats.org/markup-compatibility/2006">
+    <mc:Choice xmlns:p14="http://schemas.microsoft.com/office/powerpoint/2010/main" Requires="p14">
+      <p:transition spd="med" p14:dur="700">
+        <p14:cube dir="l"/>
+      </p:transition>
+    </mc:Choice>
+    <mc:Fallback>
+      <p:transition spd="med">
+        <p:push dir="l"/>
+      </p:transition>
+    </mc:Fallback>
+  </mc:AlternateContent>
 </p:sld>
 </file>
 
@@ -9049,7 +13146,7 @@
                 </a:solidFill>
                 <a:latin typeface="Montserrat"/>
               </a:rPr>
-              <a:t>004 / 016</a:t>
+              <a:t>004 / 022</a:t>
             </a:r>
           </a:p>
         </p:txBody>
@@ -9158,7 +13255,7 @@
       </p:sp>
       <p:sp>
         <p:nvSpPr>
-          <p:cNvPr id="7" name="Rounded Rectangle 6"/>
+          <p:cNvPr id="7" name="Rectangle 6"/>
           <p:cNvSpPr/>
           <p:nvPr/>
         </p:nvSpPr>
@@ -9167,7 +13264,7 @@
             <a:off x="868680" y="1627632"/>
             <a:ext cx="2011680" cy="73152"/>
           </a:xfrm>
-          <a:prstGeom prst="roundRect">
+          <a:prstGeom prst="rect">
             <a:avLst/>
           </a:prstGeom>
           <a:solidFill>
@@ -9209,7 +13306,7 @@
         <p:spPr>
           <a:xfrm>
             <a:off x="822960" y="1965960"/>
-            <a:ext cx="4983480" cy="4206240"/>
+            <a:ext cx="5029200" cy="4206240"/>
           </a:xfrm>
           <a:prstGeom prst="rect">
             <a:avLst/>
@@ -9331,8 +13428,8 @@
         </p:nvSpPr>
         <p:spPr>
           <a:xfrm>
-            <a:off x="5806440" y="1051560"/>
-            <a:ext cx="5298947" cy="4629150"/>
+            <a:off x="6080760" y="1965960"/>
+            <a:ext cx="5303520" cy="4572000"/>
           </a:xfrm>
           <a:prstGeom prst="roundRect">
             <a:avLst/>
@@ -9377,8 +13474,8 @@
         </p:nvSpPr>
         <p:spPr>
           <a:xfrm>
-            <a:off x="6080760" y="2726055"/>
-            <a:ext cx="4750307" cy="1280160"/>
+            <a:off x="6355080" y="3611880"/>
+            <a:ext cx="4754880" cy="1280160"/>
           </a:xfrm>
           <a:prstGeom prst="rect">
             <a:avLst/>
@@ -9399,7 +13496,7 @@
                 </a:solidFill>
                 <a:latin typeface="Montserrat"/>
               </a:rPr>
-              <a:t>IMAGEN REALISTA</a:t>
+              <a:t>IMAGEN</a:t>
             </a:r>
           </a:p>
           <a:p>
@@ -9421,6 +13518,18 @@
   <p:clrMapOvr>
     <a:masterClrMapping/>
   </p:clrMapOvr>
+  <mc:AlternateContent xmlns:mc="http://schemas.openxmlformats.org/markup-compatibility/2006">
+    <mc:Choice xmlns:p14="http://schemas.microsoft.com/office/powerpoint/2010/main" Requires="p14">
+      <p:transition spd="med" p14:dur="700">
+        <p14:cube dir="r"/>
+      </p:transition>
+    </mc:Choice>
+    <mc:Fallback>
+      <p:transition spd="med">
+        <p:push dir="r"/>
+      </p:transition>
+    </mc:Fallback>
+  </mc:AlternateContent>
 </p:sld>
 </file>
 
@@ -9508,7 +13617,7 @@
                 </a:solidFill>
                 <a:latin typeface="Montserrat"/>
               </a:rPr>
-              <a:t>005 / 016</a:t>
+              <a:t>005 / 022</a:t>
             </a:r>
           </a:p>
         </p:txBody>
@@ -9617,7 +13726,7 @@
       </p:sp>
       <p:sp>
         <p:nvSpPr>
-          <p:cNvPr id="7" name="Rounded Rectangle 6"/>
+          <p:cNvPr id="7" name="Rectangle 6"/>
           <p:cNvSpPr/>
           <p:nvPr/>
         </p:nvSpPr>
@@ -9626,7 +13735,7 @@
             <a:off x="868680" y="1627632"/>
             <a:ext cx="2011680" cy="73152"/>
           </a:xfrm>
-          <a:prstGeom prst="roundRect">
+          <a:prstGeom prst="rect">
             <a:avLst/>
           </a:prstGeom>
           <a:solidFill>
@@ -9667,8 +13776,8 @@
         </p:nvSpPr>
         <p:spPr>
           <a:xfrm>
-            <a:off x="822960" y="1965960"/>
-            <a:ext cx="4983480" cy="4206240"/>
+            <a:off x="6355080" y="1965960"/>
+            <a:ext cx="5029200" cy="4206240"/>
           </a:xfrm>
           <a:prstGeom prst="rect">
             <a:avLst/>
@@ -9765,8 +13874,8 @@
         </p:nvSpPr>
         <p:spPr>
           <a:xfrm>
-            <a:off x="5806440" y="1051560"/>
-            <a:ext cx="5298947" cy="4629150"/>
+            <a:off x="822960" y="1965960"/>
+            <a:ext cx="5303520" cy="4572000"/>
           </a:xfrm>
           <a:prstGeom prst="roundRect">
             <a:avLst/>
@@ -9811,8 +13920,8 @@
         </p:nvSpPr>
         <p:spPr>
           <a:xfrm>
-            <a:off x="6080760" y="2726055"/>
-            <a:ext cx="4750307" cy="1280160"/>
+            <a:off x="1097280" y="3611880"/>
+            <a:ext cx="4754880" cy="1280160"/>
           </a:xfrm>
           <a:prstGeom prst="rect">
             <a:avLst/>
@@ -9833,7 +13942,7 @@
                 </a:solidFill>
                 <a:latin typeface="Montserrat"/>
               </a:rPr>
-              <a:t>IMAGEN REALISTA</a:t>
+              <a:t>IMAGEN</a:t>
             </a:r>
           </a:p>
           <a:p>
@@ -9855,6 +13964,18 @@
   <p:clrMapOvr>
     <a:masterClrMapping/>
   </p:clrMapOvr>
+  <mc:AlternateContent xmlns:mc="http://schemas.openxmlformats.org/markup-compatibility/2006">
+    <mc:Choice xmlns:p14="http://schemas.microsoft.com/office/powerpoint/2010/main" Requires="p14">
+      <p:transition spd="med" p14:dur="700">
+        <p14:cube dir="l"/>
+      </p:transition>
+    </mc:Choice>
+    <mc:Fallback>
+      <p:transition spd="med">
+        <p:push dir="l"/>
+      </p:transition>
+    </mc:Fallback>
+  </mc:AlternateContent>
 </p:sld>
 </file>
 
@@ -9942,7 +14063,7 @@
                 </a:solidFill>
                 <a:latin typeface="Montserrat"/>
               </a:rPr>
-              <a:t>006 / 016</a:t>
+              <a:t>006 / 022</a:t>
             </a:r>
           </a:p>
         </p:txBody>
@@ -10051,7 +14172,7 @@
       </p:sp>
       <p:sp>
         <p:nvSpPr>
-          <p:cNvPr id="7" name="Rounded Rectangle 6"/>
+          <p:cNvPr id="7" name="Rectangle 6"/>
           <p:cNvSpPr/>
           <p:nvPr/>
         </p:nvSpPr>
@@ -10060,7 +14181,7 @@
             <a:off x="868680" y="1627632"/>
             <a:ext cx="2011680" cy="73152"/>
           </a:xfrm>
-          <a:prstGeom prst="roundRect">
+          <a:prstGeom prst="rect">
             <a:avLst/>
           </a:prstGeom>
           <a:solidFill>
@@ -10102,7 +14223,7 @@
         <p:spPr>
           <a:xfrm>
             <a:off x="822960" y="1965960"/>
-            <a:ext cx="4983480" cy="4206240"/>
+            <a:ext cx="5029200" cy="4206240"/>
           </a:xfrm>
           <a:prstGeom prst="rect">
             <a:avLst/>
@@ -10199,8 +14320,8 @@
         </p:nvSpPr>
         <p:spPr>
           <a:xfrm>
-            <a:off x="5806440" y="1051560"/>
-            <a:ext cx="5298947" cy="4629150"/>
+            <a:off x="6080760" y="1965960"/>
+            <a:ext cx="5303520" cy="4572000"/>
           </a:xfrm>
           <a:prstGeom prst="roundRect">
             <a:avLst/>
@@ -10245,8 +14366,8 @@
         </p:nvSpPr>
         <p:spPr>
           <a:xfrm>
-            <a:off x="6080760" y="2726055"/>
-            <a:ext cx="4750307" cy="1280160"/>
+            <a:off x="6355080" y="3611880"/>
+            <a:ext cx="4754880" cy="1280160"/>
           </a:xfrm>
           <a:prstGeom prst="rect">
             <a:avLst/>
@@ -10267,7 +14388,7 @@
                 </a:solidFill>
                 <a:latin typeface="Montserrat"/>
               </a:rPr>
-              <a:t>IMAGEN REALISTA</a:t>
+              <a:t>IMAGEN</a:t>
             </a:r>
           </a:p>
           <a:p>
@@ -10289,6 +14410,18 @@
   <p:clrMapOvr>
     <a:masterClrMapping/>
   </p:clrMapOvr>
+  <mc:AlternateContent xmlns:mc="http://schemas.openxmlformats.org/markup-compatibility/2006">
+    <mc:Choice xmlns:p14="http://schemas.microsoft.com/office/powerpoint/2010/main" Requires="p14">
+      <p:transition spd="med" p14:dur="700">
+        <p14:cube dir="r"/>
+      </p:transition>
+    </mc:Choice>
+    <mc:Fallback>
+      <p:transition spd="med">
+        <p:push dir="r"/>
+      </p:transition>
+    </mc:Fallback>
+  </mc:AlternateContent>
 </p:sld>
 </file>
 
@@ -10376,7 +14509,7 @@
                 </a:solidFill>
                 <a:latin typeface="Montserrat"/>
               </a:rPr>
-              <a:t>007 / 016</a:t>
+              <a:t>007 / 022</a:t>
             </a:r>
           </a:p>
         </p:txBody>
@@ -10485,7 +14618,7 @@
       </p:sp>
       <p:sp>
         <p:nvSpPr>
-          <p:cNvPr id="7" name="Rounded Rectangle 6"/>
+          <p:cNvPr id="7" name="Rectangle 6"/>
           <p:cNvSpPr/>
           <p:nvPr/>
         </p:nvSpPr>
@@ -10494,7 +14627,7 @@
             <a:off x="868680" y="1627632"/>
             <a:ext cx="2011680" cy="73152"/>
           </a:xfrm>
-          <a:prstGeom prst="roundRect">
+          <a:prstGeom prst="rect">
             <a:avLst/>
           </a:prstGeom>
           <a:solidFill>
@@ -10535,8 +14668,8 @@
         </p:nvSpPr>
         <p:spPr>
           <a:xfrm>
-            <a:off x="822960" y="1965960"/>
-            <a:ext cx="4983480" cy="4206240"/>
+            <a:off x="6355080" y="1965960"/>
+            <a:ext cx="5029200" cy="4206240"/>
           </a:xfrm>
           <a:prstGeom prst="rect">
             <a:avLst/>
@@ -10633,8 +14766,8 @@
         </p:nvSpPr>
         <p:spPr>
           <a:xfrm>
-            <a:off x="5806440" y="1051560"/>
-            <a:ext cx="5298947" cy="4629150"/>
+            <a:off x="822960" y="1965960"/>
+            <a:ext cx="5303520" cy="4572000"/>
           </a:xfrm>
           <a:prstGeom prst="roundRect">
             <a:avLst/>
@@ -10679,8 +14812,8 @@
         </p:nvSpPr>
         <p:spPr>
           <a:xfrm>
-            <a:off x="6080760" y="2726055"/>
-            <a:ext cx="4750307" cy="1280160"/>
+            <a:off x="1097280" y="3611880"/>
+            <a:ext cx="4754880" cy="1280160"/>
           </a:xfrm>
           <a:prstGeom prst="rect">
             <a:avLst/>
@@ -10701,7 +14834,7 @@
                 </a:solidFill>
                 <a:latin typeface="Montserrat"/>
               </a:rPr>
-              <a:t>IMAGEN REALISTA</a:t>
+              <a:t>IMAGEN</a:t>
             </a:r>
           </a:p>
           <a:p>
@@ -10723,6 +14856,18 @@
   <p:clrMapOvr>
     <a:masterClrMapping/>
   </p:clrMapOvr>
+  <mc:AlternateContent xmlns:mc="http://schemas.openxmlformats.org/markup-compatibility/2006">
+    <mc:Choice xmlns:p14="http://schemas.microsoft.com/office/powerpoint/2010/main" Requires="p14">
+      <p:transition spd="med" p14:dur="700">
+        <p14:cube dir="l"/>
+      </p:transition>
+    </mc:Choice>
+    <mc:Fallback>
+      <p:transition spd="med">
+        <p:push dir="l"/>
+      </p:transition>
+    </mc:Fallback>
+  </mc:AlternateContent>
 </p:sld>
 </file>
 
@@ -10810,7 +14955,7 @@
                 </a:solidFill>
                 <a:latin typeface="Montserrat"/>
               </a:rPr>
-              <a:t>008 / 016</a:t>
+              <a:t>008 / 022</a:t>
             </a:r>
           </a:p>
         </p:txBody>
@@ -10919,7 +15064,7 @@
       </p:sp>
       <p:sp>
         <p:nvSpPr>
-          <p:cNvPr id="7" name="Rounded Rectangle 6"/>
+          <p:cNvPr id="7" name="Rectangle 6"/>
           <p:cNvSpPr/>
           <p:nvPr/>
         </p:nvSpPr>
@@ -10928,7 +15073,7 @@
             <a:off x="868680" y="1627632"/>
             <a:ext cx="2011680" cy="73152"/>
           </a:xfrm>
-          <a:prstGeom prst="roundRect">
+          <a:prstGeom prst="rect">
             <a:avLst/>
           </a:prstGeom>
           <a:solidFill>
@@ -10970,7 +15115,7 @@
         <p:spPr>
           <a:xfrm>
             <a:off x="822960" y="1965960"/>
-            <a:ext cx="4983480" cy="4206240"/>
+            <a:ext cx="5029200" cy="4206240"/>
           </a:xfrm>
           <a:prstGeom prst="rect">
             <a:avLst/>
@@ -11092,8 +15237,8 @@
         </p:nvSpPr>
         <p:spPr>
           <a:xfrm>
-            <a:off x="5806440" y="1051560"/>
-            <a:ext cx="5298947" cy="4629150"/>
+            <a:off x="6080760" y="1965960"/>
+            <a:ext cx="5303520" cy="4572000"/>
           </a:xfrm>
           <a:prstGeom prst="roundRect">
             <a:avLst/>
@@ -11138,8 +15283,8 @@
         </p:nvSpPr>
         <p:spPr>
           <a:xfrm>
-            <a:off x="6080760" y="2726055"/>
-            <a:ext cx="4750307" cy="1280160"/>
+            <a:off x="6355080" y="3611880"/>
+            <a:ext cx="4754880" cy="1280160"/>
           </a:xfrm>
           <a:prstGeom prst="rect">
             <a:avLst/>
@@ -11160,7 +15305,7 @@
                 </a:solidFill>
                 <a:latin typeface="Montserrat"/>
               </a:rPr>
-              <a:t>IMAGEN REALISTA</a:t>
+              <a:t>IMAGEN</a:t>
             </a:r>
           </a:p>
           <a:p>
@@ -11182,6 +15327,18 @@
   <p:clrMapOvr>
     <a:masterClrMapping/>
   </p:clrMapOvr>
+  <mc:AlternateContent xmlns:mc="http://schemas.openxmlformats.org/markup-compatibility/2006">
+    <mc:Choice xmlns:p14="http://schemas.microsoft.com/office/powerpoint/2010/main" Requires="p14">
+      <p:transition spd="med" p14:dur="700">
+        <p14:cube dir="r"/>
+      </p:transition>
+    </mc:Choice>
+    <mc:Fallback>
+      <p:transition spd="med">
+        <p:push dir="r"/>
+      </p:transition>
+    </mc:Fallback>
+  </mc:AlternateContent>
 </p:sld>
 </file>
 
@@ -11269,7 +15426,7 @@
                 </a:solidFill>
                 <a:latin typeface="Montserrat"/>
               </a:rPr>
-              <a:t>009 / 016</a:t>
+              <a:t>009 / 022</a:t>
             </a:r>
           </a:p>
         </p:txBody>
@@ -11310,84 +15467,16 @@
       </p:sp>
       <p:sp>
         <p:nvSpPr>
-          <p:cNvPr id="5" name="TextBox 4"/>
-          <p:cNvSpPr txBox="1"/>
-          <p:nvPr/>
-        </p:nvSpPr>
-        <p:spPr>
-          <a:xfrm>
-            <a:off x="822960" y="457200"/>
-            <a:ext cx="10058400" cy="365760"/>
-          </a:xfrm>
-          <a:prstGeom prst="rect">
-            <a:avLst/>
-          </a:prstGeom>
-          <a:noFill/>
-        </p:spPr>
-        <p:txBody>
-          <a:bodyPr wrap="square">
-            <a:spAutoFit/>
-          </a:bodyPr>
-          <a:lstStyle/>
-          <a:p>
-            <a:r>
-              <a:rPr sz="1300" b="1" i="0">
-                <a:solidFill>
-                  <a:srgbClr val="E8801A"/>
-                </a:solidFill>
-                <a:latin typeface="Montserrat"/>
-              </a:rPr>
-              <a:t>APARTADO 4.2 · CERTIFICADOS</a:t>
-            </a:r>
-          </a:p>
-        </p:txBody>
-      </p:sp>
-      <p:sp>
-        <p:nvSpPr>
-          <p:cNvPr id="6" name="TextBox 5"/>
-          <p:cNvSpPr txBox="1"/>
-          <p:nvPr/>
-        </p:nvSpPr>
-        <p:spPr>
-          <a:xfrm>
-            <a:off x="822960" y="868680"/>
-            <a:ext cx="10515600" cy="914400"/>
-          </a:xfrm>
-          <a:prstGeom prst="rect">
-            <a:avLst/>
-          </a:prstGeom>
-          <a:noFill/>
-        </p:spPr>
-        <p:txBody>
-          <a:bodyPr wrap="square">
-            <a:spAutoFit/>
-          </a:bodyPr>
-          <a:lstStyle/>
-          <a:p>
-            <a:r>
-              <a:rPr sz="2800" b="1" i="0">
-                <a:solidFill>
-                  <a:srgbClr val="1E2761"/>
-                </a:solidFill>
-                <a:latin typeface="Montserrat"/>
-              </a:rPr>
-              <a:t>El certificado de instalación</a:t>
-            </a:r>
-          </a:p>
-        </p:txBody>
-      </p:sp>
-      <p:sp>
-        <p:nvSpPr>
-          <p:cNvPr id="7" name="Rounded Rectangle 6"/>
+          <p:cNvPr id="5" name="Rectangle 4"/>
           <p:cNvSpPr/>
           <p:nvPr/>
         </p:nvSpPr>
         <p:spPr>
           <a:xfrm>
-            <a:off x="868680" y="1627632"/>
-            <a:ext cx="2011680" cy="73152"/>
-          </a:xfrm>
-          <a:prstGeom prst="roundRect">
+            <a:off x="0" y="0"/>
+            <a:ext cx="12191695" cy="1143000"/>
+          </a:xfrm>
+          <a:prstGeom prst="rect">
             <a:avLst/>
           </a:prstGeom>
           <a:solidFill>
@@ -11422,14 +15511,14 @@
       </p:sp>
       <p:sp>
         <p:nvSpPr>
-          <p:cNvPr id="8" name="TextBox 7"/>
+          <p:cNvPr id="6" name="TextBox 5"/>
           <p:cNvSpPr txBox="1"/>
           <p:nvPr/>
         </p:nvSpPr>
         <p:spPr>
           <a:xfrm>
-            <a:off x="822960" y="1965960"/>
-            <a:ext cx="4983480" cy="4206240"/>
+            <a:off x="822960" y="274320"/>
+            <a:ext cx="10515600" cy="640080"/>
           </a:xfrm>
           <a:prstGeom prst="rect">
             <a:avLst/>
@@ -11442,92 +15531,62 @@
           </a:bodyPr>
           <a:lstStyle/>
           <a:p>
-            <a:pPr>
-              <a:spcAft>
-                <a:spcPts val="1100"/>
-              </a:spcAft>
-            </a:pPr>
-            <a:r>
-              <a:rPr sz="1600" b="1" i="0">
-                <a:solidFill>
-                  <a:srgbClr val="E8801A"/>
-                </a:solidFill>
-                <a:latin typeface="Montserrat"/>
-              </a:rPr>
-              <a:t>▸  </a:t>
-            </a:r>
-            <a:r>
-              <a:rPr sz="1600" b="0" i="0">
-                <a:solidFill>
-                  <a:srgbClr val="1B2330"/>
-                </a:solidFill>
-                <a:latin typeface="Montserrat"/>
-              </a:rPr>
-              <a:t>Modelo IRV-1 del anexo 1</a:t>
-            </a:r>
-          </a:p>
-          <a:p>
-            <a:pPr>
-              <a:spcAft>
-                <a:spcPts val="1100"/>
-              </a:spcAft>
-            </a:pPr>
-            <a:r>
-              <a:rPr sz="1600" b="1" i="0">
-                <a:solidFill>
-                  <a:srgbClr val="E8801A"/>
-                </a:solidFill>
-                <a:latin typeface="Montserrat"/>
-              </a:rPr>
-              <a:t>▸  </a:t>
-            </a:r>
-            <a:r>
-              <a:rPr sz="1600" b="0" i="0">
-                <a:solidFill>
-                  <a:srgbClr val="1B2330"/>
-                </a:solidFill>
-                <a:latin typeface="Montserrat"/>
-              </a:rPr>
-              <a:t>Por triplicado</a:t>
-            </a:r>
-          </a:p>
-          <a:p>
-            <a:pPr>
-              <a:spcAft>
-                <a:spcPts val="1100"/>
-              </a:spcAft>
-            </a:pPr>
-            <a:r>
-              <a:rPr sz="1600" b="1" i="0">
-                <a:solidFill>
-                  <a:srgbClr val="E8801A"/>
-                </a:solidFill>
-                <a:latin typeface="Montserrat"/>
-              </a:rPr>
-              <a:t>▸  </a:t>
-            </a:r>
-            <a:r>
-              <a:rPr sz="1600" b="0" i="0">
-                <a:solidFill>
-                  <a:srgbClr val="1B2330"/>
-                </a:solidFill>
-                <a:latin typeface="Montserrat"/>
-              </a:rPr>
-              <a:t>Copias: instaladora, titular y Comunidad Autónoma</a:t>
-            </a:r>
-          </a:p>
-        </p:txBody>
-      </p:sp>
-      <p:sp>
-        <p:nvSpPr>
-          <p:cNvPr id="9" name="imgph" descr="IMGQ:installation certificate document signature"/>
+            <a:r>
+              <a:rPr sz="2400" b="1" i="0">
+                <a:solidFill>
+                  <a:srgbClr val="FFFFFF"/>
+                </a:solidFill>
+                <a:latin typeface="Montserrat"/>
+              </a:rPr>
+              <a:t>⚡  PREGUNTA RÁPIDA</a:t>
+            </a:r>
+          </a:p>
+        </p:txBody>
+      </p:sp>
+      <p:sp>
+        <p:nvSpPr>
+          <p:cNvPr id="7" name="TextBox 6"/>
+          <p:cNvSpPr txBox="1"/>
+          <p:nvPr/>
+        </p:nvSpPr>
+        <p:spPr>
+          <a:xfrm>
+            <a:off x="822960" y="1508760"/>
+            <a:ext cx="10515600" cy="1371600"/>
+          </a:xfrm>
+          <a:prstGeom prst="rect">
+            <a:avLst/>
+          </a:prstGeom>
+          <a:noFill/>
+        </p:spPr>
+        <p:txBody>
+          <a:bodyPr wrap="square">
+            <a:spAutoFit/>
+          </a:bodyPr>
+          <a:lstStyle/>
+          <a:p>
+            <a:r>
+              <a:rPr sz="2400" b="1" i="0">
+                <a:solidFill>
+                  <a:srgbClr val="1E2761"/>
+                </a:solidFill>
+                <a:latin typeface="Montserrat"/>
+              </a:rPr>
+              <a:t>¿Durante cuánto tiempo, como mínimo, no debe bajar la presión en la prueba de estanquidad?</a:t>
+            </a:r>
+          </a:p>
+        </p:txBody>
+      </p:sp>
+      <p:sp>
+        <p:nvSpPr>
+          <p:cNvPr id="8" name="Rounded Rectangle 7"/>
           <p:cNvSpPr/>
           <p:nvPr/>
         </p:nvSpPr>
         <p:spPr>
           <a:xfrm>
-            <a:off x="5806440" y="1051560"/>
-            <a:ext cx="5298947" cy="4629150"/>
+            <a:off x="822960" y="3291840"/>
+            <a:ext cx="4983480" cy="1143000"/>
           </a:xfrm>
           <a:prstGeom prst="roundRect">
             <a:avLst/>
@@ -11566,14 +15625,58 @@
       </p:sp>
       <p:sp>
         <p:nvSpPr>
+          <p:cNvPr id="9" name="Rectangle 8"/>
+          <p:cNvSpPr/>
+          <p:nvPr/>
+        </p:nvSpPr>
+        <p:spPr>
+          <a:xfrm>
+            <a:off x="822960" y="3291840"/>
+            <a:ext cx="640080" cy="1143000"/>
+          </a:xfrm>
+          <a:prstGeom prst="rect">
+            <a:avLst/>
+          </a:prstGeom>
+          <a:solidFill>
+            <a:srgbClr val="1E2761"/>
+          </a:solidFill>
+          <a:ln>
+            <a:noFill/>
+          </a:ln>
+          <a:effectLst/>
+        </p:spPr>
+        <p:style>
+          <a:lnRef idx="1">
+            <a:schemeClr val="accent1"/>
+          </a:lnRef>
+          <a:fillRef idx="3">
+            <a:schemeClr val="accent1"/>
+          </a:fillRef>
+          <a:effectRef idx="2">
+            <a:schemeClr val="accent1"/>
+          </a:effectRef>
+          <a:fontRef idx="minor">
+            <a:schemeClr val="lt1"/>
+          </a:fontRef>
+        </p:style>
+        <p:txBody>
+          <a:bodyPr rtlCol="0" anchor="ctr"/>
+          <a:lstStyle/>
+          <a:p>
+            <a:pPr algn="ctr"/>
+          </a:p>
+        </p:txBody>
+      </p:sp>
+      <p:sp>
+        <p:nvSpPr>
           <p:cNvPr id="10" name="TextBox 9"/>
           <p:cNvSpPr txBox="1"/>
           <p:nvPr/>
         </p:nvSpPr>
         <p:spPr>
           <a:xfrm>
-            <a:off x="6080760" y="2726055"/>
-            <a:ext cx="4750307" cy="1280160"/>
+            <a:off x="822960" y="3611880"/>
+            <a:ext cx="640080" cy="548640"/>
           </a:xfrm>
           <a:prstGeom prst="rect">
             <a:avLst/>
@@ -11588,25 +15691,524 @@
           <a:p>
             <a:pPr algn="ctr"/>
             <a:r>
-              <a:rPr sz="1400" b="1" i="0">
-                <a:solidFill>
-                  <a:srgbClr val="64748B"/>
-                </a:solidFill>
-                <a:latin typeface="Montserrat"/>
-              </a:rPr>
-              <a:t>IMAGEN REALISTA</a:t>
-            </a:r>
-          </a:p>
+              <a:rPr sz="2200" b="1" i="0">
+                <a:solidFill>
+                  <a:srgbClr val="FFFFFF"/>
+                </a:solidFill>
+                <a:latin typeface="Montserrat"/>
+              </a:rPr>
+              <a:t>A</a:t>
+            </a:r>
+          </a:p>
+        </p:txBody>
+      </p:sp>
+      <p:sp>
+        <p:nvSpPr>
+          <p:cNvPr id="11" name="TextBox 10"/>
+          <p:cNvSpPr txBox="1"/>
+          <p:nvPr/>
+        </p:nvSpPr>
+        <p:spPr>
+          <a:xfrm>
+            <a:off x="1600200" y="3474720"/>
+            <a:ext cx="4114800" cy="868680"/>
+          </a:xfrm>
+          <a:prstGeom prst="rect">
+            <a:avLst/>
+          </a:prstGeom>
+          <a:noFill/>
+        </p:spPr>
+        <p:txBody>
+          <a:bodyPr wrap="square">
+            <a:spAutoFit/>
+          </a:bodyPr>
+          <a:lstStyle/>
+          <a:p>
+            <a:r>
+              <a:rPr sz="1400" b="0" i="0">
+                <a:solidFill>
+                  <a:srgbClr val="1B2330"/>
+                </a:solidFill>
+                <a:latin typeface="Montserrat"/>
+              </a:rPr>
+              <a:t>5 minutos</a:t>
+            </a:r>
+          </a:p>
+        </p:txBody>
+      </p:sp>
+      <p:sp>
+        <p:nvSpPr>
+          <p:cNvPr id="12" name="Rounded Rectangle 11"/>
+          <p:cNvSpPr/>
+          <p:nvPr/>
+        </p:nvSpPr>
+        <p:spPr>
+          <a:xfrm>
+            <a:off x="6355080" y="3291840"/>
+            <a:ext cx="4983480" cy="1143000"/>
+          </a:xfrm>
+          <a:prstGeom prst="roundRect">
+            <a:avLst/>
+          </a:prstGeom>
+          <a:solidFill>
+            <a:srgbClr val="F3F6FB"/>
+          </a:solidFill>
+          <a:ln w="12700">
+            <a:solidFill>
+              <a:srgbClr val="C7D2E6"/>
+            </a:solidFill>
+          </a:ln>
+          <a:effectLst/>
+        </p:spPr>
+        <p:style>
+          <a:lnRef idx="1">
+            <a:schemeClr val="accent1"/>
+          </a:lnRef>
+          <a:fillRef idx="3">
+            <a:schemeClr val="accent1"/>
+          </a:fillRef>
+          <a:effectRef idx="2">
+            <a:schemeClr val="accent1"/>
+          </a:effectRef>
+          <a:fontRef idx="minor">
+            <a:schemeClr val="lt1"/>
+          </a:fontRef>
+        </p:style>
+        <p:txBody>
+          <a:bodyPr rtlCol="0" anchor="ctr"/>
+          <a:lstStyle/>
           <a:p>
             <a:pPr algn="ctr"/>
-            <a:r>
-              <a:rPr sz="1100" b="0" i="1">
-                <a:solidFill>
-                  <a:srgbClr val="64748B"/>
-                </a:solidFill>
-                <a:latin typeface="Montserrat"/>
-              </a:rPr>
-              <a:t>installation certificate document signature</a:t>
+          </a:p>
+        </p:txBody>
+      </p:sp>
+      <p:sp>
+        <p:nvSpPr>
+          <p:cNvPr id="13" name="Rectangle 12"/>
+          <p:cNvSpPr/>
+          <p:nvPr/>
+        </p:nvSpPr>
+        <p:spPr>
+          <a:xfrm>
+            <a:off x="6355080" y="3291840"/>
+            <a:ext cx="640080" cy="1143000"/>
+          </a:xfrm>
+          <a:prstGeom prst="rect">
+            <a:avLst/>
+          </a:prstGeom>
+          <a:solidFill>
+            <a:srgbClr val="1E2761"/>
+          </a:solidFill>
+          <a:ln>
+            <a:noFill/>
+          </a:ln>
+          <a:effectLst/>
+        </p:spPr>
+        <p:style>
+          <a:lnRef idx="1">
+            <a:schemeClr val="accent1"/>
+          </a:lnRef>
+          <a:fillRef idx="3">
+            <a:schemeClr val="accent1"/>
+          </a:fillRef>
+          <a:effectRef idx="2">
+            <a:schemeClr val="accent1"/>
+          </a:effectRef>
+          <a:fontRef idx="minor">
+            <a:schemeClr val="lt1"/>
+          </a:fontRef>
+        </p:style>
+        <p:txBody>
+          <a:bodyPr rtlCol="0" anchor="ctr"/>
+          <a:lstStyle/>
+          <a:p>
+            <a:pPr algn="ctr"/>
+          </a:p>
+        </p:txBody>
+      </p:sp>
+      <p:sp>
+        <p:nvSpPr>
+          <p:cNvPr id="14" name="TextBox 13"/>
+          <p:cNvSpPr txBox="1"/>
+          <p:nvPr/>
+        </p:nvSpPr>
+        <p:spPr>
+          <a:xfrm>
+            <a:off x="6355080" y="3611880"/>
+            <a:ext cx="640080" cy="548640"/>
+          </a:xfrm>
+          <a:prstGeom prst="rect">
+            <a:avLst/>
+          </a:prstGeom>
+          <a:noFill/>
+        </p:spPr>
+        <p:txBody>
+          <a:bodyPr wrap="square">
+            <a:spAutoFit/>
+          </a:bodyPr>
+          <a:lstStyle/>
+          <a:p>
+            <a:pPr algn="ctr"/>
+            <a:r>
+              <a:rPr sz="2200" b="1" i="0">
+                <a:solidFill>
+                  <a:srgbClr val="FFFFFF"/>
+                </a:solidFill>
+                <a:latin typeface="Montserrat"/>
+              </a:rPr>
+              <a:t>B</a:t>
+            </a:r>
+          </a:p>
+        </p:txBody>
+      </p:sp>
+      <p:sp>
+        <p:nvSpPr>
+          <p:cNvPr id="15" name="TextBox 14"/>
+          <p:cNvSpPr txBox="1"/>
+          <p:nvPr/>
+        </p:nvSpPr>
+        <p:spPr>
+          <a:xfrm>
+            <a:off x="7132320" y="3474720"/>
+            <a:ext cx="4114800" cy="868680"/>
+          </a:xfrm>
+          <a:prstGeom prst="rect">
+            <a:avLst/>
+          </a:prstGeom>
+          <a:noFill/>
+        </p:spPr>
+        <p:txBody>
+          <a:bodyPr wrap="square">
+            <a:spAutoFit/>
+          </a:bodyPr>
+          <a:lstStyle/>
+          <a:p>
+            <a:r>
+              <a:rPr sz="1400" b="0" i="0">
+                <a:solidFill>
+                  <a:srgbClr val="1B2330"/>
+                </a:solidFill>
+                <a:latin typeface="Montserrat"/>
+              </a:rPr>
+              <a:t>10 minutos</a:t>
+            </a:r>
+          </a:p>
+        </p:txBody>
+      </p:sp>
+      <p:sp>
+        <p:nvSpPr>
+          <p:cNvPr id="16" name="Rounded Rectangle 15"/>
+          <p:cNvSpPr/>
+          <p:nvPr/>
+        </p:nvSpPr>
+        <p:spPr>
+          <a:xfrm>
+            <a:off x="822960" y="4617720"/>
+            <a:ext cx="4983480" cy="1143000"/>
+          </a:xfrm>
+          <a:prstGeom prst="roundRect">
+            <a:avLst/>
+          </a:prstGeom>
+          <a:solidFill>
+            <a:srgbClr val="F3F6FB"/>
+          </a:solidFill>
+          <a:ln w="12700">
+            <a:solidFill>
+              <a:srgbClr val="C7D2E6"/>
+            </a:solidFill>
+          </a:ln>
+          <a:effectLst/>
+        </p:spPr>
+        <p:style>
+          <a:lnRef idx="1">
+            <a:schemeClr val="accent1"/>
+          </a:lnRef>
+          <a:fillRef idx="3">
+            <a:schemeClr val="accent1"/>
+          </a:fillRef>
+          <a:effectRef idx="2">
+            <a:schemeClr val="accent1"/>
+          </a:effectRef>
+          <a:fontRef idx="minor">
+            <a:schemeClr val="lt1"/>
+          </a:fontRef>
+        </p:style>
+        <p:txBody>
+          <a:bodyPr rtlCol="0" anchor="ctr"/>
+          <a:lstStyle/>
+          <a:p>
+            <a:pPr algn="ctr"/>
+          </a:p>
+        </p:txBody>
+      </p:sp>
+      <p:sp>
+        <p:nvSpPr>
+          <p:cNvPr id="17" name="Rectangle 16"/>
+          <p:cNvSpPr/>
+          <p:nvPr/>
+        </p:nvSpPr>
+        <p:spPr>
+          <a:xfrm>
+            <a:off x="822960" y="4617720"/>
+            <a:ext cx="640080" cy="1143000"/>
+          </a:xfrm>
+          <a:prstGeom prst="rect">
+            <a:avLst/>
+          </a:prstGeom>
+          <a:solidFill>
+            <a:srgbClr val="1E2761"/>
+          </a:solidFill>
+          <a:ln>
+            <a:noFill/>
+          </a:ln>
+          <a:effectLst/>
+        </p:spPr>
+        <p:style>
+          <a:lnRef idx="1">
+            <a:schemeClr val="accent1"/>
+          </a:lnRef>
+          <a:fillRef idx="3">
+            <a:schemeClr val="accent1"/>
+          </a:fillRef>
+          <a:effectRef idx="2">
+            <a:schemeClr val="accent1"/>
+          </a:effectRef>
+          <a:fontRef idx="minor">
+            <a:schemeClr val="lt1"/>
+          </a:fontRef>
+        </p:style>
+        <p:txBody>
+          <a:bodyPr rtlCol="0" anchor="ctr"/>
+          <a:lstStyle/>
+          <a:p>
+            <a:pPr algn="ctr"/>
+          </a:p>
+        </p:txBody>
+      </p:sp>
+      <p:sp>
+        <p:nvSpPr>
+          <p:cNvPr id="18" name="TextBox 17"/>
+          <p:cNvSpPr txBox="1"/>
+          <p:nvPr/>
+        </p:nvSpPr>
+        <p:spPr>
+          <a:xfrm>
+            <a:off x="822960" y="4937760"/>
+            <a:ext cx="640080" cy="548640"/>
+          </a:xfrm>
+          <a:prstGeom prst="rect">
+            <a:avLst/>
+          </a:prstGeom>
+          <a:noFill/>
+        </p:spPr>
+        <p:txBody>
+          <a:bodyPr wrap="square">
+            <a:spAutoFit/>
+          </a:bodyPr>
+          <a:lstStyle/>
+          <a:p>
+            <a:pPr algn="ctr"/>
+            <a:r>
+              <a:rPr sz="2200" b="1" i="0">
+                <a:solidFill>
+                  <a:srgbClr val="FFFFFF"/>
+                </a:solidFill>
+                <a:latin typeface="Montserrat"/>
+              </a:rPr>
+              <a:t>C</a:t>
+            </a:r>
+          </a:p>
+        </p:txBody>
+      </p:sp>
+      <p:sp>
+        <p:nvSpPr>
+          <p:cNvPr id="19" name="TextBox 18"/>
+          <p:cNvSpPr txBox="1"/>
+          <p:nvPr/>
+        </p:nvSpPr>
+        <p:spPr>
+          <a:xfrm>
+            <a:off x="1600200" y="4800600"/>
+            <a:ext cx="4114800" cy="868680"/>
+          </a:xfrm>
+          <a:prstGeom prst="rect">
+            <a:avLst/>
+          </a:prstGeom>
+          <a:noFill/>
+        </p:spPr>
+        <p:txBody>
+          <a:bodyPr wrap="square">
+            <a:spAutoFit/>
+          </a:bodyPr>
+          <a:lstStyle/>
+          <a:p>
+            <a:r>
+              <a:rPr sz="1400" b="0" i="0">
+                <a:solidFill>
+                  <a:srgbClr val="1B2330"/>
+                </a:solidFill>
+                <a:latin typeface="Montserrat"/>
+              </a:rPr>
+              <a:t>15 minutos</a:t>
+            </a:r>
+          </a:p>
+        </p:txBody>
+      </p:sp>
+      <p:sp>
+        <p:nvSpPr>
+          <p:cNvPr id="20" name="Rounded Rectangle 19"/>
+          <p:cNvSpPr/>
+          <p:nvPr/>
+        </p:nvSpPr>
+        <p:spPr>
+          <a:xfrm>
+            <a:off x="6355080" y="4617720"/>
+            <a:ext cx="4983480" cy="1143000"/>
+          </a:xfrm>
+          <a:prstGeom prst="roundRect">
+            <a:avLst/>
+          </a:prstGeom>
+          <a:solidFill>
+            <a:srgbClr val="F3F6FB"/>
+          </a:solidFill>
+          <a:ln w="12700">
+            <a:solidFill>
+              <a:srgbClr val="C7D2E6"/>
+            </a:solidFill>
+          </a:ln>
+          <a:effectLst/>
+        </p:spPr>
+        <p:style>
+          <a:lnRef idx="1">
+            <a:schemeClr val="accent1"/>
+          </a:lnRef>
+          <a:fillRef idx="3">
+            <a:schemeClr val="accent1"/>
+          </a:fillRef>
+          <a:effectRef idx="2">
+            <a:schemeClr val="accent1"/>
+          </a:effectRef>
+          <a:fontRef idx="minor">
+            <a:schemeClr val="lt1"/>
+          </a:fontRef>
+        </p:style>
+        <p:txBody>
+          <a:bodyPr rtlCol="0" anchor="ctr"/>
+          <a:lstStyle/>
+          <a:p>
+            <a:pPr algn="ctr"/>
+          </a:p>
+        </p:txBody>
+      </p:sp>
+      <p:sp>
+        <p:nvSpPr>
+          <p:cNvPr id="21" name="Rectangle 20"/>
+          <p:cNvSpPr/>
+          <p:nvPr/>
+        </p:nvSpPr>
+        <p:spPr>
+          <a:xfrm>
+            <a:off x="6355080" y="4617720"/>
+            <a:ext cx="640080" cy="1143000"/>
+          </a:xfrm>
+          <a:prstGeom prst="rect">
+            <a:avLst/>
+          </a:prstGeom>
+          <a:solidFill>
+            <a:srgbClr val="1E2761"/>
+          </a:solidFill>
+          <a:ln>
+            <a:noFill/>
+          </a:ln>
+          <a:effectLst/>
+        </p:spPr>
+        <p:style>
+          <a:lnRef idx="1">
+            <a:schemeClr val="accent1"/>
+          </a:lnRef>
+          <a:fillRef idx="3">
+            <a:schemeClr val="accent1"/>
+          </a:fillRef>
+          <a:effectRef idx="2">
+            <a:schemeClr val="accent1"/>
+          </a:effectRef>
+          <a:fontRef idx="minor">
+            <a:schemeClr val="lt1"/>
+          </a:fontRef>
+        </p:style>
+        <p:txBody>
+          <a:bodyPr rtlCol="0" anchor="ctr"/>
+          <a:lstStyle/>
+          <a:p>
+            <a:pPr algn="ctr"/>
+          </a:p>
+        </p:txBody>
+      </p:sp>
+      <p:sp>
+        <p:nvSpPr>
+          <p:cNvPr id="22" name="TextBox 21"/>
+          <p:cNvSpPr txBox="1"/>
+          <p:nvPr/>
+        </p:nvSpPr>
+        <p:spPr>
+          <a:xfrm>
+            <a:off x="6355080" y="4937760"/>
+            <a:ext cx="640080" cy="548640"/>
+          </a:xfrm>
+          <a:prstGeom prst="rect">
+            <a:avLst/>
+          </a:prstGeom>
+          <a:noFill/>
+        </p:spPr>
+        <p:txBody>
+          <a:bodyPr wrap="square">
+            <a:spAutoFit/>
+          </a:bodyPr>
+          <a:lstStyle/>
+          <a:p>
+            <a:pPr algn="ctr"/>
+            <a:r>
+              <a:rPr sz="2200" b="1" i="0">
+                <a:solidFill>
+                  <a:srgbClr val="FFFFFF"/>
+                </a:solidFill>
+                <a:latin typeface="Montserrat"/>
+              </a:rPr>
+              <a:t>D</a:t>
+            </a:r>
+          </a:p>
+        </p:txBody>
+      </p:sp>
+      <p:sp>
+        <p:nvSpPr>
+          <p:cNvPr id="23" name="TextBox 22"/>
+          <p:cNvSpPr txBox="1"/>
+          <p:nvPr/>
+        </p:nvSpPr>
+        <p:spPr>
+          <a:xfrm>
+            <a:off x="7132320" y="4800600"/>
+            <a:ext cx="4114800" cy="868680"/>
+          </a:xfrm>
+          <a:prstGeom prst="rect">
+            <a:avLst/>
+          </a:prstGeom>
+          <a:noFill/>
+        </p:spPr>
+        <p:txBody>
+          <a:bodyPr wrap="square">
+            <a:spAutoFit/>
+          </a:bodyPr>
+          <a:lstStyle/>
+          <a:p>
+            <a:r>
+              <a:rPr sz="1400" b="0" i="0">
+                <a:solidFill>
+                  <a:srgbClr val="1B2330"/>
+                </a:solidFill>
+                <a:latin typeface="Montserrat"/>
+              </a:rPr>
+              <a:t>30 minutos</a:t>
             </a:r>
           </a:p>
         </p:txBody>
@@ -11616,6 +16218,18 @@
   <p:clrMapOvr>
     <a:masterClrMapping/>
   </p:clrMapOvr>
+  <mc:AlternateContent xmlns:mc="http://schemas.openxmlformats.org/markup-compatibility/2006">
+    <mc:Choice xmlns:p14="http://schemas.microsoft.com/office/powerpoint/2010/main" Requires="p14">
+      <p:transition spd="med" p14:dur="700">
+        <p14:cube dir="l"/>
+      </p:transition>
+    </mc:Choice>
+    <mc:Fallback>
+      <p:transition spd="med">
+        <p:push dir="l"/>
+      </p:transition>
+    </mc:Fallback>
+  </mc:AlternateContent>
 </p:sld>
 </file>
 

--- a/Curso Gas B/07 - ITC-ICG 10 - GLP de uso domestico en caravanas y autocaravanas/07 - ITC-ICG 10 - GLP de uso domestico en caravanas y autocaravanas - Vídeo 1.pptx
+++ b/Curso Gas B/07 - ITC-ICG 10 - GLP de uso domestico en caravanas y autocaravanas/07 - ITC-ICG 10 - GLP de uso domestico en caravanas y autocaravanas - Vídeo 1.pptx
@@ -598,12 +598,12 @@
           <a:lstStyle/>
           <a:p>
             <a:r>
-              <a:t>N1: ¿Por qué esa y no otra?</a:t>
-            </a:r>
-          </a:p>
-          <a:p>
-            <a:r>
-              <a:t>N2: La norma dice no inferior a quince minutos, es decir, como mínimo quince. El truco está en la palabra: no inferior significa que puedes esperar más, pero nunca menos. Si la presión baja antes, hay fuga y no se cierra.</a:t>
+              <a:t>N2: La respuesta correcta es la opción C: quince minutos. La norma dice que la presión no debe bajar durante un período no inferior a quince minutos desde la primera lectura. Y ahí está el truco, en esas dos palabras: no inferior significa como mínimo, así que puedes esperar más, pero nunca menos. Por eso los cinco minutos de la opción A y los diez de la B se quedan cortos, y los treinta de la D no hacen falta. Si la aguja cae antes de ese cuarto de hora, hay fuga y no se cierra.</a:t>
+            </a:r>
+          </a:p>
+          <a:p>
+            <a:r>
+              <a:t>N1: Quince minutos clavados: ese es el número.</a:t>
             </a:r>
           </a:p>
         </p:txBody>
@@ -898,12 +898,12 @@
           <a:lstStyle/>
           <a:p>
             <a:r>
-              <a:t>N1: Ojo, que aquí hay una de las trampas favoritas del examen.</a:t>
-            </a:r>
-          </a:p>
-          <a:p>
-            <a:r>
-              <a:t>N2: Compara con el régimen general del Reglamento y sus plazos; en la caravana la regla es justo la contraria.</a:t>
+              <a:t>N1: Ojo con esta, que esconde una de las trampas favoritas del examen. Escucha la pregunta entera. Tras la puesta en servicio de una instalación de GLP en caravana, qué debe hacer el titular. Y las cuatro opciones. Opción A, comunicarla a la Comunidad Autónoma en un plazo de treinta días. Opción B, no comunicar nada y conservar el certificado. Opción C, registrarla ante el Ministerio. Opción D, solicitar una inspección oficial.</a:t>
+            </a:r>
+          </a:p>
+          <a:p>
+            <a:r>
+              <a:t>N2: Párate a pensarlo. Acuérdate de que en la caravana la regla es justo la contraria a la del régimen general del Reglamento. Elige tu letra.</a:t>
             </a:r>
           </a:p>
         </p:txBody>
@@ -973,12 +973,12 @@
           <a:lstStyle/>
           <a:p>
             <a:r>
-              <a:t>N1: ¿Por qué esta?</a:t>
-            </a:r>
-          </a:p>
-          <a:p>
-            <a:r>
-              <a:t>N2: A diferencia de casi todo el Reglamento, en la caravana no hay que comunicar nada a la Administración. El titular solo guarda el certificado y lo tiene a mano por si se lo piden. Si en la pregunta aparece un plazo de treinta días, ese es el cebo: es falso.</a:t>
+              <a:t>N2: La respuesta correcta es la opción B: no comunicar nada y conservar el certificado. A diferencia de casi todo el Reglamento, en la instalación de la caravana no hay que comunicar nada a la Administración; el titular solo guarda el certificado y lo tiene a mano por si se lo reclaman. El truco para no fallar: en cuanto veas un plazo de treinta días, como en la opción A, ese es el cebo, es falso. Y ni registrar ante el Ministerio ni pedir una inspección oficial pintan nada aquí, así que la opción C y la D también caen.</a:t>
+            </a:r>
+          </a:p>
+          <a:p>
+            <a:r>
+              <a:t>N1: Aquí no se comunica: solo se conserva. Que no te la cuelen.</a:t>
             </a:r>
           </a:p>
         </p:txBody>
@@ -1273,12 +1273,12 @@
           <a:lstStyle/>
           <a:p>
             <a:r>
-              <a:t>N1: Dos trampas en una sola pregunta: el plazo y la palabra.</a:t>
-            </a:r>
-          </a:p>
-          <a:p>
-            <a:r>
-              <a:t>N2: Acuérdate de que la caravana va con bombonas y no cuelga de ninguna red de distribución.</a:t>
+              <a:t>N1: Aquí hay dos trampas metidas en una sola pregunta: el plazo y la palabra. Escúchala entera. Cada cuánto y con qué nombre se controla periódicamente la instalación de una caravana. Y las cuatro opciones. Opción A, inspección cada cinco años. Opción B, revisión cada cuatro años. Opción C, inspección cada cuatro años. Opción D, revisión cada dos años.</a:t>
+            </a:r>
+          </a:p>
+          <a:p>
+            <a:r>
+              <a:t>N2: Fíjate que cambian dos cosas entre unas opciones y otras: si es revisión o inspección, y cada cuántos años. Acuérdate de que la caravana va con bombonas y no cuelga de ninguna red de distribución. Piensa tu respuesta.</a:t>
             </a:r>
           </a:p>
         </p:txBody>
@@ -1423,12 +1423,12 @@
           <a:lstStyle/>
           <a:p>
             <a:r>
-              <a:t>N1: ¿Por qué?</a:t>
-            </a:r>
-          </a:p>
-          <a:p>
-            <a:r>
-              <a:t>N2: Todo lo que no cuelga de una red se revisa, no se inspecciona; y el plazo es cada cuatro años. La chuleta es fácil: caravana, bombonas, sin red, revisión, cada cuatro años.</a:t>
+              <a:t>N2: La respuesta correcta es la opción B: revisión cada cuatro años. La clave está en que todo lo que no cuelga de una red se revisa, no se inspecciona; y como la caravana funciona con sus propias bombonas, le toca revisión. El plazo es cada cuatro años. Por eso las opciones que dicen inspección, la A y la C, caen solas por la palabra, aunque la C acierte los cuatro años; y la D falla en el plazo, dos años. La chuleta es fácil: caravana, bombonas, sin red, revisión, cada cuatro años.</a:t>
+            </a:r>
+          </a:p>
+          <a:p>
+            <a:r>
+              <a:t>N1: Revisión, no inspección; y cuatro años, ni dos ni cinco.</a:t>
             </a:r>
           </a:p>
         </p:txBody>
@@ -2099,12 +2099,12 @@
           <a:lstStyle/>
           <a:p>
             <a:r>
-              <a:t>N1: Cronómetro en mano, ¿cuánto tiene que aguantar la aguja sin moverse?</a:t>
-            </a:r>
-          </a:p>
-          <a:p>
-            <a:r>
-              <a:t>N2: Piensa en un cuarto de hora; ni un tiempo más corto vale, ni hace falta uno entero.</a:t>
+              <a:t>N1: Vamos con la pregunta, escúchala entera. Durante cuánto tiempo, como mínimo, no debe bajar la presión en la prueba de estanquidad. Y estas son las cuatro opciones. Opción A, cinco minutos. Opción B, diez minutos. Opción C, quince minutos. Opción D, treinta minutos.</a:t>
+            </a:r>
+          </a:p>
+          <a:p>
+            <a:r>
+              <a:t>N2: Piénsalo un momento, cronómetro en mano: ¿cuánto tiene que aguantar la aguja sin moverse? Si vas conduciendo, quédate con tu letra antes de que te la diga.</a:t>
             </a:r>
           </a:p>
         </p:txBody>
